--- a/docs/internet-first-team-edition.pptx
+++ b/docs/internet-first-team-edition.pptx
@@ -17,9 +17,12 @@
     <p:sldId id="265" r:id="rId11"/>
     <p:sldId id="266" r:id="rId12"/>
     <p:sldId id="267" r:id="rId13"/>
+    <p:sldId id="268" r:id="rId14"/>
+    <p:sldId id="269" r:id="rId15"/>
+    <p:sldId id="270" r:id="rId16"/>
   </p:sldIdLst>
   <p:notesMasterIdLst>
-    <p:notesMasterId r:id="rId14"/>
+    <p:notesMasterId r:id="rId17"/>
   </p:notesMasterIdLst>
   <p:sldSz cx="12192000" cy="6858000"/>
   <p:notesSz cx="6858000" cy="12192000"/>
@@ -801,6 +804,270 @@
             <a:fld id="{F7021451-1387-4CA6-816F-3879F97B5CBC}" type="slidenum">
               <a:rPr lang="en-US"/>
               <a:t>12</a:t>
+            </a:fld>
+            <a:endParaRPr lang="en-US"/>
+          </a:p>
+        </p:txBody>
+      </p:sp>
+    </p:spTree>
+    <p:extLst>
+      <p:ext uri="{BB962C8B-B14F-4D97-AF65-F5344CB8AC3E}">
+        <p14:creationId xmlns:p14="http://schemas.microsoft.com/office/powerpoint/2010/main" val="1024086991"/>
+      </p:ext>
+    </p:extLst>
+  </p:cSld>
+  <p:clrMapOvr>
+    <a:masterClrMapping/>
+  </p:clrMapOvr>
+</p:notes>
+</file>
+
+<file path=ppt/notesSlides/notesSlide13.xml><?xml version="1.0" encoding="utf-8"?>
+<p:notes xmlns:a="http://schemas.openxmlformats.org/drawingml/2006/main" xmlns:r="http://schemas.openxmlformats.org/officeDocument/2006/relationships" xmlns:p="http://schemas.openxmlformats.org/presentationml/2006/main">
+  <p:cSld>
+    <p:spTree>
+      <p:nvGrpSpPr>
+        <p:cNvPr id="1" name=""/>
+        <p:cNvGrpSpPr/>
+        <p:nvPr/>
+      </p:nvGrpSpPr>
+      <p:grpSpPr>
+        <a:xfrm>
+          <a:off x="0" y="0"/>
+          <a:ext cx="0" cy="0"/>
+          <a:chOff x="0" y="0"/>
+          <a:chExt cx="0" cy="0"/>
+        </a:xfrm>
+      </p:grpSpPr>
+      <p:sp>
+        <p:nvSpPr>
+          <p:cNvPr id="2" name="Slide Image Placeholder 1"/>
+          <p:cNvSpPr>
+            <a:spLocks noGrp="1" noRot="1" noChangeAspect="1"/>
+          </p:cNvSpPr>
+          <p:nvPr>
+            <p:ph type="sldImg"/>
+          </p:nvPr>
+        </p:nvSpPr>
+        <p:spPr/>
+      </p:sp>
+      <p:sp>
+        <p:nvSpPr>
+          <p:cNvPr id="3" name="Notes Placeholder 2"/>
+          <p:cNvSpPr>
+            <a:spLocks noGrp="1"/>
+          </p:cNvSpPr>
+          <p:nvPr>
+            <p:ph type="body" idx="1"/>
+          </p:nvPr>
+        </p:nvSpPr>
+        <p:spPr/>
+        <p:txBody>
+          <a:bodyPr/>
+          <a:lstStyle/>
+          <a:p>
+            <a:r>
+              <a:rPr lang="en-US" dirty="0"/>
+              <a:t/>
+            </a:r>
+            <a:endParaRPr lang="en-US" dirty="0"/>
+          </a:p>
+        </p:txBody>
+      </p:sp>
+      <p:sp>
+        <p:nvSpPr>
+          <p:cNvPr id="4" name="Slide Number Placeholder 3"/>
+          <p:cNvSpPr>
+            <a:spLocks noGrp="1"/>
+          </p:cNvSpPr>
+          <p:nvPr>
+            <p:ph type="sldNum" sz="quarter" idx="10"/>
+          </p:nvPr>
+        </p:nvSpPr>
+        <p:spPr/>
+        <p:txBody>
+          <a:bodyPr/>
+          <a:lstStyle/>
+          <a:p>
+            <a:fld id="{F7021451-1387-4CA6-816F-3879F97B5CBC}" type="slidenum">
+              <a:rPr lang="en-US"/>
+              <a:t>13</a:t>
+            </a:fld>
+            <a:endParaRPr lang="en-US"/>
+          </a:p>
+        </p:txBody>
+      </p:sp>
+    </p:spTree>
+    <p:extLst>
+      <p:ext uri="{BB962C8B-B14F-4D97-AF65-F5344CB8AC3E}">
+        <p14:creationId xmlns:p14="http://schemas.microsoft.com/office/powerpoint/2010/main" val="1024086991"/>
+      </p:ext>
+    </p:extLst>
+  </p:cSld>
+  <p:clrMapOvr>
+    <a:masterClrMapping/>
+  </p:clrMapOvr>
+</p:notes>
+</file>
+
+<file path=ppt/notesSlides/notesSlide14.xml><?xml version="1.0" encoding="utf-8"?>
+<p:notes xmlns:a="http://schemas.openxmlformats.org/drawingml/2006/main" xmlns:r="http://schemas.openxmlformats.org/officeDocument/2006/relationships" xmlns:p="http://schemas.openxmlformats.org/presentationml/2006/main">
+  <p:cSld>
+    <p:spTree>
+      <p:nvGrpSpPr>
+        <p:cNvPr id="1" name=""/>
+        <p:cNvGrpSpPr/>
+        <p:nvPr/>
+      </p:nvGrpSpPr>
+      <p:grpSpPr>
+        <a:xfrm>
+          <a:off x="0" y="0"/>
+          <a:ext cx="0" cy="0"/>
+          <a:chOff x="0" y="0"/>
+          <a:chExt cx="0" cy="0"/>
+        </a:xfrm>
+      </p:grpSpPr>
+      <p:sp>
+        <p:nvSpPr>
+          <p:cNvPr id="2" name="Slide Image Placeholder 1"/>
+          <p:cNvSpPr>
+            <a:spLocks noGrp="1" noRot="1" noChangeAspect="1"/>
+          </p:cNvSpPr>
+          <p:nvPr>
+            <p:ph type="sldImg"/>
+          </p:nvPr>
+        </p:nvSpPr>
+        <p:spPr/>
+      </p:sp>
+      <p:sp>
+        <p:nvSpPr>
+          <p:cNvPr id="3" name="Notes Placeholder 2"/>
+          <p:cNvSpPr>
+            <a:spLocks noGrp="1"/>
+          </p:cNvSpPr>
+          <p:nvPr>
+            <p:ph type="body" idx="1"/>
+          </p:nvPr>
+        </p:nvSpPr>
+        <p:spPr/>
+        <p:txBody>
+          <a:bodyPr/>
+          <a:lstStyle/>
+          <a:p>
+            <a:r>
+              <a:rPr lang="en-US" dirty="0"/>
+              <a:t/>
+            </a:r>
+            <a:endParaRPr lang="en-US" dirty="0"/>
+          </a:p>
+        </p:txBody>
+      </p:sp>
+      <p:sp>
+        <p:nvSpPr>
+          <p:cNvPr id="4" name="Slide Number Placeholder 3"/>
+          <p:cNvSpPr>
+            <a:spLocks noGrp="1"/>
+          </p:cNvSpPr>
+          <p:nvPr>
+            <p:ph type="sldNum" sz="quarter" idx="10"/>
+          </p:nvPr>
+        </p:nvSpPr>
+        <p:spPr/>
+        <p:txBody>
+          <a:bodyPr/>
+          <a:lstStyle/>
+          <a:p>
+            <a:fld id="{F7021451-1387-4CA6-816F-3879F97B5CBC}" type="slidenum">
+              <a:rPr lang="en-US"/>
+              <a:t>14</a:t>
+            </a:fld>
+            <a:endParaRPr lang="en-US"/>
+          </a:p>
+        </p:txBody>
+      </p:sp>
+    </p:spTree>
+    <p:extLst>
+      <p:ext uri="{BB962C8B-B14F-4D97-AF65-F5344CB8AC3E}">
+        <p14:creationId xmlns:p14="http://schemas.microsoft.com/office/powerpoint/2010/main" val="1024086991"/>
+      </p:ext>
+    </p:extLst>
+  </p:cSld>
+  <p:clrMapOvr>
+    <a:masterClrMapping/>
+  </p:clrMapOvr>
+</p:notes>
+</file>
+
+<file path=ppt/notesSlides/notesSlide15.xml><?xml version="1.0" encoding="utf-8"?>
+<p:notes xmlns:a="http://schemas.openxmlformats.org/drawingml/2006/main" xmlns:r="http://schemas.openxmlformats.org/officeDocument/2006/relationships" xmlns:p="http://schemas.openxmlformats.org/presentationml/2006/main">
+  <p:cSld>
+    <p:spTree>
+      <p:nvGrpSpPr>
+        <p:cNvPr id="1" name=""/>
+        <p:cNvGrpSpPr/>
+        <p:nvPr/>
+      </p:nvGrpSpPr>
+      <p:grpSpPr>
+        <a:xfrm>
+          <a:off x="0" y="0"/>
+          <a:ext cx="0" cy="0"/>
+          <a:chOff x="0" y="0"/>
+          <a:chExt cx="0" cy="0"/>
+        </a:xfrm>
+      </p:grpSpPr>
+      <p:sp>
+        <p:nvSpPr>
+          <p:cNvPr id="2" name="Slide Image Placeholder 1"/>
+          <p:cNvSpPr>
+            <a:spLocks noGrp="1" noRot="1" noChangeAspect="1"/>
+          </p:cNvSpPr>
+          <p:nvPr>
+            <p:ph type="sldImg"/>
+          </p:nvPr>
+        </p:nvSpPr>
+        <p:spPr/>
+      </p:sp>
+      <p:sp>
+        <p:nvSpPr>
+          <p:cNvPr id="3" name="Notes Placeholder 2"/>
+          <p:cNvSpPr>
+            <a:spLocks noGrp="1"/>
+          </p:cNvSpPr>
+          <p:nvPr>
+            <p:ph type="body" idx="1"/>
+          </p:nvPr>
+        </p:nvSpPr>
+        <p:spPr/>
+        <p:txBody>
+          <a:bodyPr/>
+          <a:lstStyle/>
+          <a:p>
+            <a:r>
+              <a:rPr lang="en-US" dirty="0"/>
+              <a:t/>
+            </a:r>
+            <a:endParaRPr lang="en-US" dirty="0"/>
+          </a:p>
+        </p:txBody>
+      </p:sp>
+      <p:sp>
+        <p:nvSpPr>
+          <p:cNvPr id="4" name="Slide Number Placeholder 3"/>
+          <p:cNvSpPr>
+            <a:spLocks noGrp="1"/>
+          </p:cNvSpPr>
+          <p:nvPr>
+            <p:ph type="sldNum" sz="quarter" idx="10"/>
+          </p:nvPr>
+        </p:nvSpPr>
+        <p:spPr/>
+        <p:txBody>
+          <a:bodyPr/>
+          <a:lstStyle/>
+          <a:p>
+            <a:fld id="{F7021451-1387-4CA6-816F-3879F97B5CBC}" type="slidenum">
+              <a:rPr lang="en-US"/>
+              <a:t>15</a:t>
             </a:fld>
             <a:endParaRPr lang="en-US"/>
           </a:p>
@@ -2264,7 +2531,7 @@
                 <a:ea typeface="Calibri" pitchFamily="34" charset="-122"/>
                 <a:cs typeface="Calibri" pitchFamily="34" charset="-120"/>
               </a:rPr>
-              <a:t>GETTING THERE</a:t>
+              <a:t>AN OPEN QUESTION, DECIDED CASE BY CASE</a:t>
             </a:r>
             <a:endParaRPr lang="en-US" sz="1200" dirty="0"/>
           </a:p>
@@ -2303,7 +2570,7 @@
                 <a:ea typeface="Cambria" pitchFamily="34" charset="-122"/>
                 <a:cs typeface="Cambria" pitchFamily="34" charset="-120"/>
               </a:rPr>
-              <a:t>A few honest stages, not a rigid deadline</a:t>
+              <a:t>Do we rebuild backends outside too?</a:t>
             </a:r>
             <a:endParaRPr lang="en-US" sz="2800" dirty="0"/>
           </a:p>
@@ -2318,11 +2585,11 @@
         <p:spPr>
           <a:xfrm>
             <a:off x="548640" y="1737360"/>
-            <a:ext cx="3515258" cy="3566160"/>
+            <a:ext cx="5364328" cy="3200400"/>
           </a:xfrm>
           <a:prstGeom prst="roundRect">
             <a:avLst>
-              <a:gd name="adj" fmla="val 2341"/>
+              <a:gd name="adj" fmla="val 2571"/>
             </a:avLst>
           </a:prstGeom>
           <a:solidFill>
@@ -2340,14 +2607,58 @@
       </p:sp>
       <p:sp>
         <p:nvSpPr>
-          <p:cNvPr id="7" name="Text 5"/>
-          <p:cNvSpPr/>
-          <p:nvPr/>
-        </p:nvSpPr>
-        <p:spPr>
-          <a:xfrm>
-            <a:off x="777240" y="1920240"/>
-            <a:ext cx="3058058" cy="274320"/>
+          <p:cNvPr id="7" name="Shape 5"/>
+          <p:cNvSpPr/>
+          <p:nvPr/>
+        </p:nvSpPr>
+        <p:spPr>
+          <a:xfrm>
+            <a:off x="804672" y="1965960"/>
+            <a:ext cx="548640" cy="548640"/>
+          </a:xfrm>
+          <a:prstGeom prst="ellipse">
+            <a:avLst/>
+          </a:prstGeom>
+          <a:solidFill>
+            <a:srgbClr val="1E2761"/>
+          </a:solidFill>
+          <a:ln/>
+        </p:spPr>
+      </p:sp>
+      <p:pic>
+        <p:nvPicPr>
+          <p:cNvPr id="8" name="Image 0" descr="preencoded.png">    </p:cNvPr>
+          <p:cNvPicPr>
+            <a:picLocks noChangeAspect="1"/>
+          </p:cNvPicPr>
+          <p:nvPr/>
+        </p:nvPicPr>
+        <p:blipFill>
+          <a:blip r:embed="rId1"/>
+          <a:stretch>
+            <a:fillRect/>
+          </a:stretch>
+        </p:blipFill>
+        <p:spPr>
+          <a:xfrm>
+            <a:off x="947318" y="2108606"/>
+            <a:ext cx="263347" cy="263347"/>
+          </a:xfrm>
+          <a:prstGeom prst="rect">
+            <a:avLst/>
+          </a:prstGeom>
+        </p:spPr>
+      </p:pic>
+      <p:sp>
+        <p:nvSpPr>
+          <p:cNvPr id="9" name="Text 6"/>
+          <p:cNvSpPr/>
+          <p:nvPr/>
+        </p:nvSpPr>
+        <p:spPr>
+          <a:xfrm>
+            <a:off x="1481328" y="2029968"/>
+            <a:ext cx="4267048" cy="365760"/>
           </a:xfrm>
           <a:prstGeom prst="rect">
             <a:avLst/>
@@ -2363,30 +2674,30 @@
               <a:buNone/>
             </a:pPr>
             <a:r>
-              <a:rPr lang="en-US" sz="1100" b="1" spc="200" kern="0" dirty="0">
-                <a:solidFill>
-                  <a:srgbClr val="5A6B8C"/>
-                </a:solidFill>
-                <a:latin typeface="Calibri" pitchFamily="34" charset="0"/>
-                <a:ea typeface="Calibri" pitchFamily="34" charset="-122"/>
-                <a:cs typeface="Calibri" pitchFamily="34" charset="-120"/>
-              </a:rPr>
-              <a:t>STAGE 1</a:t>
-            </a:r>
-            <a:endParaRPr lang="en-US" sz="1100" dirty="0"/>
-          </a:p>
-        </p:txBody>
-      </p:sp>
-      <p:sp>
-        <p:nvSpPr>
-          <p:cNvPr id="8" name="Text 6"/>
-          <p:cNvSpPr/>
-          <p:nvPr/>
-        </p:nvSpPr>
-        <p:spPr>
-          <a:xfrm>
-            <a:off x="777240" y="2212848"/>
-            <a:ext cx="3058058" cy="457200"/>
+              <a:rPr lang="en-US" sz="1500" b="1" dirty="0">
+                <a:solidFill>
+                  <a:srgbClr val="1E2761"/>
+                </a:solidFill>
+                <a:latin typeface="Calibri" pitchFamily="34" charset="0"/>
+                <a:ea typeface="Calibri" pitchFamily="34" charset="-122"/>
+                <a:cs typeface="Calibri" pitchFamily="34" charset="-120"/>
+              </a:rPr>
+              <a:t>Default: MFE only</a:t>
+            </a:r>
+            <a:endParaRPr lang="en-US" sz="1500" dirty="0"/>
+          </a:p>
+        </p:txBody>
+      </p:sp>
+      <p:sp>
+        <p:nvSpPr>
+          <p:cNvPr id="10" name="Text 7"/>
+          <p:cNvSpPr/>
+          <p:nvPr/>
+        </p:nvSpPr>
+        <p:spPr>
+          <a:xfrm>
+            <a:off x="822960" y="2514600"/>
+            <a:ext cx="4815688" cy="2011680"/>
           </a:xfrm>
           <a:prstGeom prst="rect">
             <a:avLst/>
@@ -2402,50 +2713,7 @@
               <a:buNone/>
             </a:pPr>
             <a:r>
-              <a:rPr lang="en-US" sz="1700" b="1" dirty="0">
-                <a:solidFill>
-                  <a:srgbClr val="1E2761"/>
-                </a:solidFill>
-                <a:latin typeface="Calibri" pitchFamily="34" charset="0"/>
-                <a:ea typeface="Calibri" pitchFamily="34" charset="-122"/>
-                <a:cs typeface="Calibri" pitchFamily="34" charset="-120"/>
-              </a:rPr>
-              <a:t>Try it</a:t>
-            </a:r>
-            <a:endParaRPr lang="en-US" sz="1700" dirty="0"/>
-          </a:p>
-        </p:txBody>
-      </p:sp>
-      <p:sp>
-        <p:nvSpPr>
-          <p:cNvPr id="9" name="Text 7"/>
-          <p:cNvSpPr/>
-          <p:nvPr/>
-        </p:nvSpPr>
-        <p:spPr>
-          <a:xfrm>
-            <a:off x="777240" y="2788920"/>
-            <a:ext cx="3058058" cy="2331720"/>
-          </a:xfrm>
-          <a:prstGeom prst="rect">
-            <a:avLst/>
-          </a:prstGeom>
-          <a:noFill/>
-          <a:ln/>
-        </p:spPr>
-        <p:txBody>
-          <a:bodyPr wrap="square" lIns="0" tIns="0" rIns="0" bIns="0" rtlCol="0" anchor="ctr"/>
-          <a:lstStyle/>
-          <a:p>
-            <a:pPr marL="342900" indent="-342900">
-              <a:spcAft>
-                <a:spcPts val="800"/>
-              </a:spcAft>
-              <a:buSzPct val="100000"/>
-              <a:buChar char="•"/>
-            </a:pPr>
-            <a:r>
-              <a:rPr lang="en-US" sz="1150" dirty="0">
+              <a:rPr lang="en-US" sz="1250" dirty="0">
                 <a:solidFill>
                   <a:srgbClr val="1B2440"/>
                 </a:solidFill>
@@ -2453,93 +2721,30 @@
                 <a:ea typeface="Calibri" pitchFamily="34" charset="-122"/>
                 <a:cs typeface="Calibri" pitchFamily="34" charset="-120"/>
               </a:rPr>
-              <a:t>Pick one real feature</a:t>
-            </a:r>
-            <a:endParaRPr lang="en-US" sz="1150" dirty="0"/>
-          </a:p>
-          <a:p>
-            <a:pPr marL="342900" indent="-342900">
-              <a:spcAft>
-                <a:spcPts val="800"/>
-              </a:spcAft>
-              <a:buSzPct val="100000"/>
-              <a:buChar char="•"/>
-            </a:pPr>
-            <a:r>
-              <a:rPr lang="en-US" sz="1150" dirty="0">
-                <a:solidFill>
-                  <a:srgbClr val="1B2440"/>
-                </a:solidFill>
-                <a:latin typeface="Calibri" pitchFamily="34" charset="0"/>
-                <a:ea typeface="Calibri" pitchFamily="34" charset="-122"/>
-                <a:cs typeface="Calibri" pitchFamily="34" charset="-120"/>
-              </a:rPr>
-              <a:t>Set up matching pipelines &amp; configs outside</a:t>
-            </a:r>
-            <a:endParaRPr lang="en-US" sz="1150" dirty="0"/>
-          </a:p>
-          <a:p>
-            <a:pPr marL="342900" indent="-342900">
-              <a:spcAft>
-                <a:spcPts val="800"/>
-              </a:spcAft>
-              <a:buSzPct val="100000"/>
-              <a:buChar char="•"/>
-            </a:pPr>
-            <a:r>
-              <a:rPr lang="en-US" sz="1150" dirty="0">
-                <a:solidFill>
-                  <a:srgbClr val="1B2440"/>
-                </a:solidFill>
-                <a:latin typeface="Calibri" pitchFamily="34" charset="0"/>
-                <a:ea typeface="Calibri" pitchFamily="34" charset="-122"/>
-                <a:cs typeface="Calibri" pitchFamily="34" charset="-120"/>
-              </a:rPr>
-              <a:t>Run the full loop once, start to finish</a:t>
-            </a:r>
-            <a:endParaRPr lang="en-US" sz="1150" dirty="0"/>
-          </a:p>
-          <a:p>
-            <a:pPr marL="342900" indent="-342900">
-              <a:spcAft>
-                <a:spcPts val="800"/>
-              </a:spcAft>
-              <a:buSzPct val="100000"/>
-              <a:buChar char="•"/>
-            </a:pPr>
-            <a:r>
-              <a:rPr lang="en-US" sz="1150" dirty="0">
-                <a:solidFill>
-                  <a:srgbClr val="1B2440"/>
-                </a:solidFill>
-                <a:latin typeface="Calibri" pitchFamily="34" charset="0"/>
-                <a:ea typeface="Calibri" pitchFamily="34" charset="-122"/>
-                <a:cs typeface="Calibri" pitchFamily="34" charset="-120"/>
-              </a:rPr>
-              <a:t>Talk honestly about what was clunky</a:t>
-            </a:r>
-            <a:endParaRPr lang="en-US" sz="1150" dirty="0"/>
-          </a:p>
-        </p:txBody>
-      </p:sp>
-      <p:sp>
-        <p:nvSpPr>
-          <p:cNvPr id="10" name="Shape 8"/>
-          <p:cNvSpPr/>
-          <p:nvPr/>
-        </p:nvSpPr>
-        <p:spPr>
-          <a:xfrm>
-            <a:off x="4338218" y="1737360"/>
-            <a:ext cx="3515258" cy="3566160"/>
+              <a:t>Most features: build the shell outside against a mocked backend. The real Java/Spring service stays right where it is, built and maintained inside as normal.</a:t>
+            </a:r>
+            <a:endParaRPr lang="en-US" sz="1250" dirty="0"/>
+          </a:p>
+        </p:txBody>
+      </p:sp>
+      <p:sp>
+        <p:nvSpPr>
+          <p:cNvPr id="11" name="Shape 8"/>
+          <p:cNvSpPr/>
+          <p:nvPr/>
+        </p:nvSpPr>
+        <p:spPr>
+          <a:xfrm>
+            <a:off x="6278728" y="1737360"/>
+            <a:ext cx="5364328" cy="3200400"/>
           </a:xfrm>
           <a:prstGeom prst="roundRect">
             <a:avLst>
-              <a:gd name="adj" fmla="val 2341"/>
+              <a:gd name="adj" fmla="val 2571"/>
             </a:avLst>
           </a:prstGeom>
           <a:solidFill>
-            <a:srgbClr val="EDF3FC"/>
+            <a:srgbClr val="EAF4EF"/>
           </a:solidFill>
           <a:ln/>
           <a:effectLst>
@@ -2553,14 +2758,58 @@
       </p:sp>
       <p:sp>
         <p:nvSpPr>
-          <p:cNvPr id="11" name="Text 9"/>
-          <p:cNvSpPr/>
-          <p:nvPr/>
-        </p:nvSpPr>
-        <p:spPr>
-          <a:xfrm>
-            <a:off x="4566818" y="1920240"/>
-            <a:ext cx="3058058" cy="274320"/>
+          <p:cNvPr id="12" name="Shape 9"/>
+          <p:cNvSpPr/>
+          <p:nvPr/>
+        </p:nvSpPr>
+        <p:spPr>
+          <a:xfrm>
+            <a:off x="6534760" y="1965960"/>
+            <a:ext cx="548640" cy="548640"/>
+          </a:xfrm>
+          <a:prstGeom prst="ellipse">
+            <a:avLst/>
+          </a:prstGeom>
+          <a:solidFill>
+            <a:srgbClr val="2E7D5B"/>
+          </a:solidFill>
+          <a:ln/>
+        </p:spPr>
+      </p:sp>
+      <p:pic>
+        <p:nvPicPr>
+          <p:cNvPr id="13" name="Image 1" descr="preencoded.png">    </p:cNvPr>
+          <p:cNvPicPr>
+            <a:picLocks noChangeAspect="1"/>
+          </p:cNvPicPr>
+          <p:nvPr/>
+        </p:nvPicPr>
+        <p:blipFill>
+          <a:blip r:embed="rId2"/>
+          <a:stretch>
+            <a:fillRect/>
+          </a:stretch>
+        </p:blipFill>
+        <p:spPr>
+          <a:xfrm>
+            <a:off x="6677406" y="2108606"/>
+            <a:ext cx="263347" cy="263347"/>
+          </a:xfrm>
+          <a:prstGeom prst="rect">
+            <a:avLst/>
+          </a:prstGeom>
+        </p:spPr>
+      </p:pic>
+      <p:sp>
+        <p:nvSpPr>
+          <p:cNvPr id="14" name="Text 10"/>
+          <p:cNvSpPr/>
+          <p:nvPr/>
+        </p:nvSpPr>
+        <p:spPr>
+          <a:xfrm>
+            <a:off x="7211416" y="2029968"/>
+            <a:ext cx="4267048" cy="365760"/>
           </a:xfrm>
           <a:prstGeom prst="rect">
             <a:avLst/>
@@ -2576,30 +2825,30 @@
               <a:buNone/>
             </a:pPr>
             <a:r>
-              <a:rPr lang="en-US" sz="1100" b="1" spc="200" kern="0" dirty="0">
-                <a:solidFill>
-                  <a:srgbClr val="5A6B8C"/>
-                </a:solidFill>
-                <a:latin typeface="Calibri" pitchFamily="34" charset="0"/>
-                <a:ea typeface="Calibri" pitchFamily="34" charset="-122"/>
-                <a:cs typeface="Calibri" pitchFamily="34" charset="-120"/>
-              </a:rPr>
-              <a:t>STAGE 2</a:t>
-            </a:r>
-            <a:endParaRPr lang="en-US" sz="1100" dirty="0"/>
-          </a:p>
-        </p:txBody>
-      </p:sp>
-      <p:sp>
-        <p:nvSpPr>
-          <p:cNvPr id="12" name="Text 10"/>
-          <p:cNvSpPr/>
-          <p:nvPr/>
-        </p:nvSpPr>
-        <p:spPr>
-          <a:xfrm>
-            <a:off x="4566818" y="2212848"/>
-            <a:ext cx="3058058" cy="457200"/>
+              <a:rPr lang="en-US" sz="1500" b="1" dirty="0">
+                <a:solidFill>
+                  <a:srgbClr val="2E7D5B"/>
+                </a:solidFill>
+                <a:latin typeface="Calibri" pitchFamily="34" charset="0"/>
+                <a:ea typeface="Calibri" pitchFamily="34" charset="-122"/>
+                <a:cs typeface="Calibri" pitchFamily="34" charset="-120"/>
+              </a:rPr>
+              <a:t>Case by case: bring the backend along</a:t>
+            </a:r>
+            <a:endParaRPr lang="en-US" sz="1500" dirty="0"/>
+          </a:p>
+        </p:txBody>
+      </p:sp>
+      <p:sp>
+        <p:nvSpPr>
+          <p:cNvPr id="15" name="Text 11"/>
+          <p:cNvSpPr/>
+          <p:nvPr/>
+        </p:nvSpPr>
+        <p:spPr>
+          <a:xfrm>
+            <a:off x="6553048" y="2514600"/>
+            <a:ext cx="4815688" cy="2011680"/>
           </a:xfrm>
           <a:prstGeom prst="rect">
             <a:avLst/>
@@ -2615,50 +2864,7 @@
               <a:buNone/>
             </a:pPr>
             <a:r>
-              <a:rPr lang="en-US" sz="1700" b="1" dirty="0">
-                <a:solidFill>
-                  <a:srgbClr val="1E2761"/>
-                </a:solidFill>
-                <a:latin typeface="Calibri" pitchFamily="34" charset="0"/>
-                <a:ea typeface="Calibri" pitchFamily="34" charset="-122"/>
-                <a:cs typeface="Calibri" pitchFamily="34" charset="-120"/>
-              </a:rPr>
-              <a:t>Get comfortable</a:t>
-            </a:r>
-            <a:endParaRPr lang="en-US" sz="1700" dirty="0"/>
-          </a:p>
-        </p:txBody>
-      </p:sp>
-      <p:sp>
-        <p:nvSpPr>
-          <p:cNvPr id="13" name="Text 11"/>
-          <p:cNvSpPr/>
-          <p:nvPr/>
-        </p:nvSpPr>
-        <p:spPr>
-          <a:xfrm>
-            <a:off x="4566818" y="2788920"/>
-            <a:ext cx="3058058" cy="2331720"/>
-          </a:xfrm>
-          <a:prstGeom prst="rect">
-            <a:avLst/>
-          </a:prstGeom>
-          <a:noFill/>
-          <a:ln/>
-        </p:spPr>
-        <p:txBody>
-          <a:bodyPr wrap="square" lIns="0" tIns="0" rIns="0" bIns="0" rtlCol="0" anchor="ctr"/>
-          <a:lstStyle/>
-          <a:p>
-            <a:pPr marL="342900" indent="-342900">
-              <a:spcAft>
-                <a:spcPts val="800"/>
-              </a:spcAft>
-              <a:buSzPct val="100000"/>
-              <a:buChar char="•"/>
-            </a:pPr>
-            <a:r>
-              <a:rPr lang="en-US" sz="1150" dirty="0">
+              <a:rPr lang="en-US" sz="1250" dirty="0">
                 <a:solidFill>
                   <a:srgbClr val="1B2440"/>
                 </a:solidFill>
@@ -2666,89 +2872,26 @@
                 <a:ea typeface="Calibri" pitchFamily="34" charset="-122"/>
                 <a:cs typeface="Calibri" pitchFamily="34" charset="-120"/>
               </a:rPr>
-              <a:t>A few more features through the loop</a:t>
-            </a:r>
-            <a:endParaRPr lang="en-US" sz="1150" dirty="0"/>
-          </a:p>
-          <a:p>
-            <a:pPr marL="342900" indent="-342900">
-              <a:spcAft>
-                <a:spcPts val="800"/>
-              </a:spcAft>
-              <a:buSzPct val="100000"/>
-              <a:buChar char="•"/>
-            </a:pPr>
-            <a:r>
-              <a:rPr lang="en-US" sz="1150" dirty="0">
-                <a:solidFill>
-                  <a:srgbClr val="1B2440"/>
-                </a:solidFill>
-                <a:latin typeface="Calibri" pitchFamily="34" charset="0"/>
-                <a:ea typeface="Calibri" pitchFamily="34" charset="-122"/>
-                <a:cs typeface="Calibri" pitchFamily="34" charset="-120"/>
-              </a:rPr>
-              <a:t>Fix the friction we found in Stage 1</a:t>
-            </a:r>
-            <a:endParaRPr lang="en-US" sz="1150" dirty="0"/>
-          </a:p>
-          <a:p>
-            <a:pPr marL="342900" indent="-342900">
-              <a:spcAft>
-                <a:spcPts val="800"/>
-              </a:spcAft>
-              <a:buSzPct val="100000"/>
-              <a:buChar char="•"/>
-            </a:pPr>
-            <a:r>
-              <a:rPr lang="en-US" sz="1150" dirty="0">
-                <a:solidFill>
-                  <a:srgbClr val="1B2440"/>
-                </a:solidFill>
-                <a:latin typeface="Calibri" pitchFamily="34" charset="0"/>
-                <a:ea typeface="Calibri" pitchFamily="34" charset="-122"/>
-                <a:cs typeface="Calibri" pitchFamily="34" charset="-120"/>
-              </a:rPr>
-              <a:t>Contractors settle into integration &amp; testing roles</a:t>
-            </a:r>
-            <a:endParaRPr lang="en-US" sz="1150" dirty="0"/>
-          </a:p>
-          <a:p>
-            <a:pPr marL="342900" indent="-342900">
-              <a:spcAft>
-                <a:spcPts val="800"/>
-              </a:spcAft>
-              <a:buSzPct val="100000"/>
-              <a:buChar char="•"/>
-            </a:pPr>
-            <a:r>
-              <a:rPr lang="en-US" sz="1150" dirty="0">
-                <a:solidFill>
-                  <a:srgbClr val="1B2440"/>
-                </a:solidFill>
-                <a:latin typeface="Calibri" pitchFamily="34" charset="0"/>
-                <a:ea typeface="Calibri" pitchFamily="34" charset="-122"/>
-                <a:cs typeface="Calibri" pitchFamily="34" charset="-120"/>
-              </a:rPr>
-              <a:t>The routine starts feeling routine</a:t>
-            </a:r>
-            <a:endParaRPr lang="en-US" sz="1150" dirty="0"/>
-          </a:p>
-        </p:txBody>
-      </p:sp>
-      <p:sp>
-        <p:nvSpPr>
-          <p:cNvPr id="14" name="Shape 12"/>
-          <p:cNvSpPr/>
-          <p:nvPr/>
-        </p:nvSpPr>
-        <p:spPr>
-          <a:xfrm>
-            <a:off x="8127797" y="1737360"/>
-            <a:ext cx="3515258" cy="3566160"/>
+              <a:t>When a backend genuinely needs a rewrite — not just a re-skin — build a lean version of it outside too, under the same contract-first approach, tested there, then brought in like everything else.</a:t>
+            </a:r>
+            <a:endParaRPr lang="en-US" sz="1250" dirty="0"/>
+          </a:p>
+        </p:txBody>
+      </p:sp>
+      <p:sp>
+        <p:nvSpPr>
+          <p:cNvPr id="16" name="Shape 12"/>
+          <p:cNvSpPr/>
+          <p:nvPr/>
+        </p:nvSpPr>
+        <p:spPr>
+          <a:xfrm>
+            <a:off x="548640" y="5120640"/>
+            <a:ext cx="11094415" cy="960120"/>
           </a:xfrm>
           <a:prstGeom prst="roundRect">
             <a:avLst>
-              <a:gd name="adj" fmla="val 2341"/>
+              <a:gd name="adj" fmla="val 8571"/>
             </a:avLst>
           </a:prstGeom>
           <a:solidFill>
@@ -2766,14 +2909,58 @@
       </p:sp>
       <p:sp>
         <p:nvSpPr>
-          <p:cNvPr id="15" name="Text 13"/>
-          <p:cNvSpPr/>
-          <p:nvPr/>
-        </p:nvSpPr>
-        <p:spPr>
-          <a:xfrm>
-            <a:off x="8356397" y="1920240"/>
-            <a:ext cx="3058058" cy="274320"/>
+          <p:cNvPr id="17" name="Shape 13"/>
+          <p:cNvSpPr/>
+          <p:nvPr/>
+        </p:nvSpPr>
+        <p:spPr>
+          <a:xfrm>
+            <a:off x="777240" y="5321808"/>
+            <a:ext cx="548640" cy="548640"/>
+          </a:xfrm>
+          <a:prstGeom prst="ellipse">
+            <a:avLst/>
+          </a:prstGeom>
+          <a:solidFill>
+            <a:srgbClr val="1E2761"/>
+          </a:solidFill>
+          <a:ln/>
+        </p:spPr>
+      </p:sp>
+      <p:pic>
+        <p:nvPicPr>
+          <p:cNvPr id="18" name="Image 2" descr="preencoded.png">    </p:cNvPr>
+          <p:cNvPicPr>
+            <a:picLocks noChangeAspect="1"/>
+          </p:cNvPicPr>
+          <p:nvPr/>
+        </p:nvPicPr>
+        <p:blipFill>
+          <a:blip r:embed="rId3"/>
+          <a:stretch>
+            <a:fillRect/>
+          </a:stretch>
+        </p:blipFill>
+        <p:spPr>
+          <a:xfrm>
+            <a:off x="919886" y="5464454"/>
+            <a:ext cx="263347" cy="263347"/>
+          </a:xfrm>
+          <a:prstGeom prst="rect">
+            <a:avLst/>
+          </a:prstGeom>
+        </p:spPr>
+      </p:pic>
+      <p:sp>
+        <p:nvSpPr>
+          <p:cNvPr id="19" name="Text 14"/>
+          <p:cNvSpPr/>
+          <p:nvPr/>
+        </p:nvSpPr>
+        <p:spPr>
+          <a:xfrm>
+            <a:off x="1508760" y="5230368"/>
+            <a:ext cx="9905695" cy="777240"/>
           </a:xfrm>
           <a:prstGeom prst="rect">
             <a:avLst/>
@@ -2789,89 +2976,21 @@
               <a:buNone/>
             </a:pPr>
             <a:r>
-              <a:rPr lang="en-US" sz="1100" b="1" spc="200" kern="0" dirty="0">
-                <a:solidFill>
-                  <a:srgbClr val="5A6B8C"/>
-                </a:solidFill>
-                <a:latin typeface="Calibri" pitchFamily="34" charset="0"/>
-                <a:ea typeface="Calibri" pitchFamily="34" charset="-122"/>
-                <a:cs typeface="Calibri" pitchFamily="34" charset="-120"/>
-              </a:rPr>
-              <a:t>STAGE 3</a:t>
-            </a:r>
-            <a:endParaRPr lang="en-US" sz="1100" dirty="0"/>
-          </a:p>
-        </p:txBody>
-      </p:sp>
-      <p:sp>
-        <p:nvSpPr>
-          <p:cNvPr id="16" name="Text 14"/>
-          <p:cNvSpPr/>
-          <p:nvPr/>
-        </p:nvSpPr>
-        <p:spPr>
-          <a:xfrm>
-            <a:off x="8356397" y="2212848"/>
-            <a:ext cx="3058058" cy="457200"/>
-          </a:xfrm>
-          <a:prstGeom prst="rect">
-            <a:avLst/>
-          </a:prstGeom>
-          <a:noFill/>
-          <a:ln/>
-        </p:spPr>
-        <p:txBody>
-          <a:bodyPr wrap="square" lIns="0" tIns="0" rIns="0" bIns="0" rtlCol="0" anchor="ctr"/>
-          <a:lstStyle/>
-          <a:p>
+              <a:rPr lang="en-US" sz="1300" b="1" dirty="0">
+                <a:solidFill>
+                  <a:srgbClr val="1E2761"/>
+                </a:solidFill>
+                <a:latin typeface="Calibri" pitchFamily="34" charset="0"/>
+                <a:ea typeface="Calibri" pitchFamily="34" charset="-122"/>
+                <a:cs typeface="Calibri" pitchFamily="34" charset="-120"/>
+              </a:rPr>
+              <a:t>The question to ask, per feature: </a:t>
+            </a:r>
             <a:pPr indent="0" marL="0">
               <a:buNone/>
             </a:pPr>
             <a:r>
-              <a:rPr lang="en-US" sz="1700" b="1" dirty="0">
-                <a:solidFill>
-                  <a:srgbClr val="1E2761"/>
-                </a:solidFill>
-                <a:latin typeface="Calibri" pitchFamily="34" charset="0"/>
-                <a:ea typeface="Calibri" pitchFamily="34" charset="-122"/>
-                <a:cs typeface="Calibri" pitchFamily="34" charset="-120"/>
-              </a:rPr>
-              <a:t>Make it the norm</a:t>
-            </a:r>
-            <a:endParaRPr lang="en-US" sz="1700" dirty="0"/>
-          </a:p>
-        </p:txBody>
-      </p:sp>
-      <p:sp>
-        <p:nvSpPr>
-          <p:cNvPr id="17" name="Text 15"/>
-          <p:cNvSpPr/>
-          <p:nvPr/>
-        </p:nvSpPr>
-        <p:spPr>
-          <a:xfrm>
-            <a:off x="8356397" y="2788920"/>
-            <a:ext cx="3058058" cy="2331720"/>
-          </a:xfrm>
-          <a:prstGeom prst="rect">
-            <a:avLst/>
-          </a:prstGeom>
-          <a:noFill/>
-          <a:ln/>
-        </p:spPr>
-        <p:txBody>
-          <a:bodyPr wrap="square" lIns="0" tIns="0" rIns="0" bIns="0" rtlCol="0" anchor="ctr"/>
-          <a:lstStyle/>
-          <a:p>
-            <a:pPr marL="342900" indent="-342900">
-              <a:spcAft>
-                <a:spcPts val="800"/>
-              </a:spcAft>
-              <a:buSzPct val="100000"/>
-              <a:buChar char="•"/>
-            </a:pPr>
-            <a:r>
-              <a:rPr lang="en-US" sz="1150" dirty="0">
+              <a:rPr lang="en-US" sz="1300" dirty="0">
                 <a:solidFill>
                   <a:srgbClr val="1B2440"/>
                 </a:solidFill>
@@ -2879,109 +2998,7 @@
                 <a:ea typeface="Calibri" pitchFamily="34" charset="-122"/>
                 <a:cs typeface="Calibri" pitchFamily="34" charset="-120"/>
               </a:rPr>
-              <a:t>Most new work starts outside by default</a:t>
-            </a:r>
-            <a:endParaRPr lang="en-US" sz="1150" dirty="0"/>
-          </a:p>
-          <a:p>
-            <a:pPr marL="342900" indent="-342900">
-              <a:spcAft>
-                <a:spcPts val="800"/>
-              </a:spcAft>
-              <a:buSzPct val="100000"/>
-              <a:buChar char="•"/>
-            </a:pPr>
-            <a:r>
-              <a:rPr lang="en-US" sz="1150" dirty="0">
-                <a:solidFill>
-                  <a:srgbClr val="1B2440"/>
-                </a:solidFill>
-                <a:latin typeface="Calibri" pitchFamily="34" charset="0"/>
-                <a:ea typeface="Calibri" pitchFamily="34" charset="-122"/>
-                <a:cs typeface="Calibri" pitchFamily="34" charset="-120"/>
-              </a:rPr>
-              <a:t>Angular inventory &amp; porting well underway</a:t>
-            </a:r>
-            <a:endParaRPr lang="en-US" sz="1150" dirty="0"/>
-          </a:p>
-          <a:p>
-            <a:pPr marL="342900" indent="-342900">
-              <a:spcAft>
-                <a:spcPts val="800"/>
-              </a:spcAft>
-              <a:buSzPct val="100000"/>
-              <a:buChar char="•"/>
-            </a:pPr>
-            <a:r>
-              <a:rPr lang="en-US" sz="1150" dirty="0">
-                <a:solidFill>
-                  <a:srgbClr val="1B2440"/>
-                </a:solidFill>
-                <a:latin typeface="Calibri" pitchFamily="34" charset="0"/>
-                <a:ea typeface="Calibri" pitchFamily="34" charset="-122"/>
-                <a:cs typeface="Calibri" pitchFamily="34" charset="-120"/>
-              </a:rPr>
-              <a:t>Sign-off is quick because the habits are solid</a:t>
-            </a:r>
-            <a:endParaRPr lang="en-US" sz="1150" dirty="0"/>
-          </a:p>
-          <a:p>
-            <a:pPr marL="342900" indent="-342900">
-              <a:spcAft>
-                <a:spcPts val="800"/>
-              </a:spcAft>
-              <a:buSzPct val="100000"/>
-              <a:buChar char="•"/>
-            </a:pPr>
-            <a:r>
-              <a:rPr lang="en-US" sz="1150" dirty="0">
-                <a:solidFill>
-                  <a:srgbClr val="1B2440"/>
-                </a:solidFill>
-                <a:latin typeface="Calibri" pitchFamily="34" charset="0"/>
-                <a:ea typeface="Calibri" pitchFamily="34" charset="-122"/>
-                <a:cs typeface="Calibri" pitchFamily="34" charset="-120"/>
-              </a:rPr>
-              <a:t>We're no longer thinking about this as "new"</a:t>
-            </a:r>
-            <a:endParaRPr lang="en-US" sz="1150" dirty="0"/>
-          </a:p>
-        </p:txBody>
-      </p:sp>
-      <p:sp>
-        <p:nvSpPr>
-          <p:cNvPr id="18" name="Text 16"/>
-          <p:cNvSpPr/>
-          <p:nvPr/>
-        </p:nvSpPr>
-        <p:spPr>
-          <a:xfrm>
-            <a:off x="548640" y="5486400"/>
-            <a:ext cx="11094415" cy="411480"/>
-          </a:xfrm>
-          <a:prstGeom prst="rect">
-            <a:avLst/>
-          </a:prstGeom>
-          <a:noFill/>
-          <a:ln/>
-        </p:spPr>
-        <p:txBody>
-          <a:bodyPr wrap="square" lIns="0" tIns="0" rIns="0" bIns="0" rtlCol="0" anchor="ctr"/>
-          <a:lstStyle/>
-          <a:p>
-            <a:pPr algn="ctr" indent="0" marL="0">
-              <a:buNone/>
-            </a:pPr>
-            <a:r>
-              <a:rPr lang="en-US" sz="1300" i="1" dirty="0">
-                <a:solidFill>
-                  <a:srgbClr val="5A6B8C"/>
-                </a:solidFill>
-                <a:latin typeface="Calibri" pitchFamily="34" charset="0"/>
-                <a:ea typeface="Calibri" pitchFamily="34" charset="-122"/>
-                <a:cs typeface="Calibri" pitchFamily="34" charset="-120"/>
-              </a:rPr>
-              <a:t>No fixed dates on purpose — each stage ends when the criteria above are actually true, not when a calendar says so.</a:t>
+              <a:t>does Confi already have a working backend for this? If yes, mock it. If the backend itself is due for a rewrite anyway, build it outside too.</a:t>
             </a:r>
             <a:endParaRPr lang="en-US" sz="1300" dirty="0"/>
           </a:p>
@@ -3130,7 +3147,7 @@
                 <a:ea typeface="Calibri" pitchFamily="34" charset="-122"/>
                 <a:cs typeface="Calibri" pitchFamily="34" charset="-120"/>
               </a:rPr>
-              <a:t>BEING STRAIGHT ABOUT THE PEOPLE SIDE</a:t>
+              <a:t>WHO NEEDS TO LOOK AT WHAT</a:t>
             </a:r>
             <a:endParaRPr lang="en-US" sz="1200" dirty="0"/>
           </a:p>
@@ -3169,7 +3186,7 @@
                 <a:ea typeface="Cambria" pitchFamily="34" charset="-122"/>
                 <a:cs typeface="Cambria" pitchFamily="34" charset="-120"/>
               </a:rPr>
-              <a:t>This changes roles — let's talk about it early and honestly</a:t>
+              <a:t>Most things need a quick look. Some need a second pair of eyes.</a:t>
             </a:r>
             <a:endParaRPr lang="en-US" sz="2800" dirty="0"/>
           </a:p>
@@ -3183,12 +3200,12 @@
         </p:nvSpPr>
         <p:spPr>
           <a:xfrm>
-            <a:off x="548640" y="1691640"/>
-            <a:ext cx="3520440" cy="3657600"/>
+            <a:off x="548640" y="1737360"/>
+            <a:ext cx="5364328" cy="3291840"/>
           </a:xfrm>
           <a:prstGeom prst="roundRect">
             <a:avLst>
-              <a:gd name="adj" fmla="val 2338"/>
+              <a:gd name="adj" fmla="val 2500"/>
             </a:avLst>
           </a:prstGeom>
           <a:solidFill>
@@ -3212,7 +3229,7 @@
         </p:nvSpPr>
         <p:spPr>
           <a:xfrm>
-            <a:off x="777240" y="1920240"/>
+            <a:off x="804672" y="1965960"/>
             <a:ext cx="548640" cy="548640"/>
           </a:xfrm>
           <a:prstGeom prst="ellipse">
@@ -3240,7 +3257,7 @@
         </p:blipFill>
         <p:spPr>
           <a:xfrm>
-            <a:off x="919886" y="2062886"/>
+            <a:off x="947318" y="2108606"/>
             <a:ext cx="263347" cy="263347"/>
           </a:xfrm>
           <a:prstGeom prst="rect">
@@ -3256,8 +3273,8 @@
         </p:nvSpPr>
         <p:spPr>
           <a:xfrm>
-            <a:off x="777240" y="2606040"/>
-            <a:ext cx="3063240" cy="457200"/>
+            <a:off x="1481328" y="2029968"/>
+            <a:ext cx="4267048" cy="365760"/>
           </a:xfrm>
           <a:prstGeom prst="rect">
             <a:avLst/>
@@ -3281,7 +3298,7 @@
                 <a:ea typeface="Calibri" pitchFamily="34" charset="-122"/>
                 <a:cs typeface="Calibri" pitchFamily="34" charset="-120"/>
               </a:rPr>
-              <a:t>For developers</a:t>
+              <a:t>Everyday stuff</a:t>
             </a:r>
             <a:endParaRPr lang="en-US" sz="1500" dirty="0"/>
           </a:p>
@@ -3295,8 +3312,8 @@
         </p:nvSpPr>
         <p:spPr>
           <a:xfrm>
-            <a:off x="777240" y="3108960"/>
-            <a:ext cx="3063240" cy="2103120"/>
+            <a:off x="822960" y="2487168"/>
+            <a:ext cx="4815688" cy="457200"/>
           </a:xfrm>
           <a:prstGeom prst="rect">
             <a:avLst/>
@@ -3312,7 +3329,50 @@
               <a:buNone/>
             </a:pPr>
             <a:r>
-              <a:rPr lang="en-US" sz="1200" dirty="0">
+              <a:rPr lang="en-US" sz="1200" i="1" dirty="0">
+                <a:solidFill>
+                  <a:srgbClr val="5A6B8C"/>
+                </a:solidFill>
+                <a:latin typeface="Calibri" pitchFamily="34" charset="0"/>
+                <a:ea typeface="Calibri" pitchFamily="34" charset="-122"/>
+                <a:cs typeface="Calibri" pitchFamily="34" charset="-120"/>
+              </a:rPr>
+              <a:t>Structure, contracts, sanitized code, sample fixtures.</a:t>
+            </a:r>
+            <a:endParaRPr lang="en-US" sz="1200" dirty="0"/>
+          </a:p>
+        </p:txBody>
+      </p:sp>
+      <p:sp>
+        <p:nvSpPr>
+          <p:cNvPr id="11" name="Text 8"/>
+          <p:cNvSpPr/>
+          <p:nvPr/>
+        </p:nvSpPr>
+        <p:spPr>
+          <a:xfrm>
+            <a:off x="822960" y="3017520"/>
+            <a:ext cx="4815688" cy="1371600"/>
+          </a:xfrm>
+          <a:prstGeom prst="rect">
+            <a:avLst/>
+          </a:prstGeom>
+          <a:noFill/>
+          <a:ln/>
+        </p:spPr>
+        <p:txBody>
+          <a:bodyPr wrap="square" lIns="0" tIns="0" rIns="0" bIns="0" rtlCol="0" anchor="ctr"/>
+          <a:lstStyle/>
+          <a:p>
+            <a:pPr marL="342900" indent="-342900">
+              <a:spcAft>
+                <a:spcPts val="800"/>
+              </a:spcAft>
+              <a:buSzPct val="100000"/>
+              <a:buChar char="•"/>
+            </a:pPr>
+            <a:r>
+              <a:rPr lang="en-US" sz="1300" dirty="0">
                 <a:solidFill>
                   <a:srgbClr val="1B2440"/>
                 </a:solidFill>
@@ -3320,30 +3380,51 @@
                 <a:ea typeface="Calibri" pitchFamily="34" charset="-122"/>
                 <a:cs typeface="Calibri" pitchFamily="34" charset="-120"/>
               </a:rPr>
-              <a:t>More time on the interesting problems, less on environment friction and rebuilding plumbing. The tools handle more of the repetitive part so we can focus on what actually needs a person.</a:t>
-            </a:r>
-            <a:endParaRPr lang="en-US" sz="1200" dirty="0"/>
-          </a:p>
-        </p:txBody>
-      </p:sp>
-      <p:sp>
-        <p:nvSpPr>
-          <p:cNvPr id="11" name="Shape 8"/>
-          <p:cNvSpPr/>
-          <p:nvPr/>
-        </p:nvSpPr>
-        <p:spPr>
-          <a:xfrm>
-            <a:off x="4334256" y="1691640"/>
-            <a:ext cx="3520440" cy="3657600"/>
+              <a:t>A teammate reviews it</a:t>
+            </a:r>
+            <a:endParaRPr lang="en-US" sz="1300" dirty="0"/>
+          </a:p>
+          <a:p>
+            <a:pPr marL="342900" indent="-342900">
+              <a:spcAft>
+                <a:spcPts val="800"/>
+              </a:spcAft>
+              <a:buSzPct val="100000"/>
+              <a:buChar char="•"/>
+            </a:pPr>
+            <a:r>
+              <a:rPr lang="en-US" sz="1300" dirty="0">
+                <a:solidFill>
+                  <a:srgbClr val="1B2440"/>
+                </a:solidFill>
+                <a:latin typeface="Calibri" pitchFamily="34" charset="0"/>
+                <a:ea typeface="Calibri" pitchFamily="34" charset="-122"/>
+                <a:cs typeface="Calibri" pitchFamily="34" charset="-120"/>
+              </a:rPr>
+              <a:t>Off it goes — same day, routine</a:t>
+            </a:r>
+            <a:endParaRPr lang="en-US" sz="1300" dirty="0"/>
+          </a:p>
+        </p:txBody>
+      </p:sp>
+      <p:sp>
+        <p:nvSpPr>
+          <p:cNvPr id="12" name="Shape 9"/>
+          <p:cNvSpPr/>
+          <p:nvPr/>
+        </p:nvSpPr>
+        <p:spPr>
+          <a:xfrm>
+            <a:off x="6278728" y="1737360"/>
+            <a:ext cx="5364328" cy="3291840"/>
           </a:xfrm>
           <a:prstGeom prst="roundRect">
             <a:avLst>
-              <a:gd name="adj" fmla="val 2338"/>
+              <a:gd name="adj" fmla="val 2500"/>
             </a:avLst>
           </a:prstGeom>
           <a:solidFill>
-            <a:srgbClr val="EDF3FC"/>
+            <a:srgbClr val="EAF4EF"/>
           </a:solidFill>
           <a:ln/>
           <a:effectLst>
@@ -3357,27 +3438,27 @@
       </p:sp>
       <p:sp>
         <p:nvSpPr>
-          <p:cNvPr id="12" name="Shape 9"/>
-          <p:cNvSpPr/>
-          <p:nvPr/>
-        </p:nvSpPr>
-        <p:spPr>
-          <a:xfrm>
-            <a:off x="4562856" y="1920240"/>
+          <p:cNvPr id="13" name="Shape 10"/>
+          <p:cNvSpPr/>
+          <p:nvPr/>
+        </p:nvSpPr>
+        <p:spPr>
+          <a:xfrm>
+            <a:off x="6534760" y="1965960"/>
             <a:ext cx="548640" cy="548640"/>
           </a:xfrm>
           <a:prstGeom prst="ellipse">
             <a:avLst/>
           </a:prstGeom>
           <a:solidFill>
-            <a:srgbClr val="1E2761"/>
+            <a:srgbClr val="2E7D5B"/>
           </a:solidFill>
           <a:ln/>
         </p:spPr>
       </p:sp>
       <p:pic>
         <p:nvPicPr>
-          <p:cNvPr id="13" name="Image 1" descr="preencoded.png">    </p:cNvPr>
+          <p:cNvPr id="14" name="Image 1" descr="preencoded.png">    </p:cNvPr>
           <p:cNvPicPr>
             <a:picLocks noChangeAspect="1"/>
           </p:cNvPicPr>
@@ -3391,7 +3472,7 @@
         </p:blipFill>
         <p:spPr>
           <a:xfrm>
-            <a:off x="4705502" y="2062886"/>
+            <a:off x="6677406" y="2108606"/>
             <a:ext cx="263347" cy="263347"/>
           </a:xfrm>
           <a:prstGeom prst="rect">
@@ -3401,14 +3482,14 @@
       </p:pic>
       <p:sp>
         <p:nvSpPr>
-          <p:cNvPr id="14" name="Text 10"/>
-          <p:cNvSpPr/>
-          <p:nvPr/>
-        </p:nvSpPr>
-        <p:spPr>
-          <a:xfrm>
-            <a:off x="4562856" y="2606040"/>
-            <a:ext cx="3063240" cy="457200"/>
+          <p:cNvPr id="15" name="Text 11"/>
+          <p:cNvSpPr/>
+          <p:nvPr/>
+        </p:nvSpPr>
+        <p:spPr>
+          <a:xfrm>
+            <a:off x="7211416" y="2029968"/>
+            <a:ext cx="4267048" cy="365760"/>
           </a:xfrm>
           <a:prstGeom prst="rect">
             <a:avLst/>
@@ -3426,13 +3507,13 @@
             <a:r>
               <a:rPr lang="en-US" sz="1500" b="1" dirty="0">
                 <a:solidFill>
-                  <a:srgbClr val="1E2761"/>
-                </a:solidFill>
-                <a:latin typeface="Calibri" pitchFamily="34" charset="0"/>
-                <a:ea typeface="Calibri" pitchFamily="34" charset="-122"/>
-                <a:cs typeface="Calibri" pitchFamily="34" charset="-120"/>
-              </a:rPr>
-              <a:t>For contractors</a:t>
+                  <a:srgbClr val="2E7D5B"/>
+                </a:solidFill>
+                <a:latin typeface="Calibri" pitchFamily="34" charset="0"/>
+                <a:ea typeface="Calibri" pitchFamily="34" charset="-122"/>
+                <a:cs typeface="Calibri" pitchFamily="34" charset="-120"/>
+              </a:rPr>
+              <a:t>Anything touching real rules</a:t>
             </a:r>
             <a:endParaRPr lang="en-US" sz="1500" dirty="0"/>
           </a:p>
@@ -3440,14 +3521,14 @@
       </p:sp>
       <p:sp>
         <p:nvSpPr>
-          <p:cNvPr id="15" name="Text 11"/>
-          <p:cNvSpPr/>
-          <p:nvPr/>
-        </p:nvSpPr>
-        <p:spPr>
-          <a:xfrm>
-            <a:off x="4562856" y="3108960"/>
-            <a:ext cx="3063240" cy="2103120"/>
+          <p:cNvPr id="16" name="Text 12"/>
+          <p:cNvSpPr/>
+          <p:nvPr/>
+        </p:nvSpPr>
+        <p:spPr>
+          <a:xfrm>
+            <a:off x="6553048" y="2487168"/>
+            <a:ext cx="4815688" cy="457200"/>
           </a:xfrm>
           <a:prstGeom prst="rect">
             <a:avLst/>
@@ -3463,7 +3544,50 @@
               <a:buNone/>
             </a:pPr>
             <a:r>
-              <a:rPr lang="en-US" sz="1200" dirty="0">
+              <a:rPr lang="en-US" sz="1200" i="1" dirty="0">
+                <a:solidFill>
+                  <a:srgbClr val="5A6B8C"/>
+                </a:solidFill>
+                <a:latin typeface="Calibri" pitchFamily="34" charset="0"/>
+                <a:ea typeface="Calibri" pitchFamily="34" charset="-122"/>
+                <a:cs typeface="Calibri" pitchFamily="34" charset="-120"/>
+              </a:rPr>
+              <a:t>Unusual shapes, anything near sensitive logic.</a:t>
+            </a:r>
+            <a:endParaRPr lang="en-US" sz="1200" dirty="0"/>
+          </a:p>
+        </p:txBody>
+      </p:sp>
+      <p:sp>
+        <p:nvSpPr>
+          <p:cNvPr id="17" name="Text 13"/>
+          <p:cNvSpPr/>
+          <p:nvPr/>
+        </p:nvSpPr>
+        <p:spPr>
+          <a:xfrm>
+            <a:off x="6553048" y="3017520"/>
+            <a:ext cx="4815688" cy="1371600"/>
+          </a:xfrm>
+          <a:prstGeom prst="rect">
+            <a:avLst/>
+          </a:prstGeom>
+          <a:noFill/>
+          <a:ln/>
+        </p:spPr>
+        <p:txBody>
+          <a:bodyPr wrap="square" lIns="0" tIns="0" rIns="0" bIns="0" rtlCol="0" anchor="ctr"/>
+          <a:lstStyle/>
+          <a:p>
+            <a:pPr marL="342900" indent="-342900">
+              <a:spcAft>
+                <a:spcPts val="800"/>
+              </a:spcAft>
+              <a:buSzPct val="100000"/>
+              <a:buChar char="•"/>
+            </a:pPr>
+            <a:r>
+              <a:rPr lang="en-US" sz="1300" dirty="0">
                 <a:solidFill>
                   <a:srgbClr val="1B2440"/>
                 </a:solidFill>
@@ -3471,150 +3595,20 @@
                 <a:ea typeface="Calibri" pitchFamily="34" charset="-122"/>
                 <a:cs typeface="Calibri" pitchFamily="34" charset="-120"/>
               </a:rPr>
-              <a:t>Some roles shift toward integration, environment testing, and configuration management — genuinely valuable, hands-on work, not busywork. Where useful, some may also move toward more BA-style spec work.</a:t>
-            </a:r>
-            <a:endParaRPr lang="en-US" sz="1200" dirty="0"/>
-          </a:p>
-        </p:txBody>
-      </p:sp>
-      <p:sp>
-        <p:nvSpPr>
-          <p:cNvPr id="16" name="Shape 12"/>
-          <p:cNvSpPr/>
-          <p:nvPr/>
-        </p:nvSpPr>
-        <p:spPr>
-          <a:xfrm>
-            <a:off x="8119872" y="1691640"/>
-            <a:ext cx="3520440" cy="3657600"/>
-          </a:xfrm>
-          <a:prstGeom prst="roundRect">
-            <a:avLst>
-              <a:gd name="adj" fmla="val 2338"/>
-            </a:avLst>
-          </a:prstGeom>
-          <a:solidFill>
-            <a:srgbClr val="EAF4EF"/>
-          </a:solidFill>
-          <a:ln/>
-          <a:effectLst>
-            <a:outerShdw sx="100000" sy="100000" kx="0" ky="0" algn="bl" rotWithShape="0" blurRad="76200" dist="12700" dir="5400000">
-              <a:srgbClr val="9AA7C4">
-                <a:alpha val="22000"/>
-              </a:srgbClr>
-            </a:outerShdw>
-          </a:effectLst>
-        </p:spPr>
-      </p:sp>
-      <p:sp>
-        <p:nvSpPr>
-          <p:cNvPr id="17" name="Shape 13"/>
-          <p:cNvSpPr/>
-          <p:nvPr/>
-        </p:nvSpPr>
-        <p:spPr>
-          <a:xfrm>
-            <a:off x="8348472" y="1920240"/>
-            <a:ext cx="548640" cy="548640"/>
-          </a:xfrm>
-          <a:prstGeom prst="ellipse">
-            <a:avLst/>
-          </a:prstGeom>
-          <a:solidFill>
-            <a:srgbClr val="2E7D5B"/>
-          </a:solidFill>
-          <a:ln/>
-        </p:spPr>
-      </p:sp>
-      <p:pic>
-        <p:nvPicPr>
-          <p:cNvPr id="18" name="Image 2" descr="preencoded.png">    </p:cNvPr>
-          <p:cNvPicPr>
-            <a:picLocks noChangeAspect="1"/>
-          </p:cNvPicPr>
-          <p:nvPr/>
-        </p:nvPicPr>
-        <p:blipFill>
-          <a:blip r:embed="rId3"/>
-          <a:stretch>
-            <a:fillRect/>
-          </a:stretch>
-        </p:blipFill>
-        <p:spPr>
-          <a:xfrm>
-            <a:off x="8491118" y="2062886"/>
-            <a:ext cx="263347" cy="263347"/>
-          </a:xfrm>
-          <a:prstGeom prst="rect">
-            <a:avLst/>
-          </a:prstGeom>
-        </p:spPr>
-      </p:pic>
-      <p:sp>
-        <p:nvSpPr>
-          <p:cNvPr id="19" name="Text 14"/>
-          <p:cNvSpPr/>
-          <p:nvPr/>
-        </p:nvSpPr>
-        <p:spPr>
-          <a:xfrm>
-            <a:off x="8348472" y="2606040"/>
-            <a:ext cx="3063240" cy="457200"/>
-          </a:xfrm>
-          <a:prstGeom prst="rect">
-            <a:avLst/>
-          </a:prstGeom>
-          <a:noFill/>
-          <a:ln/>
-        </p:spPr>
-        <p:txBody>
-          <a:bodyPr wrap="square" lIns="0" tIns="0" rIns="0" bIns="0" rtlCol="0" anchor="ctr"/>
-          <a:lstStyle/>
-          <a:p>
-            <a:pPr indent="0" marL="0">
-              <a:buNone/>
-            </a:pPr>
-            <a:r>
-              <a:rPr lang="en-US" sz="1500" b="1" dirty="0">
-                <a:solidFill>
-                  <a:srgbClr val="2E7D5B"/>
-                </a:solidFill>
-                <a:latin typeface="Calibri" pitchFamily="34" charset="0"/>
-                <a:ea typeface="Calibri" pitchFamily="34" charset="-122"/>
-                <a:cs typeface="Calibri" pitchFamily="34" charset="-120"/>
-              </a:rPr>
-              <a:t>For everyone</a:t>
-            </a:r>
-            <a:endParaRPr lang="en-US" sz="1500" dirty="0"/>
-          </a:p>
-        </p:txBody>
-      </p:sp>
-      <p:sp>
-        <p:nvSpPr>
-          <p:cNvPr id="20" name="Text 15"/>
-          <p:cNvSpPr/>
-          <p:nvPr/>
-        </p:nvSpPr>
-        <p:spPr>
-          <a:xfrm>
-            <a:off x="8348472" y="3108960"/>
-            <a:ext cx="3063240" cy="2103120"/>
-          </a:xfrm>
-          <a:prstGeom prst="rect">
-            <a:avLst/>
-          </a:prstGeom>
-          <a:noFill/>
-          <a:ln/>
-        </p:spPr>
-        <p:txBody>
-          <a:bodyPr wrap="square" lIns="0" tIns="0" rIns="0" bIns="0" rtlCol="0" anchor="ctr"/>
-          <a:lstStyle/>
-          <a:p>
-            <a:pPr indent="0" marL="0">
-              <a:buNone/>
-            </a:pPr>
-            <a:r>
-              <a:rPr lang="en-US" sz="1200" dirty="0">
+              <a:t>Loop in a tech lead or the supervisor first</a:t>
+            </a:r>
+            <a:endParaRPr lang="en-US" sz="1300" dirty="0"/>
+          </a:p>
+          <a:p>
+            <a:pPr marL="342900" indent="-342900">
+              <a:spcAft>
+                <a:spcPts val="800"/>
+              </a:spcAft>
+              <a:buSzPct val="100000"/>
+              <a:buChar char="•"/>
+            </a:pPr>
+            <a:r>
+              <a:rPr lang="en-US" sz="1300" dirty="0">
                 <a:solidFill>
                   <a:srgbClr val="1B2440"/>
                 </a:solidFill>
@@ -3622,9 +3616,48 @@
                 <a:ea typeface="Calibri" pitchFamily="34" charset="-122"/>
                 <a:cs typeface="Calibri" pitchFamily="34" charset="-120"/>
               </a:rPr>
-              <a:t>Nothing about headcount is decided or urgent right now. As things become clearer, we'll say so — plainly and early, not as a surprise later.</a:t>
-            </a:r>
-            <a:endParaRPr lang="en-US" sz="1200" dirty="0"/>
+              <a:t>A day or two, not a blocker — just a second look</a:t>
+            </a:r>
+            <a:endParaRPr lang="en-US" sz="1300" dirty="0"/>
+          </a:p>
+        </p:txBody>
+      </p:sp>
+      <p:sp>
+        <p:nvSpPr>
+          <p:cNvPr id="18" name="Text 14"/>
+          <p:cNvSpPr/>
+          <p:nvPr/>
+        </p:nvSpPr>
+        <p:spPr>
+          <a:xfrm>
+            <a:off x="548640" y="5257800"/>
+            <a:ext cx="11094415" cy="457200"/>
+          </a:xfrm>
+          <a:prstGeom prst="rect">
+            <a:avLst/>
+          </a:prstGeom>
+          <a:noFill/>
+          <a:ln/>
+        </p:spPr>
+        <p:txBody>
+          <a:bodyPr wrap="square" lIns="0" tIns="0" rIns="0" bIns="0" rtlCol="0" anchor="ctr"/>
+          <a:lstStyle/>
+          <a:p>
+            <a:pPr algn="ctr" indent="0" marL="0">
+              <a:buNone/>
+            </a:pPr>
+            <a:r>
+              <a:rPr lang="en-US" sz="1300" i="1" dirty="0">
+                <a:solidFill>
+                  <a:srgbClr val="5A6B8C"/>
+                </a:solidFill>
+                <a:latin typeface="Calibri" pitchFamily="34" charset="0"/>
+                <a:ea typeface="Calibri" pitchFamily="34" charset="-122"/>
+                <a:cs typeface="Calibri" pitchFamily="34" charset="-120"/>
+              </a:rPr>
+              <a:t>We'll tighten this up as we go — better to start simple and add structure only where we actually need it.</a:t>
+            </a:r>
+            <a:endParaRPr lang="en-US" sz="1300" dirty="0"/>
           </a:p>
         </p:txBody>
       </p:sp>
@@ -3639,6 +3672,2519 @@
 <file path=ppt/slides/slide12.xml><?xml version="1.0" encoding="utf-8"?>
 <p:sld xmlns:a="http://schemas.openxmlformats.org/drawingml/2006/main" xmlns:r="http://schemas.openxmlformats.org/officeDocument/2006/relationships" xmlns:p="http://schemas.openxmlformats.org/presentationml/2006/main">
   <p:cSld name="Slide 12">
+    <p:bg>
+      <p:bgPr>
+        <a:solidFill>
+          <a:srgbClr val="FFFFFF"/>
+        </a:solidFill>
+      </p:bgPr>
+    </p:bg>
+    <p:spTree>
+      <p:nvGrpSpPr>
+        <p:cNvPr id="1" name=""/>
+        <p:cNvGrpSpPr/>
+        <p:nvPr/>
+      </p:nvGrpSpPr>
+      <p:grpSpPr>
+        <a:xfrm>
+          <a:off x="0" y="0"/>
+          <a:ext cx="0" cy="0"/>
+          <a:chOff x="0" y="0"/>
+          <a:chExt cx="0" cy="0"/>
+        </a:xfrm>
+      </p:grpSpPr>
+      <p:sp>
+        <p:nvSpPr>
+          <p:cNvPr id="2" name="Text 0"/>
+          <p:cNvSpPr/>
+          <p:nvPr/>
+        </p:nvSpPr>
+        <p:spPr>
+          <a:xfrm>
+            <a:off x="548640" y="6473952"/>
+            <a:ext cx="5029200" cy="274320"/>
+          </a:xfrm>
+          <a:prstGeom prst="rect">
+            <a:avLst/>
+          </a:prstGeom>
+          <a:noFill/>
+          <a:ln/>
+        </p:spPr>
+        <p:txBody>
+          <a:bodyPr wrap="square" lIns="0" tIns="0" rIns="0" bIns="0" rtlCol="0" anchor="ctr"/>
+          <a:lstStyle/>
+          <a:p>
+            <a:pPr algn="l" indent="0" marL="0">
+              <a:buNone/>
+            </a:pPr>
+            <a:r>
+              <a:rPr lang="en-US" sz="900" dirty="0">
+                <a:solidFill>
+                  <a:srgbClr val="5A6B8C"/>
+                </a:solidFill>
+                <a:latin typeface="Calibri" pitchFamily="34" charset="0"/>
+                <a:ea typeface="Calibri" pitchFamily="34" charset="-122"/>
+                <a:cs typeface="Calibri" pitchFamily="34" charset="-120"/>
+              </a:rPr>
+              <a:t>Internet-First, Airgap-Final — Team Edition</a:t>
+            </a:r>
+            <a:endParaRPr lang="en-US" sz="900" dirty="0"/>
+          </a:p>
+        </p:txBody>
+      </p:sp>
+      <p:sp>
+        <p:nvSpPr>
+          <p:cNvPr id="3" name="Text 1"/>
+          <p:cNvSpPr/>
+          <p:nvPr/>
+        </p:nvSpPr>
+        <p:spPr>
+          <a:xfrm>
+            <a:off x="11094415" y="6473952"/>
+            <a:ext cx="548640" cy="274320"/>
+          </a:xfrm>
+          <a:prstGeom prst="rect">
+            <a:avLst/>
+          </a:prstGeom>
+          <a:noFill/>
+          <a:ln/>
+        </p:spPr>
+        <p:txBody>
+          <a:bodyPr wrap="square" lIns="0" tIns="0" rIns="0" bIns="0" rtlCol="0" anchor="ctr"/>
+          <a:lstStyle/>
+          <a:p>
+            <a:pPr algn="r" indent="0" marL="0">
+              <a:buNone/>
+            </a:pPr>
+            <a:r>
+              <a:rPr lang="en-US" sz="900" dirty="0">
+                <a:solidFill>
+                  <a:srgbClr val="5A6B8C"/>
+                </a:solidFill>
+                <a:latin typeface="Calibri" pitchFamily="34" charset="0"/>
+                <a:ea typeface="Calibri" pitchFamily="34" charset="-122"/>
+                <a:cs typeface="Calibri" pitchFamily="34" charset="-120"/>
+              </a:rPr>
+              <a:t>12</a:t>
+            </a:r>
+            <a:endParaRPr lang="en-US" sz="900" dirty="0"/>
+          </a:p>
+        </p:txBody>
+      </p:sp>
+      <p:sp>
+        <p:nvSpPr>
+          <p:cNvPr id="4" name="Text 2"/>
+          <p:cNvSpPr/>
+          <p:nvPr/>
+        </p:nvSpPr>
+        <p:spPr>
+          <a:xfrm>
+            <a:off x="548640" y="384048"/>
+            <a:ext cx="11094415" cy="274320"/>
+          </a:xfrm>
+          <a:prstGeom prst="rect">
+            <a:avLst/>
+          </a:prstGeom>
+          <a:noFill/>
+          <a:ln/>
+        </p:spPr>
+        <p:txBody>
+          <a:bodyPr wrap="square" lIns="0" tIns="0" rIns="0" bIns="0" rtlCol="0" anchor="ctr"/>
+          <a:lstStyle/>
+          <a:p>
+            <a:pPr indent="0" marL="0">
+              <a:buNone/>
+            </a:pPr>
+            <a:r>
+              <a:rPr lang="en-US" sz="1200" b="1" spc="300" kern="0" dirty="0">
+                <a:solidFill>
+                  <a:srgbClr val="5A6B8C"/>
+                </a:solidFill>
+                <a:latin typeface="Calibri" pitchFamily="34" charset="0"/>
+                <a:ea typeface="Calibri" pitchFamily="34" charset="-122"/>
+                <a:cs typeface="Calibri" pitchFamily="34" charset="-120"/>
+              </a:rPr>
+              <a:t>PORTING FEATURES, ONE AT A TIME</a:t>
+            </a:r>
+            <a:endParaRPr lang="en-US" sz="1200" dirty="0"/>
+          </a:p>
+        </p:txBody>
+      </p:sp>
+      <p:sp>
+        <p:nvSpPr>
+          <p:cNvPr id="5" name="Text 3"/>
+          <p:cNvSpPr/>
+          <p:nvPr/>
+        </p:nvSpPr>
+        <p:spPr>
+          <a:xfrm>
+            <a:off x="548640" y="658368"/>
+            <a:ext cx="11094415" cy="621792"/>
+          </a:xfrm>
+          <a:prstGeom prst="rect">
+            <a:avLst/>
+          </a:prstGeom>
+          <a:noFill/>
+          <a:ln/>
+        </p:spPr>
+        <p:txBody>
+          <a:bodyPr wrap="square" lIns="0" tIns="0" rIns="0" bIns="0" rtlCol="0" anchor="t"/>
+          <a:lstStyle/>
+          <a:p>
+            <a:pPr indent="0" marL="0">
+              <a:buNone/>
+            </a:pPr>
+            <a:r>
+              <a:rPr lang="en-US" sz="2800" b="1" dirty="0">
+                <a:solidFill>
+                  <a:srgbClr val="1E2761"/>
+                </a:solidFill>
+                <a:latin typeface="Cambria" pitchFamily="34" charset="0"/>
+                <a:ea typeface="Cambria" pitchFamily="34" charset="-122"/>
+                <a:cs typeface="Cambria" pitchFamily="34" charset="-120"/>
+              </a:rPr>
+              <a:t>Inventory → Spec → Build → Verify — repeat</a:t>
+            </a:r>
+            <a:endParaRPr lang="en-US" sz="2800" dirty="0"/>
+          </a:p>
+        </p:txBody>
+      </p:sp>
+      <p:sp>
+        <p:nvSpPr>
+          <p:cNvPr id="6" name="Shape 4"/>
+          <p:cNvSpPr/>
+          <p:nvPr/>
+        </p:nvSpPr>
+        <p:spPr>
+          <a:xfrm>
+            <a:off x="548640" y="1691640"/>
+            <a:ext cx="2602154" cy="3017520"/>
+          </a:xfrm>
+          <a:prstGeom prst="roundRect">
+            <a:avLst>
+              <a:gd name="adj" fmla="val 3163"/>
+            </a:avLst>
+          </a:prstGeom>
+          <a:solidFill>
+            <a:srgbClr val="EDF3FC"/>
+          </a:solidFill>
+          <a:ln/>
+          <a:effectLst>
+            <a:outerShdw sx="100000" sy="100000" kx="0" ky="0" algn="bl" rotWithShape="0" blurRad="76200" dist="12700" dir="5400000">
+              <a:srgbClr val="9AA7C4">
+                <a:alpha val="22000"/>
+              </a:srgbClr>
+            </a:outerShdw>
+          </a:effectLst>
+        </p:spPr>
+      </p:sp>
+      <p:sp>
+        <p:nvSpPr>
+          <p:cNvPr id="7" name="Text 5"/>
+          <p:cNvSpPr/>
+          <p:nvPr/>
+        </p:nvSpPr>
+        <p:spPr>
+          <a:xfrm>
+            <a:off x="731520" y="1828800"/>
+            <a:ext cx="731520" cy="685800"/>
+          </a:xfrm>
+          <a:prstGeom prst="rect">
+            <a:avLst/>
+          </a:prstGeom>
+          <a:noFill/>
+          <a:ln/>
+        </p:spPr>
+        <p:txBody>
+          <a:bodyPr wrap="square" lIns="0" tIns="0" rIns="0" bIns="0" rtlCol="0" anchor="ctr"/>
+          <a:lstStyle/>
+          <a:p>
+            <a:pPr indent="0" marL="0">
+              <a:buNone/>
+            </a:pPr>
+            <a:r>
+              <a:rPr lang="en-US" sz="3600" b="1" dirty="0">
+                <a:solidFill>
+                  <a:srgbClr val="CADCFC"/>
+                </a:solidFill>
+                <a:latin typeface="Cambria" pitchFamily="34" charset="0"/>
+                <a:ea typeface="Cambria" pitchFamily="34" charset="-122"/>
+                <a:cs typeface="Cambria" pitchFamily="34" charset="-120"/>
+              </a:rPr>
+              <a:t>1</a:t>
+            </a:r>
+            <a:endParaRPr lang="en-US" sz="3600" dirty="0"/>
+          </a:p>
+        </p:txBody>
+      </p:sp>
+      <p:sp>
+        <p:nvSpPr>
+          <p:cNvPr id="8" name="Text 6"/>
+          <p:cNvSpPr/>
+          <p:nvPr/>
+        </p:nvSpPr>
+        <p:spPr>
+          <a:xfrm>
+            <a:off x="731520" y="2468880"/>
+            <a:ext cx="2236394" cy="320040"/>
+          </a:xfrm>
+          <a:prstGeom prst="rect">
+            <a:avLst/>
+          </a:prstGeom>
+          <a:noFill/>
+          <a:ln/>
+        </p:spPr>
+        <p:txBody>
+          <a:bodyPr wrap="square" lIns="0" tIns="0" rIns="0" bIns="0" rtlCol="0" anchor="ctr"/>
+          <a:lstStyle/>
+          <a:p>
+            <a:pPr indent="0" marL="0">
+              <a:buNone/>
+            </a:pPr>
+            <a:r>
+              <a:rPr lang="en-US" sz="1500" b="1" dirty="0">
+                <a:solidFill>
+                  <a:srgbClr val="1E2761"/>
+                </a:solidFill>
+                <a:latin typeface="Calibri" pitchFamily="34" charset="0"/>
+                <a:ea typeface="Calibri" pitchFamily="34" charset="-122"/>
+                <a:cs typeface="Calibri" pitchFamily="34" charset="-120"/>
+              </a:rPr>
+              <a:t>Inventory</a:t>
+            </a:r>
+            <a:endParaRPr lang="en-US" sz="1500" dirty="0"/>
+          </a:p>
+        </p:txBody>
+      </p:sp>
+      <p:sp>
+        <p:nvSpPr>
+          <p:cNvPr id="9" name="Text 7"/>
+          <p:cNvSpPr/>
+          <p:nvPr/>
+        </p:nvSpPr>
+        <p:spPr>
+          <a:xfrm>
+            <a:off x="731520" y="2834640"/>
+            <a:ext cx="2236394" cy="1691640"/>
+          </a:xfrm>
+          <a:prstGeom prst="rect">
+            <a:avLst/>
+          </a:prstGeom>
+          <a:noFill/>
+          <a:ln/>
+        </p:spPr>
+        <p:txBody>
+          <a:bodyPr wrap="square" lIns="0" tIns="0" rIns="0" bIns="0" rtlCol="0" anchor="ctr"/>
+          <a:lstStyle/>
+          <a:p>
+            <a:pPr indent="0" marL="0">
+              <a:buNone/>
+            </a:pPr>
+            <a:r>
+              <a:rPr lang="en-US" sz="1100" dirty="0">
+                <a:solidFill>
+                  <a:srgbClr val="1B2440"/>
+                </a:solidFill>
+                <a:latin typeface="Calibri" pitchFamily="34" charset="0"/>
+                <a:ea typeface="Calibri" pitchFamily="34" charset="-122"/>
+                <a:cs typeface="Calibri" pitchFamily="34" charset="-120"/>
+              </a:rPr>
+              <a:t>List out what each Angular feature actually does: routes, screens, calls, rules. One row per feature.</a:t>
+            </a:r>
+            <a:endParaRPr lang="en-US" sz="1100" dirty="0"/>
+          </a:p>
+        </p:txBody>
+      </p:sp>
+      <p:sp>
+        <p:nvSpPr>
+          <p:cNvPr id="10" name="Text 8"/>
+          <p:cNvSpPr/>
+          <p:nvPr/>
+        </p:nvSpPr>
+        <p:spPr>
+          <a:xfrm>
+            <a:off x="3132506" y="3017520"/>
+            <a:ext cx="274320" cy="365760"/>
+          </a:xfrm>
+          <a:prstGeom prst="rect">
+            <a:avLst/>
+          </a:prstGeom>
+          <a:noFill/>
+          <a:ln/>
+        </p:spPr>
+        <p:txBody>
+          <a:bodyPr wrap="square" lIns="0" tIns="0" rIns="0" bIns="0" rtlCol="0" anchor="ctr"/>
+          <a:lstStyle/>
+          <a:p>
+            <a:pPr algn="ctr" indent="0" marL="0">
+              <a:buNone/>
+            </a:pPr>
+            <a:r>
+              <a:rPr lang="en-US" sz="1800" dirty="0">
+                <a:solidFill>
+                  <a:srgbClr val="5A6B8C"/>
+                </a:solidFill>
+              </a:rPr>
+              <a:t>▸</a:t>
+            </a:r>
+            <a:endParaRPr lang="en-US" sz="1800" dirty="0"/>
+          </a:p>
+        </p:txBody>
+      </p:sp>
+      <p:sp>
+        <p:nvSpPr>
+          <p:cNvPr id="11" name="Shape 9"/>
+          <p:cNvSpPr/>
+          <p:nvPr/>
+        </p:nvSpPr>
+        <p:spPr>
+          <a:xfrm>
+            <a:off x="3379394" y="1691640"/>
+            <a:ext cx="2602154" cy="3017520"/>
+          </a:xfrm>
+          <a:prstGeom prst="roundRect">
+            <a:avLst>
+              <a:gd name="adj" fmla="val 3163"/>
+            </a:avLst>
+          </a:prstGeom>
+          <a:solidFill>
+            <a:srgbClr val="EDF3FC"/>
+          </a:solidFill>
+          <a:ln/>
+          <a:effectLst>
+            <a:outerShdw sx="100000" sy="100000" kx="0" ky="0" algn="bl" rotWithShape="0" blurRad="76200" dist="12700" dir="5400000">
+              <a:srgbClr val="9AA7C4">
+                <a:alpha val="22000"/>
+              </a:srgbClr>
+            </a:outerShdw>
+          </a:effectLst>
+        </p:spPr>
+      </p:sp>
+      <p:sp>
+        <p:nvSpPr>
+          <p:cNvPr id="12" name="Text 10"/>
+          <p:cNvSpPr/>
+          <p:nvPr/>
+        </p:nvSpPr>
+        <p:spPr>
+          <a:xfrm>
+            <a:off x="3562274" y="1828800"/>
+            <a:ext cx="731520" cy="685800"/>
+          </a:xfrm>
+          <a:prstGeom prst="rect">
+            <a:avLst/>
+          </a:prstGeom>
+          <a:noFill/>
+          <a:ln/>
+        </p:spPr>
+        <p:txBody>
+          <a:bodyPr wrap="square" lIns="0" tIns="0" rIns="0" bIns="0" rtlCol="0" anchor="ctr"/>
+          <a:lstStyle/>
+          <a:p>
+            <a:pPr indent="0" marL="0">
+              <a:buNone/>
+            </a:pPr>
+            <a:r>
+              <a:rPr lang="en-US" sz="3600" b="1" dirty="0">
+                <a:solidFill>
+                  <a:srgbClr val="CADCFC"/>
+                </a:solidFill>
+                <a:latin typeface="Cambria" pitchFamily="34" charset="0"/>
+                <a:ea typeface="Cambria" pitchFamily="34" charset="-122"/>
+                <a:cs typeface="Cambria" pitchFamily="34" charset="-120"/>
+              </a:rPr>
+              <a:t>2</a:t>
+            </a:r>
+            <a:endParaRPr lang="en-US" sz="3600" dirty="0"/>
+          </a:p>
+        </p:txBody>
+      </p:sp>
+      <p:sp>
+        <p:nvSpPr>
+          <p:cNvPr id="13" name="Text 11"/>
+          <p:cNvSpPr/>
+          <p:nvPr/>
+        </p:nvSpPr>
+        <p:spPr>
+          <a:xfrm>
+            <a:off x="3562274" y="2468880"/>
+            <a:ext cx="2236394" cy="320040"/>
+          </a:xfrm>
+          <a:prstGeom prst="rect">
+            <a:avLst/>
+          </a:prstGeom>
+          <a:noFill/>
+          <a:ln/>
+        </p:spPr>
+        <p:txBody>
+          <a:bodyPr wrap="square" lIns="0" tIns="0" rIns="0" bIns="0" rtlCol="0" anchor="ctr"/>
+          <a:lstStyle/>
+          <a:p>
+            <a:pPr indent="0" marL="0">
+              <a:buNone/>
+            </a:pPr>
+            <a:r>
+              <a:rPr lang="en-US" sz="1500" b="1" dirty="0">
+                <a:solidFill>
+                  <a:srgbClr val="1E2761"/>
+                </a:solidFill>
+                <a:latin typeface="Calibri" pitchFamily="34" charset="0"/>
+                <a:ea typeface="Calibri" pitchFamily="34" charset="-122"/>
+                <a:cs typeface="Calibri" pitchFamily="34" charset="-120"/>
+              </a:rPr>
+              <a:t>Spec</a:t>
+            </a:r>
+            <a:endParaRPr lang="en-US" sz="1500" dirty="0"/>
+          </a:p>
+        </p:txBody>
+      </p:sp>
+      <p:sp>
+        <p:nvSpPr>
+          <p:cNvPr id="14" name="Text 12"/>
+          <p:cNvSpPr/>
+          <p:nvPr/>
+        </p:nvSpPr>
+        <p:spPr>
+          <a:xfrm>
+            <a:off x="3562274" y="2834640"/>
+            <a:ext cx="2236394" cy="1691640"/>
+          </a:xfrm>
+          <a:prstGeom prst="rect">
+            <a:avLst/>
+          </a:prstGeom>
+          <a:noFill/>
+          <a:ln/>
+        </p:spPr>
+        <p:txBody>
+          <a:bodyPr wrap="square" lIns="0" tIns="0" rIns="0" bIns="0" rtlCol="0" anchor="ctr"/>
+          <a:lstStyle/>
+          <a:p>
+            <a:pPr indent="0" marL="0">
+              <a:buNone/>
+            </a:pPr>
+            <a:r>
+              <a:rPr lang="en-US" sz="1100" dirty="0">
+                <a:solidFill>
+                  <a:srgbClr val="1B2440"/>
+                </a:solidFill>
+                <a:latin typeface="Calibri" pitchFamily="34" charset="0"/>
+                <a:ea typeface="Calibri" pitchFamily="34" charset="-122"/>
+                <a:cs typeface="Calibri" pitchFamily="34" charset="-120"/>
+              </a:rPr>
+              <a:t>Write the contract inside: API shape, rule keys, sample data. Keep it tight — a spec shouldn't take a week.</a:t>
+            </a:r>
+            <a:endParaRPr lang="en-US" sz="1100" dirty="0"/>
+          </a:p>
+        </p:txBody>
+      </p:sp>
+      <p:sp>
+        <p:nvSpPr>
+          <p:cNvPr id="15" name="Text 13"/>
+          <p:cNvSpPr/>
+          <p:nvPr/>
+        </p:nvSpPr>
+        <p:spPr>
+          <a:xfrm>
+            <a:off x="5963260" y="3017520"/>
+            <a:ext cx="274320" cy="365760"/>
+          </a:xfrm>
+          <a:prstGeom prst="rect">
+            <a:avLst/>
+          </a:prstGeom>
+          <a:noFill/>
+          <a:ln/>
+        </p:spPr>
+        <p:txBody>
+          <a:bodyPr wrap="square" lIns="0" tIns="0" rIns="0" bIns="0" rtlCol="0" anchor="ctr"/>
+          <a:lstStyle/>
+          <a:p>
+            <a:pPr algn="ctr" indent="0" marL="0">
+              <a:buNone/>
+            </a:pPr>
+            <a:r>
+              <a:rPr lang="en-US" sz="1800" dirty="0">
+                <a:solidFill>
+                  <a:srgbClr val="5A6B8C"/>
+                </a:solidFill>
+              </a:rPr>
+              <a:t>▸</a:t>
+            </a:r>
+            <a:endParaRPr lang="en-US" sz="1800" dirty="0"/>
+          </a:p>
+        </p:txBody>
+      </p:sp>
+      <p:sp>
+        <p:nvSpPr>
+          <p:cNvPr id="16" name="Shape 14"/>
+          <p:cNvSpPr/>
+          <p:nvPr/>
+        </p:nvSpPr>
+        <p:spPr>
+          <a:xfrm>
+            <a:off x="6210148" y="1691640"/>
+            <a:ext cx="2602154" cy="3017520"/>
+          </a:xfrm>
+          <a:prstGeom prst="roundRect">
+            <a:avLst>
+              <a:gd name="adj" fmla="val 3163"/>
+            </a:avLst>
+          </a:prstGeom>
+          <a:solidFill>
+            <a:srgbClr val="EDF3FC"/>
+          </a:solidFill>
+          <a:ln/>
+          <a:effectLst>
+            <a:outerShdw sx="100000" sy="100000" kx="0" ky="0" algn="bl" rotWithShape="0" blurRad="76200" dist="12700" dir="5400000">
+              <a:srgbClr val="9AA7C4">
+                <a:alpha val="22000"/>
+              </a:srgbClr>
+            </a:outerShdw>
+          </a:effectLst>
+        </p:spPr>
+      </p:sp>
+      <p:sp>
+        <p:nvSpPr>
+          <p:cNvPr id="17" name="Text 15"/>
+          <p:cNvSpPr/>
+          <p:nvPr/>
+        </p:nvSpPr>
+        <p:spPr>
+          <a:xfrm>
+            <a:off x="6393028" y="1828800"/>
+            <a:ext cx="731520" cy="685800"/>
+          </a:xfrm>
+          <a:prstGeom prst="rect">
+            <a:avLst/>
+          </a:prstGeom>
+          <a:noFill/>
+          <a:ln/>
+        </p:spPr>
+        <p:txBody>
+          <a:bodyPr wrap="square" lIns="0" tIns="0" rIns="0" bIns="0" rtlCol="0" anchor="ctr"/>
+          <a:lstStyle/>
+          <a:p>
+            <a:pPr indent="0" marL="0">
+              <a:buNone/>
+            </a:pPr>
+            <a:r>
+              <a:rPr lang="en-US" sz="3600" b="1" dirty="0">
+                <a:solidFill>
+                  <a:srgbClr val="CADCFC"/>
+                </a:solidFill>
+                <a:latin typeface="Cambria" pitchFamily="34" charset="0"/>
+                <a:ea typeface="Cambria" pitchFamily="34" charset="-122"/>
+                <a:cs typeface="Cambria" pitchFamily="34" charset="-120"/>
+              </a:rPr>
+              <a:t>3</a:t>
+            </a:r>
+            <a:endParaRPr lang="en-US" sz="3600" dirty="0"/>
+          </a:p>
+        </p:txBody>
+      </p:sp>
+      <p:sp>
+        <p:nvSpPr>
+          <p:cNvPr id="18" name="Text 16"/>
+          <p:cNvSpPr/>
+          <p:nvPr/>
+        </p:nvSpPr>
+        <p:spPr>
+          <a:xfrm>
+            <a:off x="6393028" y="2468880"/>
+            <a:ext cx="2236394" cy="320040"/>
+          </a:xfrm>
+          <a:prstGeom prst="rect">
+            <a:avLst/>
+          </a:prstGeom>
+          <a:noFill/>
+          <a:ln/>
+        </p:spPr>
+        <p:txBody>
+          <a:bodyPr wrap="square" lIns="0" tIns="0" rIns="0" bIns="0" rtlCol="0" anchor="ctr"/>
+          <a:lstStyle/>
+          <a:p>
+            <a:pPr indent="0" marL="0">
+              <a:buNone/>
+            </a:pPr>
+            <a:r>
+              <a:rPr lang="en-US" sz="1500" b="1" dirty="0">
+                <a:solidFill>
+                  <a:srgbClr val="1E2761"/>
+                </a:solidFill>
+                <a:latin typeface="Calibri" pitchFamily="34" charset="0"/>
+                <a:ea typeface="Calibri" pitchFamily="34" charset="-122"/>
+                <a:cs typeface="Calibri" pitchFamily="34" charset="-120"/>
+              </a:rPr>
+              <a:t>Build</a:t>
+            </a:r>
+            <a:endParaRPr lang="en-US" sz="1500" dirty="0"/>
+          </a:p>
+        </p:txBody>
+      </p:sp>
+      <p:sp>
+        <p:nvSpPr>
+          <p:cNvPr id="19" name="Text 17"/>
+          <p:cNvSpPr/>
+          <p:nvPr/>
+        </p:nvSpPr>
+        <p:spPr>
+          <a:xfrm>
+            <a:off x="6393028" y="2834640"/>
+            <a:ext cx="2236394" cy="1691640"/>
+          </a:xfrm>
+          <a:prstGeom prst="rect">
+            <a:avLst/>
+          </a:prstGeom>
+          <a:noFill/>
+          <a:ln/>
+        </p:spPr>
+        <p:txBody>
+          <a:bodyPr wrap="square" lIns="0" tIns="0" rIns="0" bIns="0" rtlCol="0" anchor="ctr"/>
+          <a:lstStyle/>
+          <a:p>
+            <a:pPr indent="0" marL="0">
+              <a:buNone/>
+            </a:pPr>
+            <a:r>
+              <a:rPr lang="en-US" sz="1100" dirty="0">
+                <a:solidFill>
+                  <a:srgbClr val="1B2440"/>
+                </a:solidFill>
+                <a:latin typeface="Calibri" pitchFamily="34" charset="0"/>
+                <a:ea typeface="Calibri" pitchFamily="34" charset="-122"/>
+                <a:cs typeface="Calibri" pitchFamily="34" charset="-120"/>
+              </a:rPr>
+              <a:t>Build it outside end-to-end — UI, tests, docs together — against the mocks. Not all-screens-first.</a:t>
+            </a:r>
+            <a:endParaRPr lang="en-US" sz="1100" dirty="0"/>
+          </a:p>
+        </p:txBody>
+      </p:sp>
+      <p:sp>
+        <p:nvSpPr>
+          <p:cNvPr id="20" name="Text 18"/>
+          <p:cNvSpPr/>
+          <p:nvPr/>
+        </p:nvSpPr>
+        <p:spPr>
+          <a:xfrm>
+            <a:off x="8794013" y="3017520"/>
+            <a:ext cx="274320" cy="365760"/>
+          </a:xfrm>
+          <a:prstGeom prst="rect">
+            <a:avLst/>
+          </a:prstGeom>
+          <a:noFill/>
+          <a:ln/>
+        </p:spPr>
+        <p:txBody>
+          <a:bodyPr wrap="square" lIns="0" tIns="0" rIns="0" bIns="0" rtlCol="0" anchor="ctr"/>
+          <a:lstStyle/>
+          <a:p>
+            <a:pPr algn="ctr" indent="0" marL="0">
+              <a:buNone/>
+            </a:pPr>
+            <a:r>
+              <a:rPr lang="en-US" sz="1800" dirty="0">
+                <a:solidFill>
+                  <a:srgbClr val="5A6B8C"/>
+                </a:solidFill>
+              </a:rPr>
+              <a:t>▸</a:t>
+            </a:r>
+            <a:endParaRPr lang="en-US" sz="1800" dirty="0"/>
+          </a:p>
+        </p:txBody>
+      </p:sp>
+      <p:sp>
+        <p:nvSpPr>
+          <p:cNvPr id="21" name="Shape 19"/>
+          <p:cNvSpPr/>
+          <p:nvPr/>
+        </p:nvSpPr>
+        <p:spPr>
+          <a:xfrm>
+            <a:off x="9040901" y="1691640"/>
+            <a:ext cx="2602154" cy="3017520"/>
+          </a:xfrm>
+          <a:prstGeom prst="roundRect">
+            <a:avLst>
+              <a:gd name="adj" fmla="val 3163"/>
+            </a:avLst>
+          </a:prstGeom>
+          <a:solidFill>
+            <a:srgbClr val="EDF3FC"/>
+          </a:solidFill>
+          <a:ln/>
+          <a:effectLst>
+            <a:outerShdw sx="100000" sy="100000" kx="0" ky="0" algn="bl" rotWithShape="0" blurRad="76200" dist="12700" dir="5400000">
+              <a:srgbClr val="9AA7C4">
+                <a:alpha val="22000"/>
+              </a:srgbClr>
+            </a:outerShdw>
+          </a:effectLst>
+        </p:spPr>
+      </p:sp>
+      <p:sp>
+        <p:nvSpPr>
+          <p:cNvPr id="22" name="Text 20"/>
+          <p:cNvSpPr/>
+          <p:nvPr/>
+        </p:nvSpPr>
+        <p:spPr>
+          <a:xfrm>
+            <a:off x="9223781" y="1828800"/>
+            <a:ext cx="731520" cy="685800"/>
+          </a:xfrm>
+          <a:prstGeom prst="rect">
+            <a:avLst/>
+          </a:prstGeom>
+          <a:noFill/>
+          <a:ln/>
+        </p:spPr>
+        <p:txBody>
+          <a:bodyPr wrap="square" lIns="0" tIns="0" rIns="0" bIns="0" rtlCol="0" anchor="ctr"/>
+          <a:lstStyle/>
+          <a:p>
+            <a:pPr indent="0" marL="0">
+              <a:buNone/>
+            </a:pPr>
+            <a:r>
+              <a:rPr lang="en-US" sz="3600" b="1" dirty="0">
+                <a:solidFill>
+                  <a:srgbClr val="CADCFC"/>
+                </a:solidFill>
+                <a:latin typeface="Cambria" pitchFamily="34" charset="0"/>
+                <a:ea typeface="Cambria" pitchFamily="34" charset="-122"/>
+                <a:cs typeface="Cambria" pitchFamily="34" charset="-120"/>
+              </a:rPr>
+              <a:t>4</a:t>
+            </a:r>
+            <a:endParaRPr lang="en-US" sz="3600" dirty="0"/>
+          </a:p>
+        </p:txBody>
+      </p:sp>
+      <p:sp>
+        <p:nvSpPr>
+          <p:cNvPr id="23" name="Text 21"/>
+          <p:cNvSpPr/>
+          <p:nvPr/>
+        </p:nvSpPr>
+        <p:spPr>
+          <a:xfrm>
+            <a:off x="9223781" y="2468880"/>
+            <a:ext cx="2236394" cy="320040"/>
+          </a:xfrm>
+          <a:prstGeom prst="rect">
+            <a:avLst/>
+          </a:prstGeom>
+          <a:noFill/>
+          <a:ln/>
+        </p:spPr>
+        <p:txBody>
+          <a:bodyPr wrap="square" lIns="0" tIns="0" rIns="0" bIns="0" rtlCol="0" anchor="ctr"/>
+          <a:lstStyle/>
+          <a:p>
+            <a:pPr indent="0" marL="0">
+              <a:buNone/>
+            </a:pPr>
+            <a:r>
+              <a:rPr lang="en-US" sz="1500" b="1" dirty="0">
+                <a:solidFill>
+                  <a:srgbClr val="1E2761"/>
+                </a:solidFill>
+                <a:latin typeface="Calibri" pitchFamily="34" charset="0"/>
+                <a:ea typeface="Calibri" pitchFamily="34" charset="-122"/>
+                <a:cs typeface="Calibri" pitchFamily="34" charset="-120"/>
+              </a:rPr>
+              <a:t>Verify</a:t>
+            </a:r>
+            <a:endParaRPr lang="en-US" sz="1500" dirty="0"/>
+          </a:p>
+        </p:txBody>
+      </p:sp>
+      <p:sp>
+        <p:nvSpPr>
+          <p:cNvPr id="24" name="Text 22"/>
+          <p:cNvSpPr/>
+          <p:nvPr/>
+        </p:nvSpPr>
+        <p:spPr>
+          <a:xfrm>
+            <a:off x="9223781" y="2834640"/>
+            <a:ext cx="2236394" cy="1691640"/>
+          </a:xfrm>
+          <a:prstGeom prst="rect">
+            <a:avLst/>
+          </a:prstGeom>
+          <a:noFill/>
+          <a:ln/>
+        </p:spPr>
+        <p:txBody>
+          <a:bodyPr wrap="square" lIns="0" tIns="0" rIns="0" bIns="0" rtlCol="0" anchor="ctr"/>
+          <a:lstStyle/>
+          <a:p>
+            <a:pPr indent="0" marL="0">
+              <a:buNone/>
+            </a:pPr>
+            <a:r>
+              <a:rPr lang="en-US" sz="1100" dirty="0">
+                <a:solidFill>
+                  <a:srgbClr val="1B2440"/>
+                </a:solidFill>
+                <a:latin typeface="Calibri" pitchFamily="34" charset="0"/>
+                <a:ea typeface="Calibri" pitchFamily="34" charset="-122"/>
+                <a:cs typeface="Calibri" pitchFamily="34" charset="-120"/>
+              </a:rPr>
+              <a:t>Bring it in, plug in the real backend, re-run the same tests. Found a gap? Fix the spec, then the code.</a:t>
+            </a:r>
+            <a:endParaRPr lang="en-US" sz="1100" dirty="0"/>
+          </a:p>
+        </p:txBody>
+      </p:sp>
+      <p:sp>
+        <p:nvSpPr>
+          <p:cNvPr id="25" name="Shape 23"/>
+          <p:cNvSpPr/>
+          <p:nvPr/>
+        </p:nvSpPr>
+        <p:spPr>
+          <a:xfrm>
+            <a:off x="548640" y="4983480"/>
+            <a:ext cx="11094415" cy="1051560"/>
+          </a:xfrm>
+          <a:prstGeom prst="roundRect">
+            <a:avLst>
+              <a:gd name="adj" fmla="val 7826"/>
+            </a:avLst>
+          </a:prstGeom>
+          <a:solidFill>
+            <a:srgbClr val="EAF4EF"/>
+          </a:solidFill>
+          <a:ln/>
+          <a:effectLst>
+            <a:outerShdw sx="100000" sy="100000" kx="0" ky="0" algn="bl" rotWithShape="0" blurRad="76200" dist="12700" dir="5400000">
+              <a:srgbClr val="9AA7C4">
+                <a:alpha val="22000"/>
+              </a:srgbClr>
+            </a:outerShdw>
+          </a:effectLst>
+        </p:spPr>
+      </p:sp>
+      <p:sp>
+        <p:nvSpPr>
+          <p:cNvPr id="26" name="Shape 24"/>
+          <p:cNvSpPr/>
+          <p:nvPr/>
+        </p:nvSpPr>
+        <p:spPr>
+          <a:xfrm>
+            <a:off x="777240" y="5184648"/>
+            <a:ext cx="566928" cy="566928"/>
+          </a:xfrm>
+          <a:prstGeom prst="ellipse">
+            <a:avLst/>
+          </a:prstGeom>
+          <a:solidFill>
+            <a:srgbClr val="2E7D5B"/>
+          </a:solidFill>
+          <a:ln/>
+        </p:spPr>
+      </p:sp>
+      <p:pic>
+        <p:nvPicPr>
+          <p:cNvPr id="27" name="Image 0" descr="preencoded.png">    </p:cNvPr>
+          <p:cNvPicPr>
+            <a:picLocks noChangeAspect="1"/>
+          </p:cNvPicPr>
+          <p:nvPr/>
+        </p:nvPicPr>
+        <p:blipFill>
+          <a:blip r:embed="rId1"/>
+          <a:stretch>
+            <a:fillRect/>
+          </a:stretch>
+        </p:blipFill>
+        <p:spPr>
+          <a:xfrm>
+            <a:off x="924641" y="5332049"/>
+            <a:ext cx="272125" cy="272125"/>
+          </a:xfrm>
+          <a:prstGeom prst="rect">
+            <a:avLst/>
+          </a:prstGeom>
+        </p:spPr>
+      </p:pic>
+      <p:sp>
+        <p:nvSpPr>
+          <p:cNvPr id="28" name="Text 25"/>
+          <p:cNvSpPr/>
+          <p:nvPr/>
+        </p:nvSpPr>
+        <p:spPr>
+          <a:xfrm>
+            <a:off x="1508760" y="5120640"/>
+            <a:ext cx="9905695" cy="822960"/>
+          </a:xfrm>
+          <a:prstGeom prst="rect">
+            <a:avLst/>
+          </a:prstGeom>
+          <a:noFill/>
+          <a:ln/>
+        </p:spPr>
+        <p:txBody>
+          <a:bodyPr wrap="square" lIns="0" tIns="0" rIns="0" bIns="0" rtlCol="0" anchor="ctr"/>
+          <a:lstStyle/>
+          <a:p>
+            <a:pPr indent="0" marL="0">
+              <a:buNone/>
+            </a:pPr>
+            <a:r>
+              <a:rPr lang="en-US" sz="1300" b="1" dirty="0">
+                <a:solidFill>
+                  <a:srgbClr val="2E7D5B"/>
+                </a:solidFill>
+                <a:latin typeface="Calibri" pitchFamily="34" charset="0"/>
+                <a:ea typeface="Calibri" pitchFamily="34" charset="-122"/>
+                <a:cs typeface="Calibri" pitchFamily="34" charset="-120"/>
+              </a:rPr>
+              <a:t>First pick a medium feature, not the hardest one. </a:t>
+            </a:r>
+            <a:pPr indent="0" marL="0">
+              <a:buNone/>
+            </a:pPr>
+            <a:r>
+              <a:rPr lang="en-US" sz="1300" dirty="0">
+                <a:solidFill>
+                  <a:srgbClr val="1B2440"/>
+                </a:solidFill>
+                <a:latin typeface="Calibri" pitchFamily="34" charset="0"/>
+                <a:ea typeface="Calibri" pitchFamily="34" charset="-122"/>
+                <a:cs typeface="Calibri" pitchFamily="34" charset="-120"/>
+              </a:rPr>
+              <a:t>Its job is to help us learn the loop — how long a spec takes, how the mocks feel, how integration actually goes — before we scale it up.</a:t>
+            </a:r>
+            <a:endParaRPr lang="en-US" sz="1300" dirty="0"/>
+          </a:p>
+        </p:txBody>
+      </p:sp>
+    </p:spTree>
+  </p:cSld>
+  <p:clrMapOvr>
+    <a:masterClrMapping/>
+  </p:clrMapOvr>
+</p:sld>
+</file>
+
+<file path=ppt/slides/slide13.xml><?xml version="1.0" encoding="utf-8"?>
+<p:sld xmlns:a="http://schemas.openxmlformats.org/drawingml/2006/main" xmlns:r="http://schemas.openxmlformats.org/officeDocument/2006/relationships" xmlns:p="http://schemas.openxmlformats.org/presentationml/2006/main">
+  <p:cSld name="Slide 13">
+    <p:bg>
+      <p:bgPr>
+        <a:solidFill>
+          <a:srgbClr val="FFFFFF"/>
+        </a:solidFill>
+      </p:bgPr>
+    </p:bg>
+    <p:spTree>
+      <p:nvGrpSpPr>
+        <p:cNvPr id="1" name=""/>
+        <p:cNvGrpSpPr/>
+        <p:nvPr/>
+      </p:nvGrpSpPr>
+      <p:grpSpPr>
+        <a:xfrm>
+          <a:off x="0" y="0"/>
+          <a:ext cx="0" cy="0"/>
+          <a:chOff x="0" y="0"/>
+          <a:chExt cx="0" cy="0"/>
+        </a:xfrm>
+      </p:grpSpPr>
+      <p:sp>
+        <p:nvSpPr>
+          <p:cNvPr id="2" name="Text 0"/>
+          <p:cNvSpPr/>
+          <p:nvPr/>
+        </p:nvSpPr>
+        <p:spPr>
+          <a:xfrm>
+            <a:off x="548640" y="6473952"/>
+            <a:ext cx="5029200" cy="274320"/>
+          </a:xfrm>
+          <a:prstGeom prst="rect">
+            <a:avLst/>
+          </a:prstGeom>
+          <a:noFill/>
+          <a:ln/>
+        </p:spPr>
+        <p:txBody>
+          <a:bodyPr wrap="square" lIns="0" tIns="0" rIns="0" bIns="0" rtlCol="0" anchor="ctr"/>
+          <a:lstStyle/>
+          <a:p>
+            <a:pPr algn="l" indent="0" marL="0">
+              <a:buNone/>
+            </a:pPr>
+            <a:r>
+              <a:rPr lang="en-US" sz="900" dirty="0">
+                <a:solidFill>
+                  <a:srgbClr val="5A6B8C"/>
+                </a:solidFill>
+                <a:latin typeface="Calibri" pitchFamily="34" charset="0"/>
+                <a:ea typeface="Calibri" pitchFamily="34" charset="-122"/>
+                <a:cs typeface="Calibri" pitchFamily="34" charset="-120"/>
+              </a:rPr>
+              <a:t>Internet-First, Airgap-Final — Team Edition</a:t>
+            </a:r>
+            <a:endParaRPr lang="en-US" sz="900" dirty="0"/>
+          </a:p>
+        </p:txBody>
+      </p:sp>
+      <p:sp>
+        <p:nvSpPr>
+          <p:cNvPr id="3" name="Text 1"/>
+          <p:cNvSpPr/>
+          <p:nvPr/>
+        </p:nvSpPr>
+        <p:spPr>
+          <a:xfrm>
+            <a:off x="11094415" y="6473952"/>
+            <a:ext cx="548640" cy="274320"/>
+          </a:xfrm>
+          <a:prstGeom prst="rect">
+            <a:avLst/>
+          </a:prstGeom>
+          <a:noFill/>
+          <a:ln/>
+        </p:spPr>
+        <p:txBody>
+          <a:bodyPr wrap="square" lIns="0" tIns="0" rIns="0" bIns="0" rtlCol="0" anchor="ctr"/>
+          <a:lstStyle/>
+          <a:p>
+            <a:pPr algn="r" indent="0" marL="0">
+              <a:buNone/>
+            </a:pPr>
+            <a:r>
+              <a:rPr lang="en-US" sz="900" dirty="0">
+                <a:solidFill>
+                  <a:srgbClr val="5A6B8C"/>
+                </a:solidFill>
+                <a:latin typeface="Calibri" pitchFamily="34" charset="0"/>
+                <a:ea typeface="Calibri" pitchFamily="34" charset="-122"/>
+                <a:cs typeface="Calibri" pitchFamily="34" charset="-120"/>
+              </a:rPr>
+              <a:t>13</a:t>
+            </a:r>
+            <a:endParaRPr lang="en-US" sz="900" dirty="0"/>
+          </a:p>
+        </p:txBody>
+      </p:sp>
+      <p:sp>
+        <p:nvSpPr>
+          <p:cNvPr id="4" name="Text 2"/>
+          <p:cNvSpPr/>
+          <p:nvPr/>
+        </p:nvSpPr>
+        <p:spPr>
+          <a:xfrm>
+            <a:off x="548640" y="384048"/>
+            <a:ext cx="11094415" cy="274320"/>
+          </a:xfrm>
+          <a:prstGeom prst="rect">
+            <a:avLst/>
+          </a:prstGeom>
+          <a:noFill/>
+          <a:ln/>
+        </p:spPr>
+        <p:txBody>
+          <a:bodyPr wrap="square" lIns="0" tIns="0" rIns="0" bIns="0" rtlCol="0" anchor="ctr"/>
+          <a:lstStyle/>
+          <a:p>
+            <a:pPr indent="0" marL="0">
+              <a:buNone/>
+            </a:pPr>
+            <a:r>
+              <a:rPr lang="en-US" sz="1200" b="1" spc="300" kern="0" dirty="0">
+                <a:solidFill>
+                  <a:srgbClr val="5A6B8C"/>
+                </a:solidFill>
+                <a:latin typeface="Calibri" pitchFamily="34" charset="0"/>
+                <a:ea typeface="Calibri" pitchFamily="34" charset="-122"/>
+                <a:cs typeface="Calibri" pitchFamily="34" charset="-120"/>
+              </a:rPr>
+              <a:t>GETTING THERE</a:t>
+            </a:r>
+            <a:endParaRPr lang="en-US" sz="1200" dirty="0"/>
+          </a:p>
+        </p:txBody>
+      </p:sp>
+      <p:sp>
+        <p:nvSpPr>
+          <p:cNvPr id="5" name="Text 3"/>
+          <p:cNvSpPr/>
+          <p:nvPr/>
+        </p:nvSpPr>
+        <p:spPr>
+          <a:xfrm>
+            <a:off x="548640" y="658368"/>
+            <a:ext cx="11094415" cy="621792"/>
+          </a:xfrm>
+          <a:prstGeom prst="rect">
+            <a:avLst/>
+          </a:prstGeom>
+          <a:noFill/>
+          <a:ln/>
+        </p:spPr>
+        <p:txBody>
+          <a:bodyPr wrap="square" lIns="0" tIns="0" rIns="0" bIns="0" rtlCol="0" anchor="t"/>
+          <a:lstStyle/>
+          <a:p>
+            <a:pPr indent="0" marL="0">
+              <a:buNone/>
+            </a:pPr>
+            <a:r>
+              <a:rPr lang="en-US" sz="2800" b="1" dirty="0">
+                <a:solidFill>
+                  <a:srgbClr val="1E2761"/>
+                </a:solidFill>
+                <a:latin typeface="Cambria" pitchFamily="34" charset="0"/>
+                <a:ea typeface="Cambria" pitchFamily="34" charset="-122"/>
+                <a:cs typeface="Cambria" pitchFamily="34" charset="-120"/>
+              </a:rPr>
+              <a:t>A few honest stages, not a rigid deadline</a:t>
+            </a:r>
+            <a:endParaRPr lang="en-US" sz="2800" dirty="0"/>
+          </a:p>
+        </p:txBody>
+      </p:sp>
+      <p:sp>
+        <p:nvSpPr>
+          <p:cNvPr id="6" name="Shape 4"/>
+          <p:cNvSpPr/>
+          <p:nvPr/>
+        </p:nvSpPr>
+        <p:spPr>
+          <a:xfrm>
+            <a:off x="548640" y="1737360"/>
+            <a:ext cx="3515258" cy="3566160"/>
+          </a:xfrm>
+          <a:prstGeom prst="roundRect">
+            <a:avLst>
+              <a:gd name="adj" fmla="val 2341"/>
+            </a:avLst>
+          </a:prstGeom>
+          <a:solidFill>
+            <a:srgbClr val="EDF3FC"/>
+          </a:solidFill>
+          <a:ln/>
+          <a:effectLst>
+            <a:outerShdw sx="100000" sy="100000" kx="0" ky="0" algn="bl" rotWithShape="0" blurRad="76200" dist="12700" dir="5400000">
+              <a:srgbClr val="9AA7C4">
+                <a:alpha val="22000"/>
+              </a:srgbClr>
+            </a:outerShdw>
+          </a:effectLst>
+        </p:spPr>
+      </p:sp>
+      <p:sp>
+        <p:nvSpPr>
+          <p:cNvPr id="7" name="Text 5"/>
+          <p:cNvSpPr/>
+          <p:nvPr/>
+        </p:nvSpPr>
+        <p:spPr>
+          <a:xfrm>
+            <a:off x="777240" y="1920240"/>
+            <a:ext cx="3058058" cy="274320"/>
+          </a:xfrm>
+          <a:prstGeom prst="rect">
+            <a:avLst/>
+          </a:prstGeom>
+          <a:noFill/>
+          <a:ln/>
+        </p:spPr>
+        <p:txBody>
+          <a:bodyPr wrap="square" lIns="0" tIns="0" rIns="0" bIns="0" rtlCol="0" anchor="ctr"/>
+          <a:lstStyle/>
+          <a:p>
+            <a:pPr indent="0" marL="0">
+              <a:buNone/>
+            </a:pPr>
+            <a:r>
+              <a:rPr lang="en-US" sz="1100" b="1" spc="200" kern="0" dirty="0">
+                <a:solidFill>
+                  <a:srgbClr val="5A6B8C"/>
+                </a:solidFill>
+                <a:latin typeface="Calibri" pitchFamily="34" charset="0"/>
+                <a:ea typeface="Calibri" pitchFamily="34" charset="-122"/>
+                <a:cs typeface="Calibri" pitchFamily="34" charset="-120"/>
+              </a:rPr>
+              <a:t>STAGE 1</a:t>
+            </a:r>
+            <a:endParaRPr lang="en-US" sz="1100" dirty="0"/>
+          </a:p>
+        </p:txBody>
+      </p:sp>
+      <p:sp>
+        <p:nvSpPr>
+          <p:cNvPr id="8" name="Text 6"/>
+          <p:cNvSpPr/>
+          <p:nvPr/>
+        </p:nvSpPr>
+        <p:spPr>
+          <a:xfrm>
+            <a:off x="777240" y="2212848"/>
+            <a:ext cx="3058058" cy="457200"/>
+          </a:xfrm>
+          <a:prstGeom prst="rect">
+            <a:avLst/>
+          </a:prstGeom>
+          <a:noFill/>
+          <a:ln/>
+        </p:spPr>
+        <p:txBody>
+          <a:bodyPr wrap="square" lIns="0" tIns="0" rIns="0" bIns="0" rtlCol="0" anchor="ctr"/>
+          <a:lstStyle/>
+          <a:p>
+            <a:pPr indent="0" marL="0">
+              <a:buNone/>
+            </a:pPr>
+            <a:r>
+              <a:rPr lang="en-US" sz="1700" b="1" dirty="0">
+                <a:solidFill>
+                  <a:srgbClr val="1E2761"/>
+                </a:solidFill>
+                <a:latin typeface="Calibri" pitchFamily="34" charset="0"/>
+                <a:ea typeface="Calibri" pitchFamily="34" charset="-122"/>
+                <a:cs typeface="Calibri" pitchFamily="34" charset="-120"/>
+              </a:rPr>
+              <a:t>Try it</a:t>
+            </a:r>
+            <a:endParaRPr lang="en-US" sz="1700" dirty="0"/>
+          </a:p>
+        </p:txBody>
+      </p:sp>
+      <p:sp>
+        <p:nvSpPr>
+          <p:cNvPr id="9" name="Text 7"/>
+          <p:cNvSpPr/>
+          <p:nvPr/>
+        </p:nvSpPr>
+        <p:spPr>
+          <a:xfrm>
+            <a:off x="777240" y="2788920"/>
+            <a:ext cx="3058058" cy="2331720"/>
+          </a:xfrm>
+          <a:prstGeom prst="rect">
+            <a:avLst/>
+          </a:prstGeom>
+          <a:noFill/>
+          <a:ln/>
+        </p:spPr>
+        <p:txBody>
+          <a:bodyPr wrap="square" lIns="0" tIns="0" rIns="0" bIns="0" rtlCol="0" anchor="ctr"/>
+          <a:lstStyle/>
+          <a:p>
+            <a:pPr marL="342900" indent="-342900">
+              <a:spcAft>
+                <a:spcPts val="800"/>
+              </a:spcAft>
+              <a:buSzPct val="100000"/>
+              <a:buChar char="•"/>
+            </a:pPr>
+            <a:r>
+              <a:rPr lang="en-US" sz="1150" dirty="0">
+                <a:solidFill>
+                  <a:srgbClr val="1B2440"/>
+                </a:solidFill>
+                <a:latin typeface="Calibri" pitchFamily="34" charset="0"/>
+                <a:ea typeface="Calibri" pitchFamily="34" charset="-122"/>
+                <a:cs typeface="Calibri" pitchFamily="34" charset="-120"/>
+              </a:rPr>
+              <a:t>Pick one real feature</a:t>
+            </a:r>
+            <a:endParaRPr lang="en-US" sz="1150" dirty="0"/>
+          </a:p>
+          <a:p>
+            <a:pPr marL="342900" indent="-342900">
+              <a:spcAft>
+                <a:spcPts val="800"/>
+              </a:spcAft>
+              <a:buSzPct val="100000"/>
+              <a:buChar char="•"/>
+            </a:pPr>
+            <a:r>
+              <a:rPr lang="en-US" sz="1150" dirty="0">
+                <a:solidFill>
+                  <a:srgbClr val="1B2440"/>
+                </a:solidFill>
+                <a:latin typeface="Calibri" pitchFamily="34" charset="0"/>
+                <a:ea typeface="Calibri" pitchFamily="34" charset="-122"/>
+                <a:cs typeface="Calibri" pitchFamily="34" charset="-120"/>
+              </a:rPr>
+              <a:t>Set up matching pipelines &amp; configs outside</a:t>
+            </a:r>
+            <a:endParaRPr lang="en-US" sz="1150" dirty="0"/>
+          </a:p>
+          <a:p>
+            <a:pPr marL="342900" indent="-342900">
+              <a:spcAft>
+                <a:spcPts val="800"/>
+              </a:spcAft>
+              <a:buSzPct val="100000"/>
+              <a:buChar char="•"/>
+            </a:pPr>
+            <a:r>
+              <a:rPr lang="en-US" sz="1150" dirty="0">
+                <a:solidFill>
+                  <a:srgbClr val="1B2440"/>
+                </a:solidFill>
+                <a:latin typeface="Calibri" pitchFamily="34" charset="0"/>
+                <a:ea typeface="Calibri" pitchFamily="34" charset="-122"/>
+                <a:cs typeface="Calibri" pitchFamily="34" charset="-120"/>
+              </a:rPr>
+              <a:t>Run the full loop once, start to finish</a:t>
+            </a:r>
+            <a:endParaRPr lang="en-US" sz="1150" dirty="0"/>
+          </a:p>
+          <a:p>
+            <a:pPr marL="342900" indent="-342900">
+              <a:spcAft>
+                <a:spcPts val="800"/>
+              </a:spcAft>
+              <a:buSzPct val="100000"/>
+              <a:buChar char="•"/>
+            </a:pPr>
+            <a:r>
+              <a:rPr lang="en-US" sz="1150" dirty="0">
+                <a:solidFill>
+                  <a:srgbClr val="1B2440"/>
+                </a:solidFill>
+                <a:latin typeface="Calibri" pitchFamily="34" charset="0"/>
+                <a:ea typeface="Calibri" pitchFamily="34" charset="-122"/>
+                <a:cs typeface="Calibri" pitchFamily="34" charset="-120"/>
+              </a:rPr>
+              <a:t>Talk honestly about what was clunky</a:t>
+            </a:r>
+            <a:endParaRPr lang="en-US" sz="1150" dirty="0"/>
+          </a:p>
+        </p:txBody>
+      </p:sp>
+      <p:sp>
+        <p:nvSpPr>
+          <p:cNvPr id="10" name="Shape 8"/>
+          <p:cNvSpPr/>
+          <p:nvPr/>
+        </p:nvSpPr>
+        <p:spPr>
+          <a:xfrm>
+            <a:off x="4338218" y="1737360"/>
+            <a:ext cx="3515258" cy="3566160"/>
+          </a:xfrm>
+          <a:prstGeom prst="roundRect">
+            <a:avLst>
+              <a:gd name="adj" fmla="val 2341"/>
+            </a:avLst>
+          </a:prstGeom>
+          <a:solidFill>
+            <a:srgbClr val="EDF3FC"/>
+          </a:solidFill>
+          <a:ln/>
+          <a:effectLst>
+            <a:outerShdw sx="100000" sy="100000" kx="0" ky="0" algn="bl" rotWithShape="0" blurRad="76200" dist="12700" dir="5400000">
+              <a:srgbClr val="9AA7C4">
+                <a:alpha val="22000"/>
+              </a:srgbClr>
+            </a:outerShdw>
+          </a:effectLst>
+        </p:spPr>
+      </p:sp>
+      <p:sp>
+        <p:nvSpPr>
+          <p:cNvPr id="11" name="Text 9"/>
+          <p:cNvSpPr/>
+          <p:nvPr/>
+        </p:nvSpPr>
+        <p:spPr>
+          <a:xfrm>
+            <a:off x="4566818" y="1920240"/>
+            <a:ext cx="3058058" cy="274320"/>
+          </a:xfrm>
+          <a:prstGeom prst="rect">
+            <a:avLst/>
+          </a:prstGeom>
+          <a:noFill/>
+          <a:ln/>
+        </p:spPr>
+        <p:txBody>
+          <a:bodyPr wrap="square" lIns="0" tIns="0" rIns="0" bIns="0" rtlCol="0" anchor="ctr"/>
+          <a:lstStyle/>
+          <a:p>
+            <a:pPr indent="0" marL="0">
+              <a:buNone/>
+            </a:pPr>
+            <a:r>
+              <a:rPr lang="en-US" sz="1100" b="1" spc="200" kern="0" dirty="0">
+                <a:solidFill>
+                  <a:srgbClr val="5A6B8C"/>
+                </a:solidFill>
+                <a:latin typeface="Calibri" pitchFamily="34" charset="0"/>
+                <a:ea typeface="Calibri" pitchFamily="34" charset="-122"/>
+                <a:cs typeface="Calibri" pitchFamily="34" charset="-120"/>
+              </a:rPr>
+              <a:t>STAGE 2</a:t>
+            </a:r>
+            <a:endParaRPr lang="en-US" sz="1100" dirty="0"/>
+          </a:p>
+        </p:txBody>
+      </p:sp>
+      <p:sp>
+        <p:nvSpPr>
+          <p:cNvPr id="12" name="Text 10"/>
+          <p:cNvSpPr/>
+          <p:nvPr/>
+        </p:nvSpPr>
+        <p:spPr>
+          <a:xfrm>
+            <a:off x="4566818" y="2212848"/>
+            <a:ext cx="3058058" cy="457200"/>
+          </a:xfrm>
+          <a:prstGeom prst="rect">
+            <a:avLst/>
+          </a:prstGeom>
+          <a:noFill/>
+          <a:ln/>
+        </p:spPr>
+        <p:txBody>
+          <a:bodyPr wrap="square" lIns="0" tIns="0" rIns="0" bIns="0" rtlCol="0" anchor="ctr"/>
+          <a:lstStyle/>
+          <a:p>
+            <a:pPr indent="0" marL="0">
+              <a:buNone/>
+            </a:pPr>
+            <a:r>
+              <a:rPr lang="en-US" sz="1700" b="1" dirty="0">
+                <a:solidFill>
+                  <a:srgbClr val="1E2761"/>
+                </a:solidFill>
+                <a:latin typeface="Calibri" pitchFamily="34" charset="0"/>
+                <a:ea typeface="Calibri" pitchFamily="34" charset="-122"/>
+                <a:cs typeface="Calibri" pitchFamily="34" charset="-120"/>
+              </a:rPr>
+              <a:t>Get comfortable</a:t>
+            </a:r>
+            <a:endParaRPr lang="en-US" sz="1700" dirty="0"/>
+          </a:p>
+        </p:txBody>
+      </p:sp>
+      <p:sp>
+        <p:nvSpPr>
+          <p:cNvPr id="13" name="Text 11"/>
+          <p:cNvSpPr/>
+          <p:nvPr/>
+        </p:nvSpPr>
+        <p:spPr>
+          <a:xfrm>
+            <a:off x="4566818" y="2788920"/>
+            <a:ext cx="3058058" cy="2331720"/>
+          </a:xfrm>
+          <a:prstGeom prst="rect">
+            <a:avLst/>
+          </a:prstGeom>
+          <a:noFill/>
+          <a:ln/>
+        </p:spPr>
+        <p:txBody>
+          <a:bodyPr wrap="square" lIns="0" tIns="0" rIns="0" bIns="0" rtlCol="0" anchor="ctr"/>
+          <a:lstStyle/>
+          <a:p>
+            <a:pPr marL="342900" indent="-342900">
+              <a:spcAft>
+                <a:spcPts val="800"/>
+              </a:spcAft>
+              <a:buSzPct val="100000"/>
+              <a:buChar char="•"/>
+            </a:pPr>
+            <a:r>
+              <a:rPr lang="en-US" sz="1150" dirty="0">
+                <a:solidFill>
+                  <a:srgbClr val="1B2440"/>
+                </a:solidFill>
+                <a:latin typeface="Calibri" pitchFamily="34" charset="0"/>
+                <a:ea typeface="Calibri" pitchFamily="34" charset="-122"/>
+                <a:cs typeface="Calibri" pitchFamily="34" charset="-120"/>
+              </a:rPr>
+              <a:t>A few more features through the loop</a:t>
+            </a:r>
+            <a:endParaRPr lang="en-US" sz="1150" dirty="0"/>
+          </a:p>
+          <a:p>
+            <a:pPr marL="342900" indent="-342900">
+              <a:spcAft>
+                <a:spcPts val="800"/>
+              </a:spcAft>
+              <a:buSzPct val="100000"/>
+              <a:buChar char="•"/>
+            </a:pPr>
+            <a:r>
+              <a:rPr lang="en-US" sz="1150" dirty="0">
+                <a:solidFill>
+                  <a:srgbClr val="1B2440"/>
+                </a:solidFill>
+                <a:latin typeface="Calibri" pitchFamily="34" charset="0"/>
+                <a:ea typeface="Calibri" pitchFamily="34" charset="-122"/>
+                <a:cs typeface="Calibri" pitchFamily="34" charset="-120"/>
+              </a:rPr>
+              <a:t>Fix the friction we found in Stage 1</a:t>
+            </a:r>
+            <a:endParaRPr lang="en-US" sz="1150" dirty="0"/>
+          </a:p>
+          <a:p>
+            <a:pPr marL="342900" indent="-342900">
+              <a:spcAft>
+                <a:spcPts val="800"/>
+              </a:spcAft>
+              <a:buSzPct val="100000"/>
+              <a:buChar char="•"/>
+            </a:pPr>
+            <a:r>
+              <a:rPr lang="en-US" sz="1150" dirty="0">
+                <a:solidFill>
+                  <a:srgbClr val="1B2440"/>
+                </a:solidFill>
+                <a:latin typeface="Calibri" pitchFamily="34" charset="0"/>
+                <a:ea typeface="Calibri" pitchFamily="34" charset="-122"/>
+                <a:cs typeface="Calibri" pitchFamily="34" charset="-120"/>
+              </a:rPr>
+              <a:t>Contractors settle into integration &amp; testing roles</a:t>
+            </a:r>
+            <a:endParaRPr lang="en-US" sz="1150" dirty="0"/>
+          </a:p>
+          <a:p>
+            <a:pPr marL="342900" indent="-342900">
+              <a:spcAft>
+                <a:spcPts val="800"/>
+              </a:spcAft>
+              <a:buSzPct val="100000"/>
+              <a:buChar char="•"/>
+            </a:pPr>
+            <a:r>
+              <a:rPr lang="en-US" sz="1150" dirty="0">
+                <a:solidFill>
+                  <a:srgbClr val="1B2440"/>
+                </a:solidFill>
+                <a:latin typeface="Calibri" pitchFamily="34" charset="0"/>
+                <a:ea typeface="Calibri" pitchFamily="34" charset="-122"/>
+                <a:cs typeface="Calibri" pitchFamily="34" charset="-120"/>
+              </a:rPr>
+              <a:t>The routine starts feeling routine</a:t>
+            </a:r>
+            <a:endParaRPr lang="en-US" sz="1150" dirty="0"/>
+          </a:p>
+        </p:txBody>
+      </p:sp>
+      <p:sp>
+        <p:nvSpPr>
+          <p:cNvPr id="14" name="Shape 12"/>
+          <p:cNvSpPr/>
+          <p:nvPr/>
+        </p:nvSpPr>
+        <p:spPr>
+          <a:xfrm>
+            <a:off x="8127797" y="1737360"/>
+            <a:ext cx="3515258" cy="3566160"/>
+          </a:xfrm>
+          <a:prstGeom prst="roundRect">
+            <a:avLst>
+              <a:gd name="adj" fmla="val 2341"/>
+            </a:avLst>
+          </a:prstGeom>
+          <a:solidFill>
+            <a:srgbClr val="EDF3FC"/>
+          </a:solidFill>
+          <a:ln/>
+          <a:effectLst>
+            <a:outerShdw sx="100000" sy="100000" kx="0" ky="0" algn="bl" rotWithShape="0" blurRad="76200" dist="12700" dir="5400000">
+              <a:srgbClr val="9AA7C4">
+                <a:alpha val="22000"/>
+              </a:srgbClr>
+            </a:outerShdw>
+          </a:effectLst>
+        </p:spPr>
+      </p:sp>
+      <p:sp>
+        <p:nvSpPr>
+          <p:cNvPr id="15" name="Text 13"/>
+          <p:cNvSpPr/>
+          <p:nvPr/>
+        </p:nvSpPr>
+        <p:spPr>
+          <a:xfrm>
+            <a:off x="8356397" y="1920240"/>
+            <a:ext cx="3058058" cy="274320"/>
+          </a:xfrm>
+          <a:prstGeom prst="rect">
+            <a:avLst/>
+          </a:prstGeom>
+          <a:noFill/>
+          <a:ln/>
+        </p:spPr>
+        <p:txBody>
+          <a:bodyPr wrap="square" lIns="0" tIns="0" rIns="0" bIns="0" rtlCol="0" anchor="ctr"/>
+          <a:lstStyle/>
+          <a:p>
+            <a:pPr indent="0" marL="0">
+              <a:buNone/>
+            </a:pPr>
+            <a:r>
+              <a:rPr lang="en-US" sz="1100" b="1" spc="200" kern="0" dirty="0">
+                <a:solidFill>
+                  <a:srgbClr val="5A6B8C"/>
+                </a:solidFill>
+                <a:latin typeface="Calibri" pitchFamily="34" charset="0"/>
+                <a:ea typeface="Calibri" pitchFamily="34" charset="-122"/>
+                <a:cs typeface="Calibri" pitchFamily="34" charset="-120"/>
+              </a:rPr>
+              <a:t>STAGE 3</a:t>
+            </a:r>
+            <a:endParaRPr lang="en-US" sz="1100" dirty="0"/>
+          </a:p>
+        </p:txBody>
+      </p:sp>
+      <p:sp>
+        <p:nvSpPr>
+          <p:cNvPr id="16" name="Text 14"/>
+          <p:cNvSpPr/>
+          <p:nvPr/>
+        </p:nvSpPr>
+        <p:spPr>
+          <a:xfrm>
+            <a:off x="8356397" y="2212848"/>
+            <a:ext cx="3058058" cy="457200"/>
+          </a:xfrm>
+          <a:prstGeom prst="rect">
+            <a:avLst/>
+          </a:prstGeom>
+          <a:noFill/>
+          <a:ln/>
+        </p:spPr>
+        <p:txBody>
+          <a:bodyPr wrap="square" lIns="0" tIns="0" rIns="0" bIns="0" rtlCol="0" anchor="ctr"/>
+          <a:lstStyle/>
+          <a:p>
+            <a:pPr indent="0" marL="0">
+              <a:buNone/>
+            </a:pPr>
+            <a:r>
+              <a:rPr lang="en-US" sz="1700" b="1" dirty="0">
+                <a:solidFill>
+                  <a:srgbClr val="1E2761"/>
+                </a:solidFill>
+                <a:latin typeface="Calibri" pitchFamily="34" charset="0"/>
+                <a:ea typeface="Calibri" pitchFamily="34" charset="-122"/>
+                <a:cs typeface="Calibri" pitchFamily="34" charset="-120"/>
+              </a:rPr>
+              <a:t>Make it the norm</a:t>
+            </a:r>
+            <a:endParaRPr lang="en-US" sz="1700" dirty="0"/>
+          </a:p>
+        </p:txBody>
+      </p:sp>
+      <p:sp>
+        <p:nvSpPr>
+          <p:cNvPr id="17" name="Text 15"/>
+          <p:cNvSpPr/>
+          <p:nvPr/>
+        </p:nvSpPr>
+        <p:spPr>
+          <a:xfrm>
+            <a:off x="8356397" y="2788920"/>
+            <a:ext cx="3058058" cy="2331720"/>
+          </a:xfrm>
+          <a:prstGeom prst="rect">
+            <a:avLst/>
+          </a:prstGeom>
+          <a:noFill/>
+          <a:ln/>
+        </p:spPr>
+        <p:txBody>
+          <a:bodyPr wrap="square" lIns="0" tIns="0" rIns="0" bIns="0" rtlCol="0" anchor="ctr"/>
+          <a:lstStyle/>
+          <a:p>
+            <a:pPr marL="342900" indent="-342900">
+              <a:spcAft>
+                <a:spcPts val="800"/>
+              </a:spcAft>
+              <a:buSzPct val="100000"/>
+              <a:buChar char="•"/>
+            </a:pPr>
+            <a:r>
+              <a:rPr lang="en-US" sz="1150" dirty="0">
+                <a:solidFill>
+                  <a:srgbClr val="1B2440"/>
+                </a:solidFill>
+                <a:latin typeface="Calibri" pitchFamily="34" charset="0"/>
+                <a:ea typeface="Calibri" pitchFamily="34" charset="-122"/>
+                <a:cs typeface="Calibri" pitchFamily="34" charset="-120"/>
+              </a:rPr>
+              <a:t>Most new work starts outside by default</a:t>
+            </a:r>
+            <a:endParaRPr lang="en-US" sz="1150" dirty="0"/>
+          </a:p>
+          <a:p>
+            <a:pPr marL="342900" indent="-342900">
+              <a:spcAft>
+                <a:spcPts val="800"/>
+              </a:spcAft>
+              <a:buSzPct val="100000"/>
+              <a:buChar char="•"/>
+            </a:pPr>
+            <a:r>
+              <a:rPr lang="en-US" sz="1150" dirty="0">
+                <a:solidFill>
+                  <a:srgbClr val="1B2440"/>
+                </a:solidFill>
+                <a:latin typeface="Calibri" pitchFamily="34" charset="0"/>
+                <a:ea typeface="Calibri" pitchFamily="34" charset="-122"/>
+                <a:cs typeface="Calibri" pitchFamily="34" charset="-120"/>
+              </a:rPr>
+              <a:t>Angular inventory &amp; porting well underway</a:t>
+            </a:r>
+            <a:endParaRPr lang="en-US" sz="1150" dirty="0"/>
+          </a:p>
+          <a:p>
+            <a:pPr marL="342900" indent="-342900">
+              <a:spcAft>
+                <a:spcPts val="800"/>
+              </a:spcAft>
+              <a:buSzPct val="100000"/>
+              <a:buChar char="•"/>
+            </a:pPr>
+            <a:r>
+              <a:rPr lang="en-US" sz="1150" dirty="0">
+                <a:solidFill>
+                  <a:srgbClr val="1B2440"/>
+                </a:solidFill>
+                <a:latin typeface="Calibri" pitchFamily="34" charset="0"/>
+                <a:ea typeface="Calibri" pitchFamily="34" charset="-122"/>
+                <a:cs typeface="Calibri" pitchFamily="34" charset="-120"/>
+              </a:rPr>
+              <a:t>Sign-off is quick because the habits are solid</a:t>
+            </a:r>
+            <a:endParaRPr lang="en-US" sz="1150" dirty="0"/>
+          </a:p>
+          <a:p>
+            <a:pPr marL="342900" indent="-342900">
+              <a:spcAft>
+                <a:spcPts val="800"/>
+              </a:spcAft>
+              <a:buSzPct val="100000"/>
+              <a:buChar char="•"/>
+            </a:pPr>
+            <a:r>
+              <a:rPr lang="en-US" sz="1150" dirty="0">
+                <a:solidFill>
+                  <a:srgbClr val="1B2440"/>
+                </a:solidFill>
+                <a:latin typeface="Calibri" pitchFamily="34" charset="0"/>
+                <a:ea typeface="Calibri" pitchFamily="34" charset="-122"/>
+                <a:cs typeface="Calibri" pitchFamily="34" charset="-120"/>
+              </a:rPr>
+              <a:t>We're no longer thinking about this as "new"</a:t>
+            </a:r>
+            <a:endParaRPr lang="en-US" sz="1150" dirty="0"/>
+          </a:p>
+        </p:txBody>
+      </p:sp>
+      <p:sp>
+        <p:nvSpPr>
+          <p:cNvPr id="18" name="Text 16"/>
+          <p:cNvSpPr/>
+          <p:nvPr/>
+        </p:nvSpPr>
+        <p:spPr>
+          <a:xfrm>
+            <a:off x="548640" y="5486400"/>
+            <a:ext cx="11094415" cy="411480"/>
+          </a:xfrm>
+          <a:prstGeom prst="rect">
+            <a:avLst/>
+          </a:prstGeom>
+          <a:noFill/>
+          <a:ln/>
+        </p:spPr>
+        <p:txBody>
+          <a:bodyPr wrap="square" lIns="0" tIns="0" rIns="0" bIns="0" rtlCol="0" anchor="ctr"/>
+          <a:lstStyle/>
+          <a:p>
+            <a:pPr algn="ctr" indent="0" marL="0">
+              <a:buNone/>
+            </a:pPr>
+            <a:r>
+              <a:rPr lang="en-US" sz="1300" i="1" dirty="0">
+                <a:solidFill>
+                  <a:srgbClr val="5A6B8C"/>
+                </a:solidFill>
+                <a:latin typeface="Calibri" pitchFamily="34" charset="0"/>
+                <a:ea typeface="Calibri" pitchFamily="34" charset="-122"/>
+                <a:cs typeface="Calibri" pitchFamily="34" charset="-120"/>
+              </a:rPr>
+              <a:t>No fixed dates on purpose — each stage ends when the criteria above are actually true, not when a calendar says so.</a:t>
+            </a:r>
+            <a:endParaRPr lang="en-US" sz="1300" dirty="0"/>
+          </a:p>
+        </p:txBody>
+      </p:sp>
+    </p:spTree>
+  </p:cSld>
+  <p:clrMapOvr>
+    <a:masterClrMapping/>
+  </p:clrMapOvr>
+</p:sld>
+</file>
+
+<file path=ppt/slides/slide14.xml><?xml version="1.0" encoding="utf-8"?>
+<p:sld xmlns:a="http://schemas.openxmlformats.org/drawingml/2006/main" xmlns:r="http://schemas.openxmlformats.org/officeDocument/2006/relationships" xmlns:p="http://schemas.openxmlformats.org/presentationml/2006/main">
+  <p:cSld name="Slide 14">
+    <p:bg>
+      <p:bgPr>
+        <a:solidFill>
+          <a:srgbClr val="FFFFFF"/>
+        </a:solidFill>
+      </p:bgPr>
+    </p:bg>
+    <p:spTree>
+      <p:nvGrpSpPr>
+        <p:cNvPr id="1" name=""/>
+        <p:cNvGrpSpPr/>
+        <p:nvPr/>
+      </p:nvGrpSpPr>
+      <p:grpSpPr>
+        <a:xfrm>
+          <a:off x="0" y="0"/>
+          <a:ext cx="0" cy="0"/>
+          <a:chOff x="0" y="0"/>
+          <a:chExt cx="0" cy="0"/>
+        </a:xfrm>
+      </p:grpSpPr>
+      <p:sp>
+        <p:nvSpPr>
+          <p:cNvPr id="2" name="Text 0"/>
+          <p:cNvSpPr/>
+          <p:nvPr/>
+        </p:nvSpPr>
+        <p:spPr>
+          <a:xfrm>
+            <a:off x="548640" y="6473952"/>
+            <a:ext cx="5029200" cy="274320"/>
+          </a:xfrm>
+          <a:prstGeom prst="rect">
+            <a:avLst/>
+          </a:prstGeom>
+          <a:noFill/>
+          <a:ln/>
+        </p:spPr>
+        <p:txBody>
+          <a:bodyPr wrap="square" lIns="0" tIns="0" rIns="0" bIns="0" rtlCol="0" anchor="ctr"/>
+          <a:lstStyle/>
+          <a:p>
+            <a:pPr algn="l" indent="0" marL="0">
+              <a:buNone/>
+            </a:pPr>
+            <a:r>
+              <a:rPr lang="en-US" sz="900" dirty="0">
+                <a:solidFill>
+                  <a:srgbClr val="5A6B8C"/>
+                </a:solidFill>
+                <a:latin typeface="Calibri" pitchFamily="34" charset="0"/>
+                <a:ea typeface="Calibri" pitchFamily="34" charset="-122"/>
+                <a:cs typeface="Calibri" pitchFamily="34" charset="-120"/>
+              </a:rPr>
+              <a:t>Internet-First, Airgap-Final — Team Edition</a:t>
+            </a:r>
+            <a:endParaRPr lang="en-US" sz="900" dirty="0"/>
+          </a:p>
+        </p:txBody>
+      </p:sp>
+      <p:sp>
+        <p:nvSpPr>
+          <p:cNvPr id="3" name="Text 1"/>
+          <p:cNvSpPr/>
+          <p:nvPr/>
+        </p:nvSpPr>
+        <p:spPr>
+          <a:xfrm>
+            <a:off x="11094415" y="6473952"/>
+            <a:ext cx="548640" cy="274320"/>
+          </a:xfrm>
+          <a:prstGeom prst="rect">
+            <a:avLst/>
+          </a:prstGeom>
+          <a:noFill/>
+          <a:ln/>
+        </p:spPr>
+        <p:txBody>
+          <a:bodyPr wrap="square" lIns="0" tIns="0" rIns="0" bIns="0" rtlCol="0" anchor="ctr"/>
+          <a:lstStyle/>
+          <a:p>
+            <a:pPr algn="r" indent="0" marL="0">
+              <a:buNone/>
+            </a:pPr>
+            <a:r>
+              <a:rPr lang="en-US" sz="900" dirty="0">
+                <a:solidFill>
+                  <a:srgbClr val="5A6B8C"/>
+                </a:solidFill>
+                <a:latin typeface="Calibri" pitchFamily="34" charset="0"/>
+                <a:ea typeface="Calibri" pitchFamily="34" charset="-122"/>
+                <a:cs typeface="Calibri" pitchFamily="34" charset="-120"/>
+              </a:rPr>
+              <a:t>14</a:t>
+            </a:r>
+            <a:endParaRPr lang="en-US" sz="900" dirty="0"/>
+          </a:p>
+        </p:txBody>
+      </p:sp>
+      <p:sp>
+        <p:nvSpPr>
+          <p:cNvPr id="4" name="Text 2"/>
+          <p:cNvSpPr/>
+          <p:nvPr/>
+        </p:nvSpPr>
+        <p:spPr>
+          <a:xfrm>
+            <a:off x="548640" y="384048"/>
+            <a:ext cx="11094415" cy="274320"/>
+          </a:xfrm>
+          <a:prstGeom prst="rect">
+            <a:avLst/>
+          </a:prstGeom>
+          <a:noFill/>
+          <a:ln/>
+        </p:spPr>
+        <p:txBody>
+          <a:bodyPr wrap="square" lIns="0" tIns="0" rIns="0" bIns="0" rtlCol="0" anchor="ctr"/>
+          <a:lstStyle/>
+          <a:p>
+            <a:pPr indent="0" marL="0">
+              <a:buNone/>
+            </a:pPr>
+            <a:r>
+              <a:rPr lang="en-US" sz="1200" b="1" spc="300" kern="0" dirty="0">
+                <a:solidFill>
+                  <a:srgbClr val="5A6B8C"/>
+                </a:solidFill>
+                <a:latin typeface="Calibri" pitchFamily="34" charset="0"/>
+                <a:ea typeface="Calibri" pitchFamily="34" charset="-122"/>
+                <a:cs typeface="Calibri" pitchFamily="34" charset="-120"/>
+              </a:rPr>
+              <a:t>BEING STRAIGHT ABOUT THE PEOPLE SIDE</a:t>
+            </a:r>
+            <a:endParaRPr lang="en-US" sz="1200" dirty="0"/>
+          </a:p>
+        </p:txBody>
+      </p:sp>
+      <p:sp>
+        <p:nvSpPr>
+          <p:cNvPr id="5" name="Text 3"/>
+          <p:cNvSpPr/>
+          <p:nvPr/>
+        </p:nvSpPr>
+        <p:spPr>
+          <a:xfrm>
+            <a:off x="548640" y="658368"/>
+            <a:ext cx="11094415" cy="621792"/>
+          </a:xfrm>
+          <a:prstGeom prst="rect">
+            <a:avLst/>
+          </a:prstGeom>
+          <a:noFill/>
+          <a:ln/>
+        </p:spPr>
+        <p:txBody>
+          <a:bodyPr wrap="square" lIns="0" tIns="0" rIns="0" bIns="0" rtlCol="0" anchor="t"/>
+          <a:lstStyle/>
+          <a:p>
+            <a:pPr indent="0" marL="0">
+              <a:buNone/>
+            </a:pPr>
+            <a:r>
+              <a:rPr lang="en-US" sz="2800" b="1" dirty="0">
+                <a:solidFill>
+                  <a:srgbClr val="1E2761"/>
+                </a:solidFill>
+                <a:latin typeface="Cambria" pitchFamily="34" charset="0"/>
+                <a:ea typeface="Cambria" pitchFamily="34" charset="-122"/>
+                <a:cs typeface="Cambria" pitchFamily="34" charset="-120"/>
+              </a:rPr>
+              <a:t>This changes roles — let's talk about it early and honestly</a:t>
+            </a:r>
+            <a:endParaRPr lang="en-US" sz="2800" dirty="0"/>
+          </a:p>
+        </p:txBody>
+      </p:sp>
+      <p:sp>
+        <p:nvSpPr>
+          <p:cNvPr id="6" name="Shape 4"/>
+          <p:cNvSpPr/>
+          <p:nvPr/>
+        </p:nvSpPr>
+        <p:spPr>
+          <a:xfrm>
+            <a:off x="548640" y="1691640"/>
+            <a:ext cx="3520440" cy="3657600"/>
+          </a:xfrm>
+          <a:prstGeom prst="roundRect">
+            <a:avLst>
+              <a:gd name="adj" fmla="val 2338"/>
+            </a:avLst>
+          </a:prstGeom>
+          <a:solidFill>
+            <a:srgbClr val="EDF3FC"/>
+          </a:solidFill>
+          <a:ln/>
+          <a:effectLst>
+            <a:outerShdw sx="100000" sy="100000" kx="0" ky="0" algn="bl" rotWithShape="0" blurRad="76200" dist="12700" dir="5400000">
+              <a:srgbClr val="9AA7C4">
+                <a:alpha val="22000"/>
+              </a:srgbClr>
+            </a:outerShdw>
+          </a:effectLst>
+        </p:spPr>
+      </p:sp>
+      <p:sp>
+        <p:nvSpPr>
+          <p:cNvPr id="7" name="Shape 5"/>
+          <p:cNvSpPr/>
+          <p:nvPr/>
+        </p:nvSpPr>
+        <p:spPr>
+          <a:xfrm>
+            <a:off x="777240" y="1920240"/>
+            <a:ext cx="548640" cy="548640"/>
+          </a:xfrm>
+          <a:prstGeom prst="ellipse">
+            <a:avLst/>
+          </a:prstGeom>
+          <a:solidFill>
+            <a:srgbClr val="1E2761"/>
+          </a:solidFill>
+          <a:ln/>
+        </p:spPr>
+      </p:sp>
+      <p:pic>
+        <p:nvPicPr>
+          <p:cNvPr id="8" name="Image 0" descr="preencoded.png">    </p:cNvPr>
+          <p:cNvPicPr>
+            <a:picLocks noChangeAspect="1"/>
+          </p:cNvPicPr>
+          <p:nvPr/>
+        </p:nvPicPr>
+        <p:blipFill>
+          <a:blip r:embed="rId1"/>
+          <a:stretch>
+            <a:fillRect/>
+          </a:stretch>
+        </p:blipFill>
+        <p:spPr>
+          <a:xfrm>
+            <a:off x="919886" y="2062886"/>
+            <a:ext cx="263347" cy="263347"/>
+          </a:xfrm>
+          <a:prstGeom prst="rect">
+            <a:avLst/>
+          </a:prstGeom>
+        </p:spPr>
+      </p:pic>
+      <p:sp>
+        <p:nvSpPr>
+          <p:cNvPr id="9" name="Text 6"/>
+          <p:cNvSpPr/>
+          <p:nvPr/>
+        </p:nvSpPr>
+        <p:spPr>
+          <a:xfrm>
+            <a:off x="777240" y="2606040"/>
+            <a:ext cx="3063240" cy="457200"/>
+          </a:xfrm>
+          <a:prstGeom prst="rect">
+            <a:avLst/>
+          </a:prstGeom>
+          <a:noFill/>
+          <a:ln/>
+        </p:spPr>
+        <p:txBody>
+          <a:bodyPr wrap="square" lIns="0" tIns="0" rIns="0" bIns="0" rtlCol="0" anchor="ctr"/>
+          <a:lstStyle/>
+          <a:p>
+            <a:pPr indent="0" marL="0">
+              <a:buNone/>
+            </a:pPr>
+            <a:r>
+              <a:rPr lang="en-US" sz="1500" b="1" dirty="0">
+                <a:solidFill>
+                  <a:srgbClr val="1E2761"/>
+                </a:solidFill>
+                <a:latin typeface="Calibri" pitchFamily="34" charset="0"/>
+                <a:ea typeface="Calibri" pitchFamily="34" charset="-122"/>
+                <a:cs typeface="Calibri" pitchFamily="34" charset="-120"/>
+              </a:rPr>
+              <a:t>For developers</a:t>
+            </a:r>
+            <a:endParaRPr lang="en-US" sz="1500" dirty="0"/>
+          </a:p>
+        </p:txBody>
+      </p:sp>
+      <p:sp>
+        <p:nvSpPr>
+          <p:cNvPr id="10" name="Text 7"/>
+          <p:cNvSpPr/>
+          <p:nvPr/>
+        </p:nvSpPr>
+        <p:spPr>
+          <a:xfrm>
+            <a:off x="777240" y="3108960"/>
+            <a:ext cx="3063240" cy="2103120"/>
+          </a:xfrm>
+          <a:prstGeom prst="rect">
+            <a:avLst/>
+          </a:prstGeom>
+          <a:noFill/>
+          <a:ln/>
+        </p:spPr>
+        <p:txBody>
+          <a:bodyPr wrap="square" lIns="0" tIns="0" rIns="0" bIns="0" rtlCol="0" anchor="ctr"/>
+          <a:lstStyle/>
+          <a:p>
+            <a:pPr indent="0" marL="0">
+              <a:buNone/>
+            </a:pPr>
+            <a:r>
+              <a:rPr lang="en-US" sz="1200" dirty="0">
+                <a:solidFill>
+                  <a:srgbClr val="1B2440"/>
+                </a:solidFill>
+                <a:latin typeface="Calibri" pitchFamily="34" charset="0"/>
+                <a:ea typeface="Calibri" pitchFamily="34" charset="-122"/>
+                <a:cs typeface="Calibri" pitchFamily="34" charset="-120"/>
+              </a:rPr>
+              <a:t>More time on the interesting problems, less on environment friction and waiting on access or pipelines. The tools handle more of the repetitive part so we can focus on what actually needs a person.</a:t>
+            </a:r>
+            <a:endParaRPr lang="en-US" sz="1200" dirty="0"/>
+          </a:p>
+        </p:txBody>
+      </p:sp>
+      <p:sp>
+        <p:nvSpPr>
+          <p:cNvPr id="11" name="Shape 8"/>
+          <p:cNvSpPr/>
+          <p:nvPr/>
+        </p:nvSpPr>
+        <p:spPr>
+          <a:xfrm>
+            <a:off x="4334256" y="1691640"/>
+            <a:ext cx="3520440" cy="3657600"/>
+          </a:xfrm>
+          <a:prstGeom prst="roundRect">
+            <a:avLst>
+              <a:gd name="adj" fmla="val 2338"/>
+            </a:avLst>
+          </a:prstGeom>
+          <a:solidFill>
+            <a:srgbClr val="EDF3FC"/>
+          </a:solidFill>
+          <a:ln/>
+          <a:effectLst>
+            <a:outerShdw sx="100000" sy="100000" kx="0" ky="0" algn="bl" rotWithShape="0" blurRad="76200" dist="12700" dir="5400000">
+              <a:srgbClr val="9AA7C4">
+                <a:alpha val="22000"/>
+              </a:srgbClr>
+            </a:outerShdw>
+          </a:effectLst>
+        </p:spPr>
+      </p:sp>
+      <p:sp>
+        <p:nvSpPr>
+          <p:cNvPr id="12" name="Shape 9"/>
+          <p:cNvSpPr/>
+          <p:nvPr/>
+        </p:nvSpPr>
+        <p:spPr>
+          <a:xfrm>
+            <a:off x="4562856" y="1920240"/>
+            <a:ext cx="548640" cy="548640"/>
+          </a:xfrm>
+          <a:prstGeom prst="ellipse">
+            <a:avLst/>
+          </a:prstGeom>
+          <a:solidFill>
+            <a:srgbClr val="1E2761"/>
+          </a:solidFill>
+          <a:ln/>
+        </p:spPr>
+      </p:sp>
+      <p:pic>
+        <p:nvPicPr>
+          <p:cNvPr id="13" name="Image 1" descr="preencoded.png">    </p:cNvPr>
+          <p:cNvPicPr>
+            <a:picLocks noChangeAspect="1"/>
+          </p:cNvPicPr>
+          <p:nvPr/>
+        </p:nvPicPr>
+        <p:blipFill>
+          <a:blip r:embed="rId2"/>
+          <a:stretch>
+            <a:fillRect/>
+          </a:stretch>
+        </p:blipFill>
+        <p:spPr>
+          <a:xfrm>
+            <a:off x="4705502" y="2062886"/>
+            <a:ext cx="263347" cy="263347"/>
+          </a:xfrm>
+          <a:prstGeom prst="rect">
+            <a:avLst/>
+          </a:prstGeom>
+        </p:spPr>
+      </p:pic>
+      <p:sp>
+        <p:nvSpPr>
+          <p:cNvPr id="14" name="Text 10"/>
+          <p:cNvSpPr/>
+          <p:nvPr/>
+        </p:nvSpPr>
+        <p:spPr>
+          <a:xfrm>
+            <a:off x="4562856" y="2606040"/>
+            <a:ext cx="3063240" cy="457200"/>
+          </a:xfrm>
+          <a:prstGeom prst="rect">
+            <a:avLst/>
+          </a:prstGeom>
+          <a:noFill/>
+          <a:ln/>
+        </p:spPr>
+        <p:txBody>
+          <a:bodyPr wrap="square" lIns="0" tIns="0" rIns="0" bIns="0" rtlCol="0" anchor="ctr"/>
+          <a:lstStyle/>
+          <a:p>
+            <a:pPr indent="0" marL="0">
+              <a:buNone/>
+            </a:pPr>
+            <a:r>
+              <a:rPr lang="en-US" sz="1500" b="1" dirty="0">
+                <a:solidFill>
+                  <a:srgbClr val="1E2761"/>
+                </a:solidFill>
+                <a:latin typeface="Calibri" pitchFamily="34" charset="0"/>
+                <a:ea typeface="Calibri" pitchFamily="34" charset="-122"/>
+                <a:cs typeface="Calibri" pitchFamily="34" charset="-120"/>
+              </a:rPr>
+              <a:t>For contractors</a:t>
+            </a:r>
+            <a:endParaRPr lang="en-US" sz="1500" dirty="0"/>
+          </a:p>
+        </p:txBody>
+      </p:sp>
+      <p:sp>
+        <p:nvSpPr>
+          <p:cNvPr id="15" name="Text 11"/>
+          <p:cNvSpPr/>
+          <p:nvPr/>
+        </p:nvSpPr>
+        <p:spPr>
+          <a:xfrm>
+            <a:off x="4562856" y="3108960"/>
+            <a:ext cx="3063240" cy="2103120"/>
+          </a:xfrm>
+          <a:prstGeom prst="rect">
+            <a:avLst/>
+          </a:prstGeom>
+          <a:noFill/>
+          <a:ln/>
+        </p:spPr>
+        <p:txBody>
+          <a:bodyPr wrap="square" lIns="0" tIns="0" rIns="0" bIns="0" rtlCol="0" anchor="ctr"/>
+          <a:lstStyle/>
+          <a:p>
+            <a:pPr indent="0" marL="0">
+              <a:buNone/>
+            </a:pPr>
+            <a:r>
+              <a:rPr lang="en-US" sz="1200" dirty="0">
+                <a:solidFill>
+                  <a:srgbClr val="1B2440"/>
+                </a:solidFill>
+                <a:latin typeface="Calibri" pitchFamily="34" charset="0"/>
+                <a:ea typeface="Calibri" pitchFamily="34" charset="-122"/>
+                <a:cs typeface="Calibri" pitchFamily="34" charset="-120"/>
+              </a:rPr>
+              <a:t>Some roles shift toward integration, environment testing, and configuration management — genuinely valuable, hands-on work, not busywork. Where useful, some may also move toward more BA-style spec work.</a:t>
+            </a:r>
+            <a:endParaRPr lang="en-US" sz="1200" dirty="0"/>
+          </a:p>
+        </p:txBody>
+      </p:sp>
+      <p:sp>
+        <p:nvSpPr>
+          <p:cNvPr id="16" name="Shape 12"/>
+          <p:cNvSpPr/>
+          <p:nvPr/>
+        </p:nvSpPr>
+        <p:spPr>
+          <a:xfrm>
+            <a:off x="8119872" y="1691640"/>
+            <a:ext cx="3520440" cy="3657600"/>
+          </a:xfrm>
+          <a:prstGeom prst="roundRect">
+            <a:avLst>
+              <a:gd name="adj" fmla="val 2338"/>
+            </a:avLst>
+          </a:prstGeom>
+          <a:solidFill>
+            <a:srgbClr val="EAF4EF"/>
+          </a:solidFill>
+          <a:ln/>
+          <a:effectLst>
+            <a:outerShdw sx="100000" sy="100000" kx="0" ky="0" algn="bl" rotWithShape="0" blurRad="76200" dist="12700" dir="5400000">
+              <a:srgbClr val="9AA7C4">
+                <a:alpha val="22000"/>
+              </a:srgbClr>
+            </a:outerShdw>
+          </a:effectLst>
+        </p:spPr>
+      </p:sp>
+      <p:sp>
+        <p:nvSpPr>
+          <p:cNvPr id="17" name="Shape 13"/>
+          <p:cNvSpPr/>
+          <p:nvPr/>
+        </p:nvSpPr>
+        <p:spPr>
+          <a:xfrm>
+            <a:off x="8348472" y="1920240"/>
+            <a:ext cx="548640" cy="548640"/>
+          </a:xfrm>
+          <a:prstGeom prst="ellipse">
+            <a:avLst/>
+          </a:prstGeom>
+          <a:solidFill>
+            <a:srgbClr val="2E7D5B"/>
+          </a:solidFill>
+          <a:ln/>
+        </p:spPr>
+      </p:sp>
+      <p:pic>
+        <p:nvPicPr>
+          <p:cNvPr id="18" name="Image 2" descr="preencoded.png">    </p:cNvPr>
+          <p:cNvPicPr>
+            <a:picLocks noChangeAspect="1"/>
+          </p:cNvPicPr>
+          <p:nvPr/>
+        </p:nvPicPr>
+        <p:blipFill>
+          <a:blip r:embed="rId3"/>
+          <a:stretch>
+            <a:fillRect/>
+          </a:stretch>
+        </p:blipFill>
+        <p:spPr>
+          <a:xfrm>
+            <a:off x="8491118" y="2062886"/>
+            <a:ext cx="263347" cy="263347"/>
+          </a:xfrm>
+          <a:prstGeom prst="rect">
+            <a:avLst/>
+          </a:prstGeom>
+        </p:spPr>
+      </p:pic>
+      <p:sp>
+        <p:nvSpPr>
+          <p:cNvPr id="19" name="Text 14"/>
+          <p:cNvSpPr/>
+          <p:nvPr/>
+        </p:nvSpPr>
+        <p:spPr>
+          <a:xfrm>
+            <a:off x="8348472" y="2606040"/>
+            <a:ext cx="3063240" cy="457200"/>
+          </a:xfrm>
+          <a:prstGeom prst="rect">
+            <a:avLst/>
+          </a:prstGeom>
+          <a:noFill/>
+          <a:ln/>
+        </p:spPr>
+        <p:txBody>
+          <a:bodyPr wrap="square" lIns="0" tIns="0" rIns="0" bIns="0" rtlCol="0" anchor="ctr"/>
+          <a:lstStyle/>
+          <a:p>
+            <a:pPr indent="0" marL="0">
+              <a:buNone/>
+            </a:pPr>
+            <a:r>
+              <a:rPr lang="en-US" sz="1500" b="1" dirty="0">
+                <a:solidFill>
+                  <a:srgbClr val="2E7D5B"/>
+                </a:solidFill>
+                <a:latin typeface="Calibri" pitchFamily="34" charset="0"/>
+                <a:ea typeface="Calibri" pitchFamily="34" charset="-122"/>
+                <a:cs typeface="Calibri" pitchFamily="34" charset="-120"/>
+              </a:rPr>
+              <a:t>For everyone</a:t>
+            </a:r>
+            <a:endParaRPr lang="en-US" sz="1500" dirty="0"/>
+          </a:p>
+        </p:txBody>
+      </p:sp>
+      <p:sp>
+        <p:nvSpPr>
+          <p:cNvPr id="20" name="Text 15"/>
+          <p:cNvSpPr/>
+          <p:nvPr/>
+        </p:nvSpPr>
+        <p:spPr>
+          <a:xfrm>
+            <a:off x="8348472" y="3108960"/>
+            <a:ext cx="3063240" cy="2103120"/>
+          </a:xfrm>
+          <a:prstGeom prst="rect">
+            <a:avLst/>
+          </a:prstGeom>
+          <a:noFill/>
+          <a:ln/>
+        </p:spPr>
+        <p:txBody>
+          <a:bodyPr wrap="square" lIns="0" tIns="0" rIns="0" bIns="0" rtlCol="0" anchor="ctr"/>
+          <a:lstStyle/>
+          <a:p>
+            <a:pPr indent="0" marL="0">
+              <a:buNone/>
+            </a:pPr>
+            <a:r>
+              <a:rPr lang="en-US" sz="1200" dirty="0">
+                <a:solidFill>
+                  <a:srgbClr val="1B2440"/>
+                </a:solidFill>
+                <a:latin typeface="Calibri" pitchFamily="34" charset="0"/>
+                <a:ea typeface="Calibri" pitchFamily="34" charset="-122"/>
+                <a:cs typeface="Calibri" pitchFamily="34" charset="-120"/>
+              </a:rPr>
+              <a:t>Nothing about headcount is decided or urgent right now. As things become clearer, we'll say so — plainly and early, not as a surprise later.</a:t>
+            </a:r>
+            <a:endParaRPr lang="en-US" sz="1200" dirty="0"/>
+          </a:p>
+        </p:txBody>
+      </p:sp>
+    </p:spTree>
+  </p:cSld>
+  <p:clrMapOvr>
+    <a:masterClrMapping/>
+  </p:clrMapOvr>
+</p:sld>
+</file>
+
+<file path=ppt/slides/slide15.xml><?xml version="1.0" encoding="utf-8"?>
+<p:sld xmlns:a="http://schemas.openxmlformats.org/drawingml/2006/main" xmlns:r="http://schemas.openxmlformats.org/officeDocument/2006/relationships" xmlns:p="http://schemas.openxmlformats.org/presentationml/2006/main">
+  <p:cSld name="Slide 15">
     <p:bg>
       <p:bgPr>
         <a:solidFill>
@@ -3732,7 +6278,7 @@
                 <a:ea typeface="Calibri" pitchFamily="34" charset="-122"/>
                 <a:cs typeface="Calibri" pitchFamily="34" charset="-120"/>
               </a:rPr>
-              <a:t>12</a:t>
+              <a:t>15</a:t>
             </a:r>
             <a:endParaRPr lang="en-US" sz="900" dirty="0"/>
           </a:p>
@@ -4596,7 +7142,7 @@
                 <a:ea typeface="Calibri" pitchFamily="34" charset="-122"/>
                 <a:cs typeface="Calibri" pitchFamily="34" charset="-120"/>
               </a:rPr>
-              <a:t>We rebuild the same plumbing every time</a:t>
+              <a:t>We want proof before it counts</a:t>
             </a:r>
             <a:endParaRPr lang="en-US" sz="1500" dirty="0"/>
           </a:p>
@@ -4635,7 +7181,7 @@
                 <a:ea typeface="Calibri" pitchFamily="34" charset="-122"/>
                 <a:cs typeface="Calibri" pitchFamily="34" charset="-120"/>
               </a:rPr>
-              <a:t>Auth, API wiring, form validation, test setup — we write it fresh on every MFE. A lot of that can just... not be rewritten.</a:t>
+              <a:t>Building and testing outside means the feature has already been exercised end-to-end by the time it reaches Confi. Integration becomes validation, not discovery.</a:t>
             </a:r>
             <a:endParaRPr lang="en-US" sz="1150" dirty="0"/>
           </a:p>
@@ -6081,7 +8627,7 @@
                 <a:ea typeface="Calibri" pitchFamily="34" charset="-122"/>
                 <a:cs typeface="Calibri" pitchFamily="34" charset="-120"/>
               </a:rPr>
-              <a:t>THE PART THAT MAKES THIS EASY LATER</a:t>
+              <a:t>WHO WE ARE, OUTSIDE</a:t>
             </a:r>
             <a:endParaRPr lang="en-US" sz="1200" dirty="0"/>
           </a:p>
@@ -6120,7 +8666,7 @@
                 <a:ea typeface="Cambria" pitchFamily="34" charset="-122"/>
                 <a:cs typeface="Cambria" pitchFamily="34" charset="-120"/>
               </a:rPr>
-              <a:t>Stay aligned with Confi, and integration stops being scary</a:t>
+              <a:t>Meet Looking at Trees Corporation</a:t>
             </a:r>
             <a:endParaRPr lang="en-US" sz="2800" dirty="0"/>
           </a:p>
@@ -6135,11 +8681,11 @@
         <p:spPr>
           <a:xfrm>
             <a:off x="548640" y="1691640"/>
-            <a:ext cx="11094415" cy="475488"/>
+            <a:ext cx="11094415" cy="2651760"/>
           </a:xfrm>
           <a:prstGeom prst="roundRect">
             <a:avLst>
-              <a:gd name="adj" fmla="val 17308"/>
+              <a:gd name="adj" fmla="val 3103"/>
             </a:avLst>
           </a:prstGeom>
           <a:solidFill>
@@ -6163,14 +8709,14 @@
         </p:nvSpPr>
         <p:spPr>
           <a:xfrm>
-            <a:off x="713232" y="1755648"/>
-            <a:ext cx="347472" cy="347472"/>
+            <a:off x="822960" y="1920240"/>
+            <a:ext cx="594360" cy="594360"/>
           </a:xfrm>
           <a:prstGeom prst="ellipse">
             <a:avLst/>
           </a:prstGeom>
           <a:solidFill>
-            <a:srgbClr val="2E7D5B"/>
+            <a:srgbClr val="1E2761"/>
           </a:solidFill>
           <a:ln/>
         </p:spPr>
@@ -6191,8 +8737,8 @@
         </p:blipFill>
         <p:spPr>
           <a:xfrm>
-            <a:off x="803575" y="1845991"/>
-            <a:ext cx="166787" cy="166787"/>
+            <a:off x="977494" y="2074774"/>
+            <a:ext cx="285293" cy="285293"/>
           </a:xfrm>
           <a:prstGeom prst="rect">
             <a:avLst/>
@@ -6207,8 +8753,8 @@
         </p:nvSpPr>
         <p:spPr>
           <a:xfrm>
-            <a:off x="1207008" y="1691640"/>
-            <a:ext cx="10271455" cy="475488"/>
+            <a:off x="1600200" y="1965960"/>
+            <a:ext cx="9814255" cy="2194560"/>
           </a:xfrm>
           <a:prstGeom prst="rect">
             <a:avLst/>
@@ -6221,10 +8767,13 @@
           <a:lstStyle/>
           <a:p>
             <a:pPr indent="0" marL="0">
-              <a:buNone/>
-            </a:pPr>
-            <a:r>
-              <a:rPr lang="en-US" sz="1250" dirty="0">
+              <a:spcAft>
+                <a:spcPts val="600"/>
+              </a:spcAft>
+              <a:buNone/>
+            </a:pPr>
+            <a:r>
+              <a:rPr lang="en-US" sz="1400" dirty="0">
                 <a:solidFill>
                   <a:srgbClr val="1B2440"/>
                 </a:solidFill>
@@ -6232,9 +8781,140 @@
                 <a:ea typeface="Calibri" pitchFamily="34" charset="-122"/>
                 <a:cs typeface="Calibri" pitchFamily="34" charset="-120"/>
               </a:rPr>
-              <a:t>Same lint / test / SAST rules — copy the actual config files over, don't reinvent them</a:t>
-            </a:r>
-            <a:endParaRPr lang="en-US" sz="1250" dirty="0"/>
+              <a:t>On the internet, we operate as </a:t>
+            </a:r>
+            <a:pPr indent="0" marL="0">
+              <a:spcAft>
+                <a:spcPts val="600"/>
+              </a:spcAft>
+              <a:buNone/>
+            </a:pPr>
+            <a:r>
+              <a:rPr lang="en-US" sz="1400" b="1" dirty="0">
+                <a:solidFill>
+                  <a:srgbClr val="1E2761"/>
+                </a:solidFill>
+                <a:latin typeface="Calibri" pitchFamily="34" charset="0"/>
+                <a:ea typeface="Calibri" pitchFamily="34" charset="-122"/>
+                <a:cs typeface="Calibri" pitchFamily="34" charset="-120"/>
+              </a:rPr>
+              <a:t>Looking at Trees Corporation</a:t>
+            </a:r>
+            <a:pPr indent="0" marL="0">
+              <a:spcAft>
+                <a:spcPts val="600"/>
+              </a:spcAft>
+              <a:buNone/>
+            </a:pPr>
+            <a:r>
+              <a:rPr lang="en-US" sz="1400" dirty="0">
+                <a:solidFill>
+                  <a:srgbClr val="1B2440"/>
+                </a:solidFill>
+                <a:latin typeface="Calibri" pitchFamily="34" charset="0"/>
+                <a:ea typeface="Calibri" pitchFamily="34" charset="-122"/>
+                <a:cs typeface="Calibri" pitchFamily="34" charset="-120"/>
+              </a:rPr>
+              <a:t> — a company focused on marketing and specialized trees. LTC is built around five core service lines (think </a:t>
+            </a:r>
+            <a:pPr indent="0" marL="0">
+              <a:spcAft>
+                <a:spcPts val="600"/>
+              </a:spcAft>
+              <a:buNone/>
+            </a:pPr>
+            <a:r>
+              <a:rPr lang="en-US" sz="1400" i="1" dirty="0">
+                <a:solidFill>
+                  <a:srgbClr val="1E2761"/>
+                </a:solidFill>
+                <a:latin typeface="Calibri" pitchFamily="34" charset="0"/>
+                <a:ea typeface="Calibri" pitchFamily="34" charset="-122"/>
+                <a:cs typeface="Calibri" pitchFamily="34" charset="-120"/>
+              </a:rPr>
+              <a:t>Brain Partnerships</a:t>
+            </a:r>
+            <a:pPr indent="0" marL="0">
+              <a:spcAft>
+                <a:spcPts val="600"/>
+              </a:spcAft>
+              <a:buNone/>
+            </a:pPr>
+            <a:r>
+              <a:rPr lang="en-US" sz="1400" dirty="0">
+                <a:solidFill>
+                  <a:srgbClr val="1B2440"/>
+                </a:solidFill>
+                <a:latin typeface="Calibri" pitchFamily="34" charset="0"/>
+                <a:ea typeface="Calibri" pitchFamily="34" charset="-122"/>
+                <a:cs typeface="Calibri" pitchFamily="34" charset="-120"/>
+              </a:rPr>
+              <a:t>, </a:t>
+            </a:r>
+            <a:pPr indent="0" marL="0">
+              <a:spcAft>
+                <a:spcPts val="600"/>
+              </a:spcAft>
+              <a:buNone/>
+            </a:pPr>
+            <a:r>
+              <a:rPr lang="en-US" sz="1400" i="1" dirty="0">
+                <a:solidFill>
+                  <a:srgbClr val="1E2761"/>
+                </a:solidFill>
+                <a:latin typeface="Calibri" pitchFamily="34" charset="0"/>
+                <a:ea typeface="Calibri" pitchFamily="34" charset="-122"/>
+                <a:cs typeface="Calibri" pitchFamily="34" charset="-120"/>
+              </a:rPr>
+              <a:t>Japanese Ops</a:t>
+            </a:r>
+            <a:pPr indent="0" marL="0">
+              <a:spcAft>
+                <a:spcPts val="600"/>
+              </a:spcAft>
+              <a:buNone/>
+            </a:pPr>
+            <a:r>
+              <a:rPr lang="en-US" sz="1400" dirty="0">
+                <a:solidFill>
+                  <a:srgbClr val="1B2440"/>
+                </a:solidFill>
+                <a:latin typeface="Calibri" pitchFamily="34" charset="0"/>
+                <a:ea typeface="Calibri" pitchFamily="34" charset="-122"/>
+                <a:cs typeface="Calibri" pitchFamily="34" charset="-120"/>
+              </a:rPr>
+              <a:t>, and a few others), each with its own departments and sub-teams — shaped, fittingly, like a tree.</a:t>
+            </a:r>
+            <a:endParaRPr lang="en-US" sz="1400" dirty="0"/>
+          </a:p>
+          <a:p>
+            <a:pPr indent="0" marL="0">
+              <a:spcAft>
+                <a:spcPts val="600"/>
+              </a:spcAft>
+              <a:buNone/>
+            </a:pPr>
+            <a:endParaRPr lang="en-US" sz="1400" dirty="0"/>
+          </a:p>
+          <a:p>
+            <a:pPr indent="0" marL="0">
+              <a:spcAft>
+                <a:spcPts val="600"/>
+              </a:spcAft>
+              <a:buNone/>
+            </a:pPr>
+            <a:r>
+              <a:rPr lang="en-US" sz="1400" dirty="0">
+                <a:solidFill>
+                  <a:srgbClr val="1B2440"/>
+                </a:solidFill>
+                <a:latin typeface="Calibri" pitchFamily="34" charset="0"/>
+                <a:ea typeface="Calibri" pitchFamily="34" charset="-122"/>
+                <a:cs typeface="Calibri" pitchFamily="34" charset="-120"/>
+              </a:rPr>
+              <a:t>Every screen, flow, and dataset we build outside speaks LTC's language. The real names and structure only get plugged back in once the code is inside.</a:t>
+            </a:r>
+            <a:endParaRPr lang="en-US" sz="1400" dirty="0"/>
           </a:p>
         </p:txBody>
       </p:sp>
@@ -6246,16 +8926,16 @@
         </p:nvSpPr>
         <p:spPr>
           <a:xfrm>
-            <a:off x="548640" y="2258568"/>
-            <a:ext cx="11094415" cy="475488"/>
+            <a:off x="548640" y="4526280"/>
+            <a:ext cx="11094415" cy="1097280"/>
           </a:xfrm>
           <a:prstGeom prst="roundRect">
             <a:avLst>
-              <a:gd name="adj" fmla="val 17308"/>
+              <a:gd name="adj" fmla="val 7500"/>
             </a:avLst>
           </a:prstGeom>
           <a:solidFill>
-            <a:srgbClr val="EDF3FC"/>
+            <a:srgbClr val="EAF4EF"/>
           </a:solidFill>
           <a:ln/>
           <a:effectLst>
@@ -6275,8 +8955,8 @@
         </p:nvSpPr>
         <p:spPr>
           <a:xfrm>
-            <a:off x="713232" y="2322576"/>
-            <a:ext cx="347472" cy="347472"/>
+            <a:off x="777240" y="4736592"/>
+            <a:ext cx="594360" cy="594360"/>
           </a:xfrm>
           <a:prstGeom prst="ellipse">
             <a:avLst/>
@@ -6303,8 +8983,8 @@
         </p:blipFill>
         <p:spPr>
           <a:xfrm>
-            <a:off x="803575" y="2412919"/>
-            <a:ext cx="166787" cy="166787"/>
+            <a:off x="931774" y="4891126"/>
+            <a:ext cx="285293" cy="285293"/>
           </a:xfrm>
           <a:prstGeom prst="rect">
             <a:avLst/>
@@ -6319,8 +8999,8 @@
         </p:nvSpPr>
         <p:spPr>
           <a:xfrm>
-            <a:off x="1207008" y="2258568"/>
-            <a:ext cx="10271455" cy="475488"/>
+            <a:off x="1554480" y="4645152"/>
+            <a:ext cx="9859975" cy="914400"/>
           </a:xfrm>
           <a:prstGeom prst="rect">
             <a:avLst/>
@@ -6336,7 +9016,21 @@
               <a:buNone/>
             </a:pPr>
             <a:r>
-              <a:rPr lang="en-US" sz="1250" dirty="0">
+              <a:rPr lang="en-US" sz="1350" b="1" dirty="0">
+                <a:solidFill>
+                  <a:srgbClr val="2E7D5B"/>
+                </a:solidFill>
+                <a:latin typeface="Calibri" pitchFamily="34" charset="0"/>
+                <a:ea typeface="Calibri" pitchFamily="34" charset="-122"/>
+                <a:cs typeface="Calibri" pitchFamily="34" charset="-120"/>
+              </a:rPr>
+              <a:t>One deliberate choice: </a:t>
+            </a:r>
+            <a:pPr indent="0" marL="0">
+              <a:buNone/>
+            </a:pPr>
+            <a:r>
+              <a:rPr lang="en-US" sz="1350" dirty="0">
                 <a:solidFill>
                   <a:srgbClr val="1B2440"/>
                 </a:solidFill>
@@ -6344,583 +9038,9 @@
                 <a:ea typeface="Calibri" pitchFamily="34" charset="-122"/>
                 <a:cs typeface="Calibri" pitchFamily="34" charset="-120"/>
               </a:rPr>
-              <a:t>Same API contract format (OpenAPI) as the source of truth on both sides</a:t>
-            </a:r>
-            <a:endParaRPr lang="en-US" sz="1250" dirty="0"/>
-          </a:p>
-        </p:txBody>
-      </p:sp>
-      <p:sp>
-        <p:nvSpPr>
-          <p:cNvPr id="14" name="Shape 10"/>
-          <p:cNvSpPr/>
-          <p:nvPr/>
-        </p:nvSpPr>
-        <p:spPr>
-          <a:xfrm>
-            <a:off x="548640" y="2825496"/>
-            <a:ext cx="11094415" cy="475488"/>
-          </a:xfrm>
-          <a:prstGeom prst="roundRect">
-            <a:avLst>
-              <a:gd name="adj" fmla="val 17308"/>
-            </a:avLst>
-          </a:prstGeom>
-          <a:solidFill>
-            <a:srgbClr val="EDF3FC"/>
-          </a:solidFill>
-          <a:ln/>
-          <a:effectLst>
-            <a:outerShdw sx="100000" sy="100000" kx="0" ky="0" algn="bl" rotWithShape="0" blurRad="76200" dist="12700" dir="5400000">
-              <a:srgbClr val="9AA7C4">
-                <a:alpha val="22000"/>
-              </a:srgbClr>
-            </a:outerShdw>
-          </a:effectLst>
-        </p:spPr>
-      </p:sp>
-      <p:sp>
-        <p:nvSpPr>
-          <p:cNvPr id="15" name="Shape 11"/>
-          <p:cNvSpPr/>
-          <p:nvPr/>
-        </p:nvSpPr>
-        <p:spPr>
-          <a:xfrm>
-            <a:off x="713232" y="2889504"/>
-            <a:ext cx="347472" cy="347472"/>
-          </a:xfrm>
-          <a:prstGeom prst="ellipse">
-            <a:avLst/>
-          </a:prstGeom>
-          <a:solidFill>
-            <a:srgbClr val="2E7D5B"/>
-          </a:solidFill>
-          <a:ln/>
-        </p:spPr>
-      </p:sp>
-      <p:pic>
-        <p:nvPicPr>
-          <p:cNvPr id="16" name="Image 2" descr="preencoded.png">    </p:cNvPr>
-          <p:cNvPicPr>
-            <a:picLocks noChangeAspect="1"/>
-          </p:cNvPicPr>
-          <p:nvPr/>
-        </p:nvPicPr>
-        <p:blipFill>
-          <a:blip r:embed="rId3"/>
-          <a:stretch>
-            <a:fillRect/>
-          </a:stretch>
-        </p:blipFill>
-        <p:spPr>
-          <a:xfrm>
-            <a:off x="803575" y="2979847"/>
-            <a:ext cx="166787" cy="166787"/>
-          </a:xfrm>
-          <a:prstGeom prst="rect">
-            <a:avLst/>
-          </a:prstGeom>
-        </p:spPr>
-      </p:pic>
-      <p:sp>
-        <p:nvSpPr>
-          <p:cNvPr id="17" name="Text 12"/>
-          <p:cNvSpPr/>
-          <p:nvPr/>
-        </p:nvSpPr>
-        <p:spPr>
-          <a:xfrm>
-            <a:off x="1207008" y="2825496"/>
-            <a:ext cx="10271455" cy="475488"/>
-          </a:xfrm>
-          <a:prstGeom prst="rect">
-            <a:avLst/>
-          </a:prstGeom>
-          <a:noFill/>
-          <a:ln/>
-        </p:spPr>
-        <p:txBody>
-          <a:bodyPr wrap="square" lIns="0" tIns="0" rIns="0" bIns="0" rtlCol="0" anchor="ctr"/>
-          <a:lstStyle/>
-          <a:p>
-            <a:pPr indent="0" marL="0">
-              <a:buNone/>
-            </a:pPr>
-            <a:r>
-              <a:rPr lang="en-US" sz="1250" dirty="0">
-                <a:solidFill>
-                  <a:srgbClr val="1B2440"/>
-                </a:solidFill>
-                <a:latin typeface="Calibri" pitchFamily="34" charset="0"/>
-                <a:ea typeface="Calibri" pitchFamily="34" charset="-122"/>
-                <a:cs typeface="Calibri" pitchFamily="34" charset="-120"/>
-              </a:rPr>
-              <a:t>Same folder &amp; module structure and naming conventions — just wearing our cover names</a:t>
-            </a:r>
-            <a:endParaRPr lang="en-US" sz="1250" dirty="0"/>
-          </a:p>
-        </p:txBody>
-      </p:sp>
-      <p:sp>
-        <p:nvSpPr>
-          <p:cNvPr id="18" name="Shape 13"/>
-          <p:cNvSpPr/>
-          <p:nvPr/>
-        </p:nvSpPr>
-        <p:spPr>
-          <a:xfrm>
-            <a:off x="548640" y="3392424"/>
-            <a:ext cx="11094415" cy="475488"/>
-          </a:xfrm>
-          <a:prstGeom prst="roundRect">
-            <a:avLst>
-              <a:gd name="adj" fmla="val 17308"/>
-            </a:avLst>
-          </a:prstGeom>
-          <a:solidFill>
-            <a:srgbClr val="EDF3FC"/>
-          </a:solidFill>
-          <a:ln/>
-          <a:effectLst>
-            <a:outerShdw sx="100000" sy="100000" kx="0" ky="0" algn="bl" rotWithShape="0" blurRad="76200" dist="12700" dir="5400000">
-              <a:srgbClr val="9AA7C4">
-                <a:alpha val="22000"/>
-              </a:srgbClr>
-            </a:outerShdw>
-          </a:effectLst>
-        </p:spPr>
-      </p:sp>
-      <p:sp>
-        <p:nvSpPr>
-          <p:cNvPr id="19" name="Shape 14"/>
-          <p:cNvSpPr/>
-          <p:nvPr/>
-        </p:nvSpPr>
-        <p:spPr>
-          <a:xfrm>
-            <a:off x="713232" y="3456432"/>
-            <a:ext cx="347472" cy="347472"/>
-          </a:xfrm>
-          <a:prstGeom prst="ellipse">
-            <a:avLst/>
-          </a:prstGeom>
-          <a:solidFill>
-            <a:srgbClr val="2E7D5B"/>
-          </a:solidFill>
-          <a:ln/>
-        </p:spPr>
-      </p:sp>
-      <p:pic>
-        <p:nvPicPr>
-          <p:cNvPr id="20" name="Image 3" descr="preencoded.png">    </p:cNvPr>
-          <p:cNvPicPr>
-            <a:picLocks noChangeAspect="1"/>
-          </p:cNvPicPr>
-          <p:nvPr/>
-        </p:nvPicPr>
-        <p:blipFill>
-          <a:blip r:embed="rId4"/>
-          <a:stretch>
-            <a:fillRect/>
-          </a:stretch>
-        </p:blipFill>
-        <p:spPr>
-          <a:xfrm>
-            <a:off x="803575" y="3546775"/>
-            <a:ext cx="166787" cy="166787"/>
-          </a:xfrm>
-          <a:prstGeom prst="rect">
-            <a:avLst/>
-          </a:prstGeom>
-        </p:spPr>
-      </p:pic>
-      <p:sp>
-        <p:nvSpPr>
-          <p:cNvPr id="21" name="Text 15"/>
-          <p:cNvSpPr/>
-          <p:nvPr/>
-        </p:nvSpPr>
-        <p:spPr>
-          <a:xfrm>
-            <a:off x="1207008" y="3392424"/>
-            <a:ext cx="10271455" cy="475488"/>
-          </a:xfrm>
-          <a:prstGeom prst="rect">
-            <a:avLst/>
-          </a:prstGeom>
-          <a:noFill/>
-          <a:ln/>
-        </p:spPr>
-        <p:txBody>
-          <a:bodyPr wrap="square" lIns="0" tIns="0" rIns="0" bIns="0" rtlCol="0" anchor="ctr"/>
-          <a:lstStyle/>
-          <a:p>
-            <a:pPr indent="0" marL="0">
-              <a:buNone/>
-            </a:pPr>
-            <a:r>
-              <a:rPr lang="en-US" sz="1250" dirty="0">
-                <a:solidFill>
-                  <a:srgbClr val="1B2440"/>
-                </a:solidFill>
-                <a:latin typeface="Calibri" pitchFamily="34" charset="0"/>
-                <a:ea typeface="Calibri" pitchFamily="34" charset="-122"/>
-                <a:cs typeface="Calibri" pitchFamily="34" charset="-120"/>
-              </a:rPr>
-              <a:t>Same versioning &amp; tagging approach — Confi always pulls one known-good, tagged release</a:t>
-            </a:r>
-            <a:endParaRPr lang="en-US" sz="1250" dirty="0"/>
-          </a:p>
-        </p:txBody>
-      </p:sp>
-      <p:sp>
-        <p:nvSpPr>
-          <p:cNvPr id="22" name="Shape 16"/>
-          <p:cNvSpPr/>
-          <p:nvPr/>
-        </p:nvSpPr>
-        <p:spPr>
-          <a:xfrm>
-            <a:off x="548640" y="3959352"/>
-            <a:ext cx="11094415" cy="475488"/>
-          </a:xfrm>
-          <a:prstGeom prst="roundRect">
-            <a:avLst>
-              <a:gd name="adj" fmla="val 17308"/>
-            </a:avLst>
-          </a:prstGeom>
-          <a:solidFill>
-            <a:srgbClr val="EDF3FC"/>
-          </a:solidFill>
-          <a:ln/>
-          <a:effectLst>
-            <a:outerShdw sx="100000" sy="100000" kx="0" ky="0" algn="bl" rotWithShape="0" blurRad="76200" dist="12700" dir="5400000">
-              <a:srgbClr val="9AA7C4">
-                <a:alpha val="22000"/>
-              </a:srgbClr>
-            </a:outerShdw>
-          </a:effectLst>
-        </p:spPr>
-      </p:sp>
-      <p:sp>
-        <p:nvSpPr>
-          <p:cNvPr id="23" name="Shape 17"/>
-          <p:cNvSpPr/>
-          <p:nvPr/>
-        </p:nvSpPr>
-        <p:spPr>
-          <a:xfrm>
-            <a:off x="713232" y="4023360"/>
-            <a:ext cx="347472" cy="347472"/>
-          </a:xfrm>
-          <a:prstGeom prst="ellipse">
-            <a:avLst/>
-          </a:prstGeom>
-          <a:solidFill>
-            <a:srgbClr val="2E7D5B"/>
-          </a:solidFill>
-          <a:ln/>
-        </p:spPr>
-      </p:sp>
-      <p:pic>
-        <p:nvPicPr>
-          <p:cNvPr id="24" name="Image 4" descr="preencoded.png">    </p:cNvPr>
-          <p:cNvPicPr>
-            <a:picLocks noChangeAspect="1"/>
-          </p:cNvPicPr>
-          <p:nvPr/>
-        </p:nvPicPr>
-        <p:blipFill>
-          <a:blip r:embed="rId5"/>
-          <a:stretch>
-            <a:fillRect/>
-          </a:stretch>
-        </p:blipFill>
-        <p:spPr>
-          <a:xfrm>
-            <a:off x="803575" y="4113703"/>
-            <a:ext cx="166787" cy="166787"/>
-          </a:xfrm>
-          <a:prstGeom prst="rect">
-            <a:avLst/>
-          </a:prstGeom>
-        </p:spPr>
-      </p:pic>
-      <p:sp>
-        <p:nvSpPr>
-          <p:cNvPr id="25" name="Text 18"/>
-          <p:cNvSpPr/>
-          <p:nvPr/>
-        </p:nvSpPr>
-        <p:spPr>
-          <a:xfrm>
-            <a:off x="1207008" y="3959352"/>
-            <a:ext cx="10271455" cy="475488"/>
-          </a:xfrm>
-          <a:prstGeom prst="rect">
-            <a:avLst/>
-          </a:prstGeom>
-          <a:noFill/>
-          <a:ln/>
-        </p:spPr>
-        <p:txBody>
-          <a:bodyPr wrap="square" lIns="0" tIns="0" rIns="0" bIns="0" rtlCol="0" anchor="ctr"/>
-          <a:lstStyle/>
-          <a:p>
-            <a:pPr indent="0" marL="0">
-              <a:buNone/>
-            </a:pPr>
-            <a:r>
-              <a:rPr lang="en-US" sz="1250" dirty="0">
-                <a:solidFill>
-                  <a:srgbClr val="1B2440"/>
-                </a:solidFill>
-                <a:latin typeface="Calibri" pitchFamily="34" charset="0"/>
-                <a:ea typeface="Calibri" pitchFamily="34" charset="-122"/>
-                <a:cs typeface="Calibri" pitchFamily="34" charset="-120"/>
-              </a:rPr>
-              <a:t>Dependencies checked against what Confi already allows, so surprises show up early, not at integration</a:t>
-            </a:r>
-            <a:endParaRPr lang="en-US" sz="1250" dirty="0"/>
-          </a:p>
-        </p:txBody>
-      </p:sp>
-      <p:sp>
-        <p:nvSpPr>
-          <p:cNvPr id="26" name="Shape 19"/>
-          <p:cNvSpPr/>
-          <p:nvPr/>
-        </p:nvSpPr>
-        <p:spPr>
-          <a:xfrm>
-            <a:off x="548640" y="4526280"/>
-            <a:ext cx="11094415" cy="475488"/>
-          </a:xfrm>
-          <a:prstGeom prst="roundRect">
-            <a:avLst>
-              <a:gd name="adj" fmla="val 17308"/>
-            </a:avLst>
-          </a:prstGeom>
-          <a:solidFill>
-            <a:srgbClr val="EDF3FC"/>
-          </a:solidFill>
-          <a:ln/>
-          <a:effectLst>
-            <a:outerShdw sx="100000" sy="100000" kx="0" ky="0" algn="bl" rotWithShape="0" blurRad="76200" dist="12700" dir="5400000">
-              <a:srgbClr val="9AA7C4">
-                <a:alpha val="22000"/>
-              </a:srgbClr>
-            </a:outerShdw>
-          </a:effectLst>
-        </p:spPr>
-      </p:sp>
-      <p:sp>
-        <p:nvSpPr>
-          <p:cNvPr id="27" name="Shape 20"/>
-          <p:cNvSpPr/>
-          <p:nvPr/>
-        </p:nvSpPr>
-        <p:spPr>
-          <a:xfrm>
-            <a:off x="713232" y="4590288"/>
-            <a:ext cx="347472" cy="347472"/>
-          </a:xfrm>
-          <a:prstGeom prst="ellipse">
-            <a:avLst/>
-          </a:prstGeom>
-          <a:solidFill>
-            <a:srgbClr val="2E7D5B"/>
-          </a:solidFill>
-          <a:ln/>
-        </p:spPr>
-      </p:sp>
-      <p:pic>
-        <p:nvPicPr>
-          <p:cNvPr id="28" name="Image 5" descr="preencoded.png">    </p:cNvPr>
-          <p:cNvPicPr>
-            <a:picLocks noChangeAspect="1"/>
-          </p:cNvPicPr>
-          <p:nvPr/>
-        </p:nvPicPr>
-        <p:blipFill>
-          <a:blip r:embed="rId6"/>
-          <a:stretch>
-            <a:fillRect/>
-          </a:stretch>
-        </p:blipFill>
-        <p:spPr>
-          <a:xfrm>
-            <a:off x="803575" y="4680631"/>
-            <a:ext cx="166787" cy="166787"/>
-          </a:xfrm>
-          <a:prstGeom prst="rect">
-            <a:avLst/>
-          </a:prstGeom>
-        </p:spPr>
-      </p:pic>
-      <p:sp>
-        <p:nvSpPr>
-          <p:cNvPr id="29" name="Text 21"/>
-          <p:cNvSpPr/>
-          <p:nvPr/>
-        </p:nvSpPr>
-        <p:spPr>
-          <a:xfrm>
-            <a:off x="1207008" y="4526280"/>
-            <a:ext cx="10271455" cy="475488"/>
-          </a:xfrm>
-          <a:prstGeom prst="rect">
-            <a:avLst/>
-          </a:prstGeom>
-          <a:noFill/>
-          <a:ln/>
-        </p:spPr>
-        <p:txBody>
-          <a:bodyPr wrap="square" lIns="0" tIns="0" rIns="0" bIns="0" rtlCol="0" anchor="ctr"/>
-          <a:lstStyle/>
-          <a:p>
-            <a:pPr indent="0" marL="0">
-              <a:buNone/>
-            </a:pPr>
-            <a:r>
-              <a:rPr lang="en-US" sz="1250" dirty="0">
-                <a:solidFill>
-                  <a:srgbClr val="1B2440"/>
-                </a:solidFill>
-                <a:latin typeface="Calibri" pitchFamily="34" charset="0"/>
-                <a:ea typeface="Calibri" pitchFamily="34" charset="-122"/>
-                <a:cs typeface="Calibri" pitchFamily="34" charset="-120"/>
-              </a:rPr>
-              <a:t>Config (URLs, auth, environment stuff) lives in one clearly separate place from the feature code</a:t>
-            </a:r>
-            <a:endParaRPr lang="en-US" sz="1250" dirty="0"/>
-          </a:p>
-        </p:txBody>
-      </p:sp>
-      <p:sp>
-        <p:nvSpPr>
-          <p:cNvPr id="30" name="Shape 22"/>
-          <p:cNvSpPr/>
-          <p:nvPr/>
-        </p:nvSpPr>
-        <p:spPr>
-          <a:xfrm>
-            <a:off x="548640" y="5166360"/>
-            <a:ext cx="11094415" cy="777240"/>
-          </a:xfrm>
-          <a:prstGeom prst="roundRect">
-            <a:avLst>
-              <a:gd name="adj" fmla="val 10588"/>
-            </a:avLst>
-          </a:prstGeom>
-          <a:solidFill>
-            <a:srgbClr val="EAF4EF"/>
-          </a:solidFill>
-          <a:ln/>
-          <a:effectLst>
-            <a:outerShdw sx="100000" sy="100000" kx="0" ky="0" algn="bl" rotWithShape="0" blurRad="76200" dist="12700" dir="5400000">
-              <a:srgbClr val="9AA7C4">
-                <a:alpha val="22000"/>
-              </a:srgbClr>
-            </a:outerShdw>
-          </a:effectLst>
-        </p:spPr>
-      </p:sp>
-      <p:sp>
-        <p:nvSpPr>
-          <p:cNvPr id="31" name="Shape 23"/>
-          <p:cNvSpPr/>
-          <p:nvPr/>
-        </p:nvSpPr>
-        <p:spPr>
-          <a:xfrm>
-            <a:off x="749808" y="5303520"/>
-            <a:ext cx="502920" cy="502920"/>
-          </a:xfrm>
-          <a:prstGeom prst="ellipse">
-            <a:avLst/>
-          </a:prstGeom>
-          <a:solidFill>
-            <a:srgbClr val="2E7D5B"/>
-          </a:solidFill>
-          <a:ln/>
-        </p:spPr>
-      </p:sp>
-      <p:pic>
-        <p:nvPicPr>
-          <p:cNvPr id="32" name="Image 6" descr="preencoded.png">    </p:cNvPr>
-          <p:cNvPicPr>
-            <a:picLocks noChangeAspect="1"/>
-          </p:cNvPicPr>
-          <p:nvPr/>
-        </p:nvPicPr>
-        <p:blipFill>
-          <a:blip r:embed="rId7"/>
-          <a:stretch>
-            <a:fillRect/>
-          </a:stretch>
-        </p:blipFill>
-        <p:spPr>
-          <a:xfrm>
-            <a:off x="880567" y="5434279"/>
-            <a:ext cx="241402" cy="241402"/>
-          </a:xfrm>
-          <a:prstGeom prst="rect">
-            <a:avLst/>
-          </a:prstGeom>
-        </p:spPr>
-      </p:pic>
-      <p:sp>
-        <p:nvSpPr>
-          <p:cNvPr id="33" name="Text 24"/>
-          <p:cNvSpPr/>
-          <p:nvPr/>
-        </p:nvSpPr>
-        <p:spPr>
-          <a:xfrm>
-            <a:off x="1389888" y="5212080"/>
-            <a:ext cx="10042855" cy="594360"/>
-          </a:xfrm>
-          <a:prstGeom prst="rect">
-            <a:avLst/>
-          </a:prstGeom>
-          <a:noFill/>
-          <a:ln/>
-        </p:spPr>
-        <p:txBody>
-          <a:bodyPr wrap="square" lIns="0" tIns="0" rIns="0" bIns="0" rtlCol="0" anchor="ctr"/>
-          <a:lstStyle/>
-          <a:p>
-            <a:pPr indent="0" marL="0">
-              <a:buNone/>
-            </a:pPr>
-            <a:r>
-              <a:rPr lang="en-US" sz="1250" b="1" dirty="0">
-                <a:solidFill>
-                  <a:srgbClr val="2E7D5B"/>
-                </a:solidFill>
-                <a:latin typeface="Calibri" pitchFamily="34" charset="0"/>
-                <a:ea typeface="Calibri" pitchFamily="34" charset="-122"/>
-                <a:cs typeface="Calibri" pitchFamily="34" charset="-120"/>
-              </a:rPr>
-              <a:t>Do these six things consistently and </a:t>
-            </a:r>
-            <a:pPr indent="0" marL="0">
-              <a:buNone/>
-            </a:pPr>
-            <a:r>
-              <a:rPr lang="en-US" sz="1250" dirty="0">
-                <a:solidFill>
-                  <a:srgbClr val="1B2440"/>
-                </a:solidFill>
-                <a:latin typeface="Calibri" pitchFamily="34" charset="0"/>
-                <a:ea typeface="Calibri" pitchFamily="34" charset="-122"/>
-                <a:cs typeface="Calibri" pitchFamily="34" charset="-120"/>
-              </a:rPr>
-              <a:t>“bringing it inside” becomes closer to a deploy than a rewrite — which is the whole goal of building outside in the first place.</a:t>
-            </a:r>
-            <a:endParaRPr lang="en-US" sz="1250" dirty="0"/>
+              <a:t>LTC's shape is ours to design — it doesn't need to mirror our real org chart one-for-one. Keeping some healthy distance there is a feature, not an accident.</a:t>
+            </a:r>
+            <a:endParaRPr lang="en-US" sz="1350" dirty="0"/>
           </a:p>
         </p:txBody>
       </p:sp>
@@ -7067,7 +9187,7 @@
                 <a:ea typeface="Calibri" pitchFamily="34" charset="-122"/>
                 <a:cs typeface="Calibri" pitchFamily="34" charset="-120"/>
               </a:rPr>
-              <a:t>KEEPING IT SIMPLE FOR EVERYONE</a:t>
+              <a:t>THE PART THAT MAKES THIS EASY LATER</a:t>
             </a:r>
             <a:endParaRPr lang="en-US" sz="1200" dirty="0"/>
           </a:p>
@@ -7106,7 +9226,7 @@
                 <a:ea typeface="Cambria" pitchFamily="34" charset="-122"/>
                 <a:cs typeface="Cambria" pitchFamily="34" charset="-120"/>
               </a:rPr>
-              <a:t>A short, boring list beats a long, scary one</a:t>
+              <a:t>Stay aligned with Confi, and integration stops being scary</a:t>
             </a:r>
             <a:endParaRPr lang="en-US" sz="2800" dirty="0"/>
           </a:p>
@@ -7121,15 +9241,15 @@
         <p:spPr>
           <a:xfrm>
             <a:off x="548640" y="1691640"/>
-            <a:ext cx="5364328" cy="3200400"/>
+            <a:ext cx="11094415" cy="475488"/>
           </a:xfrm>
           <a:prstGeom prst="roundRect">
             <a:avLst>
-              <a:gd name="adj" fmla="val 2571"/>
+              <a:gd name="adj" fmla="val 17308"/>
             </a:avLst>
           </a:prstGeom>
           <a:solidFill>
-            <a:srgbClr val="EAF4EF"/>
+            <a:srgbClr val="EDF3FC"/>
           </a:solidFill>
           <a:ln/>
           <a:effectLst>
@@ -7149,8 +9269,8 @@
         </p:nvSpPr>
         <p:spPr>
           <a:xfrm>
-            <a:off x="804672" y="1920240"/>
-            <a:ext cx="530352" cy="530352"/>
+            <a:off x="713232" y="1755648"/>
+            <a:ext cx="347472" cy="347472"/>
           </a:xfrm>
           <a:prstGeom prst="ellipse">
             <a:avLst/>
@@ -7177,8 +9297,8 @@
         </p:blipFill>
         <p:spPr>
           <a:xfrm>
-            <a:off x="942564" y="2058132"/>
-            <a:ext cx="254569" cy="254569"/>
+            <a:off x="803575" y="1845991"/>
+            <a:ext cx="166787" cy="166787"/>
           </a:xfrm>
           <a:prstGeom prst="rect">
             <a:avLst/>
@@ -7193,8 +9313,8 @@
         </p:nvSpPr>
         <p:spPr>
           <a:xfrm>
-            <a:off x="1463040" y="1975104"/>
-            <a:ext cx="4267048" cy="365760"/>
+            <a:off x="1207008" y="1691640"/>
+            <a:ext cx="10271455" cy="475488"/>
           </a:xfrm>
           <a:prstGeom prst="rect">
             <a:avLst/>
@@ -7210,49 +9330,6 @@
               <a:buNone/>
             </a:pPr>
             <a:r>
-              <a:rPr lang="en-US" sz="1500" b="1" dirty="0">
-                <a:solidFill>
-                  <a:srgbClr val="2E7D5B"/>
-                </a:solidFill>
-                <a:latin typeface="Calibri" pitchFamily="34" charset="0"/>
-                <a:ea typeface="Calibri" pitchFamily="34" charset="-122"/>
-                <a:cs typeface="Calibri" pitchFamily="34" charset="-120"/>
-              </a:rPr>
-              <a:t>Goes outside</a:t>
-            </a:r>
-            <a:endParaRPr lang="en-US" sz="1500" dirty="0"/>
-          </a:p>
-        </p:txBody>
-      </p:sp>
-      <p:sp>
-        <p:nvSpPr>
-          <p:cNvPr id="10" name="Text 7"/>
-          <p:cNvSpPr/>
-          <p:nvPr/>
-        </p:nvSpPr>
-        <p:spPr>
-          <a:xfrm>
-            <a:off x="822960" y="2468880"/>
-            <a:ext cx="4815688" cy="2286000"/>
-          </a:xfrm>
-          <a:prstGeom prst="rect">
-            <a:avLst/>
-          </a:prstGeom>
-          <a:noFill/>
-          <a:ln/>
-        </p:spPr>
-        <p:txBody>
-          <a:bodyPr wrap="square" lIns="0" tIns="0" rIns="0" bIns="0" rtlCol="0" anchor="ctr"/>
-          <a:lstStyle/>
-          <a:p>
-            <a:pPr marL="342900" indent="-342900">
-              <a:spcAft>
-                <a:spcPts val="800"/>
-              </a:spcAft>
-              <a:buSzPct val="100000"/>
-              <a:buChar char="•"/>
-            </a:pPr>
-            <a:r>
               <a:rPr lang="en-US" sz="1250" dirty="0">
                 <a:solidFill>
                   <a:srgbClr val="1B2440"/>
@@ -7261,68 +9338,26 @@
                 <a:ea typeface="Calibri" pitchFamily="34" charset="-122"/>
                 <a:cs typeface="Calibri" pitchFamily="34" charset="-120"/>
               </a:rPr>
-              <a:t>Routes &amp; structure, renamed</a:t>
+              <a:t>Same lint &amp; static-analysis rules (ESLint, SAST) — copy the actual configs over, don't reinvent them</a:t>
             </a:r>
             <a:endParaRPr lang="en-US" sz="1250" dirty="0"/>
           </a:p>
-          <a:p>
-            <a:pPr marL="342900" indent="-342900">
-              <a:spcAft>
-                <a:spcPts val="800"/>
-              </a:spcAft>
-              <a:buSzPct val="100000"/>
-              <a:buChar char="•"/>
-            </a:pPr>
-            <a:r>
-              <a:rPr lang="en-US" sz="1250" dirty="0">
-                <a:solidFill>
-                  <a:srgbClr val="1B2440"/>
-                </a:solidFill>
-                <a:latin typeface="Calibri" pitchFamily="34" charset="0"/>
-                <a:ea typeface="Calibri" pitchFamily="34" charset="-122"/>
-                <a:cs typeface="Calibri" pitchFamily="34" charset="-120"/>
-              </a:rPr>
-              <a:t>API contracts + sample data</a:t>
-            </a:r>
-            <a:endParaRPr lang="en-US" sz="1250" dirty="0"/>
-          </a:p>
-          <a:p>
-            <a:pPr marL="342900" indent="-342900">
-              <a:spcAft>
-                <a:spcPts val="800"/>
-              </a:spcAft>
-              <a:buSzPct val="100000"/>
-              <a:buChar char="•"/>
-            </a:pPr>
-            <a:r>
-              <a:rPr lang="en-US" sz="1250" dirty="0">
-                <a:solidFill>
-                  <a:srgbClr val="1B2440"/>
-                </a:solidFill>
-                <a:latin typeface="Calibri" pitchFamily="34" charset="0"/>
-                <a:ea typeface="Calibri" pitchFamily="34" charset="-122"/>
-                <a:cs typeface="Calibri" pitchFamily="34" charset="-120"/>
-              </a:rPr>
-              <a:t>Source code, run through our extractor tool first</a:t>
-            </a:r>
-            <a:endParaRPr lang="en-US" sz="1250" dirty="0"/>
-          </a:p>
-        </p:txBody>
-      </p:sp>
-      <p:sp>
-        <p:nvSpPr>
-          <p:cNvPr id="11" name="Shape 8"/>
-          <p:cNvSpPr/>
-          <p:nvPr/>
-        </p:nvSpPr>
-        <p:spPr>
-          <a:xfrm>
-            <a:off x="6278728" y="1691640"/>
-            <a:ext cx="5364328" cy="3200400"/>
+        </p:txBody>
+      </p:sp>
+      <p:sp>
+        <p:nvSpPr>
+          <p:cNvPr id="10" name="Shape 7"/>
+          <p:cNvSpPr/>
+          <p:nvPr/>
+        </p:nvSpPr>
+        <p:spPr>
+          <a:xfrm>
+            <a:off x="548640" y="2258568"/>
+            <a:ext cx="11094415" cy="475488"/>
           </a:xfrm>
           <a:prstGeom prst="roundRect">
             <a:avLst>
-              <a:gd name="adj" fmla="val 2571"/>
+              <a:gd name="adj" fmla="val 17308"/>
             </a:avLst>
           </a:prstGeom>
           <a:solidFill>
@@ -7340,27 +9375,27 @@
       </p:sp>
       <p:sp>
         <p:nvSpPr>
-          <p:cNvPr id="12" name="Shape 9"/>
-          <p:cNvSpPr/>
-          <p:nvPr/>
-        </p:nvSpPr>
-        <p:spPr>
-          <a:xfrm>
-            <a:off x="6534760" y="1920240"/>
-            <a:ext cx="530352" cy="530352"/>
+          <p:cNvPr id="11" name="Shape 8"/>
+          <p:cNvSpPr/>
+          <p:nvPr/>
+        </p:nvSpPr>
+        <p:spPr>
+          <a:xfrm>
+            <a:off x="713232" y="2322576"/>
+            <a:ext cx="347472" cy="347472"/>
           </a:xfrm>
           <a:prstGeom prst="ellipse">
             <a:avLst/>
           </a:prstGeom>
           <a:solidFill>
-            <a:srgbClr val="1E2761"/>
+            <a:srgbClr val="2E7D5B"/>
           </a:solidFill>
           <a:ln/>
         </p:spPr>
       </p:sp>
       <p:pic>
         <p:nvPicPr>
-          <p:cNvPr id="13" name="Image 1" descr="preencoded.png">    </p:cNvPr>
+          <p:cNvPr id="12" name="Image 1" descr="preencoded.png">    </p:cNvPr>
           <p:cNvPicPr>
             <a:picLocks noChangeAspect="1"/>
           </p:cNvPicPr>
@@ -7374,8 +9409,8 @@
         </p:blipFill>
         <p:spPr>
           <a:xfrm>
-            <a:off x="6672651" y="2058132"/>
-            <a:ext cx="254569" cy="254569"/>
+            <a:off x="803575" y="2412919"/>
+            <a:ext cx="166787" cy="166787"/>
           </a:xfrm>
           <a:prstGeom prst="rect">
             <a:avLst/>
@@ -7384,14 +9419,14 @@
       </p:pic>
       <p:sp>
         <p:nvSpPr>
-          <p:cNvPr id="14" name="Text 10"/>
-          <p:cNvSpPr/>
-          <p:nvPr/>
-        </p:nvSpPr>
-        <p:spPr>
-          <a:xfrm>
-            <a:off x="7193128" y="1975104"/>
-            <a:ext cx="4267048" cy="365760"/>
+          <p:cNvPr id="13" name="Text 9"/>
+          <p:cNvSpPr/>
+          <p:nvPr/>
+        </p:nvSpPr>
+        <p:spPr>
+          <a:xfrm>
+            <a:off x="1207008" y="2258568"/>
+            <a:ext cx="10271455" cy="475488"/>
           </a:xfrm>
           <a:prstGeom prst="rect">
             <a:avLst/>
@@ -7407,49 +9442,6 @@
               <a:buNone/>
             </a:pPr>
             <a:r>
-              <a:rPr lang="en-US" sz="1500" b="1" dirty="0">
-                <a:solidFill>
-                  <a:srgbClr val="1E2761"/>
-                </a:solidFill>
-                <a:latin typeface="Calibri" pitchFamily="34" charset="0"/>
-                <a:ea typeface="Calibri" pitchFamily="34" charset="-122"/>
-                <a:cs typeface="Calibri" pitchFamily="34" charset="-120"/>
-              </a:rPr>
-              <a:t>Stays inside</a:t>
-            </a:r>
-            <a:endParaRPr lang="en-US" sz="1500" dirty="0"/>
-          </a:p>
-        </p:txBody>
-      </p:sp>
-      <p:sp>
-        <p:nvSpPr>
-          <p:cNvPr id="15" name="Text 11"/>
-          <p:cNvSpPr/>
-          <p:nvPr/>
-        </p:nvSpPr>
-        <p:spPr>
-          <a:xfrm>
-            <a:off x="6553048" y="2468880"/>
-            <a:ext cx="4815688" cy="2286000"/>
-          </a:xfrm>
-          <a:prstGeom prst="rect">
-            <a:avLst/>
-          </a:prstGeom>
-          <a:noFill/>
-          <a:ln/>
-        </p:spPr>
-        <p:txBody>
-          <a:bodyPr wrap="square" lIns="0" tIns="0" rIns="0" bIns="0" rtlCol="0" anchor="ctr"/>
-          <a:lstStyle/>
-          <a:p>
-            <a:pPr marL="342900" indent="-342900">
-              <a:spcAft>
-                <a:spcPts val="800"/>
-              </a:spcAft>
-              <a:buSzPct val="100000"/>
-              <a:buChar char="•"/>
-            </a:pPr>
-            <a:r>
               <a:rPr lang="en-US" sz="1250" dirty="0">
                 <a:solidFill>
                   <a:srgbClr val="1B2440"/>
@@ -7458,89 +9450,26 @@
                 <a:ea typeface="Calibri" pitchFamily="34" charset="-122"/>
                 <a:cs typeface="Calibri" pitchFamily="34" charset="-120"/>
               </a:rPr>
-              <a:t>mapping.json — our one key file</a:t>
+              <a:t>Same API contract format (OpenAPI) as the shared source of truth on both sides</a:t>
             </a:r>
             <a:endParaRPr lang="en-US" sz="1250" dirty="0"/>
           </a:p>
-          <a:p>
-            <a:pPr marL="342900" indent="-342900">
-              <a:spcAft>
-                <a:spcPts val="800"/>
-              </a:spcAft>
-              <a:buSzPct val="100000"/>
-              <a:buChar char="•"/>
-            </a:pPr>
-            <a:r>
-              <a:rPr lang="en-US" sz="1250" dirty="0">
-                <a:solidFill>
-                  <a:srgbClr val="1B2440"/>
-                </a:solidFill>
-                <a:latin typeface="Calibri" pitchFamily="34" charset="0"/>
-                <a:ea typeface="Calibri" pitchFamily="34" charset="-122"/>
-                <a:cs typeface="Calibri" pitchFamily="34" charset="-120"/>
-              </a:rPr>
-              <a:t>Real names, real data</a:t>
-            </a:r>
-            <a:endParaRPr lang="en-US" sz="1250" dirty="0"/>
-          </a:p>
-          <a:p>
-            <a:pPr marL="342900" indent="-342900">
-              <a:spcAft>
-                <a:spcPts val="800"/>
-              </a:spcAft>
-              <a:buSzPct val="100000"/>
-              <a:buChar char="•"/>
-            </a:pPr>
-            <a:r>
-              <a:rPr lang="en-US" sz="1250" dirty="0">
-                <a:solidFill>
-                  <a:srgbClr val="1B2440"/>
-                </a:solidFill>
-                <a:latin typeface="Calibri" pitchFamily="34" charset="0"/>
-                <a:ea typeface="Calibri" pitchFamily="34" charset="-122"/>
-                <a:cs typeface="Calibri" pitchFamily="34" charset="-120"/>
-              </a:rPr>
-              <a:t>The actual rule values</a:t>
-            </a:r>
-            <a:endParaRPr lang="en-US" sz="1250" dirty="0"/>
-          </a:p>
-          <a:p>
-            <a:pPr marL="342900" indent="-342900">
-              <a:spcAft>
-                <a:spcPts val="800"/>
-              </a:spcAft>
-              <a:buSzPct val="100000"/>
-              <a:buChar char="•"/>
-            </a:pPr>
-            <a:r>
-              <a:rPr lang="en-US" sz="1250" dirty="0">
-                <a:solidFill>
-                  <a:srgbClr val="1B2440"/>
-                </a:solidFill>
-                <a:latin typeface="Calibri" pitchFamily="34" charset="0"/>
-                <a:ea typeface="Calibri" pitchFamily="34" charset="-122"/>
-                <a:cs typeface="Calibri" pitchFamily="34" charset="-120"/>
-              </a:rPr>
-              <a:t>URLs, certs, auth secrets</a:t>
-            </a:r>
-            <a:endParaRPr lang="en-US" sz="1250" dirty="0"/>
-          </a:p>
-        </p:txBody>
-      </p:sp>
-      <p:sp>
-        <p:nvSpPr>
-          <p:cNvPr id="16" name="Shape 12"/>
-          <p:cNvSpPr/>
-          <p:nvPr/>
-        </p:nvSpPr>
-        <p:spPr>
-          <a:xfrm>
-            <a:off x="548640" y="5074920"/>
-            <a:ext cx="11094415" cy="1005840"/>
+        </p:txBody>
+      </p:sp>
+      <p:sp>
+        <p:nvSpPr>
+          <p:cNvPr id="14" name="Shape 10"/>
+          <p:cNvSpPr/>
+          <p:nvPr/>
+        </p:nvSpPr>
+        <p:spPr>
+          <a:xfrm>
+            <a:off x="548640" y="2825496"/>
+            <a:ext cx="11094415" cy="475488"/>
           </a:xfrm>
           <a:prstGeom prst="roundRect">
             <a:avLst>
-              <a:gd name="adj" fmla="val 8182"/>
+              <a:gd name="adj" fmla="val 17308"/>
             </a:avLst>
           </a:prstGeom>
           <a:solidFill>
@@ -7558,27 +9487,27 @@
       </p:sp>
       <p:sp>
         <p:nvSpPr>
-          <p:cNvPr id="17" name="Shape 13"/>
-          <p:cNvSpPr/>
-          <p:nvPr/>
-        </p:nvSpPr>
-        <p:spPr>
-          <a:xfrm>
-            <a:off x="777240" y="5285232"/>
-            <a:ext cx="566928" cy="566928"/>
+          <p:cNvPr id="15" name="Shape 11"/>
+          <p:cNvSpPr/>
+          <p:nvPr/>
+        </p:nvSpPr>
+        <p:spPr>
+          <a:xfrm>
+            <a:off x="713232" y="2889504"/>
+            <a:ext cx="347472" cy="347472"/>
           </a:xfrm>
           <a:prstGeom prst="ellipse">
             <a:avLst/>
           </a:prstGeom>
           <a:solidFill>
-            <a:srgbClr val="1E2761"/>
+            <a:srgbClr val="2E7D5B"/>
           </a:solidFill>
           <a:ln/>
         </p:spPr>
       </p:sp>
       <p:pic>
         <p:nvPicPr>
-          <p:cNvPr id="18" name="Image 2" descr="preencoded.png">    </p:cNvPr>
+          <p:cNvPr id="16" name="Image 2" descr="preencoded.png">    </p:cNvPr>
           <p:cNvPicPr>
             <a:picLocks noChangeAspect="1"/>
           </p:cNvPicPr>
@@ -7592,8 +9521,8 @@
         </p:blipFill>
         <p:spPr>
           <a:xfrm>
-            <a:off x="924641" y="5432633"/>
-            <a:ext cx="272125" cy="272125"/>
+            <a:off x="803575" y="2979847"/>
+            <a:ext cx="166787" cy="166787"/>
           </a:xfrm>
           <a:prstGeom prst="rect">
             <a:avLst/>
@@ -7602,14 +9531,14 @@
       </p:pic>
       <p:sp>
         <p:nvSpPr>
-          <p:cNvPr id="19" name="Text 14"/>
-          <p:cNvSpPr/>
-          <p:nvPr/>
-        </p:nvSpPr>
-        <p:spPr>
-          <a:xfrm>
-            <a:off x="1554480" y="5193792"/>
-            <a:ext cx="9859975" cy="777240"/>
+          <p:cNvPr id="17" name="Text 12"/>
+          <p:cNvSpPr/>
+          <p:nvPr/>
+        </p:nvSpPr>
+        <p:spPr>
+          <a:xfrm>
+            <a:off x="1207008" y="2825496"/>
+            <a:ext cx="10271455" cy="475488"/>
           </a:xfrm>
           <a:prstGeom prst="rect">
             <a:avLst/>
@@ -7625,21 +9554,119 @@
               <a:buNone/>
             </a:pPr>
             <a:r>
-              <a:rPr lang="en-US" sz="1350" b="1" dirty="0">
-                <a:solidFill>
-                  <a:srgbClr val="1E2761"/>
-                </a:solidFill>
-                <a:latin typeface="Calibri" pitchFamily="34" charset="0"/>
-                <a:ea typeface="Calibri" pitchFamily="34" charset="-122"/>
-                <a:cs typeface="Calibri" pitchFamily="34" charset="-120"/>
-              </a:rPr>
-              <a:t>One habit does most of the work: </a:t>
-            </a:r>
+              <a:rPr lang="en-US" sz="1250" dirty="0">
+                <a:solidFill>
+                  <a:srgbClr val="1B2440"/>
+                </a:solidFill>
+                <a:latin typeface="Calibri" pitchFamily="34" charset="0"/>
+                <a:ea typeface="Calibri" pitchFamily="34" charset="-122"/>
+                <a:cs typeface="Calibri" pitchFamily="34" charset="-120"/>
+              </a:rPr>
+              <a:t>Same single-spa shell contracts &amp; design-token libraries Confi's common-root-config already provides — plug in, don't rebuild</a:t>
+            </a:r>
+            <a:endParaRPr lang="en-US" sz="1250" dirty="0"/>
+          </a:p>
+        </p:txBody>
+      </p:sp>
+      <p:sp>
+        <p:nvSpPr>
+          <p:cNvPr id="18" name="Shape 13"/>
+          <p:cNvSpPr/>
+          <p:nvPr/>
+        </p:nvSpPr>
+        <p:spPr>
+          <a:xfrm>
+            <a:off x="548640" y="3392424"/>
+            <a:ext cx="11094415" cy="475488"/>
+          </a:xfrm>
+          <a:prstGeom prst="roundRect">
+            <a:avLst>
+              <a:gd name="adj" fmla="val 17308"/>
+            </a:avLst>
+          </a:prstGeom>
+          <a:solidFill>
+            <a:srgbClr val="EDF3FC"/>
+          </a:solidFill>
+          <a:ln/>
+          <a:effectLst>
+            <a:outerShdw sx="100000" sy="100000" kx="0" ky="0" algn="bl" rotWithShape="0" blurRad="76200" dist="12700" dir="5400000">
+              <a:srgbClr val="9AA7C4">
+                <a:alpha val="22000"/>
+              </a:srgbClr>
+            </a:outerShdw>
+          </a:effectLst>
+        </p:spPr>
+      </p:sp>
+      <p:sp>
+        <p:nvSpPr>
+          <p:cNvPr id="19" name="Shape 14"/>
+          <p:cNvSpPr/>
+          <p:nvPr/>
+        </p:nvSpPr>
+        <p:spPr>
+          <a:xfrm>
+            <a:off x="713232" y="3456432"/>
+            <a:ext cx="347472" cy="347472"/>
+          </a:xfrm>
+          <a:prstGeom prst="ellipse">
+            <a:avLst/>
+          </a:prstGeom>
+          <a:solidFill>
+            <a:srgbClr val="2E7D5B"/>
+          </a:solidFill>
+          <a:ln/>
+        </p:spPr>
+      </p:sp>
+      <p:pic>
+        <p:nvPicPr>
+          <p:cNvPr id="20" name="Image 3" descr="preencoded.png">    </p:cNvPr>
+          <p:cNvPicPr>
+            <a:picLocks noChangeAspect="1"/>
+          </p:cNvPicPr>
+          <p:nvPr/>
+        </p:nvPicPr>
+        <p:blipFill>
+          <a:blip r:embed="rId4"/>
+          <a:stretch>
+            <a:fillRect/>
+          </a:stretch>
+        </p:blipFill>
+        <p:spPr>
+          <a:xfrm>
+            <a:off x="803575" y="3546775"/>
+            <a:ext cx="166787" cy="166787"/>
+          </a:xfrm>
+          <a:prstGeom prst="rect">
+            <a:avLst/>
+          </a:prstGeom>
+        </p:spPr>
+      </p:pic>
+      <p:sp>
+        <p:nvSpPr>
+          <p:cNvPr id="21" name="Text 15"/>
+          <p:cNvSpPr/>
+          <p:nvPr/>
+        </p:nvSpPr>
+        <p:spPr>
+          <a:xfrm>
+            <a:off x="1207008" y="3392424"/>
+            <a:ext cx="10271455" cy="475488"/>
+          </a:xfrm>
+          <a:prstGeom prst="rect">
+            <a:avLst/>
+          </a:prstGeom>
+          <a:noFill/>
+          <a:ln/>
+        </p:spPr>
+        <p:txBody>
+          <a:bodyPr wrap="square" lIns="0" tIns="0" rIns="0" bIns="0" rtlCol="0" anchor="ctr"/>
+          <a:lstStyle/>
+          <a:p>
             <a:pPr indent="0" marL="0">
               <a:buNone/>
             </a:pPr>
             <a:r>
-              <a:rPr lang="en-US" sz="1350" dirty="0">
+              <a:rPr lang="en-US" sz="1250" dirty="0">
                 <a:solidFill>
                   <a:srgbClr val="1B2440"/>
                 </a:solidFill>
@@ -7647,9 +9674,359 @@
                 <a:ea typeface="Calibri" pitchFamily="34" charset="-122"/>
                 <a:cs typeface="Calibri" pitchFamily="34" charset="-120"/>
               </a:rPr>
-              <a:t>run it through the extractor, have a teammate glance over the output, then send it. That's the whole routine for most features.</a:t>
-            </a:r>
-            <a:endParaRPr lang="en-US" sz="1350" dirty="0"/>
+              <a:t>Same versioning &amp; tagging approach — Confi always pulls one known-good, tagged release</a:t>
+            </a:r>
+            <a:endParaRPr lang="en-US" sz="1250" dirty="0"/>
+          </a:p>
+        </p:txBody>
+      </p:sp>
+      <p:sp>
+        <p:nvSpPr>
+          <p:cNvPr id="22" name="Shape 16"/>
+          <p:cNvSpPr/>
+          <p:nvPr/>
+        </p:nvSpPr>
+        <p:spPr>
+          <a:xfrm>
+            <a:off x="548640" y="3959352"/>
+            <a:ext cx="11094415" cy="475488"/>
+          </a:xfrm>
+          <a:prstGeom prst="roundRect">
+            <a:avLst>
+              <a:gd name="adj" fmla="val 17308"/>
+            </a:avLst>
+          </a:prstGeom>
+          <a:solidFill>
+            <a:srgbClr val="EDF3FC"/>
+          </a:solidFill>
+          <a:ln/>
+          <a:effectLst>
+            <a:outerShdw sx="100000" sy="100000" kx="0" ky="0" algn="bl" rotWithShape="0" blurRad="76200" dist="12700" dir="5400000">
+              <a:srgbClr val="9AA7C4">
+                <a:alpha val="22000"/>
+              </a:srgbClr>
+            </a:outerShdw>
+          </a:effectLst>
+        </p:spPr>
+      </p:sp>
+      <p:sp>
+        <p:nvSpPr>
+          <p:cNvPr id="23" name="Shape 17"/>
+          <p:cNvSpPr/>
+          <p:nvPr/>
+        </p:nvSpPr>
+        <p:spPr>
+          <a:xfrm>
+            <a:off x="713232" y="4023360"/>
+            <a:ext cx="347472" cy="347472"/>
+          </a:xfrm>
+          <a:prstGeom prst="ellipse">
+            <a:avLst/>
+          </a:prstGeom>
+          <a:solidFill>
+            <a:srgbClr val="2E7D5B"/>
+          </a:solidFill>
+          <a:ln/>
+        </p:spPr>
+      </p:sp>
+      <p:pic>
+        <p:nvPicPr>
+          <p:cNvPr id="24" name="Image 4" descr="preencoded.png">    </p:cNvPr>
+          <p:cNvPicPr>
+            <a:picLocks noChangeAspect="1"/>
+          </p:cNvPicPr>
+          <p:nvPr/>
+        </p:nvPicPr>
+        <p:blipFill>
+          <a:blip r:embed="rId5"/>
+          <a:stretch>
+            <a:fillRect/>
+          </a:stretch>
+        </p:blipFill>
+        <p:spPr>
+          <a:xfrm>
+            <a:off x="803575" y="4113703"/>
+            <a:ext cx="166787" cy="166787"/>
+          </a:xfrm>
+          <a:prstGeom prst="rect">
+            <a:avLst/>
+          </a:prstGeom>
+        </p:spPr>
+      </p:pic>
+      <p:sp>
+        <p:nvSpPr>
+          <p:cNvPr id="25" name="Text 18"/>
+          <p:cNvSpPr/>
+          <p:nvPr/>
+        </p:nvSpPr>
+        <p:spPr>
+          <a:xfrm>
+            <a:off x="1207008" y="3959352"/>
+            <a:ext cx="10271455" cy="475488"/>
+          </a:xfrm>
+          <a:prstGeom prst="rect">
+            <a:avLst/>
+          </a:prstGeom>
+          <a:noFill/>
+          <a:ln/>
+        </p:spPr>
+        <p:txBody>
+          <a:bodyPr wrap="square" lIns="0" tIns="0" rIns="0" bIns="0" rtlCol="0" anchor="ctr"/>
+          <a:lstStyle/>
+          <a:p>
+            <a:pPr indent="0" marL="0">
+              <a:buNone/>
+            </a:pPr>
+            <a:r>
+              <a:rPr lang="en-US" sz="1250" dirty="0">
+                <a:solidFill>
+                  <a:srgbClr val="1B2440"/>
+                </a:solidFill>
+                <a:latin typeface="Calibri" pitchFamily="34" charset="0"/>
+                <a:ea typeface="Calibri" pitchFamily="34" charset="-122"/>
+                <a:cs typeface="Calibri" pitchFamily="34" charset="-120"/>
+              </a:rPr>
+              <a:t>Dependencies checked against what Confi already allows, so surprises show up early, not at integration</a:t>
+            </a:r>
+            <a:endParaRPr lang="en-US" sz="1250" dirty="0"/>
+          </a:p>
+        </p:txBody>
+      </p:sp>
+      <p:sp>
+        <p:nvSpPr>
+          <p:cNvPr id="26" name="Shape 19"/>
+          <p:cNvSpPr/>
+          <p:nvPr/>
+        </p:nvSpPr>
+        <p:spPr>
+          <a:xfrm>
+            <a:off x="548640" y="4526280"/>
+            <a:ext cx="11094415" cy="475488"/>
+          </a:xfrm>
+          <a:prstGeom prst="roundRect">
+            <a:avLst>
+              <a:gd name="adj" fmla="val 17308"/>
+            </a:avLst>
+          </a:prstGeom>
+          <a:solidFill>
+            <a:srgbClr val="EDF3FC"/>
+          </a:solidFill>
+          <a:ln/>
+          <a:effectLst>
+            <a:outerShdw sx="100000" sy="100000" kx="0" ky="0" algn="bl" rotWithShape="0" blurRad="76200" dist="12700" dir="5400000">
+              <a:srgbClr val="9AA7C4">
+                <a:alpha val="22000"/>
+              </a:srgbClr>
+            </a:outerShdw>
+          </a:effectLst>
+        </p:spPr>
+      </p:sp>
+      <p:sp>
+        <p:nvSpPr>
+          <p:cNvPr id="27" name="Shape 20"/>
+          <p:cNvSpPr/>
+          <p:nvPr/>
+        </p:nvSpPr>
+        <p:spPr>
+          <a:xfrm>
+            <a:off x="713232" y="4590288"/>
+            <a:ext cx="347472" cy="347472"/>
+          </a:xfrm>
+          <a:prstGeom prst="ellipse">
+            <a:avLst/>
+          </a:prstGeom>
+          <a:solidFill>
+            <a:srgbClr val="2E7D5B"/>
+          </a:solidFill>
+          <a:ln/>
+        </p:spPr>
+      </p:sp>
+      <p:pic>
+        <p:nvPicPr>
+          <p:cNvPr id="28" name="Image 5" descr="preencoded.png">    </p:cNvPr>
+          <p:cNvPicPr>
+            <a:picLocks noChangeAspect="1"/>
+          </p:cNvPicPr>
+          <p:nvPr/>
+        </p:nvPicPr>
+        <p:blipFill>
+          <a:blip r:embed="rId6"/>
+          <a:stretch>
+            <a:fillRect/>
+          </a:stretch>
+        </p:blipFill>
+        <p:spPr>
+          <a:xfrm>
+            <a:off x="803575" y="4680631"/>
+            <a:ext cx="166787" cy="166787"/>
+          </a:xfrm>
+          <a:prstGeom prst="rect">
+            <a:avLst/>
+          </a:prstGeom>
+        </p:spPr>
+      </p:pic>
+      <p:sp>
+        <p:nvSpPr>
+          <p:cNvPr id="29" name="Text 21"/>
+          <p:cNvSpPr/>
+          <p:nvPr/>
+        </p:nvSpPr>
+        <p:spPr>
+          <a:xfrm>
+            <a:off x="1207008" y="4526280"/>
+            <a:ext cx="10271455" cy="475488"/>
+          </a:xfrm>
+          <a:prstGeom prst="rect">
+            <a:avLst/>
+          </a:prstGeom>
+          <a:noFill/>
+          <a:ln/>
+        </p:spPr>
+        <p:txBody>
+          <a:bodyPr wrap="square" lIns="0" tIns="0" rIns="0" bIns="0" rtlCol="0" anchor="ctr"/>
+          <a:lstStyle/>
+          <a:p>
+            <a:pPr indent="0" marL="0">
+              <a:buNone/>
+            </a:pPr>
+            <a:r>
+              <a:rPr lang="en-US" sz="1250" dirty="0">
+                <a:solidFill>
+                  <a:srgbClr val="1B2440"/>
+                </a:solidFill>
+                <a:latin typeface="Calibri" pitchFamily="34" charset="0"/>
+                <a:ea typeface="Calibri" pitchFamily="34" charset="-122"/>
+                <a:cs typeface="Calibri" pitchFamily="34" charset="-120"/>
+              </a:rPr>
+              <a:t>Config (URLs, auth, environment stuff) lives in one clearly separate place from the feature code</a:t>
+            </a:r>
+            <a:endParaRPr lang="en-US" sz="1250" dirty="0"/>
+          </a:p>
+        </p:txBody>
+      </p:sp>
+      <p:sp>
+        <p:nvSpPr>
+          <p:cNvPr id="30" name="Shape 22"/>
+          <p:cNvSpPr/>
+          <p:nvPr/>
+        </p:nvSpPr>
+        <p:spPr>
+          <a:xfrm>
+            <a:off x="548640" y="5166360"/>
+            <a:ext cx="11094415" cy="777240"/>
+          </a:xfrm>
+          <a:prstGeom prst="roundRect">
+            <a:avLst>
+              <a:gd name="adj" fmla="val 10588"/>
+            </a:avLst>
+          </a:prstGeom>
+          <a:solidFill>
+            <a:srgbClr val="EAF4EF"/>
+          </a:solidFill>
+          <a:ln/>
+          <a:effectLst>
+            <a:outerShdw sx="100000" sy="100000" kx="0" ky="0" algn="bl" rotWithShape="0" blurRad="76200" dist="12700" dir="5400000">
+              <a:srgbClr val="9AA7C4">
+                <a:alpha val="22000"/>
+              </a:srgbClr>
+            </a:outerShdw>
+          </a:effectLst>
+        </p:spPr>
+      </p:sp>
+      <p:sp>
+        <p:nvSpPr>
+          <p:cNvPr id="31" name="Shape 23"/>
+          <p:cNvSpPr/>
+          <p:nvPr/>
+        </p:nvSpPr>
+        <p:spPr>
+          <a:xfrm>
+            <a:off x="749808" y="5303520"/>
+            <a:ext cx="502920" cy="502920"/>
+          </a:xfrm>
+          <a:prstGeom prst="ellipse">
+            <a:avLst/>
+          </a:prstGeom>
+          <a:solidFill>
+            <a:srgbClr val="2E7D5B"/>
+          </a:solidFill>
+          <a:ln/>
+        </p:spPr>
+      </p:sp>
+      <p:pic>
+        <p:nvPicPr>
+          <p:cNvPr id="32" name="Image 6" descr="preencoded.png">    </p:cNvPr>
+          <p:cNvPicPr>
+            <a:picLocks noChangeAspect="1"/>
+          </p:cNvPicPr>
+          <p:nvPr/>
+        </p:nvPicPr>
+        <p:blipFill>
+          <a:blip r:embed="rId7"/>
+          <a:stretch>
+            <a:fillRect/>
+          </a:stretch>
+        </p:blipFill>
+        <p:spPr>
+          <a:xfrm>
+            <a:off x="880567" y="5434279"/>
+            <a:ext cx="241402" cy="241402"/>
+          </a:xfrm>
+          <a:prstGeom prst="rect">
+            <a:avLst/>
+          </a:prstGeom>
+        </p:spPr>
+      </p:pic>
+      <p:sp>
+        <p:nvSpPr>
+          <p:cNvPr id="33" name="Text 24"/>
+          <p:cNvSpPr/>
+          <p:nvPr/>
+        </p:nvSpPr>
+        <p:spPr>
+          <a:xfrm>
+            <a:off x="1389888" y="5212080"/>
+            <a:ext cx="10042855" cy="594360"/>
+          </a:xfrm>
+          <a:prstGeom prst="rect">
+            <a:avLst/>
+          </a:prstGeom>
+          <a:noFill/>
+          <a:ln/>
+        </p:spPr>
+        <p:txBody>
+          <a:bodyPr wrap="square" lIns="0" tIns="0" rIns="0" bIns="0" rtlCol="0" anchor="ctr"/>
+          <a:lstStyle/>
+          <a:p>
+            <a:pPr indent="0" marL="0">
+              <a:buNone/>
+            </a:pPr>
+            <a:r>
+              <a:rPr lang="en-US" sz="1250" b="1" dirty="0">
+                <a:solidFill>
+                  <a:srgbClr val="2E7D5B"/>
+                </a:solidFill>
+                <a:latin typeface="Calibri" pitchFamily="34" charset="0"/>
+                <a:ea typeface="Calibri" pitchFamily="34" charset="-122"/>
+                <a:cs typeface="Calibri" pitchFamily="34" charset="-120"/>
+              </a:rPr>
+              <a:t>Do these six things consistently and </a:t>
+            </a:r>
+            <a:pPr indent="0" marL="0">
+              <a:buNone/>
+            </a:pPr>
+            <a:r>
+              <a:rPr lang="en-US" sz="1250" dirty="0">
+                <a:solidFill>
+                  <a:srgbClr val="1B2440"/>
+                </a:solidFill>
+                <a:latin typeface="Calibri" pitchFamily="34" charset="0"/>
+                <a:ea typeface="Calibri" pitchFamily="34" charset="-122"/>
+                <a:cs typeface="Calibri" pitchFamily="34" charset="-120"/>
+              </a:rPr>
+              <a:t>“bringing it inside” becomes closer to a deploy than a rewrite — which is the whole goal of building outside in the first place.</a:t>
+            </a:r>
+            <a:endParaRPr lang="en-US" sz="1250" dirty="0"/>
           </a:p>
         </p:txBody>
       </p:sp>
@@ -7796,7 +10173,7 @@
                 <a:ea typeface="Calibri" pitchFamily="34" charset="-122"/>
                 <a:cs typeface="Calibri" pitchFamily="34" charset="-120"/>
               </a:rPr>
-              <a:t>THE ONE TRICKY PART, MADE SIMPLE</a:t>
+              <a:t>KEEPING IT SIMPLE FOR EVERYONE</a:t>
             </a:r>
             <a:endParaRPr lang="en-US" sz="1200" dirty="0"/>
           </a:p>
@@ -7835,7 +10212,7 @@
                 <a:ea typeface="Cambria" pitchFamily="34" charset="-122"/>
                 <a:cs typeface="Cambria" pitchFamily="34" charset="-120"/>
               </a:rPr>
-              <a:t>Real rules plug in later — like an environment config</a:t>
+              <a:t>A short, boring list beats a long, scary one</a:t>
             </a:r>
             <a:endParaRPr lang="en-US" sz="2800" dirty="0"/>
           </a:p>
@@ -7843,152 +10220,18 @@
       </p:sp>
       <p:sp>
         <p:nvSpPr>
-          <p:cNvPr id="6" name="Text 4"/>
-          <p:cNvSpPr/>
-          <p:nvPr/>
-        </p:nvSpPr>
-        <p:spPr>
-          <a:xfrm>
-            <a:off x="548640" y="1783080"/>
-            <a:ext cx="5120640" cy="3931920"/>
-          </a:xfrm>
-          <a:prstGeom prst="rect">
-            <a:avLst/>
-          </a:prstGeom>
-          <a:noFill/>
-          <a:ln/>
-        </p:spPr>
-        <p:txBody>
-          <a:bodyPr wrap="square" lIns="0" tIns="0" rIns="0" bIns="0" rtlCol="0" anchor="ctr"/>
-          <a:lstStyle/>
-          <a:p>
-            <a:pPr indent="0" marL="0">
-              <a:spcAft>
-                <a:spcPts val="600"/>
-              </a:spcAft>
-              <a:buNone/>
-            </a:pPr>
-            <a:r>
-              <a:rPr lang="en-US" sz="1450" dirty="0">
-                <a:solidFill>
-                  <a:srgbClr val="1B2440"/>
-                </a:solidFill>
-                <a:latin typeface="Calibri" pitchFamily="34" charset="0"/>
-                <a:ea typeface="Calibri" pitchFamily="34" charset="-122"/>
-                <a:cs typeface="Calibri" pitchFamily="34" charset="-120"/>
-              </a:rPr>
-              <a:t>The app we build outside works off placeholder rules and made-up sample data, so it's fully testable entirely on its own.</a:t>
-            </a:r>
-            <a:endParaRPr lang="en-US" sz="1450" dirty="0"/>
-          </a:p>
-          <a:p>
-            <a:pPr indent="0" marL="0">
-              <a:spcAft>
-                <a:spcPts val="600"/>
-              </a:spcAft>
-              <a:buNone/>
-            </a:pPr>
-            <a:endParaRPr lang="en-US" sz="1450" dirty="0"/>
-          </a:p>
-          <a:p>
-            <a:pPr indent="0" marL="0">
-              <a:spcAft>
-                <a:spcPts val="600"/>
-              </a:spcAft>
-              <a:buNone/>
-            </a:pPr>
-            <a:r>
-              <a:rPr lang="en-US" sz="1450" dirty="0">
-                <a:solidFill>
-                  <a:srgbClr val="1B2440"/>
-                </a:solidFill>
-                <a:latin typeface="Calibri" pitchFamily="34" charset="0"/>
-                <a:ea typeface="Calibri" pitchFamily="34" charset="-122"/>
-                <a:cs typeface="Calibri" pitchFamily="34" charset="-120"/>
-              </a:rPr>
-              <a:t>Once it moves inside, we point it at the real rules and real data instead — similar to swapping an </a:t>
-            </a:r>
-            <a:pPr indent="0" marL="0">
-              <a:spcAft>
-                <a:spcPts val="600"/>
-              </a:spcAft>
-              <a:buNone/>
-            </a:pPr>
-            <a:r>
-              <a:rPr lang="en-US" sz="1450" dirty="0">
-                <a:solidFill>
-                  <a:srgbClr val="1E2761"/>
-                </a:solidFill>
-                <a:latin typeface="Courier New" pitchFamily="34" charset="0"/>
-                <a:ea typeface="Courier New" pitchFamily="34" charset="-122"/>
-                <a:cs typeface="Courier New" pitchFamily="34" charset="-120"/>
-              </a:rPr>
-              <a:t>.env</a:t>
-            </a:r>
-            <a:pPr indent="0" marL="0">
-              <a:spcAft>
-                <a:spcPts val="600"/>
-              </a:spcAft>
-              <a:buNone/>
-            </a:pPr>
-            <a:r>
-              <a:rPr lang="en-US" sz="1450" dirty="0">
-                <a:solidFill>
-                  <a:srgbClr val="1B2440"/>
-                </a:solidFill>
-                <a:latin typeface="Calibri" pitchFamily="34" charset="0"/>
-                <a:ea typeface="Calibri" pitchFamily="34" charset="-122"/>
-                <a:cs typeface="Calibri" pitchFamily="34" charset="-120"/>
-              </a:rPr>
-              <a:t> file, not rewriting the app.</a:t>
-            </a:r>
-            <a:endParaRPr lang="en-US" sz="1450" dirty="0"/>
-          </a:p>
-          <a:p>
-            <a:pPr indent="0" marL="0">
-              <a:spcAft>
-                <a:spcPts val="600"/>
-              </a:spcAft>
-              <a:buNone/>
-            </a:pPr>
-            <a:endParaRPr lang="en-US" sz="1450" dirty="0"/>
-          </a:p>
-          <a:p>
-            <a:pPr indent="0" marL="0">
-              <a:spcAft>
-                <a:spcPts val="600"/>
-              </a:spcAft>
-              <a:buNone/>
-            </a:pPr>
-            <a:r>
-              <a:rPr lang="en-US" sz="1450" b="1" dirty="0">
-                <a:solidFill>
-                  <a:srgbClr val="2E7D5B"/>
-                </a:solidFill>
-                <a:latin typeface="Calibri" pitchFamily="34" charset="0"/>
-                <a:ea typeface="Calibri" pitchFamily="34" charset="-122"/>
-                <a:cs typeface="Calibri" pitchFamily="34" charset="-120"/>
-              </a:rPr>
-              <a:t>Some rules will be complex or sensitive enough that we just build them directly inside — that's completely fine. We'll flag those upfront, per feature, so nobody's surprised later.</a:t>
-            </a:r>
-            <a:endParaRPr lang="en-US" sz="1450" dirty="0"/>
-          </a:p>
-        </p:txBody>
-      </p:sp>
-      <p:sp>
-        <p:nvSpPr>
-          <p:cNvPr id="7" name="Shape 5"/>
-          <p:cNvSpPr/>
-          <p:nvPr/>
-        </p:nvSpPr>
-        <p:spPr>
-          <a:xfrm>
-            <a:off x="6126480" y="1783080"/>
-            <a:ext cx="5486400" cy="1874520"/>
+          <p:cNvPr id="6" name="Shape 4"/>
+          <p:cNvSpPr/>
+          <p:nvPr/>
+        </p:nvSpPr>
+        <p:spPr>
+          <a:xfrm>
+            <a:off x="548640" y="1691640"/>
+            <a:ext cx="5364328" cy="3200400"/>
           </a:xfrm>
           <a:prstGeom prst="roundRect">
             <a:avLst>
-              <a:gd name="adj" fmla="val 4390"/>
+              <a:gd name="adj" fmla="val 2571"/>
             </a:avLst>
           </a:prstGeom>
           <a:solidFill>
@@ -8006,14 +10249,14 @@
       </p:sp>
       <p:sp>
         <p:nvSpPr>
-          <p:cNvPr id="8" name="Shape 6"/>
-          <p:cNvSpPr/>
-          <p:nvPr/>
-        </p:nvSpPr>
-        <p:spPr>
-          <a:xfrm>
-            <a:off x="6355080" y="1984248"/>
-            <a:ext cx="502920" cy="502920"/>
+          <p:cNvPr id="7" name="Shape 5"/>
+          <p:cNvSpPr/>
+          <p:nvPr/>
+        </p:nvSpPr>
+        <p:spPr>
+          <a:xfrm>
+            <a:off x="804672" y="1920240"/>
+            <a:ext cx="530352" cy="530352"/>
           </a:xfrm>
           <a:prstGeom prst="ellipse">
             <a:avLst/>
@@ -8026,7 +10269,7 @@
       </p:sp>
       <p:pic>
         <p:nvPicPr>
-          <p:cNvPr id="9" name="Image 0" descr="preencoded.png">    </p:cNvPr>
+          <p:cNvPr id="8" name="Image 0" descr="preencoded.png">    </p:cNvPr>
           <p:cNvPicPr>
             <a:picLocks noChangeAspect="1"/>
           </p:cNvPicPr>
@@ -8040,8 +10283,8 @@
         </p:blipFill>
         <p:spPr>
           <a:xfrm>
-            <a:off x="6485839" y="2115007"/>
-            <a:ext cx="241402" cy="241402"/>
+            <a:off x="942564" y="2058132"/>
+            <a:ext cx="254569" cy="254569"/>
           </a:xfrm>
           <a:prstGeom prst="rect">
             <a:avLst/>
@@ -8050,69 +10293,73 @@
       </p:pic>
       <p:sp>
         <p:nvSpPr>
+          <p:cNvPr id="9" name="Text 6"/>
+          <p:cNvSpPr/>
+          <p:nvPr/>
+        </p:nvSpPr>
+        <p:spPr>
+          <a:xfrm>
+            <a:off x="1463040" y="1975104"/>
+            <a:ext cx="4267048" cy="365760"/>
+          </a:xfrm>
+          <a:prstGeom prst="rect">
+            <a:avLst/>
+          </a:prstGeom>
+          <a:noFill/>
+          <a:ln/>
+        </p:spPr>
+        <p:txBody>
+          <a:bodyPr wrap="square" lIns="0" tIns="0" rIns="0" bIns="0" rtlCol="0" anchor="ctr"/>
+          <a:lstStyle/>
+          <a:p>
+            <a:pPr indent="0" marL="0">
+              <a:buNone/>
+            </a:pPr>
+            <a:r>
+              <a:rPr lang="en-US" sz="1500" b="1" dirty="0">
+                <a:solidFill>
+                  <a:srgbClr val="2E7D5B"/>
+                </a:solidFill>
+                <a:latin typeface="Calibri" pitchFamily="34" charset="0"/>
+                <a:ea typeface="Calibri" pitchFamily="34" charset="-122"/>
+                <a:cs typeface="Calibri" pitchFamily="34" charset="-120"/>
+              </a:rPr>
+              <a:t>Goes outside</a:t>
+            </a:r>
+            <a:endParaRPr lang="en-US" sz="1500" dirty="0"/>
+          </a:p>
+        </p:txBody>
+      </p:sp>
+      <p:sp>
+        <p:nvSpPr>
           <p:cNvPr id="10" name="Text 7"/>
           <p:cNvSpPr/>
           <p:nvPr/>
         </p:nvSpPr>
         <p:spPr>
           <a:xfrm>
-            <a:off x="6967728" y="2029968"/>
-            <a:ext cx="4480560" cy="365760"/>
-          </a:xfrm>
-          <a:prstGeom prst="rect">
-            <a:avLst/>
-          </a:prstGeom>
-          <a:noFill/>
-          <a:ln/>
-        </p:spPr>
-        <p:txBody>
-          <a:bodyPr wrap="square" lIns="0" tIns="0" rIns="0" bIns="0" rtlCol="0" anchor="ctr"/>
-          <a:lstStyle/>
-          <a:p>
-            <a:pPr indent="0" marL="0">
-              <a:buNone/>
-            </a:pPr>
-            <a:r>
-              <a:rPr lang="en-US" sz="1300" b="1" dirty="0">
-                <a:solidFill>
-                  <a:srgbClr val="2E7D5B"/>
-                </a:solidFill>
-                <a:latin typeface="Calibri" pitchFamily="34" charset="0"/>
-                <a:ea typeface="Calibri" pitchFamily="34" charset="-122"/>
-                <a:cs typeface="Calibri" pitchFamily="34" charset="-120"/>
-              </a:rPr>
-              <a:t>OUTSIDE — placeholder rules</a:t>
-            </a:r>
-            <a:endParaRPr lang="en-US" sz="1300" dirty="0"/>
-          </a:p>
-        </p:txBody>
-      </p:sp>
-      <p:sp>
-        <p:nvSpPr>
-          <p:cNvPr id="11" name="Text 8"/>
-          <p:cNvSpPr/>
-          <p:nvPr/>
-        </p:nvSpPr>
-        <p:spPr>
-          <a:xfrm>
-            <a:off x="6382512" y="2450592"/>
-            <a:ext cx="4974336" cy="1005840"/>
-          </a:xfrm>
-          <a:prstGeom prst="rect">
-            <a:avLst/>
-          </a:prstGeom>
-          <a:noFill/>
-          <a:ln/>
-        </p:spPr>
-        <p:txBody>
-          <a:bodyPr wrap="square" lIns="0" tIns="0" rIns="0" bIns="0" rtlCol="0" anchor="ctr"/>
-          <a:lstStyle/>
-          <a:p>
-            <a:pPr indent="0" marL="0">
-              <a:buNone/>
-            </a:pPr>
-            <a:r>
-              <a:rPr lang="en-US" sz="1150" dirty="0">
+            <a:off x="822960" y="2468880"/>
+            <a:ext cx="4815688" cy="2286000"/>
+          </a:xfrm>
+          <a:prstGeom prst="rect">
+            <a:avLst/>
+          </a:prstGeom>
+          <a:noFill/>
+          <a:ln/>
+        </p:spPr>
+        <p:txBody>
+          <a:bodyPr wrap="square" lIns="0" tIns="0" rIns="0" bIns="0" rtlCol="0" anchor="ctr"/>
+          <a:lstStyle/>
+          <a:p>
+            <a:pPr marL="342900" indent="-342900">
+              <a:spcAft>
+                <a:spcPts val="800"/>
+              </a:spcAft>
+              <a:buSzPct val="100000"/>
+              <a:buChar char="•"/>
+            </a:pPr>
+            <a:r>
+              <a:rPr lang="en-US" sz="1250" dirty="0">
                 <a:solidFill>
                   <a:srgbClr val="1B2440"/>
                 </a:solidFill>
@@ -8120,65 +10367,68 @@
                 <a:ea typeface="Calibri" pitchFamily="34" charset="-122"/>
                 <a:cs typeface="Calibri" pitchFamily="34" charset="-120"/>
               </a:rPr>
-              <a:t>Fake but realistic values. Looks and behaves the same way the real thing will — enough to build and test the whole feature with confidence.</a:t>
-            </a:r>
-            <a:endParaRPr lang="en-US" sz="1150" dirty="0"/>
-          </a:p>
-        </p:txBody>
-      </p:sp>
-      <p:sp>
-        <p:nvSpPr>
-          <p:cNvPr id="12" name="Text 9"/>
-          <p:cNvSpPr/>
-          <p:nvPr/>
-        </p:nvSpPr>
-        <p:spPr>
-          <a:xfrm>
-            <a:off x="6126480" y="3794760"/>
-            <a:ext cx="5486400" cy="320040"/>
-          </a:xfrm>
-          <a:prstGeom prst="rect">
-            <a:avLst/>
-          </a:prstGeom>
-          <a:noFill/>
-          <a:ln/>
-        </p:spPr>
-        <p:txBody>
-          <a:bodyPr wrap="square" lIns="0" tIns="0" rIns="0" bIns="0" rtlCol="0" anchor="ctr"/>
-          <a:lstStyle/>
-          <a:p>
-            <a:pPr algn="ctr" indent="0" marL="0">
-              <a:buNone/>
-            </a:pPr>
-            <a:r>
-              <a:rPr lang="en-US" sz="1200" b="1" dirty="0">
-                <a:solidFill>
-                  <a:srgbClr val="5A6B8C"/>
-                </a:solidFill>
-                <a:latin typeface="Calibri" pitchFamily="34" charset="0"/>
-                <a:ea typeface="Calibri" pitchFamily="34" charset="-122"/>
-                <a:cs typeface="Calibri" pitchFamily="34" charset="-120"/>
-              </a:rPr>
-              <a:t>▼  same app, different values  ▼</a:t>
-            </a:r>
-            <a:endParaRPr lang="en-US" sz="1200" dirty="0"/>
-          </a:p>
-        </p:txBody>
-      </p:sp>
-      <p:sp>
-        <p:nvSpPr>
-          <p:cNvPr id="13" name="Shape 10"/>
-          <p:cNvSpPr/>
-          <p:nvPr/>
-        </p:nvSpPr>
-        <p:spPr>
-          <a:xfrm>
-            <a:off x="6126480" y="4160520"/>
-            <a:ext cx="5486400" cy="1828800"/>
+              <a:t>Routes &amp; structure, renamed</a:t>
+            </a:r>
+            <a:endParaRPr lang="en-US" sz="1250" dirty="0"/>
+          </a:p>
+          <a:p>
+            <a:pPr marL="342900" indent="-342900">
+              <a:spcAft>
+                <a:spcPts val="800"/>
+              </a:spcAft>
+              <a:buSzPct val="100000"/>
+              <a:buChar char="•"/>
+            </a:pPr>
+            <a:r>
+              <a:rPr lang="en-US" sz="1250" dirty="0">
+                <a:solidFill>
+                  <a:srgbClr val="1B2440"/>
+                </a:solidFill>
+                <a:latin typeface="Calibri" pitchFamily="34" charset="0"/>
+                <a:ea typeface="Calibri" pitchFamily="34" charset="-122"/>
+                <a:cs typeface="Calibri" pitchFamily="34" charset="-120"/>
+              </a:rPr>
+              <a:t>API contracts + sample data</a:t>
+            </a:r>
+            <a:endParaRPr lang="en-US" sz="1250" dirty="0"/>
+          </a:p>
+          <a:p>
+            <a:pPr marL="342900" indent="-342900">
+              <a:spcAft>
+                <a:spcPts val="800"/>
+              </a:spcAft>
+              <a:buSzPct val="100000"/>
+              <a:buChar char="•"/>
+            </a:pPr>
+            <a:r>
+              <a:rPr lang="en-US" sz="1250" dirty="0">
+                <a:solidFill>
+                  <a:srgbClr val="1B2440"/>
+                </a:solidFill>
+                <a:latin typeface="Calibri" pitchFamily="34" charset="0"/>
+                <a:ea typeface="Calibri" pitchFamily="34" charset="-122"/>
+                <a:cs typeface="Calibri" pitchFamily="34" charset="-120"/>
+              </a:rPr>
+              <a:t>Source code, run through our extractor tool first</a:t>
+            </a:r>
+            <a:endParaRPr lang="en-US" sz="1250" dirty="0"/>
+          </a:p>
+        </p:txBody>
+      </p:sp>
+      <p:sp>
+        <p:nvSpPr>
+          <p:cNvPr id="11" name="Shape 8"/>
+          <p:cNvSpPr/>
+          <p:nvPr/>
+        </p:nvSpPr>
+        <p:spPr>
+          <a:xfrm>
+            <a:off x="6278728" y="1691640"/>
+            <a:ext cx="5364328" cy="3200400"/>
           </a:xfrm>
           <a:prstGeom prst="roundRect">
             <a:avLst>
-              <a:gd name="adj" fmla="val 4500"/>
+              <a:gd name="adj" fmla="val 2571"/>
             </a:avLst>
           </a:prstGeom>
           <a:solidFill>
@@ -8196,14 +10446,14 @@
       </p:sp>
       <p:sp>
         <p:nvSpPr>
-          <p:cNvPr id="14" name="Shape 11"/>
-          <p:cNvSpPr/>
-          <p:nvPr/>
-        </p:nvSpPr>
-        <p:spPr>
-          <a:xfrm>
-            <a:off x="6355080" y="4361688"/>
-            <a:ext cx="502920" cy="502920"/>
+          <p:cNvPr id="12" name="Shape 9"/>
+          <p:cNvSpPr/>
+          <p:nvPr/>
+        </p:nvSpPr>
+        <p:spPr>
+          <a:xfrm>
+            <a:off x="6534760" y="1920240"/>
+            <a:ext cx="530352" cy="530352"/>
           </a:xfrm>
           <a:prstGeom prst="ellipse">
             <a:avLst/>
@@ -8216,7 +10466,7 @@
       </p:sp>
       <p:pic>
         <p:nvPicPr>
-          <p:cNvPr id="15" name="Image 1" descr="preencoded.png">    </p:cNvPr>
+          <p:cNvPr id="13" name="Image 1" descr="preencoded.png">    </p:cNvPr>
           <p:cNvPicPr>
             <a:picLocks noChangeAspect="1"/>
           </p:cNvPicPr>
@@ -8230,8 +10480,8 @@
         </p:blipFill>
         <p:spPr>
           <a:xfrm>
-            <a:off x="6485839" y="4492447"/>
-            <a:ext cx="241402" cy="241402"/>
+            <a:off x="6672651" y="2058132"/>
+            <a:ext cx="254569" cy="254569"/>
           </a:xfrm>
           <a:prstGeom prst="rect">
             <a:avLst/>
@@ -8240,14 +10490,14 @@
       </p:pic>
       <p:sp>
         <p:nvSpPr>
-          <p:cNvPr id="16" name="Text 12"/>
-          <p:cNvSpPr/>
-          <p:nvPr/>
-        </p:nvSpPr>
-        <p:spPr>
-          <a:xfrm>
-            <a:off x="6967728" y="4407408"/>
-            <a:ext cx="4480560" cy="365760"/>
+          <p:cNvPr id="14" name="Text 10"/>
+          <p:cNvSpPr/>
+          <p:nvPr/>
+        </p:nvSpPr>
+        <p:spPr>
+          <a:xfrm>
+            <a:off x="7193128" y="1975104"/>
+            <a:ext cx="4267048" cy="365760"/>
           </a:xfrm>
           <a:prstGeom prst="rect">
             <a:avLst/>
@@ -8263,7 +10513,7 @@
               <a:buNone/>
             </a:pPr>
             <a:r>
-              <a:rPr lang="en-US" sz="1300" b="1" dirty="0">
+              <a:rPr lang="en-US" sz="1500" b="1" dirty="0">
                 <a:solidFill>
                   <a:srgbClr val="1E2761"/>
                 </a:solidFill>
@@ -8271,22 +10521,201 @@
                 <a:ea typeface="Calibri" pitchFamily="34" charset="-122"/>
                 <a:cs typeface="Calibri" pitchFamily="34" charset="-120"/>
               </a:rPr>
-              <a:t>INSIDE — the real thing</a:t>
-            </a:r>
-            <a:endParaRPr lang="en-US" sz="1300" dirty="0"/>
-          </a:p>
-        </p:txBody>
-      </p:sp>
-      <p:sp>
-        <p:nvSpPr>
-          <p:cNvPr id="17" name="Text 13"/>
-          <p:cNvSpPr/>
-          <p:nvPr/>
-        </p:nvSpPr>
-        <p:spPr>
-          <a:xfrm>
-            <a:off x="6382512" y="4828032"/>
-            <a:ext cx="4974336" cy="1005840"/>
+              <a:t>Stays inside</a:t>
+            </a:r>
+            <a:endParaRPr lang="en-US" sz="1500" dirty="0"/>
+          </a:p>
+        </p:txBody>
+      </p:sp>
+      <p:sp>
+        <p:nvSpPr>
+          <p:cNvPr id="15" name="Text 11"/>
+          <p:cNvSpPr/>
+          <p:nvPr/>
+        </p:nvSpPr>
+        <p:spPr>
+          <a:xfrm>
+            <a:off x="6553048" y="2468880"/>
+            <a:ext cx="4815688" cy="2286000"/>
+          </a:xfrm>
+          <a:prstGeom prst="rect">
+            <a:avLst/>
+          </a:prstGeom>
+          <a:noFill/>
+          <a:ln/>
+        </p:spPr>
+        <p:txBody>
+          <a:bodyPr wrap="square" lIns="0" tIns="0" rIns="0" bIns="0" rtlCol="0" anchor="ctr"/>
+          <a:lstStyle/>
+          <a:p>
+            <a:pPr marL="342900" indent="-342900">
+              <a:spcAft>
+                <a:spcPts val="800"/>
+              </a:spcAft>
+              <a:buSzPct val="100000"/>
+              <a:buChar char="•"/>
+            </a:pPr>
+            <a:r>
+              <a:rPr lang="en-US" sz="1250" dirty="0">
+                <a:solidFill>
+                  <a:srgbClr val="1B2440"/>
+                </a:solidFill>
+                <a:latin typeface="Calibri" pitchFamily="34" charset="0"/>
+                <a:ea typeface="Calibri" pitchFamily="34" charset="-122"/>
+                <a:cs typeface="Calibri" pitchFamily="34" charset="-120"/>
+              </a:rPr>
+              <a:t>mapping.json — our one key file</a:t>
+            </a:r>
+            <a:endParaRPr lang="en-US" sz="1250" dirty="0"/>
+          </a:p>
+          <a:p>
+            <a:pPr marL="342900" indent="-342900">
+              <a:spcAft>
+                <a:spcPts val="800"/>
+              </a:spcAft>
+              <a:buSzPct val="100000"/>
+              <a:buChar char="•"/>
+            </a:pPr>
+            <a:r>
+              <a:rPr lang="en-US" sz="1250" dirty="0">
+                <a:solidFill>
+                  <a:srgbClr val="1B2440"/>
+                </a:solidFill>
+                <a:latin typeface="Calibri" pitchFamily="34" charset="0"/>
+                <a:ea typeface="Calibri" pitchFamily="34" charset="-122"/>
+                <a:cs typeface="Calibri" pitchFamily="34" charset="-120"/>
+              </a:rPr>
+              <a:t>Real names, real data</a:t>
+            </a:r>
+            <a:endParaRPr lang="en-US" sz="1250" dirty="0"/>
+          </a:p>
+          <a:p>
+            <a:pPr marL="342900" indent="-342900">
+              <a:spcAft>
+                <a:spcPts val="800"/>
+              </a:spcAft>
+              <a:buSzPct val="100000"/>
+              <a:buChar char="•"/>
+            </a:pPr>
+            <a:r>
+              <a:rPr lang="en-US" sz="1250" dirty="0">
+                <a:solidFill>
+                  <a:srgbClr val="1B2440"/>
+                </a:solidFill>
+                <a:latin typeface="Calibri" pitchFamily="34" charset="0"/>
+                <a:ea typeface="Calibri" pitchFamily="34" charset="-122"/>
+                <a:cs typeface="Calibri" pitchFamily="34" charset="-120"/>
+              </a:rPr>
+              <a:t>The actual rule values</a:t>
+            </a:r>
+            <a:endParaRPr lang="en-US" sz="1250" dirty="0"/>
+          </a:p>
+          <a:p>
+            <a:pPr marL="342900" indent="-342900">
+              <a:spcAft>
+                <a:spcPts val="800"/>
+              </a:spcAft>
+              <a:buSzPct val="100000"/>
+              <a:buChar char="•"/>
+            </a:pPr>
+            <a:r>
+              <a:rPr lang="en-US" sz="1250" dirty="0">
+                <a:solidFill>
+                  <a:srgbClr val="1B2440"/>
+                </a:solidFill>
+                <a:latin typeface="Calibri" pitchFamily="34" charset="0"/>
+                <a:ea typeface="Calibri" pitchFamily="34" charset="-122"/>
+                <a:cs typeface="Calibri" pitchFamily="34" charset="-120"/>
+              </a:rPr>
+              <a:t>URLs, certs, auth secrets</a:t>
+            </a:r>
+            <a:endParaRPr lang="en-US" sz="1250" dirty="0"/>
+          </a:p>
+        </p:txBody>
+      </p:sp>
+      <p:sp>
+        <p:nvSpPr>
+          <p:cNvPr id="16" name="Shape 12"/>
+          <p:cNvSpPr/>
+          <p:nvPr/>
+        </p:nvSpPr>
+        <p:spPr>
+          <a:xfrm>
+            <a:off x="548640" y="5074920"/>
+            <a:ext cx="11094415" cy="1005840"/>
+          </a:xfrm>
+          <a:prstGeom prst="roundRect">
+            <a:avLst>
+              <a:gd name="adj" fmla="val 8182"/>
+            </a:avLst>
+          </a:prstGeom>
+          <a:solidFill>
+            <a:srgbClr val="EDF3FC"/>
+          </a:solidFill>
+          <a:ln/>
+          <a:effectLst>
+            <a:outerShdw sx="100000" sy="100000" kx="0" ky="0" algn="bl" rotWithShape="0" blurRad="76200" dist="12700" dir="5400000">
+              <a:srgbClr val="9AA7C4">
+                <a:alpha val="22000"/>
+              </a:srgbClr>
+            </a:outerShdw>
+          </a:effectLst>
+        </p:spPr>
+      </p:sp>
+      <p:sp>
+        <p:nvSpPr>
+          <p:cNvPr id="17" name="Shape 13"/>
+          <p:cNvSpPr/>
+          <p:nvPr/>
+        </p:nvSpPr>
+        <p:spPr>
+          <a:xfrm>
+            <a:off x="777240" y="5285232"/>
+            <a:ext cx="566928" cy="566928"/>
+          </a:xfrm>
+          <a:prstGeom prst="ellipse">
+            <a:avLst/>
+          </a:prstGeom>
+          <a:solidFill>
+            <a:srgbClr val="1E2761"/>
+          </a:solidFill>
+          <a:ln/>
+        </p:spPr>
+      </p:sp>
+      <p:pic>
+        <p:nvPicPr>
+          <p:cNvPr id="18" name="Image 2" descr="preencoded.png">    </p:cNvPr>
+          <p:cNvPicPr>
+            <a:picLocks noChangeAspect="1"/>
+          </p:cNvPicPr>
+          <p:nvPr/>
+        </p:nvPicPr>
+        <p:blipFill>
+          <a:blip r:embed="rId3"/>
+          <a:stretch>
+            <a:fillRect/>
+          </a:stretch>
+        </p:blipFill>
+        <p:spPr>
+          <a:xfrm>
+            <a:off x="924641" y="5432633"/>
+            <a:ext cx="272125" cy="272125"/>
+          </a:xfrm>
+          <a:prstGeom prst="rect">
+            <a:avLst/>
+          </a:prstGeom>
+        </p:spPr>
+      </p:pic>
+      <p:sp>
+        <p:nvSpPr>
+          <p:cNvPr id="19" name="Text 14"/>
+          <p:cNvSpPr/>
+          <p:nvPr/>
+        </p:nvSpPr>
+        <p:spPr>
+          <a:xfrm>
+            <a:off x="1554480" y="5193792"/>
+            <a:ext cx="9859975" cy="777240"/>
           </a:xfrm>
           <a:prstGeom prst="rect">
             <a:avLst/>
@@ -8302,7 +10731,21 @@
               <a:buNone/>
             </a:pPr>
             <a:r>
-              <a:rPr lang="en-US" sz="1150" dirty="0">
+              <a:rPr lang="en-US" sz="1350" b="1" dirty="0">
+                <a:solidFill>
+                  <a:srgbClr val="1E2761"/>
+                </a:solidFill>
+                <a:latin typeface="Calibri" pitchFamily="34" charset="0"/>
+                <a:ea typeface="Calibri" pitchFamily="34" charset="-122"/>
+                <a:cs typeface="Calibri" pitchFamily="34" charset="-120"/>
+              </a:rPr>
+              <a:t>One habit does most of the work: </a:t>
+            </a:r>
+            <a:pPr indent="0" marL="0">
+              <a:buNone/>
+            </a:pPr>
+            <a:r>
+              <a:rPr lang="en-US" sz="1350" dirty="0">
                 <a:solidFill>
                   <a:srgbClr val="1B2440"/>
                 </a:solidFill>
@@ -8310,9 +10753,9 @@
                 <a:ea typeface="Calibri" pitchFamily="34" charset="-122"/>
                 <a:cs typeface="Calibri" pitchFamily="34" charset="-120"/>
               </a:rPr>
-              <a:t>Same components, same tests. Only the values underneath change — reviewed and versioned like everything else we ship.</a:t>
-            </a:r>
-            <a:endParaRPr lang="en-US" sz="1150" dirty="0"/>
+              <a:t>run it through the extractor, have a teammate glance over the output, then send it. That's the whole routine for most features.</a:t>
+            </a:r>
+            <a:endParaRPr lang="en-US" sz="1350" dirty="0"/>
           </a:p>
         </p:txBody>
       </p:sp>
@@ -8459,7 +10902,7 @@
                 <a:ea typeface="Calibri" pitchFamily="34" charset="-122"/>
                 <a:cs typeface="Calibri" pitchFamily="34" charset="-120"/>
               </a:rPr>
-              <a:t>BUILDING WITHOUT WAITING ON ANYONE</a:t>
+              <a:t>ELEVATING “LOOKING AT TREES” TO REAL C3</a:t>
             </a:r>
             <a:endParaRPr lang="en-US" sz="1200" dirty="0"/>
           </a:p>
@@ -8498,7 +10941,7 @@
                 <a:ea typeface="Cambria" pitchFamily="34" charset="-122"/>
                 <a:cs typeface="Cambria" pitchFamily="34" charset="-120"/>
               </a:rPr>
-              <a:t>Test the whole thing before it ever touches Confi</a:t>
+              <a:t>The code doesn't care which company it's for — the data does</a:t>
             </a:r>
             <a:endParaRPr lang="en-US" sz="2800" dirty="0"/>
           </a:p>
@@ -8506,22 +10949,219 @@
       </p:sp>
       <p:sp>
         <p:nvSpPr>
-          <p:cNvPr id="6" name="Shape 4"/>
-          <p:cNvSpPr/>
-          <p:nvPr/>
-        </p:nvSpPr>
-        <p:spPr>
-          <a:xfrm>
-            <a:off x="548640" y="1691640"/>
-            <a:ext cx="11094415" cy="859536"/>
+          <p:cNvPr id="6" name="Text 4"/>
+          <p:cNvSpPr/>
+          <p:nvPr/>
+        </p:nvSpPr>
+        <p:spPr>
+          <a:xfrm>
+            <a:off x="548640" y="1737360"/>
+            <a:ext cx="5120640" cy="4114800"/>
+          </a:xfrm>
+          <a:prstGeom prst="rect">
+            <a:avLst/>
+          </a:prstGeom>
+          <a:noFill/>
+          <a:ln/>
+        </p:spPr>
+        <p:txBody>
+          <a:bodyPr wrap="square" lIns="0" tIns="0" rIns="0" bIns="0" rtlCol="0" anchor="ctr"/>
+          <a:lstStyle/>
+          <a:p>
+            <a:pPr indent="0" marL="0">
+              <a:spcAft>
+                <a:spcPts val="500"/>
+              </a:spcAft>
+              <a:buNone/>
+            </a:pPr>
+            <a:r>
+              <a:rPr lang="en-US" sz="1350" dirty="0">
+                <a:solidFill>
+                  <a:srgbClr val="1B2440"/>
+                </a:solidFill>
+                <a:latin typeface="Calibri" pitchFamily="34" charset="0"/>
+                <a:ea typeface="Calibri" pitchFamily="34" charset="-122"/>
+                <a:cs typeface="Calibri" pitchFamily="34" charset="-120"/>
+              </a:rPr>
+              <a:t>Whether it's Looking at Trees or the real thing, the components, forms, validation logic, and flows are exactly the same code either way.</a:t>
+            </a:r>
+            <a:endParaRPr lang="en-US" sz="1350" dirty="0"/>
+          </a:p>
+          <a:p>
+            <a:pPr indent="0" marL="0">
+              <a:spcAft>
+                <a:spcPts val="500"/>
+              </a:spcAft>
+              <a:buNone/>
+            </a:pPr>
+            <a:endParaRPr lang="en-US" sz="1350" dirty="0"/>
+          </a:p>
+          <a:p>
+            <a:pPr indent="0" marL="0">
+              <a:spcAft>
+                <a:spcPts val="500"/>
+              </a:spcAft>
+              <a:buNone/>
+            </a:pPr>
+            <a:r>
+              <a:rPr lang="en-US" sz="1350" dirty="0">
+                <a:solidFill>
+                  <a:srgbClr val="1B2440"/>
+                </a:solidFill>
+                <a:latin typeface="Calibri" pitchFamily="34" charset="0"/>
+                <a:ea typeface="Calibri" pitchFamily="34" charset="-122"/>
+                <a:cs typeface="Calibri" pitchFamily="34" charset="-120"/>
+              </a:rPr>
+              <a:t>What's actually sensitive is almost always the </a:t>
+            </a:r>
+            <a:pPr indent="0" marL="0">
+              <a:spcAft>
+                <a:spcPts val="500"/>
+              </a:spcAft>
+              <a:buNone/>
+            </a:pPr>
+            <a:r>
+              <a:rPr lang="en-US" sz="1350" b="1" dirty="0">
+                <a:solidFill>
+                  <a:srgbClr val="1E2761"/>
+                </a:solidFill>
+                <a:latin typeface="Calibri" pitchFamily="34" charset="0"/>
+                <a:ea typeface="Calibri" pitchFamily="34" charset="-122"/>
+                <a:cs typeface="Calibri" pitchFamily="34" charset="-120"/>
+              </a:rPr>
+              <a:t>data</a:t>
+            </a:r>
+            <a:pPr indent="0" marL="0">
+              <a:spcAft>
+                <a:spcPts val="500"/>
+              </a:spcAft>
+              <a:buNone/>
+            </a:pPr>
+            <a:r>
+              <a:rPr lang="en-US" sz="1350" dirty="0">
+                <a:solidFill>
+                  <a:srgbClr val="1B2440"/>
+                </a:solidFill>
+                <a:latin typeface="Calibri" pitchFamily="34" charset="0"/>
+                <a:ea typeface="Calibri" pitchFamily="34" charset="-122"/>
+                <a:cs typeface="Calibri" pitchFamily="34" charset="-120"/>
+              </a:rPr>
+              <a:t> underneath — real customer records, real figures, real identifiers — plus, occasionally, one or two genuinely sensitive rule values.</a:t>
+            </a:r>
+            <a:endParaRPr lang="en-US" sz="1350" dirty="0"/>
+          </a:p>
+          <a:p>
+            <a:pPr indent="0" marL="0">
+              <a:spcAft>
+                <a:spcPts val="500"/>
+              </a:spcAft>
+              <a:buNone/>
+            </a:pPr>
+            <a:endParaRPr lang="en-US" sz="1350" dirty="0"/>
+          </a:p>
+          <a:p>
+            <a:pPr indent="0" marL="0">
+              <a:spcAft>
+                <a:spcPts val="500"/>
+              </a:spcAft>
+              <a:buNone/>
+            </a:pPr>
+            <a:r>
+              <a:rPr lang="en-US" sz="1350" dirty="0">
+                <a:solidFill>
+                  <a:srgbClr val="1B2440"/>
+                </a:solidFill>
+                <a:latin typeface="Calibri" pitchFamily="34" charset="0"/>
+                <a:ea typeface="Calibri" pitchFamily="34" charset="-122"/>
+                <a:cs typeface="Calibri" pitchFamily="34" charset="-120"/>
+              </a:rPr>
+              <a:t>So outside, the app runs on placeholder data (and placeholder values for the rare sensitive rule). Inside, we point it at the real data instead — closer to swapping an </a:t>
+            </a:r>
+            <a:pPr indent="0" marL="0">
+              <a:spcAft>
+                <a:spcPts val="500"/>
+              </a:spcAft>
+              <a:buNone/>
+            </a:pPr>
+            <a:r>
+              <a:rPr lang="en-US" sz="1350" dirty="0">
+                <a:solidFill>
+                  <a:srgbClr val="1E2761"/>
+                </a:solidFill>
+                <a:latin typeface="Courier New" pitchFamily="34" charset="0"/>
+                <a:ea typeface="Courier New" pitchFamily="34" charset="-122"/>
+                <a:cs typeface="Courier New" pitchFamily="34" charset="-120"/>
+              </a:rPr>
+              <a:t>.env</a:t>
+            </a:r>
+            <a:pPr indent="0" marL="0">
+              <a:spcAft>
+                <a:spcPts val="500"/>
+              </a:spcAft>
+              <a:buNone/>
+            </a:pPr>
+            <a:r>
+              <a:rPr lang="en-US" sz="1350" dirty="0">
+                <a:solidFill>
+                  <a:srgbClr val="1B2440"/>
+                </a:solidFill>
+                <a:latin typeface="Calibri" pitchFamily="34" charset="0"/>
+                <a:ea typeface="Calibri" pitchFamily="34" charset="-122"/>
+                <a:cs typeface="Calibri" pitchFamily="34" charset="-120"/>
+              </a:rPr>
+              <a:t> file than rewriting the app.</a:t>
+            </a:r>
+            <a:endParaRPr lang="en-US" sz="1350" dirty="0"/>
+          </a:p>
+          <a:p>
+            <a:pPr indent="0" marL="0">
+              <a:spcAft>
+                <a:spcPts val="500"/>
+              </a:spcAft>
+              <a:buNone/>
+            </a:pPr>
+            <a:endParaRPr lang="en-US" sz="1350" dirty="0"/>
+          </a:p>
+          <a:p>
+            <a:pPr indent="0" marL="0">
+              <a:spcAft>
+                <a:spcPts val="500"/>
+              </a:spcAft>
+              <a:buNone/>
+            </a:pPr>
+            <a:r>
+              <a:rPr lang="en-US" sz="1350" b="1" dirty="0">
+                <a:solidFill>
+                  <a:srgbClr val="2E7D5B"/>
+                </a:solidFill>
+                <a:latin typeface="Calibri" pitchFamily="34" charset="0"/>
+                <a:ea typeface="Calibri" pitchFamily="34" charset="-122"/>
+                <a:cs typeface="Calibri" pitchFamily="34" charset="-120"/>
+              </a:rPr>
+              <a:t>Some rules will be sensitive or complex enough that we just build them directly inside — that's completely fine. We'll flag those upfront, per feature, so nobody's surprised later.</a:t>
+            </a:r>
+            <a:endParaRPr lang="en-US" sz="1350" dirty="0"/>
+          </a:p>
+        </p:txBody>
+      </p:sp>
+      <p:sp>
+        <p:nvSpPr>
+          <p:cNvPr id="7" name="Shape 5"/>
+          <p:cNvSpPr/>
+          <p:nvPr/>
+        </p:nvSpPr>
+        <p:spPr>
+          <a:xfrm>
+            <a:off x="6126480" y="1737360"/>
+            <a:ext cx="5486400" cy="1874520"/>
           </a:xfrm>
           <a:prstGeom prst="roundRect">
             <a:avLst>
-              <a:gd name="adj" fmla="val 9574"/>
+              <a:gd name="adj" fmla="val 4390"/>
             </a:avLst>
           </a:prstGeom>
           <a:solidFill>
-            <a:srgbClr val="EDF3FC"/>
+            <a:srgbClr val="EAF4EF"/>
           </a:solidFill>
           <a:ln/>
           <a:effectLst>
@@ -8535,27 +11175,27 @@
       </p:sp>
       <p:sp>
         <p:nvSpPr>
-          <p:cNvPr id="7" name="Shape 5"/>
-          <p:cNvSpPr/>
-          <p:nvPr/>
-        </p:nvSpPr>
-        <p:spPr>
-          <a:xfrm>
-            <a:off x="749808" y="1865376"/>
-            <a:ext cx="548640" cy="548640"/>
+          <p:cNvPr id="8" name="Shape 6"/>
+          <p:cNvSpPr/>
+          <p:nvPr/>
+        </p:nvSpPr>
+        <p:spPr>
+          <a:xfrm>
+            <a:off x="6355080" y="1938528"/>
+            <a:ext cx="502920" cy="502920"/>
           </a:xfrm>
           <a:prstGeom prst="ellipse">
             <a:avLst/>
           </a:prstGeom>
           <a:solidFill>
-            <a:srgbClr val="1E2761"/>
+            <a:srgbClr val="2E7D5B"/>
           </a:solidFill>
           <a:ln/>
         </p:spPr>
       </p:sp>
       <p:pic>
         <p:nvPicPr>
-          <p:cNvPr id="8" name="Image 0" descr="preencoded.png">    </p:cNvPr>
+          <p:cNvPr id="9" name="Image 0" descr="preencoded.png">    </p:cNvPr>
           <p:cNvPicPr>
             <a:picLocks noChangeAspect="1"/>
           </p:cNvPicPr>
@@ -8569,8 +11209,8 @@
         </p:blipFill>
         <p:spPr>
           <a:xfrm>
-            <a:off x="892454" y="2008022"/>
-            <a:ext cx="263347" cy="263347"/>
+            <a:off x="6485839" y="2069287"/>
+            <a:ext cx="241402" cy="241402"/>
           </a:xfrm>
           <a:prstGeom prst="rect">
             <a:avLst/>
@@ -8579,14 +11219,14 @@
       </p:pic>
       <p:sp>
         <p:nvSpPr>
-          <p:cNvPr id="9" name="Text 6"/>
-          <p:cNvSpPr/>
-          <p:nvPr/>
-        </p:nvSpPr>
-        <p:spPr>
-          <a:xfrm>
-            <a:off x="1463040" y="1801368"/>
-            <a:ext cx="2926080" cy="694944"/>
+          <p:cNvPr id="10" name="Text 7"/>
+          <p:cNvSpPr/>
+          <p:nvPr/>
+        </p:nvSpPr>
+        <p:spPr>
+          <a:xfrm>
+            <a:off x="6967728" y="1984248"/>
+            <a:ext cx="4480560" cy="365760"/>
           </a:xfrm>
           <a:prstGeom prst="rect">
             <a:avLst/>
@@ -8602,30 +11242,30 @@
               <a:buNone/>
             </a:pPr>
             <a:r>
-              <a:rPr lang="en-US" sz="1400" b="1" dirty="0">
-                <a:solidFill>
-                  <a:srgbClr val="1E2761"/>
-                </a:solidFill>
-                <a:latin typeface="Calibri" pitchFamily="34" charset="0"/>
-                <a:ea typeface="Calibri" pitchFamily="34" charset="-122"/>
-                <a:cs typeface="Calibri" pitchFamily="34" charset="-120"/>
-              </a:rPr>
-              <a:t>OpenAPI spec</a:t>
-            </a:r>
-            <a:endParaRPr lang="en-US" sz="1400" dirty="0"/>
-          </a:p>
-        </p:txBody>
-      </p:sp>
-      <p:sp>
-        <p:nvSpPr>
-          <p:cNvPr id="10" name="Text 7"/>
-          <p:cNvSpPr/>
-          <p:nvPr/>
-        </p:nvSpPr>
-        <p:spPr>
-          <a:xfrm>
-            <a:off x="4572000" y="1783080"/>
-            <a:ext cx="6888175" cy="731520"/>
+              <a:rPr lang="en-US" sz="1300" b="1" dirty="0">
+                <a:solidFill>
+                  <a:srgbClr val="2E7D5B"/>
+                </a:solidFill>
+                <a:latin typeface="Calibri" pitchFamily="34" charset="0"/>
+                <a:ea typeface="Calibri" pitchFamily="34" charset="-122"/>
+                <a:cs typeface="Calibri" pitchFamily="34" charset="-120"/>
+              </a:rPr>
+              <a:t>OUTSIDE — “Looking at Trees” data</a:t>
+            </a:r>
+            <a:endParaRPr lang="en-US" sz="1300" dirty="0"/>
+          </a:p>
+        </p:txBody>
+      </p:sp>
+      <p:sp>
+        <p:nvSpPr>
+          <p:cNvPr id="11" name="Text 8"/>
+          <p:cNvSpPr/>
+          <p:nvPr/>
+        </p:nvSpPr>
+        <p:spPr>
+          <a:xfrm>
+            <a:off x="6382512" y="2404872"/>
+            <a:ext cx="4974336" cy="1005840"/>
           </a:xfrm>
           <a:prstGeom prst="rect">
             <a:avLst/>
@@ -8641,7 +11281,7 @@
               <a:buNone/>
             </a:pPr>
             <a:r>
-              <a:rPr lang="en-US" sz="1200" dirty="0">
+              <a:rPr lang="en-US" sz="1150" dirty="0">
                 <a:solidFill>
                   <a:srgbClr val="1B2440"/>
                 </a:solidFill>
@@ -8649,7 +11289,46 @@
                 <a:ea typeface="Calibri" pitchFamily="34" charset="-122"/>
                 <a:cs typeface="Calibri" pitchFamily="34" charset="-120"/>
               </a:rPr>
-              <a:t>The contract everyone builds against — types, endpoints, sample data</a:t>
+              <a:t>Fake but realistic records and figures. Same app, same behavior — nothing real underneath.</a:t>
+            </a:r>
+            <a:endParaRPr lang="en-US" sz="1150" dirty="0"/>
+          </a:p>
+        </p:txBody>
+      </p:sp>
+      <p:sp>
+        <p:nvSpPr>
+          <p:cNvPr id="12" name="Text 9"/>
+          <p:cNvSpPr/>
+          <p:nvPr/>
+        </p:nvSpPr>
+        <p:spPr>
+          <a:xfrm>
+            <a:off x="6126480" y="3749040"/>
+            <a:ext cx="5486400" cy="320040"/>
+          </a:xfrm>
+          <a:prstGeom prst="rect">
+            <a:avLst/>
+          </a:prstGeom>
+          <a:noFill/>
+          <a:ln/>
+        </p:spPr>
+        <p:txBody>
+          <a:bodyPr wrap="square" lIns="0" tIns="0" rIns="0" bIns="0" rtlCol="0" anchor="ctr"/>
+          <a:lstStyle/>
+          <a:p>
+            <a:pPr algn="ctr" indent="0" marL="0">
+              <a:buNone/>
+            </a:pPr>
+            <a:r>
+              <a:rPr lang="en-US" sz="1200" b="1" dirty="0">
+                <a:solidFill>
+                  <a:srgbClr val="5A6B8C"/>
+                </a:solidFill>
+                <a:latin typeface="Calibri" pitchFamily="34" charset="0"/>
+                <a:ea typeface="Calibri" pitchFamily="34" charset="-122"/>
+                <a:cs typeface="Calibri" pitchFamily="34" charset="-120"/>
+              </a:rPr>
+              <a:t>▼  same app, different data  ▼</a:t>
             </a:r>
             <a:endParaRPr lang="en-US" sz="1200" dirty="0"/>
           </a:p>
@@ -8657,18 +11336,18 @@
       </p:sp>
       <p:sp>
         <p:nvSpPr>
-          <p:cNvPr id="11" name="Shape 8"/>
-          <p:cNvSpPr/>
-          <p:nvPr/>
-        </p:nvSpPr>
-        <p:spPr>
-          <a:xfrm>
-            <a:off x="548640" y="2679192"/>
-            <a:ext cx="11094415" cy="859536"/>
+          <p:cNvPr id="13" name="Shape 10"/>
+          <p:cNvSpPr/>
+          <p:nvPr/>
+        </p:nvSpPr>
+        <p:spPr>
+          <a:xfrm>
+            <a:off x="6126480" y="4114800"/>
+            <a:ext cx="5486400" cy="1874520"/>
           </a:xfrm>
           <a:prstGeom prst="roundRect">
             <a:avLst>
-              <a:gd name="adj" fmla="val 9574"/>
+              <a:gd name="adj" fmla="val 4390"/>
             </a:avLst>
           </a:prstGeom>
           <a:solidFill>
@@ -8686,14 +11365,14 @@
       </p:sp>
       <p:sp>
         <p:nvSpPr>
-          <p:cNvPr id="12" name="Shape 9"/>
-          <p:cNvSpPr/>
-          <p:nvPr/>
-        </p:nvSpPr>
-        <p:spPr>
-          <a:xfrm>
-            <a:off x="749808" y="2852928"/>
-            <a:ext cx="548640" cy="548640"/>
+          <p:cNvPr id="14" name="Shape 11"/>
+          <p:cNvSpPr/>
+          <p:nvPr/>
+        </p:nvSpPr>
+        <p:spPr>
+          <a:xfrm>
+            <a:off x="6355080" y="4315968"/>
+            <a:ext cx="502920" cy="502920"/>
           </a:xfrm>
           <a:prstGeom prst="ellipse">
             <a:avLst/>
@@ -8706,7 +11385,7 @@
       </p:sp>
       <p:pic>
         <p:nvPicPr>
-          <p:cNvPr id="13" name="Image 1" descr="preencoded.png">    </p:cNvPr>
+          <p:cNvPr id="15" name="Image 1" descr="preencoded.png">    </p:cNvPr>
           <p:cNvPicPr>
             <a:picLocks noChangeAspect="1"/>
           </p:cNvPicPr>
@@ -8720,8 +11399,8 @@
         </p:blipFill>
         <p:spPr>
           <a:xfrm>
-            <a:off x="892454" y="2995574"/>
-            <a:ext cx="263347" cy="263347"/>
+            <a:off x="6485839" y="4446727"/>
+            <a:ext cx="241402" cy="241402"/>
           </a:xfrm>
           <a:prstGeom prst="rect">
             <a:avLst/>
@@ -8730,14 +11409,14 @@
       </p:pic>
       <p:sp>
         <p:nvSpPr>
-          <p:cNvPr id="14" name="Text 10"/>
-          <p:cNvSpPr/>
-          <p:nvPr/>
-        </p:nvSpPr>
-        <p:spPr>
-          <a:xfrm>
-            <a:off x="1463040" y="2788920"/>
-            <a:ext cx="2926080" cy="694944"/>
+          <p:cNvPr id="16" name="Text 12"/>
+          <p:cNvSpPr/>
+          <p:nvPr/>
+        </p:nvSpPr>
+        <p:spPr>
+          <a:xfrm>
+            <a:off x="6967728" y="4361688"/>
+            <a:ext cx="4480560" cy="365760"/>
           </a:xfrm>
           <a:prstGeom prst="rect">
             <a:avLst/>
@@ -8753,7 +11432,7 @@
               <a:buNone/>
             </a:pPr>
             <a:r>
-              <a:rPr lang="en-US" sz="1400" b="1" dirty="0">
+              <a:rPr lang="en-US" sz="1300" b="1" dirty="0">
                 <a:solidFill>
                   <a:srgbClr val="1E2761"/>
                 </a:solidFill>
@@ -8761,22 +11440,22 @@
                 <a:ea typeface="Calibri" pitchFamily="34" charset="-122"/>
                 <a:cs typeface="Calibri" pitchFamily="34" charset="-120"/>
               </a:rPr>
-              <a:t>Generated types + client</a:t>
-            </a:r>
-            <a:endParaRPr lang="en-US" sz="1400" dirty="0"/>
-          </a:p>
-        </p:txBody>
-      </p:sp>
-      <p:sp>
-        <p:nvSpPr>
-          <p:cNvPr id="15" name="Text 11"/>
-          <p:cNvSpPr/>
-          <p:nvPr/>
-        </p:nvSpPr>
-        <p:spPr>
-          <a:xfrm>
-            <a:off x="4572000" y="2770632"/>
-            <a:ext cx="6888175" cy="731520"/>
+              <a:t>INSIDE — the real data</a:t>
+            </a:r>
+            <a:endParaRPr lang="en-US" sz="1300" dirty="0"/>
+          </a:p>
+        </p:txBody>
+      </p:sp>
+      <p:sp>
+        <p:nvSpPr>
+          <p:cNvPr id="17" name="Text 13"/>
+          <p:cNvSpPr/>
+          <p:nvPr/>
+        </p:nvSpPr>
+        <p:spPr>
+          <a:xfrm>
+            <a:off x="6382512" y="4782312"/>
+            <a:ext cx="4974336" cy="1005840"/>
           </a:xfrm>
           <a:prstGeom prst="rect">
             <a:avLst/>
@@ -8792,7 +11471,7 @@
               <a:buNone/>
             </a:pPr>
             <a:r>
-              <a:rPr lang="en-US" sz="1200" dirty="0">
+              <a:rPr lang="en-US" sz="1150" dirty="0">
                 <a:solidFill>
                   <a:srgbClr val="1B2440"/>
                 </a:solidFill>
@@ -8800,437 +11479,9 @@
                 <a:ea typeface="Calibri" pitchFamily="34" charset="-122"/>
                 <a:cs typeface="Calibri" pitchFamily="34" charset="-120"/>
               </a:rPr>
-              <a:t>No one hand-writes fetch calls — they're generated from the spec</a:t>
-            </a:r>
-            <a:endParaRPr lang="en-US" sz="1200" dirty="0"/>
-          </a:p>
-        </p:txBody>
-      </p:sp>
-      <p:sp>
-        <p:nvSpPr>
-          <p:cNvPr id="16" name="Shape 12"/>
-          <p:cNvSpPr/>
-          <p:nvPr/>
-        </p:nvSpPr>
-        <p:spPr>
-          <a:xfrm>
-            <a:off x="548640" y="3666744"/>
-            <a:ext cx="11094415" cy="859536"/>
-          </a:xfrm>
-          <a:prstGeom prst="roundRect">
-            <a:avLst>
-              <a:gd name="adj" fmla="val 9574"/>
-            </a:avLst>
-          </a:prstGeom>
-          <a:solidFill>
-            <a:srgbClr val="EDF3FC"/>
-          </a:solidFill>
-          <a:ln/>
-          <a:effectLst>
-            <a:outerShdw sx="100000" sy="100000" kx="0" ky="0" algn="bl" rotWithShape="0" blurRad="76200" dist="12700" dir="5400000">
-              <a:srgbClr val="9AA7C4">
-                <a:alpha val="22000"/>
-              </a:srgbClr>
-            </a:outerShdw>
-          </a:effectLst>
-        </p:spPr>
-      </p:sp>
-      <p:sp>
-        <p:nvSpPr>
-          <p:cNvPr id="17" name="Shape 13"/>
-          <p:cNvSpPr/>
-          <p:nvPr/>
-        </p:nvSpPr>
-        <p:spPr>
-          <a:xfrm>
-            <a:off x="749808" y="3840480"/>
-            <a:ext cx="548640" cy="548640"/>
-          </a:xfrm>
-          <a:prstGeom prst="ellipse">
-            <a:avLst/>
-          </a:prstGeom>
-          <a:solidFill>
-            <a:srgbClr val="1E2761"/>
-          </a:solidFill>
-          <a:ln/>
-        </p:spPr>
-      </p:sp>
-      <p:pic>
-        <p:nvPicPr>
-          <p:cNvPr id="18" name="Image 2" descr="preencoded.png">    </p:cNvPr>
-          <p:cNvPicPr>
-            <a:picLocks noChangeAspect="1"/>
-          </p:cNvPicPr>
-          <p:nvPr/>
-        </p:nvPicPr>
-        <p:blipFill>
-          <a:blip r:embed="rId3"/>
-          <a:stretch>
-            <a:fillRect/>
-          </a:stretch>
-        </p:blipFill>
-        <p:spPr>
-          <a:xfrm>
-            <a:off x="892454" y="3983126"/>
-            <a:ext cx="263347" cy="263347"/>
-          </a:xfrm>
-          <a:prstGeom prst="rect">
-            <a:avLst/>
-          </a:prstGeom>
-        </p:spPr>
-      </p:pic>
-      <p:sp>
-        <p:nvSpPr>
-          <p:cNvPr id="19" name="Text 14"/>
-          <p:cNvSpPr/>
-          <p:nvPr/>
-        </p:nvSpPr>
-        <p:spPr>
-          <a:xfrm>
-            <a:off x="1463040" y="3776472"/>
-            <a:ext cx="2926080" cy="694944"/>
-          </a:xfrm>
-          <a:prstGeom prst="rect">
-            <a:avLst/>
-          </a:prstGeom>
-          <a:noFill/>
-          <a:ln/>
-        </p:spPr>
-        <p:txBody>
-          <a:bodyPr wrap="square" lIns="0" tIns="0" rIns="0" bIns="0" rtlCol="0" anchor="ctr"/>
-          <a:lstStyle/>
-          <a:p>
-            <a:pPr indent="0" marL="0">
-              <a:buNone/>
-            </a:pPr>
-            <a:r>
-              <a:rPr lang="en-US" sz="1400" b="1" dirty="0">
-                <a:solidFill>
-                  <a:srgbClr val="1E2761"/>
-                </a:solidFill>
-                <a:latin typeface="Calibri" pitchFamily="34" charset="0"/>
-                <a:ea typeface="Calibri" pitchFamily="34" charset="-122"/>
-                <a:cs typeface="Calibri" pitchFamily="34" charset="-120"/>
-              </a:rPr>
-              <a:t>Mock backend (MSW)</a:t>
-            </a:r>
-            <a:endParaRPr lang="en-US" sz="1400" dirty="0"/>
-          </a:p>
-        </p:txBody>
-      </p:sp>
-      <p:sp>
-        <p:nvSpPr>
-          <p:cNvPr id="20" name="Text 15"/>
-          <p:cNvSpPr/>
-          <p:nvPr/>
-        </p:nvSpPr>
-        <p:spPr>
-          <a:xfrm>
-            <a:off x="4572000" y="3758184"/>
-            <a:ext cx="6888175" cy="731520"/>
-          </a:xfrm>
-          <a:prstGeom prst="rect">
-            <a:avLst/>
-          </a:prstGeom>
-          <a:noFill/>
-          <a:ln/>
-        </p:spPr>
-        <p:txBody>
-          <a:bodyPr wrap="square" lIns="0" tIns="0" rIns="0" bIns="0" rtlCol="0" anchor="ctr"/>
-          <a:lstStyle/>
-          <a:p>
-            <a:pPr indent="0" marL="0">
-              <a:buNone/>
-            </a:pPr>
-            <a:r>
-              <a:rPr lang="en-US" sz="1200" dirty="0">
-                <a:solidFill>
-                  <a:srgbClr val="1B2440"/>
-                </a:solidFill>
-                <a:latin typeface="Calibri" pitchFamily="34" charset="0"/>
-                <a:ea typeface="Calibri" pitchFamily="34" charset="-122"/>
-                <a:cs typeface="Calibri" pitchFamily="34" charset="-120"/>
-              </a:rPr>
-              <a:t>The app runs for real, with realistic fake data, zero live backend</a:t>
-            </a:r>
-            <a:endParaRPr lang="en-US" sz="1200" dirty="0"/>
-          </a:p>
-        </p:txBody>
-      </p:sp>
-      <p:sp>
-        <p:nvSpPr>
-          <p:cNvPr id="21" name="Shape 16"/>
-          <p:cNvSpPr/>
-          <p:nvPr/>
-        </p:nvSpPr>
-        <p:spPr>
-          <a:xfrm>
-            <a:off x="548640" y="4654296"/>
-            <a:ext cx="11094415" cy="859536"/>
-          </a:xfrm>
-          <a:prstGeom prst="roundRect">
-            <a:avLst>
-              <a:gd name="adj" fmla="val 9574"/>
-            </a:avLst>
-          </a:prstGeom>
-          <a:solidFill>
-            <a:srgbClr val="EDF3FC"/>
-          </a:solidFill>
-          <a:ln/>
-          <a:effectLst>
-            <a:outerShdw sx="100000" sy="100000" kx="0" ky="0" algn="bl" rotWithShape="0" blurRad="76200" dist="12700" dir="5400000">
-              <a:srgbClr val="9AA7C4">
-                <a:alpha val="22000"/>
-              </a:srgbClr>
-            </a:outerShdw>
-          </a:effectLst>
-        </p:spPr>
-      </p:sp>
-      <p:sp>
-        <p:nvSpPr>
-          <p:cNvPr id="22" name="Shape 17"/>
-          <p:cNvSpPr/>
-          <p:nvPr/>
-        </p:nvSpPr>
-        <p:spPr>
-          <a:xfrm>
-            <a:off x="749808" y="4828032"/>
-            <a:ext cx="548640" cy="548640"/>
-          </a:xfrm>
-          <a:prstGeom prst="ellipse">
-            <a:avLst/>
-          </a:prstGeom>
-          <a:solidFill>
-            <a:srgbClr val="1E2761"/>
-          </a:solidFill>
-          <a:ln/>
-        </p:spPr>
-      </p:sp>
-      <p:pic>
-        <p:nvPicPr>
-          <p:cNvPr id="23" name="Image 3" descr="preencoded.png">    </p:cNvPr>
-          <p:cNvPicPr>
-            <a:picLocks noChangeAspect="1"/>
-          </p:cNvPicPr>
-          <p:nvPr/>
-        </p:nvPicPr>
-        <p:blipFill>
-          <a:blip r:embed="rId4"/>
-          <a:stretch>
-            <a:fillRect/>
-          </a:stretch>
-        </p:blipFill>
-        <p:spPr>
-          <a:xfrm>
-            <a:off x="892454" y="4970678"/>
-            <a:ext cx="263347" cy="263347"/>
-          </a:xfrm>
-          <a:prstGeom prst="rect">
-            <a:avLst/>
-          </a:prstGeom>
-        </p:spPr>
-      </p:pic>
-      <p:sp>
-        <p:nvSpPr>
-          <p:cNvPr id="24" name="Text 18"/>
-          <p:cNvSpPr/>
-          <p:nvPr/>
-        </p:nvSpPr>
-        <p:spPr>
-          <a:xfrm>
-            <a:off x="1463040" y="4764024"/>
-            <a:ext cx="2926080" cy="694944"/>
-          </a:xfrm>
-          <a:prstGeom prst="rect">
-            <a:avLst/>
-          </a:prstGeom>
-          <a:noFill/>
-          <a:ln/>
-        </p:spPr>
-        <p:txBody>
-          <a:bodyPr wrap="square" lIns="0" tIns="0" rIns="0" bIns="0" rtlCol="0" anchor="ctr"/>
-          <a:lstStyle/>
-          <a:p>
-            <a:pPr indent="0" marL="0">
-              <a:buNone/>
-            </a:pPr>
-            <a:r>
-              <a:rPr lang="en-US" sz="1400" b="1" dirty="0">
-                <a:solidFill>
-                  <a:srgbClr val="1E2761"/>
-                </a:solidFill>
-                <a:latin typeface="Calibri" pitchFamily="34" charset="0"/>
-                <a:ea typeface="Calibri" pitchFamily="34" charset="-122"/>
-                <a:cs typeface="Calibri" pitchFamily="34" charset="-120"/>
-              </a:rPr>
-              <a:t>Playwright tests</a:t>
-            </a:r>
-            <a:endParaRPr lang="en-US" sz="1400" dirty="0"/>
-          </a:p>
-        </p:txBody>
-      </p:sp>
-      <p:sp>
-        <p:nvSpPr>
-          <p:cNvPr id="25" name="Text 19"/>
-          <p:cNvSpPr/>
-          <p:nvPr/>
-        </p:nvSpPr>
-        <p:spPr>
-          <a:xfrm>
-            <a:off x="4572000" y="4745736"/>
-            <a:ext cx="6888175" cy="731520"/>
-          </a:xfrm>
-          <a:prstGeom prst="rect">
-            <a:avLst/>
-          </a:prstGeom>
-          <a:noFill/>
-          <a:ln/>
-        </p:spPr>
-        <p:txBody>
-          <a:bodyPr wrap="square" lIns="0" tIns="0" rIns="0" bIns="0" rtlCol="0" anchor="ctr"/>
-          <a:lstStyle/>
-          <a:p>
-            <a:pPr indent="0" marL="0">
-              <a:buNone/>
-            </a:pPr>
-            <a:r>
-              <a:rPr lang="en-US" sz="1200" dirty="0">
-                <a:solidFill>
-                  <a:srgbClr val="1B2440"/>
-                </a:solidFill>
-                <a:latin typeface="Calibri" pitchFamily="34" charset="0"/>
-                <a:ea typeface="Calibri" pitchFamily="34" charset="-122"/>
-                <a:cs typeface="Calibri" pitchFamily="34" charset="-120"/>
-              </a:rPr>
-              <a:t>Real user flows, including error cases — fast and repeatable</a:t>
-            </a:r>
-            <a:endParaRPr lang="en-US" sz="1200" dirty="0"/>
-          </a:p>
-        </p:txBody>
-      </p:sp>
-      <p:sp>
-        <p:nvSpPr>
-          <p:cNvPr id="26" name="Shape 20"/>
-          <p:cNvSpPr/>
-          <p:nvPr/>
-        </p:nvSpPr>
-        <p:spPr>
-          <a:xfrm>
-            <a:off x="548640" y="5733288"/>
-            <a:ext cx="11094415" cy="960120"/>
-          </a:xfrm>
-          <a:prstGeom prst="roundRect">
-            <a:avLst>
-              <a:gd name="adj" fmla="val 8571"/>
-            </a:avLst>
-          </a:prstGeom>
-          <a:solidFill>
-            <a:srgbClr val="EAF4EF"/>
-          </a:solidFill>
-          <a:ln/>
-          <a:effectLst>
-            <a:outerShdw sx="100000" sy="100000" kx="0" ky="0" algn="bl" rotWithShape="0" blurRad="76200" dist="12700" dir="5400000">
-              <a:srgbClr val="9AA7C4">
-                <a:alpha val="22000"/>
-              </a:srgbClr>
-            </a:outerShdw>
-          </a:effectLst>
-        </p:spPr>
-      </p:sp>
-      <p:sp>
-        <p:nvSpPr>
-          <p:cNvPr id="27" name="Shape 21"/>
-          <p:cNvSpPr/>
-          <p:nvPr/>
-        </p:nvSpPr>
-        <p:spPr>
-          <a:xfrm>
-            <a:off x="777240" y="5943600"/>
-            <a:ext cx="548640" cy="548640"/>
-          </a:xfrm>
-          <a:prstGeom prst="ellipse">
-            <a:avLst/>
-          </a:prstGeom>
-          <a:solidFill>
-            <a:srgbClr val="2E7D5B"/>
-          </a:solidFill>
-          <a:ln/>
-        </p:spPr>
-      </p:sp>
-      <p:pic>
-        <p:nvPicPr>
-          <p:cNvPr id="28" name="Image 4" descr="preencoded.png">    </p:cNvPr>
-          <p:cNvPicPr>
-            <a:picLocks noChangeAspect="1"/>
-          </p:cNvPicPr>
-          <p:nvPr/>
-        </p:nvPicPr>
-        <p:blipFill>
-          <a:blip r:embed="rId5"/>
-          <a:stretch>
-            <a:fillRect/>
-          </a:stretch>
-        </p:blipFill>
-        <p:spPr>
-          <a:xfrm>
-            <a:off x="919886" y="6086246"/>
-            <a:ext cx="263347" cy="263347"/>
-          </a:xfrm>
-          <a:prstGeom prst="rect">
-            <a:avLst/>
-          </a:prstGeom>
-        </p:spPr>
-      </p:pic>
-      <p:sp>
-        <p:nvSpPr>
-          <p:cNvPr id="29" name="Text 22"/>
-          <p:cNvSpPr/>
-          <p:nvPr/>
-        </p:nvSpPr>
-        <p:spPr>
-          <a:xfrm>
-            <a:off x="1508760" y="5852160"/>
-            <a:ext cx="9905695" cy="731520"/>
-          </a:xfrm>
-          <a:prstGeom prst="rect">
-            <a:avLst/>
-          </a:prstGeom>
-          <a:noFill/>
-          <a:ln/>
-        </p:spPr>
-        <p:txBody>
-          <a:bodyPr wrap="square" lIns="0" tIns="0" rIns="0" bIns="0" rtlCol="0" anchor="ctr"/>
-          <a:lstStyle/>
-          <a:p>
-            <a:pPr indent="0" marL="0">
-              <a:buNone/>
-            </a:pPr>
-            <a:r>
-              <a:rPr lang="en-US" sz="1350" b="1" dirty="0">
-                <a:solidFill>
-                  <a:srgbClr val="2E7D5B"/>
-                </a:solidFill>
-                <a:latin typeface="Calibri" pitchFamily="34" charset="0"/>
-                <a:ea typeface="Calibri" pitchFamily="34" charset="-122"/>
-                <a:cs typeface="Calibri" pitchFamily="34" charset="-120"/>
-              </a:rPr>
-              <a:t>This is the part that actually saves us months: </a:t>
-            </a:r>
-            <a:pPr indent="0" marL="0">
-              <a:buNone/>
-            </a:pPr>
-            <a:r>
-              <a:rPr lang="en-US" sz="1350" dirty="0">
-                <a:solidFill>
-                  <a:srgbClr val="1B2440"/>
-                </a:solidFill>
-                <a:latin typeface="Calibri" pitchFamily="34" charset="0"/>
-                <a:ea typeface="Calibri" pitchFamily="34" charset="-122"/>
-                <a:cs typeface="Calibri" pitchFamily="34" charset="-120"/>
-              </a:rPr>
-              <a:t>most bugs get caught outside, where fixing them is a two-minute edit instead of a trip through the internal pipeline.</a:t>
-            </a:r>
-            <a:endParaRPr lang="en-US" sz="1350" dirty="0"/>
+              <a:t>Same components, same tests. Only the values underneath change — reviewed and versioned like everything else we ship.</a:t>
+            </a:r>
+            <a:endParaRPr lang="en-US" sz="1150" dirty="0"/>
           </a:p>
         </p:txBody>
       </p:sp>
@@ -9377,7 +11628,7 @@
                 <a:ea typeface="Calibri" pitchFamily="34" charset="-122"/>
                 <a:cs typeface="Calibri" pitchFamily="34" charset="-120"/>
               </a:rPr>
-              <a:t>WHO NEEDS TO LOOK AT WHAT</a:t>
+              <a:t>BUILDING WITHOUT WAITING ON ANYONE</a:t>
             </a:r>
             <a:endParaRPr lang="en-US" sz="1200" dirty="0"/>
           </a:p>
@@ -9416,7 +11667,7 @@
                 <a:ea typeface="Cambria" pitchFamily="34" charset="-122"/>
                 <a:cs typeface="Cambria" pitchFamily="34" charset="-120"/>
               </a:rPr>
-              <a:t>Most things need a quick look. Some need a second pair of eyes.</a:t>
+              <a:t>Test the whole thing before it ever touches Confi</a:t>
             </a:r>
             <a:endParaRPr lang="en-US" sz="2800" dirty="0"/>
           </a:p>
@@ -9430,12 +11681,12 @@
         </p:nvSpPr>
         <p:spPr>
           <a:xfrm>
-            <a:off x="548640" y="1737360"/>
-            <a:ext cx="5364328" cy="3291840"/>
+            <a:off x="548640" y="1691640"/>
+            <a:ext cx="11094415" cy="859536"/>
           </a:xfrm>
           <a:prstGeom prst="roundRect">
             <a:avLst>
-              <a:gd name="adj" fmla="val 2500"/>
+              <a:gd name="adj" fmla="val 9574"/>
             </a:avLst>
           </a:prstGeom>
           <a:solidFill>
@@ -9459,7 +11710,7 @@
         </p:nvSpPr>
         <p:spPr>
           <a:xfrm>
-            <a:off x="804672" y="1965960"/>
+            <a:off x="749808" y="1865376"/>
             <a:ext cx="548640" cy="548640"/>
           </a:xfrm>
           <a:prstGeom prst="ellipse">
@@ -9487,7 +11738,7 @@
         </p:blipFill>
         <p:spPr>
           <a:xfrm>
-            <a:off x="947318" y="2108606"/>
+            <a:off x="892454" y="2008022"/>
             <a:ext cx="263347" cy="263347"/>
           </a:xfrm>
           <a:prstGeom prst="rect">
@@ -9503,8 +11754,8 @@
         </p:nvSpPr>
         <p:spPr>
           <a:xfrm>
-            <a:off x="1481328" y="2029968"/>
-            <a:ext cx="4267048" cy="365760"/>
+            <a:off x="1463040" y="1801368"/>
+            <a:ext cx="2926080" cy="694944"/>
           </a:xfrm>
           <a:prstGeom prst="rect">
             <a:avLst/>
@@ -9520,7 +11771,7 @@
               <a:buNone/>
             </a:pPr>
             <a:r>
-              <a:rPr lang="en-US" sz="1500" b="1" dirty="0">
+              <a:rPr lang="en-US" sz="1400" b="1" dirty="0">
                 <a:solidFill>
                   <a:srgbClr val="1E2761"/>
                 </a:solidFill>
@@ -9528,9 +11779,9 @@
                 <a:ea typeface="Calibri" pitchFamily="34" charset="-122"/>
                 <a:cs typeface="Calibri" pitchFamily="34" charset="-120"/>
               </a:rPr>
-              <a:t>Everyday stuff</a:t>
-            </a:r>
-            <a:endParaRPr lang="en-US" sz="1500" dirty="0"/>
+              <a:t>OpenAPI spec</a:t>
+            </a:r>
+            <a:endParaRPr lang="en-US" sz="1400" dirty="0"/>
           </a:p>
         </p:txBody>
       </p:sp>
@@ -9542,8 +11793,8 @@
         </p:nvSpPr>
         <p:spPr>
           <a:xfrm>
-            <a:off x="822960" y="2487168"/>
-            <a:ext cx="4815688" cy="457200"/>
+            <a:off x="4572000" y="1783080"/>
+            <a:ext cx="6888175" cy="731520"/>
           </a:xfrm>
           <a:prstGeom prst="rect">
             <a:avLst/>
@@ -9559,15 +11810,15 @@
               <a:buNone/>
             </a:pPr>
             <a:r>
-              <a:rPr lang="en-US" sz="1200" i="1" dirty="0">
-                <a:solidFill>
-                  <a:srgbClr val="5A6B8C"/>
-                </a:solidFill>
-                <a:latin typeface="Calibri" pitchFamily="34" charset="0"/>
-                <a:ea typeface="Calibri" pitchFamily="34" charset="-122"/>
-                <a:cs typeface="Calibri" pitchFamily="34" charset="-120"/>
-              </a:rPr>
-              <a:t>Structure, contracts, sanitized code, sample fixtures.</a:t>
+              <a:rPr lang="en-US" sz="1200" dirty="0">
+                <a:solidFill>
+                  <a:srgbClr val="1B2440"/>
+                </a:solidFill>
+                <a:latin typeface="Calibri" pitchFamily="34" charset="0"/>
+                <a:ea typeface="Calibri" pitchFamily="34" charset="-122"/>
+                <a:cs typeface="Calibri" pitchFamily="34" charset="-120"/>
+              </a:rPr>
+              <a:t>The contract everyone builds against — types, endpoints, sample data</a:t>
             </a:r>
             <a:endParaRPr lang="en-US" sz="1200" dirty="0"/>
           </a:p>
@@ -9575,86 +11826,22 @@
       </p:sp>
       <p:sp>
         <p:nvSpPr>
-          <p:cNvPr id="11" name="Text 8"/>
-          <p:cNvSpPr/>
-          <p:nvPr/>
-        </p:nvSpPr>
-        <p:spPr>
-          <a:xfrm>
-            <a:off x="822960" y="3017520"/>
-            <a:ext cx="4815688" cy="1371600"/>
-          </a:xfrm>
-          <a:prstGeom prst="rect">
-            <a:avLst/>
-          </a:prstGeom>
-          <a:noFill/>
-          <a:ln/>
-        </p:spPr>
-        <p:txBody>
-          <a:bodyPr wrap="square" lIns="0" tIns="0" rIns="0" bIns="0" rtlCol="0" anchor="ctr"/>
-          <a:lstStyle/>
-          <a:p>
-            <a:pPr marL="342900" indent="-342900">
-              <a:spcAft>
-                <a:spcPts val="800"/>
-              </a:spcAft>
-              <a:buSzPct val="100000"/>
-              <a:buChar char="•"/>
-            </a:pPr>
-            <a:r>
-              <a:rPr lang="en-US" sz="1300" dirty="0">
-                <a:solidFill>
-                  <a:srgbClr val="1B2440"/>
-                </a:solidFill>
-                <a:latin typeface="Calibri" pitchFamily="34" charset="0"/>
-                <a:ea typeface="Calibri" pitchFamily="34" charset="-122"/>
-                <a:cs typeface="Calibri" pitchFamily="34" charset="-120"/>
-              </a:rPr>
-              <a:t>A teammate reviews it</a:t>
-            </a:r>
-            <a:endParaRPr lang="en-US" sz="1300" dirty="0"/>
-          </a:p>
-          <a:p>
-            <a:pPr marL="342900" indent="-342900">
-              <a:spcAft>
-                <a:spcPts val="800"/>
-              </a:spcAft>
-              <a:buSzPct val="100000"/>
-              <a:buChar char="•"/>
-            </a:pPr>
-            <a:r>
-              <a:rPr lang="en-US" sz="1300" dirty="0">
-                <a:solidFill>
-                  <a:srgbClr val="1B2440"/>
-                </a:solidFill>
-                <a:latin typeface="Calibri" pitchFamily="34" charset="0"/>
-                <a:ea typeface="Calibri" pitchFamily="34" charset="-122"/>
-                <a:cs typeface="Calibri" pitchFamily="34" charset="-120"/>
-              </a:rPr>
-              <a:t>Off it goes — same day, routine</a:t>
-            </a:r>
-            <a:endParaRPr lang="en-US" sz="1300" dirty="0"/>
-          </a:p>
-        </p:txBody>
-      </p:sp>
-      <p:sp>
-        <p:nvSpPr>
-          <p:cNvPr id="12" name="Shape 9"/>
-          <p:cNvSpPr/>
-          <p:nvPr/>
-        </p:nvSpPr>
-        <p:spPr>
-          <a:xfrm>
-            <a:off x="6278728" y="1737360"/>
-            <a:ext cx="5364328" cy="3291840"/>
+          <p:cNvPr id="11" name="Shape 8"/>
+          <p:cNvSpPr/>
+          <p:nvPr/>
+        </p:nvSpPr>
+        <p:spPr>
+          <a:xfrm>
+            <a:off x="548640" y="2679192"/>
+            <a:ext cx="11094415" cy="859536"/>
           </a:xfrm>
           <a:prstGeom prst="roundRect">
             <a:avLst>
-              <a:gd name="adj" fmla="val 2500"/>
+              <a:gd name="adj" fmla="val 9574"/>
             </a:avLst>
           </a:prstGeom>
           <a:solidFill>
-            <a:srgbClr val="EAF4EF"/>
+            <a:srgbClr val="EDF3FC"/>
           </a:solidFill>
           <a:ln/>
           <a:effectLst>
@@ -9668,27 +11855,27 @@
       </p:sp>
       <p:sp>
         <p:nvSpPr>
-          <p:cNvPr id="13" name="Shape 10"/>
-          <p:cNvSpPr/>
-          <p:nvPr/>
-        </p:nvSpPr>
-        <p:spPr>
-          <a:xfrm>
-            <a:off x="6534760" y="1965960"/>
+          <p:cNvPr id="12" name="Shape 9"/>
+          <p:cNvSpPr/>
+          <p:nvPr/>
+        </p:nvSpPr>
+        <p:spPr>
+          <a:xfrm>
+            <a:off x="749808" y="2852928"/>
             <a:ext cx="548640" cy="548640"/>
           </a:xfrm>
           <a:prstGeom prst="ellipse">
             <a:avLst/>
           </a:prstGeom>
           <a:solidFill>
-            <a:srgbClr val="2E7D5B"/>
+            <a:srgbClr val="1E2761"/>
           </a:solidFill>
           <a:ln/>
         </p:spPr>
       </p:sp>
       <p:pic>
         <p:nvPicPr>
-          <p:cNvPr id="14" name="Image 1" descr="preencoded.png">    </p:cNvPr>
+          <p:cNvPr id="13" name="Image 1" descr="preencoded.png">    </p:cNvPr>
           <p:cNvPicPr>
             <a:picLocks noChangeAspect="1"/>
           </p:cNvPicPr>
@@ -9702,7 +11889,7 @@
         </p:blipFill>
         <p:spPr>
           <a:xfrm>
-            <a:off x="6677406" y="2108606"/>
+            <a:off x="892454" y="2995574"/>
             <a:ext cx="263347" cy="263347"/>
           </a:xfrm>
           <a:prstGeom prst="rect">
@@ -9712,14 +11899,53 @@
       </p:pic>
       <p:sp>
         <p:nvSpPr>
+          <p:cNvPr id="14" name="Text 10"/>
+          <p:cNvSpPr/>
+          <p:nvPr/>
+        </p:nvSpPr>
+        <p:spPr>
+          <a:xfrm>
+            <a:off x="1463040" y="2788920"/>
+            <a:ext cx="2926080" cy="694944"/>
+          </a:xfrm>
+          <a:prstGeom prst="rect">
+            <a:avLst/>
+          </a:prstGeom>
+          <a:noFill/>
+          <a:ln/>
+        </p:spPr>
+        <p:txBody>
+          <a:bodyPr wrap="square" lIns="0" tIns="0" rIns="0" bIns="0" rtlCol="0" anchor="ctr"/>
+          <a:lstStyle/>
+          <a:p>
+            <a:pPr indent="0" marL="0">
+              <a:buNone/>
+            </a:pPr>
+            <a:r>
+              <a:rPr lang="en-US" sz="1400" b="1" dirty="0">
+                <a:solidFill>
+                  <a:srgbClr val="1E2761"/>
+                </a:solidFill>
+                <a:latin typeface="Calibri" pitchFamily="34" charset="0"/>
+                <a:ea typeface="Calibri" pitchFamily="34" charset="-122"/>
+                <a:cs typeface="Calibri" pitchFamily="34" charset="-120"/>
+              </a:rPr>
+              <a:t>Generated types + client</a:t>
+            </a:r>
+            <a:endParaRPr lang="en-US" sz="1400" dirty="0"/>
+          </a:p>
+        </p:txBody>
+      </p:sp>
+      <p:sp>
+        <p:nvSpPr>
           <p:cNvPr id="15" name="Text 11"/>
           <p:cNvSpPr/>
           <p:nvPr/>
         </p:nvSpPr>
         <p:spPr>
           <a:xfrm>
-            <a:off x="7211416" y="2029968"/>
-            <a:ext cx="4267048" cy="365760"/>
+            <a:off x="4572000" y="2770632"/>
+            <a:ext cx="6888175" cy="731520"/>
           </a:xfrm>
           <a:prstGeom prst="rect">
             <a:avLst/>
@@ -9735,7 +11961,421 @@
               <a:buNone/>
             </a:pPr>
             <a:r>
-              <a:rPr lang="en-US" sz="1500" b="1" dirty="0">
+              <a:rPr lang="en-US" sz="1200" dirty="0">
+                <a:solidFill>
+                  <a:srgbClr val="1B2440"/>
+                </a:solidFill>
+                <a:latin typeface="Calibri" pitchFamily="34" charset="0"/>
+                <a:ea typeface="Calibri" pitchFamily="34" charset="-122"/>
+                <a:cs typeface="Calibri" pitchFamily="34" charset="-120"/>
+              </a:rPr>
+              <a:t>No one hand-writes fetch calls — they're generated from the spec</a:t>
+            </a:r>
+            <a:endParaRPr lang="en-US" sz="1200" dirty="0"/>
+          </a:p>
+        </p:txBody>
+      </p:sp>
+      <p:sp>
+        <p:nvSpPr>
+          <p:cNvPr id="16" name="Shape 12"/>
+          <p:cNvSpPr/>
+          <p:nvPr/>
+        </p:nvSpPr>
+        <p:spPr>
+          <a:xfrm>
+            <a:off x="548640" y="3666744"/>
+            <a:ext cx="11094415" cy="859536"/>
+          </a:xfrm>
+          <a:prstGeom prst="roundRect">
+            <a:avLst>
+              <a:gd name="adj" fmla="val 9574"/>
+            </a:avLst>
+          </a:prstGeom>
+          <a:solidFill>
+            <a:srgbClr val="EDF3FC"/>
+          </a:solidFill>
+          <a:ln/>
+          <a:effectLst>
+            <a:outerShdw sx="100000" sy="100000" kx="0" ky="0" algn="bl" rotWithShape="0" blurRad="76200" dist="12700" dir="5400000">
+              <a:srgbClr val="9AA7C4">
+                <a:alpha val="22000"/>
+              </a:srgbClr>
+            </a:outerShdw>
+          </a:effectLst>
+        </p:spPr>
+      </p:sp>
+      <p:sp>
+        <p:nvSpPr>
+          <p:cNvPr id="17" name="Shape 13"/>
+          <p:cNvSpPr/>
+          <p:nvPr/>
+        </p:nvSpPr>
+        <p:spPr>
+          <a:xfrm>
+            <a:off x="749808" y="3840480"/>
+            <a:ext cx="548640" cy="548640"/>
+          </a:xfrm>
+          <a:prstGeom prst="ellipse">
+            <a:avLst/>
+          </a:prstGeom>
+          <a:solidFill>
+            <a:srgbClr val="1E2761"/>
+          </a:solidFill>
+          <a:ln/>
+        </p:spPr>
+      </p:sp>
+      <p:pic>
+        <p:nvPicPr>
+          <p:cNvPr id="18" name="Image 2" descr="preencoded.png">    </p:cNvPr>
+          <p:cNvPicPr>
+            <a:picLocks noChangeAspect="1"/>
+          </p:cNvPicPr>
+          <p:nvPr/>
+        </p:nvPicPr>
+        <p:blipFill>
+          <a:blip r:embed="rId3"/>
+          <a:stretch>
+            <a:fillRect/>
+          </a:stretch>
+        </p:blipFill>
+        <p:spPr>
+          <a:xfrm>
+            <a:off x="892454" y="3983126"/>
+            <a:ext cx="263347" cy="263347"/>
+          </a:xfrm>
+          <a:prstGeom prst="rect">
+            <a:avLst/>
+          </a:prstGeom>
+        </p:spPr>
+      </p:pic>
+      <p:sp>
+        <p:nvSpPr>
+          <p:cNvPr id="19" name="Text 14"/>
+          <p:cNvSpPr/>
+          <p:nvPr/>
+        </p:nvSpPr>
+        <p:spPr>
+          <a:xfrm>
+            <a:off x="1463040" y="3776472"/>
+            <a:ext cx="2926080" cy="694944"/>
+          </a:xfrm>
+          <a:prstGeom prst="rect">
+            <a:avLst/>
+          </a:prstGeom>
+          <a:noFill/>
+          <a:ln/>
+        </p:spPr>
+        <p:txBody>
+          <a:bodyPr wrap="square" lIns="0" tIns="0" rIns="0" bIns="0" rtlCol="0" anchor="ctr"/>
+          <a:lstStyle/>
+          <a:p>
+            <a:pPr indent="0" marL="0">
+              <a:buNone/>
+            </a:pPr>
+            <a:r>
+              <a:rPr lang="en-US" sz="1400" b="1" dirty="0">
+                <a:solidFill>
+                  <a:srgbClr val="1E2761"/>
+                </a:solidFill>
+                <a:latin typeface="Calibri" pitchFamily="34" charset="0"/>
+                <a:ea typeface="Calibri" pitchFamily="34" charset="-122"/>
+                <a:cs typeface="Calibri" pitchFamily="34" charset="-120"/>
+              </a:rPr>
+              <a:t>Mock backend (MSW)</a:t>
+            </a:r>
+            <a:endParaRPr lang="en-US" sz="1400" dirty="0"/>
+          </a:p>
+        </p:txBody>
+      </p:sp>
+      <p:sp>
+        <p:nvSpPr>
+          <p:cNvPr id="20" name="Text 15"/>
+          <p:cNvSpPr/>
+          <p:nvPr/>
+        </p:nvSpPr>
+        <p:spPr>
+          <a:xfrm>
+            <a:off x="4572000" y="3758184"/>
+            <a:ext cx="6888175" cy="731520"/>
+          </a:xfrm>
+          <a:prstGeom prst="rect">
+            <a:avLst/>
+          </a:prstGeom>
+          <a:noFill/>
+          <a:ln/>
+        </p:spPr>
+        <p:txBody>
+          <a:bodyPr wrap="square" lIns="0" tIns="0" rIns="0" bIns="0" rtlCol="0" anchor="ctr"/>
+          <a:lstStyle/>
+          <a:p>
+            <a:pPr indent="0" marL="0">
+              <a:buNone/>
+            </a:pPr>
+            <a:r>
+              <a:rPr lang="en-US" sz="1200" dirty="0">
+                <a:solidFill>
+                  <a:srgbClr val="1B2440"/>
+                </a:solidFill>
+                <a:latin typeface="Calibri" pitchFamily="34" charset="0"/>
+                <a:ea typeface="Calibri" pitchFamily="34" charset="-122"/>
+                <a:cs typeface="Calibri" pitchFamily="34" charset="-120"/>
+              </a:rPr>
+              <a:t>The app runs for real, with realistic fake data, zero live backend</a:t>
+            </a:r>
+            <a:endParaRPr lang="en-US" sz="1200" dirty="0"/>
+          </a:p>
+        </p:txBody>
+      </p:sp>
+      <p:sp>
+        <p:nvSpPr>
+          <p:cNvPr id="21" name="Shape 16"/>
+          <p:cNvSpPr/>
+          <p:nvPr/>
+        </p:nvSpPr>
+        <p:spPr>
+          <a:xfrm>
+            <a:off x="548640" y="4654296"/>
+            <a:ext cx="11094415" cy="859536"/>
+          </a:xfrm>
+          <a:prstGeom prst="roundRect">
+            <a:avLst>
+              <a:gd name="adj" fmla="val 9574"/>
+            </a:avLst>
+          </a:prstGeom>
+          <a:solidFill>
+            <a:srgbClr val="EDF3FC"/>
+          </a:solidFill>
+          <a:ln/>
+          <a:effectLst>
+            <a:outerShdw sx="100000" sy="100000" kx="0" ky="0" algn="bl" rotWithShape="0" blurRad="76200" dist="12700" dir="5400000">
+              <a:srgbClr val="9AA7C4">
+                <a:alpha val="22000"/>
+              </a:srgbClr>
+            </a:outerShdw>
+          </a:effectLst>
+        </p:spPr>
+      </p:sp>
+      <p:sp>
+        <p:nvSpPr>
+          <p:cNvPr id="22" name="Shape 17"/>
+          <p:cNvSpPr/>
+          <p:nvPr/>
+        </p:nvSpPr>
+        <p:spPr>
+          <a:xfrm>
+            <a:off x="749808" y="4828032"/>
+            <a:ext cx="548640" cy="548640"/>
+          </a:xfrm>
+          <a:prstGeom prst="ellipse">
+            <a:avLst/>
+          </a:prstGeom>
+          <a:solidFill>
+            <a:srgbClr val="1E2761"/>
+          </a:solidFill>
+          <a:ln/>
+        </p:spPr>
+      </p:sp>
+      <p:pic>
+        <p:nvPicPr>
+          <p:cNvPr id="23" name="Image 3" descr="preencoded.png">    </p:cNvPr>
+          <p:cNvPicPr>
+            <a:picLocks noChangeAspect="1"/>
+          </p:cNvPicPr>
+          <p:nvPr/>
+        </p:nvPicPr>
+        <p:blipFill>
+          <a:blip r:embed="rId4"/>
+          <a:stretch>
+            <a:fillRect/>
+          </a:stretch>
+        </p:blipFill>
+        <p:spPr>
+          <a:xfrm>
+            <a:off x="892454" y="4970678"/>
+            <a:ext cx="263347" cy="263347"/>
+          </a:xfrm>
+          <a:prstGeom prst="rect">
+            <a:avLst/>
+          </a:prstGeom>
+        </p:spPr>
+      </p:pic>
+      <p:sp>
+        <p:nvSpPr>
+          <p:cNvPr id="24" name="Text 18"/>
+          <p:cNvSpPr/>
+          <p:nvPr/>
+        </p:nvSpPr>
+        <p:spPr>
+          <a:xfrm>
+            <a:off x="1463040" y="4764024"/>
+            <a:ext cx="2926080" cy="694944"/>
+          </a:xfrm>
+          <a:prstGeom prst="rect">
+            <a:avLst/>
+          </a:prstGeom>
+          <a:noFill/>
+          <a:ln/>
+        </p:spPr>
+        <p:txBody>
+          <a:bodyPr wrap="square" lIns="0" tIns="0" rIns="0" bIns="0" rtlCol="0" anchor="ctr"/>
+          <a:lstStyle/>
+          <a:p>
+            <a:pPr indent="0" marL="0">
+              <a:buNone/>
+            </a:pPr>
+            <a:r>
+              <a:rPr lang="en-US" sz="1400" b="1" dirty="0">
+                <a:solidFill>
+                  <a:srgbClr val="1E2761"/>
+                </a:solidFill>
+                <a:latin typeface="Calibri" pitchFamily="34" charset="0"/>
+                <a:ea typeface="Calibri" pitchFamily="34" charset="-122"/>
+                <a:cs typeface="Calibri" pitchFamily="34" charset="-120"/>
+              </a:rPr>
+              <a:t>Playwright tests</a:t>
+            </a:r>
+            <a:endParaRPr lang="en-US" sz="1400" dirty="0"/>
+          </a:p>
+        </p:txBody>
+      </p:sp>
+      <p:sp>
+        <p:nvSpPr>
+          <p:cNvPr id="25" name="Text 19"/>
+          <p:cNvSpPr/>
+          <p:nvPr/>
+        </p:nvSpPr>
+        <p:spPr>
+          <a:xfrm>
+            <a:off x="4572000" y="4745736"/>
+            <a:ext cx="6888175" cy="731520"/>
+          </a:xfrm>
+          <a:prstGeom prst="rect">
+            <a:avLst/>
+          </a:prstGeom>
+          <a:noFill/>
+          <a:ln/>
+        </p:spPr>
+        <p:txBody>
+          <a:bodyPr wrap="square" lIns="0" tIns="0" rIns="0" bIns="0" rtlCol="0" anchor="ctr"/>
+          <a:lstStyle/>
+          <a:p>
+            <a:pPr indent="0" marL="0">
+              <a:buNone/>
+            </a:pPr>
+            <a:r>
+              <a:rPr lang="en-US" sz="1200" dirty="0">
+                <a:solidFill>
+                  <a:srgbClr val="1B2440"/>
+                </a:solidFill>
+                <a:latin typeface="Calibri" pitchFamily="34" charset="0"/>
+                <a:ea typeface="Calibri" pitchFamily="34" charset="-122"/>
+                <a:cs typeface="Calibri" pitchFamily="34" charset="-120"/>
+              </a:rPr>
+              <a:t>Real user flows, including error cases — fast and repeatable</a:t>
+            </a:r>
+            <a:endParaRPr lang="en-US" sz="1200" dirty="0"/>
+          </a:p>
+        </p:txBody>
+      </p:sp>
+      <p:sp>
+        <p:nvSpPr>
+          <p:cNvPr id="26" name="Shape 20"/>
+          <p:cNvSpPr/>
+          <p:nvPr/>
+        </p:nvSpPr>
+        <p:spPr>
+          <a:xfrm>
+            <a:off x="548640" y="5733288"/>
+            <a:ext cx="11094415" cy="960120"/>
+          </a:xfrm>
+          <a:prstGeom prst="roundRect">
+            <a:avLst>
+              <a:gd name="adj" fmla="val 8571"/>
+            </a:avLst>
+          </a:prstGeom>
+          <a:solidFill>
+            <a:srgbClr val="EAF4EF"/>
+          </a:solidFill>
+          <a:ln/>
+          <a:effectLst>
+            <a:outerShdw sx="100000" sy="100000" kx="0" ky="0" algn="bl" rotWithShape="0" blurRad="76200" dist="12700" dir="5400000">
+              <a:srgbClr val="9AA7C4">
+                <a:alpha val="22000"/>
+              </a:srgbClr>
+            </a:outerShdw>
+          </a:effectLst>
+        </p:spPr>
+      </p:sp>
+      <p:sp>
+        <p:nvSpPr>
+          <p:cNvPr id="27" name="Shape 21"/>
+          <p:cNvSpPr/>
+          <p:nvPr/>
+        </p:nvSpPr>
+        <p:spPr>
+          <a:xfrm>
+            <a:off x="777240" y="5943600"/>
+            <a:ext cx="548640" cy="548640"/>
+          </a:xfrm>
+          <a:prstGeom prst="ellipse">
+            <a:avLst/>
+          </a:prstGeom>
+          <a:solidFill>
+            <a:srgbClr val="2E7D5B"/>
+          </a:solidFill>
+          <a:ln/>
+        </p:spPr>
+      </p:sp>
+      <p:pic>
+        <p:nvPicPr>
+          <p:cNvPr id="28" name="Image 4" descr="preencoded.png">    </p:cNvPr>
+          <p:cNvPicPr>
+            <a:picLocks noChangeAspect="1"/>
+          </p:cNvPicPr>
+          <p:nvPr/>
+        </p:nvPicPr>
+        <p:blipFill>
+          <a:blip r:embed="rId5"/>
+          <a:stretch>
+            <a:fillRect/>
+          </a:stretch>
+        </p:blipFill>
+        <p:spPr>
+          <a:xfrm>
+            <a:off x="919886" y="6086246"/>
+            <a:ext cx="263347" cy="263347"/>
+          </a:xfrm>
+          <a:prstGeom prst="rect">
+            <a:avLst/>
+          </a:prstGeom>
+        </p:spPr>
+      </p:pic>
+      <p:sp>
+        <p:nvSpPr>
+          <p:cNvPr id="29" name="Text 22"/>
+          <p:cNvSpPr/>
+          <p:nvPr/>
+        </p:nvSpPr>
+        <p:spPr>
+          <a:xfrm>
+            <a:off x="1508760" y="5852160"/>
+            <a:ext cx="9905695" cy="731520"/>
+          </a:xfrm>
+          <a:prstGeom prst="rect">
+            <a:avLst/>
+          </a:prstGeom>
+          <a:noFill/>
+          <a:ln/>
+        </p:spPr>
+        <p:txBody>
+          <a:bodyPr wrap="square" lIns="0" tIns="0" rIns="0" bIns="0" rtlCol="0" anchor="ctr"/>
+          <a:lstStyle/>
+          <a:p>
+            <a:pPr indent="0" marL="0">
+              <a:buNone/>
+            </a:pPr>
+            <a:r>
+              <a:rPr lang="en-US" sz="1350" b="1" dirty="0">
                 <a:solidFill>
                   <a:srgbClr val="2E7D5B"/>
                 </a:solidFill>
@@ -9743,81 +12383,13 @@
                 <a:ea typeface="Calibri" pitchFamily="34" charset="-122"/>
                 <a:cs typeface="Calibri" pitchFamily="34" charset="-120"/>
               </a:rPr>
-              <a:t>Anything touching real rules</a:t>
-            </a:r>
-            <a:endParaRPr lang="en-US" sz="1500" dirty="0"/>
-          </a:p>
-        </p:txBody>
-      </p:sp>
-      <p:sp>
-        <p:nvSpPr>
-          <p:cNvPr id="16" name="Text 12"/>
-          <p:cNvSpPr/>
-          <p:nvPr/>
-        </p:nvSpPr>
-        <p:spPr>
-          <a:xfrm>
-            <a:off x="6553048" y="2487168"/>
-            <a:ext cx="4815688" cy="457200"/>
-          </a:xfrm>
-          <a:prstGeom prst="rect">
-            <a:avLst/>
-          </a:prstGeom>
-          <a:noFill/>
-          <a:ln/>
-        </p:spPr>
-        <p:txBody>
-          <a:bodyPr wrap="square" lIns="0" tIns="0" rIns="0" bIns="0" rtlCol="0" anchor="ctr"/>
-          <a:lstStyle/>
-          <a:p>
+              <a:t>This is the part that actually saves us months: </a:t>
+            </a:r>
             <a:pPr indent="0" marL="0">
               <a:buNone/>
             </a:pPr>
             <a:r>
-              <a:rPr lang="en-US" sz="1200" i="1" dirty="0">
-                <a:solidFill>
-                  <a:srgbClr val="5A6B8C"/>
-                </a:solidFill>
-                <a:latin typeface="Calibri" pitchFamily="34" charset="0"/>
-                <a:ea typeface="Calibri" pitchFamily="34" charset="-122"/>
-                <a:cs typeface="Calibri" pitchFamily="34" charset="-120"/>
-              </a:rPr>
-              <a:t>Unusual shapes, anything near sensitive logic.</a:t>
-            </a:r>
-            <a:endParaRPr lang="en-US" sz="1200" dirty="0"/>
-          </a:p>
-        </p:txBody>
-      </p:sp>
-      <p:sp>
-        <p:nvSpPr>
-          <p:cNvPr id="17" name="Text 13"/>
-          <p:cNvSpPr/>
-          <p:nvPr/>
-        </p:nvSpPr>
-        <p:spPr>
-          <a:xfrm>
-            <a:off x="6553048" y="3017520"/>
-            <a:ext cx="4815688" cy="1371600"/>
-          </a:xfrm>
-          <a:prstGeom prst="rect">
-            <a:avLst/>
-          </a:prstGeom>
-          <a:noFill/>
-          <a:ln/>
-        </p:spPr>
-        <p:txBody>
-          <a:bodyPr wrap="square" lIns="0" tIns="0" rIns="0" bIns="0" rtlCol="0" anchor="ctr"/>
-          <a:lstStyle/>
-          <a:p>
-            <a:pPr marL="342900" indent="-342900">
-              <a:spcAft>
-                <a:spcPts val="800"/>
-              </a:spcAft>
-              <a:buSzPct val="100000"/>
-              <a:buChar char="•"/>
-            </a:pPr>
-            <a:r>
-              <a:rPr lang="en-US" sz="1300" dirty="0">
+              <a:rPr lang="en-US" sz="1350" dirty="0">
                 <a:solidFill>
                   <a:srgbClr val="1B2440"/>
                 </a:solidFill>
@@ -9825,69 +12397,9 @@
                 <a:ea typeface="Calibri" pitchFamily="34" charset="-122"/>
                 <a:cs typeface="Calibri" pitchFamily="34" charset="-120"/>
               </a:rPr>
-              <a:t>Loop in a tech lead or the supervisor first</a:t>
-            </a:r>
-            <a:endParaRPr lang="en-US" sz="1300" dirty="0"/>
-          </a:p>
-          <a:p>
-            <a:pPr marL="342900" indent="-342900">
-              <a:spcAft>
-                <a:spcPts val="800"/>
-              </a:spcAft>
-              <a:buSzPct val="100000"/>
-              <a:buChar char="•"/>
-            </a:pPr>
-            <a:r>
-              <a:rPr lang="en-US" sz="1300" dirty="0">
-                <a:solidFill>
-                  <a:srgbClr val="1B2440"/>
-                </a:solidFill>
-                <a:latin typeface="Calibri" pitchFamily="34" charset="0"/>
-                <a:ea typeface="Calibri" pitchFamily="34" charset="-122"/>
-                <a:cs typeface="Calibri" pitchFamily="34" charset="-120"/>
-              </a:rPr>
-              <a:t>A day or two, not a blocker — just a second look</a:t>
-            </a:r>
-            <a:endParaRPr lang="en-US" sz="1300" dirty="0"/>
-          </a:p>
-        </p:txBody>
-      </p:sp>
-      <p:sp>
-        <p:nvSpPr>
-          <p:cNvPr id="18" name="Text 14"/>
-          <p:cNvSpPr/>
-          <p:nvPr/>
-        </p:nvSpPr>
-        <p:spPr>
-          <a:xfrm>
-            <a:off x="548640" y="5257800"/>
-            <a:ext cx="11094415" cy="457200"/>
-          </a:xfrm>
-          <a:prstGeom prst="rect">
-            <a:avLst/>
-          </a:prstGeom>
-          <a:noFill/>
-          <a:ln/>
-        </p:spPr>
-        <p:txBody>
-          <a:bodyPr wrap="square" lIns="0" tIns="0" rIns="0" bIns="0" rtlCol="0" anchor="ctr"/>
-          <a:lstStyle/>
-          <a:p>
-            <a:pPr algn="ctr" indent="0" marL="0">
-              <a:buNone/>
-            </a:pPr>
-            <a:r>
-              <a:rPr lang="en-US" sz="1300" i="1" dirty="0">
-                <a:solidFill>
-                  <a:srgbClr val="5A6B8C"/>
-                </a:solidFill>
-                <a:latin typeface="Calibri" pitchFamily="34" charset="0"/>
-                <a:ea typeface="Calibri" pitchFamily="34" charset="-122"/>
-                <a:cs typeface="Calibri" pitchFamily="34" charset="-120"/>
-              </a:rPr>
-              <a:t>We'll tighten this up as we go — better to start simple and add structure only where we actually need it.</a:t>
-            </a:r>
-            <a:endParaRPr lang="en-US" sz="1300" dirty="0"/>
+              <a:t>most bugs get caught outside, where fixing them is a two-minute edit instead of a trip through the internal pipeline.</a:t>
+            </a:r>
+            <a:endParaRPr lang="en-US" sz="1350" dirty="0"/>
           </a:p>
         </p:txBody>
       </p:sp>
@@ -10034,7 +12546,7 @@
                 <a:ea typeface="Calibri" pitchFamily="34" charset="-122"/>
                 <a:cs typeface="Calibri" pitchFamily="34" charset="-120"/>
               </a:rPr>
-              <a:t>PORTING FEATURES, ONE AT A TIME</a:t>
+              <a:t>BEFORE ANY CODE CROSSES</a:t>
             </a:r>
             <a:endParaRPr lang="en-US" sz="1200" dirty="0"/>
           </a:p>
@@ -10073,7 +12585,7 @@
                 <a:ea typeface="Cambria" pitchFamily="34" charset="-122"/>
                 <a:cs typeface="Cambria" pitchFamily="34" charset="-120"/>
               </a:rPr>
-              <a:t>Inventory → Spec → Build → Verify — repeat</a:t>
+              <a:t>A short checklist, every time</a:t>
             </a:r>
             <a:endParaRPr lang="en-US" sz="2800" dirty="0"/>
           </a:p>
@@ -10087,12 +12599,12 @@
         </p:nvSpPr>
         <p:spPr>
           <a:xfrm>
-            <a:off x="548640" y="1691640"/>
-            <a:ext cx="2602154" cy="3017520"/>
+            <a:off x="548640" y="1828800"/>
+            <a:ext cx="11094415" cy="704088"/>
           </a:xfrm>
           <a:prstGeom prst="roundRect">
             <a:avLst>
-              <a:gd name="adj" fmla="val 3163"/>
+              <a:gd name="adj" fmla="val 11688"/>
             </a:avLst>
           </a:prstGeom>
           <a:solidFill>
@@ -10110,14 +12622,58 @@
       </p:sp>
       <p:sp>
         <p:nvSpPr>
-          <p:cNvPr id="7" name="Text 5"/>
-          <p:cNvSpPr/>
-          <p:nvPr/>
-        </p:nvSpPr>
-        <p:spPr>
-          <a:xfrm>
-            <a:off x="731520" y="1828800"/>
-            <a:ext cx="731520" cy="685800"/>
+          <p:cNvPr id="7" name="Shape 5"/>
+          <p:cNvSpPr/>
+          <p:nvPr/>
+        </p:nvSpPr>
+        <p:spPr>
+          <a:xfrm>
+            <a:off x="731520" y="1961388"/>
+            <a:ext cx="438912" cy="438912"/>
+          </a:xfrm>
+          <a:prstGeom prst="ellipse">
+            <a:avLst/>
+          </a:prstGeom>
+          <a:solidFill>
+            <a:srgbClr val="2E7D5B"/>
+          </a:solidFill>
+          <a:ln/>
+        </p:spPr>
+      </p:sp>
+      <p:pic>
+        <p:nvPicPr>
+          <p:cNvPr id="8" name="Image 0" descr="preencoded.png">    </p:cNvPr>
+          <p:cNvPicPr>
+            <a:picLocks noChangeAspect="1"/>
+          </p:cNvPicPr>
+          <p:nvPr/>
+        </p:nvPicPr>
+        <p:blipFill>
+          <a:blip r:embed="rId1"/>
+          <a:stretch>
+            <a:fillRect/>
+          </a:stretch>
+        </p:blipFill>
+        <p:spPr>
+          <a:xfrm>
+            <a:off x="845637" y="2075505"/>
+            <a:ext cx="210678" cy="210678"/>
+          </a:xfrm>
+          <a:prstGeom prst="rect">
+            <a:avLst/>
+          </a:prstGeom>
+        </p:spPr>
+      </p:pic>
+      <p:sp>
+        <p:nvSpPr>
+          <p:cNvPr id="9" name="Text 6"/>
+          <p:cNvSpPr/>
+          <p:nvPr/>
+        </p:nvSpPr>
+        <p:spPr>
+          <a:xfrm>
+            <a:off x="1371600" y="1828800"/>
+            <a:ext cx="10088575" cy="704088"/>
           </a:xfrm>
           <a:prstGeom prst="rect">
             <a:avLst/>
@@ -10133,85 +12689,7 @@
               <a:buNone/>
             </a:pPr>
             <a:r>
-              <a:rPr lang="en-US" sz="3600" b="1" dirty="0">
-                <a:solidFill>
-                  <a:srgbClr val="CADCFC"/>
-                </a:solidFill>
-                <a:latin typeface="Cambria" pitchFamily="34" charset="0"/>
-                <a:ea typeface="Cambria" pitchFamily="34" charset="-122"/>
-                <a:cs typeface="Cambria" pitchFamily="34" charset="-120"/>
-              </a:rPr>
-              <a:t>1</a:t>
-            </a:r>
-            <a:endParaRPr lang="en-US" sz="3600" dirty="0"/>
-          </a:p>
-        </p:txBody>
-      </p:sp>
-      <p:sp>
-        <p:nvSpPr>
-          <p:cNvPr id="8" name="Text 6"/>
-          <p:cNvSpPr/>
-          <p:nvPr/>
-        </p:nvSpPr>
-        <p:spPr>
-          <a:xfrm>
-            <a:off x="731520" y="2468880"/>
-            <a:ext cx="2236394" cy="320040"/>
-          </a:xfrm>
-          <a:prstGeom prst="rect">
-            <a:avLst/>
-          </a:prstGeom>
-          <a:noFill/>
-          <a:ln/>
-        </p:spPr>
-        <p:txBody>
-          <a:bodyPr wrap="square" lIns="0" tIns="0" rIns="0" bIns="0" rtlCol="0" anchor="ctr"/>
-          <a:lstStyle/>
-          <a:p>
-            <a:pPr indent="0" marL="0">
-              <a:buNone/>
-            </a:pPr>
-            <a:r>
-              <a:rPr lang="en-US" sz="1500" b="1" dirty="0">
-                <a:solidFill>
-                  <a:srgbClr val="1E2761"/>
-                </a:solidFill>
-                <a:latin typeface="Calibri" pitchFamily="34" charset="0"/>
-                <a:ea typeface="Calibri" pitchFamily="34" charset="-122"/>
-                <a:cs typeface="Calibri" pitchFamily="34" charset="-120"/>
-              </a:rPr>
-              <a:t>Inventory</a:t>
-            </a:r>
-            <a:endParaRPr lang="en-US" sz="1500" dirty="0"/>
-          </a:p>
-        </p:txBody>
-      </p:sp>
-      <p:sp>
-        <p:nvSpPr>
-          <p:cNvPr id="9" name="Text 7"/>
-          <p:cNvSpPr/>
-          <p:nvPr/>
-        </p:nvSpPr>
-        <p:spPr>
-          <a:xfrm>
-            <a:off x="731520" y="2834640"/>
-            <a:ext cx="2236394" cy="1691640"/>
-          </a:xfrm>
-          <a:prstGeom prst="rect">
-            <a:avLst/>
-          </a:prstGeom>
-          <a:noFill/>
-          <a:ln/>
-        </p:spPr>
-        <p:txBody>
-          <a:bodyPr wrap="square" lIns="0" tIns="0" rIns="0" bIns="0" rtlCol="0" anchor="ctr"/>
-          <a:lstStyle/>
-          <a:p>
-            <a:pPr indent="0" marL="0">
-              <a:buNone/>
-            </a:pPr>
-            <a:r>
-              <a:rPr lang="en-US" sz="1100" dirty="0">
+              <a:rPr lang="en-US" sz="1350" dirty="0">
                 <a:solidFill>
                   <a:srgbClr val="1B2440"/>
                 </a:solidFill>
@@ -10219,62 +12697,26 @@
                 <a:ea typeface="Calibri" pitchFamily="34" charset="-122"/>
                 <a:cs typeface="Calibri" pitchFamily="34" charset="-120"/>
               </a:rPr>
-              <a:t>List out what each Angular feature actually does: routes, screens, calls, rules. One row per feature.</a:t>
-            </a:r>
-            <a:endParaRPr lang="en-US" sz="1100" dirty="0"/>
-          </a:p>
-        </p:txBody>
-      </p:sp>
-      <p:sp>
-        <p:nvSpPr>
-          <p:cNvPr id="10" name="Text 8"/>
-          <p:cNvSpPr/>
-          <p:nvPr/>
-        </p:nvSpPr>
-        <p:spPr>
-          <a:xfrm>
-            <a:off x="3132506" y="3017520"/>
-            <a:ext cx="274320" cy="365760"/>
-          </a:xfrm>
-          <a:prstGeom prst="rect">
-            <a:avLst/>
-          </a:prstGeom>
-          <a:noFill/>
-          <a:ln/>
-        </p:spPr>
-        <p:txBody>
-          <a:bodyPr wrap="square" lIns="0" tIns="0" rIns="0" bIns="0" rtlCol="0" anchor="ctr"/>
-          <a:lstStyle/>
-          <a:p>
-            <a:pPr algn="ctr" indent="0" marL="0">
-              <a:buNone/>
-            </a:pPr>
-            <a:r>
-              <a:rPr lang="en-US" sz="1800" dirty="0">
-                <a:solidFill>
-                  <a:srgbClr val="5A6B8C"/>
-                </a:solidFill>
-              </a:rPr>
-              <a:t>▸</a:t>
-            </a:r>
-            <a:endParaRPr lang="en-US" sz="1800" dirty="0"/>
-          </a:p>
-        </p:txBody>
-      </p:sp>
-      <p:sp>
-        <p:nvSpPr>
-          <p:cNvPr id="11" name="Shape 9"/>
-          <p:cNvSpPr/>
-          <p:nvPr/>
-        </p:nvSpPr>
-        <p:spPr>
-          <a:xfrm>
-            <a:off x="3379394" y="1691640"/>
-            <a:ext cx="2602154" cy="3017520"/>
+              <a:t>Unit tests green — Jest for React/TypeScript, JUnit for any Java/Spring code involved</a:t>
+            </a:r>
+            <a:endParaRPr lang="en-US" sz="1350" dirty="0"/>
+          </a:p>
+        </p:txBody>
+      </p:sp>
+      <p:sp>
+        <p:nvSpPr>
+          <p:cNvPr id="10" name="Shape 7"/>
+          <p:cNvSpPr/>
+          <p:nvPr/>
+        </p:nvSpPr>
+        <p:spPr>
+          <a:xfrm>
+            <a:off x="548640" y="2697480"/>
+            <a:ext cx="11094415" cy="704088"/>
           </a:xfrm>
           <a:prstGeom prst="roundRect">
             <a:avLst>
-              <a:gd name="adj" fmla="val 3163"/>
+              <a:gd name="adj" fmla="val 11688"/>
             </a:avLst>
           </a:prstGeom>
           <a:solidFill>
@@ -10292,14 +12734,58 @@
       </p:sp>
       <p:sp>
         <p:nvSpPr>
-          <p:cNvPr id="12" name="Text 10"/>
-          <p:cNvSpPr/>
-          <p:nvPr/>
-        </p:nvSpPr>
-        <p:spPr>
-          <a:xfrm>
-            <a:off x="3562274" y="1828800"/>
-            <a:ext cx="731520" cy="685800"/>
+          <p:cNvPr id="11" name="Shape 8"/>
+          <p:cNvSpPr/>
+          <p:nvPr/>
+        </p:nvSpPr>
+        <p:spPr>
+          <a:xfrm>
+            <a:off x="731520" y="2830068"/>
+            <a:ext cx="438912" cy="438912"/>
+          </a:xfrm>
+          <a:prstGeom prst="ellipse">
+            <a:avLst/>
+          </a:prstGeom>
+          <a:solidFill>
+            <a:srgbClr val="2E7D5B"/>
+          </a:solidFill>
+          <a:ln/>
+        </p:spPr>
+      </p:sp>
+      <p:pic>
+        <p:nvPicPr>
+          <p:cNvPr id="12" name="Image 1" descr="preencoded.png">    </p:cNvPr>
+          <p:cNvPicPr>
+            <a:picLocks noChangeAspect="1"/>
+          </p:cNvPicPr>
+          <p:nvPr/>
+        </p:nvPicPr>
+        <p:blipFill>
+          <a:blip r:embed="rId2"/>
+          <a:stretch>
+            <a:fillRect/>
+          </a:stretch>
+        </p:blipFill>
+        <p:spPr>
+          <a:xfrm>
+            <a:off x="845637" y="2944185"/>
+            <a:ext cx="210678" cy="210678"/>
+          </a:xfrm>
+          <a:prstGeom prst="rect">
+            <a:avLst/>
+          </a:prstGeom>
+        </p:spPr>
+      </p:pic>
+      <p:sp>
+        <p:nvSpPr>
+          <p:cNvPr id="13" name="Text 9"/>
+          <p:cNvSpPr/>
+          <p:nvPr/>
+        </p:nvSpPr>
+        <p:spPr>
+          <a:xfrm>
+            <a:off x="1371600" y="2697480"/>
+            <a:ext cx="10088575" cy="704088"/>
           </a:xfrm>
           <a:prstGeom prst="rect">
             <a:avLst/>
@@ -10315,85 +12801,7 @@
               <a:buNone/>
             </a:pPr>
             <a:r>
-              <a:rPr lang="en-US" sz="3600" b="1" dirty="0">
-                <a:solidFill>
-                  <a:srgbClr val="CADCFC"/>
-                </a:solidFill>
-                <a:latin typeface="Cambria" pitchFamily="34" charset="0"/>
-                <a:ea typeface="Cambria" pitchFamily="34" charset="-122"/>
-                <a:cs typeface="Cambria" pitchFamily="34" charset="-120"/>
-              </a:rPr>
-              <a:t>2</a:t>
-            </a:r>
-            <a:endParaRPr lang="en-US" sz="3600" dirty="0"/>
-          </a:p>
-        </p:txBody>
-      </p:sp>
-      <p:sp>
-        <p:nvSpPr>
-          <p:cNvPr id="13" name="Text 11"/>
-          <p:cNvSpPr/>
-          <p:nvPr/>
-        </p:nvSpPr>
-        <p:spPr>
-          <a:xfrm>
-            <a:off x="3562274" y="2468880"/>
-            <a:ext cx="2236394" cy="320040"/>
-          </a:xfrm>
-          <a:prstGeom prst="rect">
-            <a:avLst/>
-          </a:prstGeom>
-          <a:noFill/>
-          <a:ln/>
-        </p:spPr>
-        <p:txBody>
-          <a:bodyPr wrap="square" lIns="0" tIns="0" rIns="0" bIns="0" rtlCol="0" anchor="ctr"/>
-          <a:lstStyle/>
-          <a:p>
-            <a:pPr indent="0" marL="0">
-              <a:buNone/>
-            </a:pPr>
-            <a:r>
-              <a:rPr lang="en-US" sz="1500" b="1" dirty="0">
-                <a:solidFill>
-                  <a:srgbClr val="1E2761"/>
-                </a:solidFill>
-                <a:latin typeface="Calibri" pitchFamily="34" charset="0"/>
-                <a:ea typeface="Calibri" pitchFamily="34" charset="-122"/>
-                <a:cs typeface="Calibri" pitchFamily="34" charset="-120"/>
-              </a:rPr>
-              <a:t>Spec</a:t>
-            </a:r>
-            <a:endParaRPr lang="en-US" sz="1500" dirty="0"/>
-          </a:p>
-        </p:txBody>
-      </p:sp>
-      <p:sp>
-        <p:nvSpPr>
-          <p:cNvPr id="14" name="Text 12"/>
-          <p:cNvSpPr/>
-          <p:nvPr/>
-        </p:nvSpPr>
-        <p:spPr>
-          <a:xfrm>
-            <a:off x="3562274" y="2834640"/>
-            <a:ext cx="2236394" cy="1691640"/>
-          </a:xfrm>
-          <a:prstGeom prst="rect">
-            <a:avLst/>
-          </a:prstGeom>
-          <a:noFill/>
-          <a:ln/>
-        </p:spPr>
-        <p:txBody>
-          <a:bodyPr wrap="square" lIns="0" tIns="0" rIns="0" bIns="0" rtlCol="0" anchor="ctr"/>
-          <a:lstStyle/>
-          <a:p>
-            <a:pPr indent="0" marL="0">
-              <a:buNone/>
-            </a:pPr>
-            <a:r>
-              <a:rPr lang="en-US" sz="1100" dirty="0">
+              <a:rPr lang="en-US" sz="1350" dirty="0">
                 <a:solidFill>
                   <a:srgbClr val="1B2440"/>
                 </a:solidFill>
@@ -10401,62 +12809,26 @@
                 <a:ea typeface="Calibri" pitchFamily="34" charset="-122"/>
                 <a:cs typeface="Calibri" pitchFamily="34" charset="-120"/>
               </a:rPr>
-              <a:t>Write the contract inside: API shape, rule keys, sample data. Keep it tight — a spec shouldn't take a week.</a:t>
-            </a:r>
-            <a:endParaRPr lang="en-US" sz="1100" dirty="0"/>
-          </a:p>
-        </p:txBody>
-      </p:sp>
-      <p:sp>
-        <p:nvSpPr>
-          <p:cNvPr id="15" name="Text 13"/>
-          <p:cNvSpPr/>
-          <p:nvPr/>
-        </p:nvSpPr>
-        <p:spPr>
-          <a:xfrm>
-            <a:off x="5963260" y="3017520"/>
-            <a:ext cx="274320" cy="365760"/>
-          </a:xfrm>
-          <a:prstGeom prst="rect">
-            <a:avLst/>
-          </a:prstGeom>
-          <a:noFill/>
-          <a:ln/>
-        </p:spPr>
-        <p:txBody>
-          <a:bodyPr wrap="square" lIns="0" tIns="0" rIns="0" bIns="0" rtlCol="0" anchor="ctr"/>
-          <a:lstStyle/>
-          <a:p>
-            <a:pPr algn="ctr" indent="0" marL="0">
-              <a:buNone/>
-            </a:pPr>
-            <a:r>
-              <a:rPr lang="en-US" sz="1800" dirty="0">
-                <a:solidFill>
-                  <a:srgbClr val="5A6B8C"/>
-                </a:solidFill>
-              </a:rPr>
-              <a:t>▸</a:t>
-            </a:r>
-            <a:endParaRPr lang="en-US" sz="1800" dirty="0"/>
-          </a:p>
-        </p:txBody>
-      </p:sp>
-      <p:sp>
-        <p:nvSpPr>
-          <p:cNvPr id="16" name="Shape 14"/>
-          <p:cNvSpPr/>
-          <p:nvPr/>
-        </p:nvSpPr>
-        <p:spPr>
-          <a:xfrm>
-            <a:off x="6210148" y="1691640"/>
-            <a:ext cx="2602154" cy="3017520"/>
+              <a:t>Static analysis &amp; lint clean — the same rules Confi uses, not a lighter internet-only version</a:t>
+            </a:r>
+            <a:endParaRPr lang="en-US" sz="1350" dirty="0"/>
+          </a:p>
+        </p:txBody>
+      </p:sp>
+      <p:sp>
+        <p:nvSpPr>
+          <p:cNvPr id="14" name="Shape 10"/>
+          <p:cNvSpPr/>
+          <p:nvPr/>
+        </p:nvSpPr>
+        <p:spPr>
+          <a:xfrm>
+            <a:off x="548640" y="3566160"/>
+            <a:ext cx="11094415" cy="704088"/>
           </a:xfrm>
           <a:prstGeom prst="roundRect">
             <a:avLst>
-              <a:gd name="adj" fmla="val 3163"/>
+              <a:gd name="adj" fmla="val 11688"/>
             </a:avLst>
           </a:prstGeom>
           <a:solidFill>
@@ -10474,14 +12846,58 @@
       </p:sp>
       <p:sp>
         <p:nvSpPr>
-          <p:cNvPr id="17" name="Text 15"/>
-          <p:cNvSpPr/>
-          <p:nvPr/>
-        </p:nvSpPr>
-        <p:spPr>
-          <a:xfrm>
-            <a:off x="6393028" y="1828800"/>
-            <a:ext cx="731520" cy="685800"/>
+          <p:cNvPr id="15" name="Shape 11"/>
+          <p:cNvSpPr/>
+          <p:nvPr/>
+        </p:nvSpPr>
+        <p:spPr>
+          <a:xfrm>
+            <a:off x="731520" y="3698748"/>
+            <a:ext cx="438912" cy="438912"/>
+          </a:xfrm>
+          <a:prstGeom prst="ellipse">
+            <a:avLst/>
+          </a:prstGeom>
+          <a:solidFill>
+            <a:srgbClr val="2E7D5B"/>
+          </a:solidFill>
+          <a:ln/>
+        </p:spPr>
+      </p:sp>
+      <p:pic>
+        <p:nvPicPr>
+          <p:cNvPr id="16" name="Image 2" descr="preencoded.png">    </p:cNvPr>
+          <p:cNvPicPr>
+            <a:picLocks noChangeAspect="1"/>
+          </p:cNvPicPr>
+          <p:nvPr/>
+        </p:nvPicPr>
+        <p:blipFill>
+          <a:blip r:embed="rId3"/>
+          <a:stretch>
+            <a:fillRect/>
+          </a:stretch>
+        </p:blipFill>
+        <p:spPr>
+          <a:xfrm>
+            <a:off x="845637" y="3812865"/>
+            <a:ext cx="210678" cy="210678"/>
+          </a:xfrm>
+          <a:prstGeom prst="rect">
+            <a:avLst/>
+          </a:prstGeom>
+        </p:spPr>
+      </p:pic>
+      <p:sp>
+        <p:nvSpPr>
+          <p:cNvPr id="17" name="Text 12"/>
+          <p:cNvSpPr/>
+          <p:nvPr/>
+        </p:nvSpPr>
+        <p:spPr>
+          <a:xfrm>
+            <a:off x="1371600" y="3566160"/>
+            <a:ext cx="10088575" cy="704088"/>
           </a:xfrm>
           <a:prstGeom prst="rect">
             <a:avLst/>
@@ -10497,85 +12913,7 @@
               <a:buNone/>
             </a:pPr>
             <a:r>
-              <a:rPr lang="en-US" sz="3600" b="1" dirty="0">
-                <a:solidFill>
-                  <a:srgbClr val="CADCFC"/>
-                </a:solidFill>
-                <a:latin typeface="Cambria" pitchFamily="34" charset="0"/>
-                <a:ea typeface="Cambria" pitchFamily="34" charset="-122"/>
-                <a:cs typeface="Cambria" pitchFamily="34" charset="-120"/>
-              </a:rPr>
-              <a:t>3</a:t>
-            </a:r>
-            <a:endParaRPr lang="en-US" sz="3600" dirty="0"/>
-          </a:p>
-        </p:txBody>
-      </p:sp>
-      <p:sp>
-        <p:nvSpPr>
-          <p:cNvPr id="18" name="Text 16"/>
-          <p:cNvSpPr/>
-          <p:nvPr/>
-        </p:nvSpPr>
-        <p:spPr>
-          <a:xfrm>
-            <a:off x="6393028" y="2468880"/>
-            <a:ext cx="2236394" cy="320040"/>
-          </a:xfrm>
-          <a:prstGeom prst="rect">
-            <a:avLst/>
-          </a:prstGeom>
-          <a:noFill/>
-          <a:ln/>
-        </p:spPr>
-        <p:txBody>
-          <a:bodyPr wrap="square" lIns="0" tIns="0" rIns="0" bIns="0" rtlCol="0" anchor="ctr"/>
-          <a:lstStyle/>
-          <a:p>
-            <a:pPr indent="0" marL="0">
-              <a:buNone/>
-            </a:pPr>
-            <a:r>
-              <a:rPr lang="en-US" sz="1500" b="1" dirty="0">
-                <a:solidFill>
-                  <a:srgbClr val="1E2761"/>
-                </a:solidFill>
-                <a:latin typeface="Calibri" pitchFamily="34" charset="0"/>
-                <a:ea typeface="Calibri" pitchFamily="34" charset="-122"/>
-                <a:cs typeface="Calibri" pitchFamily="34" charset="-120"/>
-              </a:rPr>
-              <a:t>Build</a:t>
-            </a:r>
-            <a:endParaRPr lang="en-US" sz="1500" dirty="0"/>
-          </a:p>
-        </p:txBody>
-      </p:sp>
-      <p:sp>
-        <p:nvSpPr>
-          <p:cNvPr id="19" name="Text 17"/>
-          <p:cNvSpPr/>
-          <p:nvPr/>
-        </p:nvSpPr>
-        <p:spPr>
-          <a:xfrm>
-            <a:off x="6393028" y="2834640"/>
-            <a:ext cx="2236394" cy="1691640"/>
-          </a:xfrm>
-          <a:prstGeom prst="rect">
-            <a:avLst/>
-          </a:prstGeom>
-          <a:noFill/>
-          <a:ln/>
-        </p:spPr>
-        <p:txBody>
-          <a:bodyPr wrap="square" lIns="0" tIns="0" rIns="0" bIns="0" rtlCol="0" anchor="ctr"/>
-          <a:lstStyle/>
-          <a:p>
-            <a:pPr indent="0" marL="0">
-              <a:buNone/>
-            </a:pPr>
-            <a:r>
-              <a:rPr lang="en-US" sz="1100" dirty="0">
+              <a:rPr lang="en-US" sz="1350" dirty="0">
                 <a:solidFill>
                   <a:srgbClr val="1B2440"/>
                 </a:solidFill>
@@ -10583,62 +12921,26 @@
                 <a:ea typeface="Calibri" pitchFamily="34" charset="-122"/>
                 <a:cs typeface="Calibri" pitchFamily="34" charset="-120"/>
               </a:rPr>
-              <a:t>Build it outside end-to-end — UI, tests, docs together — against the mocks. Not all-screens-first.</a:t>
-            </a:r>
-            <a:endParaRPr lang="en-US" sz="1100" dirty="0"/>
-          </a:p>
-        </p:txBody>
-      </p:sp>
-      <p:sp>
-        <p:nvSpPr>
-          <p:cNvPr id="20" name="Text 18"/>
-          <p:cNvSpPr/>
-          <p:nvPr/>
-        </p:nvSpPr>
-        <p:spPr>
-          <a:xfrm>
-            <a:off x="8794013" y="3017520"/>
-            <a:ext cx="274320" cy="365760"/>
-          </a:xfrm>
-          <a:prstGeom prst="rect">
-            <a:avLst/>
-          </a:prstGeom>
-          <a:noFill/>
-          <a:ln/>
-        </p:spPr>
-        <p:txBody>
-          <a:bodyPr wrap="square" lIns="0" tIns="0" rIns="0" bIns="0" rtlCol="0" anchor="ctr"/>
-          <a:lstStyle/>
-          <a:p>
-            <a:pPr algn="ctr" indent="0" marL="0">
-              <a:buNone/>
-            </a:pPr>
-            <a:r>
-              <a:rPr lang="en-US" sz="1800" dirty="0">
-                <a:solidFill>
-                  <a:srgbClr val="5A6B8C"/>
-                </a:solidFill>
-              </a:rPr>
-              <a:t>▸</a:t>
-            </a:r>
-            <a:endParaRPr lang="en-US" sz="1800" dirty="0"/>
-          </a:p>
-        </p:txBody>
-      </p:sp>
-      <p:sp>
-        <p:nvSpPr>
-          <p:cNvPr id="21" name="Shape 19"/>
-          <p:cNvSpPr/>
-          <p:nvPr/>
-        </p:nvSpPr>
-        <p:spPr>
-          <a:xfrm>
-            <a:off x="9040901" y="1691640"/>
-            <a:ext cx="2602154" cy="3017520"/>
+              <a:t>Contract tests pass — the mocks match the OpenAPI spec exactly</a:t>
+            </a:r>
+            <a:endParaRPr lang="en-US" sz="1350" dirty="0"/>
+          </a:p>
+        </p:txBody>
+      </p:sp>
+      <p:sp>
+        <p:nvSpPr>
+          <p:cNvPr id="18" name="Shape 13"/>
+          <p:cNvSpPr/>
+          <p:nvPr/>
+        </p:nvSpPr>
+        <p:spPr>
+          <a:xfrm>
+            <a:off x="548640" y="4434840"/>
+            <a:ext cx="11094415" cy="704088"/>
           </a:xfrm>
           <a:prstGeom prst="roundRect">
             <a:avLst>
-              <a:gd name="adj" fmla="val 3163"/>
+              <a:gd name="adj" fmla="val 11688"/>
             </a:avLst>
           </a:prstGeom>
           <a:solidFill>
@@ -10656,14 +12958,58 @@
       </p:sp>
       <p:sp>
         <p:nvSpPr>
-          <p:cNvPr id="22" name="Text 20"/>
-          <p:cNvSpPr/>
-          <p:nvPr/>
-        </p:nvSpPr>
-        <p:spPr>
-          <a:xfrm>
-            <a:off x="9223781" y="1828800"/>
-            <a:ext cx="731520" cy="685800"/>
+          <p:cNvPr id="19" name="Shape 14"/>
+          <p:cNvSpPr/>
+          <p:nvPr/>
+        </p:nvSpPr>
+        <p:spPr>
+          <a:xfrm>
+            <a:off x="731520" y="4567428"/>
+            <a:ext cx="438912" cy="438912"/>
+          </a:xfrm>
+          <a:prstGeom prst="ellipse">
+            <a:avLst/>
+          </a:prstGeom>
+          <a:solidFill>
+            <a:srgbClr val="2E7D5B"/>
+          </a:solidFill>
+          <a:ln/>
+        </p:spPr>
+      </p:sp>
+      <p:pic>
+        <p:nvPicPr>
+          <p:cNvPr id="20" name="Image 3" descr="preencoded.png">    </p:cNvPr>
+          <p:cNvPicPr>
+            <a:picLocks noChangeAspect="1"/>
+          </p:cNvPicPr>
+          <p:nvPr/>
+        </p:nvPicPr>
+        <p:blipFill>
+          <a:blip r:embed="rId4"/>
+          <a:stretch>
+            <a:fillRect/>
+          </a:stretch>
+        </p:blipFill>
+        <p:spPr>
+          <a:xfrm>
+            <a:off x="845637" y="4681545"/>
+            <a:ext cx="210678" cy="210678"/>
+          </a:xfrm>
+          <a:prstGeom prst="rect">
+            <a:avLst/>
+          </a:prstGeom>
+        </p:spPr>
+      </p:pic>
+      <p:sp>
+        <p:nvSpPr>
+          <p:cNvPr id="21" name="Text 15"/>
+          <p:cNvSpPr/>
+          <p:nvPr/>
+        </p:nvSpPr>
+        <p:spPr>
+          <a:xfrm>
+            <a:off x="1371600" y="4434840"/>
+            <a:ext cx="10088575" cy="704088"/>
           </a:xfrm>
           <a:prstGeom prst="rect">
             <a:avLst/>
@@ -10679,85 +13025,7 @@
               <a:buNone/>
             </a:pPr>
             <a:r>
-              <a:rPr lang="en-US" sz="3600" b="1" dirty="0">
-                <a:solidFill>
-                  <a:srgbClr val="CADCFC"/>
-                </a:solidFill>
-                <a:latin typeface="Cambria" pitchFamily="34" charset="0"/>
-                <a:ea typeface="Cambria" pitchFamily="34" charset="-122"/>
-                <a:cs typeface="Cambria" pitchFamily="34" charset="-120"/>
-              </a:rPr>
-              <a:t>4</a:t>
-            </a:r>
-            <a:endParaRPr lang="en-US" sz="3600" dirty="0"/>
-          </a:p>
-        </p:txBody>
-      </p:sp>
-      <p:sp>
-        <p:nvSpPr>
-          <p:cNvPr id="23" name="Text 21"/>
-          <p:cNvSpPr/>
-          <p:nvPr/>
-        </p:nvSpPr>
-        <p:spPr>
-          <a:xfrm>
-            <a:off x="9223781" y="2468880"/>
-            <a:ext cx="2236394" cy="320040"/>
-          </a:xfrm>
-          <a:prstGeom prst="rect">
-            <a:avLst/>
-          </a:prstGeom>
-          <a:noFill/>
-          <a:ln/>
-        </p:spPr>
-        <p:txBody>
-          <a:bodyPr wrap="square" lIns="0" tIns="0" rIns="0" bIns="0" rtlCol="0" anchor="ctr"/>
-          <a:lstStyle/>
-          <a:p>
-            <a:pPr indent="0" marL="0">
-              <a:buNone/>
-            </a:pPr>
-            <a:r>
-              <a:rPr lang="en-US" sz="1500" b="1" dirty="0">
-                <a:solidFill>
-                  <a:srgbClr val="1E2761"/>
-                </a:solidFill>
-                <a:latin typeface="Calibri" pitchFamily="34" charset="0"/>
-                <a:ea typeface="Calibri" pitchFamily="34" charset="-122"/>
-                <a:cs typeface="Calibri" pitchFamily="34" charset="-120"/>
-              </a:rPr>
-              <a:t>Verify</a:t>
-            </a:r>
-            <a:endParaRPr lang="en-US" sz="1500" dirty="0"/>
-          </a:p>
-        </p:txBody>
-      </p:sp>
-      <p:sp>
-        <p:nvSpPr>
-          <p:cNvPr id="24" name="Text 22"/>
-          <p:cNvSpPr/>
-          <p:nvPr/>
-        </p:nvSpPr>
-        <p:spPr>
-          <a:xfrm>
-            <a:off x="9223781" y="2834640"/>
-            <a:ext cx="2236394" cy="1691640"/>
-          </a:xfrm>
-          <a:prstGeom prst="rect">
-            <a:avLst/>
-          </a:prstGeom>
-          <a:noFill/>
-          <a:ln/>
-        </p:spPr>
-        <p:txBody>
-          <a:bodyPr wrap="square" lIns="0" tIns="0" rIns="0" bIns="0" rtlCol="0" anchor="ctr"/>
-          <a:lstStyle/>
-          <a:p>
-            <a:pPr indent="0" marL="0">
-              <a:buNone/>
-            </a:pPr>
-            <a:r>
-              <a:rPr lang="en-US" sz="1100" dirty="0">
+              <a:rPr lang="en-US" sz="1350" dirty="0">
                 <a:solidFill>
                   <a:srgbClr val="1B2440"/>
                 </a:solidFill>
@@ -10765,26 +13033,26 @@
                 <a:ea typeface="Calibri" pitchFamily="34" charset="-122"/>
                 <a:cs typeface="Calibri" pitchFamily="34" charset="-120"/>
               </a:rPr>
-              <a:t>Bring it in, plug in the real backend, re-run the same tests. Found a gap? Fix the spec, then the code.</a:t>
-            </a:r>
-            <a:endParaRPr lang="en-US" sz="1100" dirty="0"/>
-          </a:p>
-        </p:txBody>
-      </p:sp>
-      <p:sp>
-        <p:nvSpPr>
-          <p:cNvPr id="25" name="Shape 23"/>
-          <p:cNvSpPr/>
-          <p:nvPr/>
-        </p:nvSpPr>
-        <p:spPr>
-          <a:xfrm>
-            <a:off x="548640" y="4983480"/>
-            <a:ext cx="11094415" cy="1051560"/>
+              <a:t>Playwright suite green — full user flows, not just isolated components</a:t>
+            </a:r>
+            <a:endParaRPr lang="en-US" sz="1350" dirty="0"/>
+          </a:p>
+        </p:txBody>
+      </p:sp>
+      <p:sp>
+        <p:nvSpPr>
+          <p:cNvPr id="22" name="Shape 16"/>
+          <p:cNvSpPr/>
+          <p:nvPr/>
+        </p:nvSpPr>
+        <p:spPr>
+          <a:xfrm>
+            <a:off x="548640" y="5349240"/>
+            <a:ext cx="11094415" cy="822960"/>
           </a:xfrm>
           <a:prstGeom prst="roundRect">
             <a:avLst>
-              <a:gd name="adj" fmla="val 7826"/>
+              <a:gd name="adj" fmla="val 10000"/>
             </a:avLst>
           </a:prstGeom>
           <a:solidFill>
@@ -10802,14 +13070,14 @@
       </p:sp>
       <p:sp>
         <p:nvSpPr>
-          <p:cNvPr id="26" name="Shape 24"/>
-          <p:cNvSpPr/>
-          <p:nvPr/>
-        </p:nvSpPr>
-        <p:spPr>
-          <a:xfrm>
-            <a:off x="777240" y="5184648"/>
-            <a:ext cx="566928" cy="566928"/>
+          <p:cNvPr id="23" name="Shape 17"/>
+          <p:cNvSpPr/>
+          <p:nvPr/>
+        </p:nvSpPr>
+        <p:spPr>
+          <a:xfrm>
+            <a:off x="749808" y="5513832"/>
+            <a:ext cx="502920" cy="502920"/>
           </a:xfrm>
           <a:prstGeom prst="ellipse">
             <a:avLst/>
@@ -10822,22 +13090,22 @@
       </p:sp>
       <p:pic>
         <p:nvPicPr>
-          <p:cNvPr id="27" name="Image 0" descr="preencoded.png">    </p:cNvPr>
+          <p:cNvPr id="24" name="Image 4" descr="preencoded.png">    </p:cNvPr>
           <p:cNvPicPr>
             <a:picLocks noChangeAspect="1"/>
           </p:cNvPicPr>
           <p:nvPr/>
         </p:nvPicPr>
         <p:blipFill>
-          <a:blip r:embed="rId1"/>
+          <a:blip r:embed="rId5"/>
           <a:stretch>
             <a:fillRect/>
           </a:stretch>
         </p:blipFill>
         <p:spPr>
           <a:xfrm>
-            <a:off x="924641" y="5332049"/>
-            <a:ext cx="272125" cy="272125"/>
+            <a:off x="880567" y="5644591"/>
+            <a:ext cx="241402" cy="241402"/>
           </a:xfrm>
           <a:prstGeom prst="rect">
             <a:avLst/>
@@ -10846,14 +13114,14 @@
       </p:pic>
       <p:sp>
         <p:nvSpPr>
-          <p:cNvPr id="28" name="Text 25"/>
-          <p:cNvSpPr/>
-          <p:nvPr/>
-        </p:nvSpPr>
-        <p:spPr>
-          <a:xfrm>
-            <a:off x="1508760" y="5120640"/>
-            <a:ext cx="9905695" cy="822960"/>
+          <p:cNvPr id="25" name="Text 18"/>
+          <p:cNvSpPr/>
+          <p:nvPr/>
+        </p:nvSpPr>
+        <p:spPr>
+          <a:xfrm>
+            <a:off x="1389888" y="5440680"/>
+            <a:ext cx="10042855" cy="594360"/>
           </a:xfrm>
           <a:prstGeom prst="rect">
             <a:avLst/>
@@ -10877,7 +13145,7 @@
                 <a:ea typeface="Calibri" pitchFamily="34" charset="-122"/>
                 <a:cs typeface="Calibri" pitchFamily="34" charset="-120"/>
               </a:rPr>
-              <a:t>First pick a medium feature, not the hardest one. </a:t>
+              <a:t>If backend code was touched, </a:t>
             </a:r>
             <a:pPr indent="0" marL="0">
               <a:buNone/>
@@ -10891,7 +13159,7 @@
                 <a:ea typeface="Calibri" pitchFamily="34" charset="-122"/>
                 <a:cs typeface="Calibri" pitchFamily="34" charset="-120"/>
               </a:rPr>
-              <a:t>Its job is to help us learn the loop — how long a spec takes, how the mocks feel, how integration actually goes — before we scale it up.</a:t>
+              <a:t>its tests travel with it — same bar as the frontend, no exceptions.</a:t>
             </a:r>
             <a:endParaRPr lang="en-US" sz="1300" dirty="0"/>
           </a:p>

--- a/docs/internet-first-team-edition.pptx
+++ b/docs/internet-first-team-edition.pptx
@@ -20,9 +20,10 @@
     <p:sldId id="268" r:id="rId14"/>
     <p:sldId id="269" r:id="rId15"/>
     <p:sldId id="270" r:id="rId16"/>
+    <p:sldId id="271" r:id="rId17"/>
   </p:sldIdLst>
   <p:notesMasterIdLst>
-    <p:notesMasterId r:id="rId17"/>
+    <p:notesMasterId r:id="rId18"/>
   </p:notesMasterIdLst>
   <p:sldSz cx="12192000" cy="6858000"/>
   <p:notesSz cx="6858000" cy="12192000"/>
@@ -1068,6 +1069,94 @@
             <a:fld id="{F7021451-1387-4CA6-816F-3879F97B5CBC}" type="slidenum">
               <a:rPr lang="en-US"/>
               <a:t>15</a:t>
+            </a:fld>
+            <a:endParaRPr lang="en-US"/>
+          </a:p>
+        </p:txBody>
+      </p:sp>
+    </p:spTree>
+    <p:extLst>
+      <p:ext uri="{BB962C8B-B14F-4D97-AF65-F5344CB8AC3E}">
+        <p14:creationId xmlns:p14="http://schemas.microsoft.com/office/powerpoint/2010/main" val="1024086991"/>
+      </p:ext>
+    </p:extLst>
+  </p:cSld>
+  <p:clrMapOvr>
+    <a:masterClrMapping/>
+  </p:clrMapOvr>
+</p:notes>
+</file>
+
+<file path=ppt/notesSlides/notesSlide16.xml><?xml version="1.0" encoding="utf-8"?>
+<p:notes xmlns:a="http://schemas.openxmlformats.org/drawingml/2006/main" xmlns:r="http://schemas.openxmlformats.org/officeDocument/2006/relationships" xmlns:p="http://schemas.openxmlformats.org/presentationml/2006/main">
+  <p:cSld>
+    <p:spTree>
+      <p:nvGrpSpPr>
+        <p:cNvPr id="1" name=""/>
+        <p:cNvGrpSpPr/>
+        <p:nvPr/>
+      </p:nvGrpSpPr>
+      <p:grpSpPr>
+        <a:xfrm>
+          <a:off x="0" y="0"/>
+          <a:ext cx="0" cy="0"/>
+          <a:chOff x="0" y="0"/>
+          <a:chExt cx="0" cy="0"/>
+        </a:xfrm>
+      </p:grpSpPr>
+      <p:sp>
+        <p:nvSpPr>
+          <p:cNvPr id="2" name="Slide Image Placeholder 1"/>
+          <p:cNvSpPr>
+            <a:spLocks noGrp="1" noRot="1" noChangeAspect="1"/>
+          </p:cNvSpPr>
+          <p:nvPr>
+            <p:ph type="sldImg"/>
+          </p:nvPr>
+        </p:nvSpPr>
+        <p:spPr/>
+      </p:sp>
+      <p:sp>
+        <p:nvSpPr>
+          <p:cNvPr id="3" name="Notes Placeholder 2"/>
+          <p:cNvSpPr>
+            <a:spLocks noGrp="1"/>
+          </p:cNvSpPr>
+          <p:nvPr>
+            <p:ph type="body" idx="1"/>
+          </p:nvPr>
+        </p:nvSpPr>
+        <p:spPr/>
+        <p:txBody>
+          <a:bodyPr/>
+          <a:lstStyle/>
+          <a:p>
+            <a:r>
+              <a:rPr lang="en-US" dirty="0"/>
+              <a:t/>
+            </a:r>
+            <a:endParaRPr lang="en-US" dirty="0"/>
+          </a:p>
+        </p:txBody>
+      </p:sp>
+      <p:sp>
+        <p:nvSpPr>
+          <p:cNvPr id="4" name="Slide Number Placeholder 3"/>
+          <p:cNvSpPr>
+            <a:spLocks noGrp="1"/>
+          </p:cNvSpPr>
+          <p:nvPr>
+            <p:ph type="sldNum" sz="quarter" idx="10"/>
+          </p:nvPr>
+        </p:nvSpPr>
+        <p:spPr/>
+        <p:txBody>
+          <a:bodyPr/>
+          <a:lstStyle/>
+          <a:p>
+            <a:fld id="{F7021451-1387-4CA6-816F-3879F97B5CBC}" type="slidenum">
+              <a:rPr lang="en-US"/>
+              <a:t>16</a:t>
             </a:fld>
             <a:endParaRPr lang="en-US"/>
           </a:p>
@@ -2531,7 +2620,7 @@
                 <a:ea typeface="Calibri" pitchFamily="34" charset="-122"/>
                 <a:cs typeface="Calibri" pitchFamily="34" charset="-120"/>
               </a:rPr>
-              <a:t>AN OPEN QUESTION, DECIDED CASE BY CASE</a:t>
+              <a:t>BEFORE ANY CODE CROSSES</a:t>
             </a:r>
             <a:endParaRPr lang="en-US" sz="1200" dirty="0"/>
           </a:p>
@@ -2570,7 +2659,7 @@
                 <a:ea typeface="Cambria" pitchFamily="34" charset="-122"/>
                 <a:cs typeface="Cambria" pitchFamily="34" charset="-120"/>
               </a:rPr>
-              <a:t>Do we rebuild backends outside too?</a:t>
+              <a:t>A short checklist, every time</a:t>
             </a:r>
             <a:endParaRPr lang="en-US" sz="2800" dirty="0"/>
           </a:p>
@@ -2584,12 +2673,12 @@
         </p:nvSpPr>
         <p:spPr>
           <a:xfrm>
-            <a:off x="548640" y="1737360"/>
-            <a:ext cx="5364328" cy="3200400"/>
+            <a:off x="548640" y="1828800"/>
+            <a:ext cx="11094415" cy="704088"/>
           </a:xfrm>
           <a:prstGeom prst="roundRect">
             <a:avLst>
-              <a:gd name="adj" fmla="val 2571"/>
+              <a:gd name="adj" fmla="val 11688"/>
             </a:avLst>
           </a:prstGeom>
           <a:solidFill>
@@ -2613,14 +2702,14 @@
         </p:nvSpPr>
         <p:spPr>
           <a:xfrm>
-            <a:off x="804672" y="1965960"/>
-            <a:ext cx="548640" cy="548640"/>
+            <a:off x="731520" y="1961388"/>
+            <a:ext cx="438912" cy="438912"/>
           </a:xfrm>
           <a:prstGeom prst="ellipse">
             <a:avLst/>
           </a:prstGeom>
           <a:solidFill>
-            <a:srgbClr val="1E2761"/>
+            <a:srgbClr val="2E7D5B"/>
           </a:solidFill>
           <a:ln/>
         </p:spPr>
@@ -2641,8 +2730,8 @@
         </p:blipFill>
         <p:spPr>
           <a:xfrm>
-            <a:off x="947318" y="2108606"/>
-            <a:ext cx="263347" cy="263347"/>
+            <a:off x="845637" y="2075505"/>
+            <a:ext cx="210678" cy="210678"/>
           </a:xfrm>
           <a:prstGeom prst="rect">
             <a:avLst/>
@@ -2657,8 +2746,8 @@
         </p:nvSpPr>
         <p:spPr>
           <a:xfrm>
-            <a:off x="1481328" y="2029968"/>
-            <a:ext cx="4267048" cy="365760"/>
+            <a:off x="1371600" y="1828800"/>
+            <a:ext cx="10088575" cy="704088"/>
           </a:xfrm>
           <a:prstGeom prst="rect">
             <a:avLst/>
@@ -2674,46 +2763,7 @@
               <a:buNone/>
             </a:pPr>
             <a:r>
-              <a:rPr lang="en-US" sz="1500" b="1" dirty="0">
-                <a:solidFill>
-                  <a:srgbClr val="1E2761"/>
-                </a:solidFill>
-                <a:latin typeface="Calibri" pitchFamily="34" charset="0"/>
-                <a:ea typeface="Calibri" pitchFamily="34" charset="-122"/>
-                <a:cs typeface="Calibri" pitchFamily="34" charset="-120"/>
-              </a:rPr>
-              <a:t>Default: MFE only</a:t>
-            </a:r>
-            <a:endParaRPr lang="en-US" sz="1500" dirty="0"/>
-          </a:p>
-        </p:txBody>
-      </p:sp>
-      <p:sp>
-        <p:nvSpPr>
-          <p:cNvPr id="10" name="Text 7"/>
-          <p:cNvSpPr/>
-          <p:nvPr/>
-        </p:nvSpPr>
-        <p:spPr>
-          <a:xfrm>
-            <a:off x="822960" y="2514600"/>
-            <a:ext cx="4815688" cy="2011680"/>
-          </a:xfrm>
-          <a:prstGeom prst="rect">
-            <a:avLst/>
-          </a:prstGeom>
-          <a:noFill/>
-          <a:ln/>
-        </p:spPr>
-        <p:txBody>
-          <a:bodyPr wrap="square" lIns="0" tIns="0" rIns="0" bIns="0" rtlCol="0" anchor="ctr"/>
-          <a:lstStyle/>
-          <a:p>
-            <a:pPr indent="0" marL="0">
-              <a:buNone/>
-            </a:pPr>
-            <a:r>
-              <a:rPr lang="en-US" sz="1250" dirty="0">
+              <a:rPr lang="en-US" sz="1350" dirty="0">
                 <a:solidFill>
                   <a:srgbClr val="1B2440"/>
                 </a:solidFill>
@@ -2721,30 +2771,30 @@
                 <a:ea typeface="Calibri" pitchFamily="34" charset="-122"/>
                 <a:cs typeface="Calibri" pitchFamily="34" charset="-120"/>
               </a:rPr>
-              <a:t>Most features: build the shell outside against a mocked backend. The real Java/Spring service stays right where it is, built and maintained inside as normal.</a:t>
-            </a:r>
-            <a:endParaRPr lang="en-US" sz="1250" dirty="0"/>
-          </a:p>
-        </p:txBody>
-      </p:sp>
-      <p:sp>
-        <p:nvSpPr>
-          <p:cNvPr id="11" name="Shape 8"/>
-          <p:cNvSpPr/>
-          <p:nvPr/>
-        </p:nvSpPr>
-        <p:spPr>
-          <a:xfrm>
-            <a:off x="6278728" y="1737360"/>
-            <a:ext cx="5364328" cy="3200400"/>
+              <a:t>Unit tests green — Jest for React/TypeScript, JUnit for any Java/Spring code involved</a:t>
+            </a:r>
+            <a:endParaRPr lang="en-US" sz="1350" dirty="0"/>
+          </a:p>
+        </p:txBody>
+      </p:sp>
+      <p:sp>
+        <p:nvSpPr>
+          <p:cNvPr id="10" name="Shape 7"/>
+          <p:cNvSpPr/>
+          <p:nvPr/>
+        </p:nvSpPr>
+        <p:spPr>
+          <a:xfrm>
+            <a:off x="548640" y="2697480"/>
+            <a:ext cx="11094415" cy="704088"/>
           </a:xfrm>
           <a:prstGeom prst="roundRect">
             <a:avLst>
-              <a:gd name="adj" fmla="val 2571"/>
+              <a:gd name="adj" fmla="val 11688"/>
             </a:avLst>
           </a:prstGeom>
           <a:solidFill>
-            <a:srgbClr val="EAF4EF"/>
+            <a:srgbClr val="EDF3FC"/>
           </a:solidFill>
           <a:ln/>
           <a:effectLst>
@@ -2758,14 +2808,14 @@
       </p:sp>
       <p:sp>
         <p:nvSpPr>
-          <p:cNvPr id="12" name="Shape 9"/>
-          <p:cNvSpPr/>
-          <p:nvPr/>
-        </p:nvSpPr>
-        <p:spPr>
-          <a:xfrm>
-            <a:off x="6534760" y="1965960"/>
-            <a:ext cx="548640" cy="548640"/>
+          <p:cNvPr id="11" name="Shape 8"/>
+          <p:cNvSpPr/>
+          <p:nvPr/>
+        </p:nvSpPr>
+        <p:spPr>
+          <a:xfrm>
+            <a:off x="731520" y="2830068"/>
+            <a:ext cx="438912" cy="438912"/>
           </a:xfrm>
           <a:prstGeom prst="ellipse">
             <a:avLst/>
@@ -2778,7 +2828,7 @@
       </p:sp>
       <p:pic>
         <p:nvPicPr>
-          <p:cNvPr id="13" name="Image 1" descr="preencoded.png">    </p:cNvPr>
+          <p:cNvPr id="12" name="Image 1" descr="preencoded.png">    </p:cNvPr>
           <p:cNvPicPr>
             <a:picLocks noChangeAspect="1"/>
           </p:cNvPicPr>
@@ -2792,8 +2842,8 @@
         </p:blipFill>
         <p:spPr>
           <a:xfrm>
-            <a:off x="6677406" y="2108606"/>
-            <a:ext cx="263347" cy="263347"/>
+            <a:off x="845637" y="2944185"/>
+            <a:ext cx="210678" cy="210678"/>
           </a:xfrm>
           <a:prstGeom prst="rect">
             <a:avLst/>
@@ -2802,14 +2852,14 @@
       </p:pic>
       <p:sp>
         <p:nvSpPr>
-          <p:cNvPr id="14" name="Text 10"/>
-          <p:cNvSpPr/>
-          <p:nvPr/>
-        </p:nvSpPr>
-        <p:spPr>
-          <a:xfrm>
-            <a:off x="7211416" y="2029968"/>
-            <a:ext cx="4267048" cy="365760"/>
+          <p:cNvPr id="13" name="Text 9"/>
+          <p:cNvSpPr/>
+          <p:nvPr/>
+        </p:nvSpPr>
+        <p:spPr>
+          <a:xfrm>
+            <a:off x="1371600" y="2697480"/>
+            <a:ext cx="10088575" cy="704088"/>
           </a:xfrm>
           <a:prstGeom prst="rect">
             <a:avLst/>
@@ -2825,46 +2875,7 @@
               <a:buNone/>
             </a:pPr>
             <a:r>
-              <a:rPr lang="en-US" sz="1500" b="1" dirty="0">
-                <a:solidFill>
-                  <a:srgbClr val="2E7D5B"/>
-                </a:solidFill>
-                <a:latin typeface="Calibri" pitchFamily="34" charset="0"/>
-                <a:ea typeface="Calibri" pitchFamily="34" charset="-122"/>
-                <a:cs typeface="Calibri" pitchFamily="34" charset="-120"/>
-              </a:rPr>
-              <a:t>Case by case: bring the backend along</a:t>
-            </a:r>
-            <a:endParaRPr lang="en-US" sz="1500" dirty="0"/>
-          </a:p>
-        </p:txBody>
-      </p:sp>
-      <p:sp>
-        <p:nvSpPr>
-          <p:cNvPr id="15" name="Text 11"/>
-          <p:cNvSpPr/>
-          <p:nvPr/>
-        </p:nvSpPr>
-        <p:spPr>
-          <a:xfrm>
-            <a:off x="6553048" y="2514600"/>
-            <a:ext cx="4815688" cy="2011680"/>
-          </a:xfrm>
-          <a:prstGeom prst="rect">
-            <a:avLst/>
-          </a:prstGeom>
-          <a:noFill/>
-          <a:ln/>
-        </p:spPr>
-        <p:txBody>
-          <a:bodyPr wrap="square" lIns="0" tIns="0" rIns="0" bIns="0" rtlCol="0" anchor="ctr"/>
-          <a:lstStyle/>
-          <a:p>
-            <a:pPr indent="0" marL="0">
-              <a:buNone/>
-            </a:pPr>
-            <a:r>
-              <a:rPr lang="en-US" sz="1250" dirty="0">
+              <a:rPr lang="en-US" sz="1350" dirty="0">
                 <a:solidFill>
                   <a:srgbClr val="1B2440"/>
                 </a:solidFill>
@@ -2872,26 +2883,26 @@
                 <a:ea typeface="Calibri" pitchFamily="34" charset="-122"/>
                 <a:cs typeface="Calibri" pitchFamily="34" charset="-120"/>
               </a:rPr>
-              <a:t>When a backend genuinely needs a rewrite — not just a re-skin — build a lean version of it outside too, under the same contract-first approach, tested there, then brought in like everything else.</a:t>
-            </a:r>
-            <a:endParaRPr lang="en-US" sz="1250" dirty="0"/>
-          </a:p>
-        </p:txBody>
-      </p:sp>
-      <p:sp>
-        <p:nvSpPr>
-          <p:cNvPr id="16" name="Shape 12"/>
-          <p:cNvSpPr/>
-          <p:nvPr/>
-        </p:nvSpPr>
-        <p:spPr>
-          <a:xfrm>
-            <a:off x="548640" y="5120640"/>
-            <a:ext cx="11094415" cy="960120"/>
+              <a:t>Static analysis &amp; lint clean — the same rules Confi uses, not a lighter internet-only version</a:t>
+            </a:r>
+            <a:endParaRPr lang="en-US" sz="1350" dirty="0"/>
+          </a:p>
+        </p:txBody>
+      </p:sp>
+      <p:sp>
+        <p:nvSpPr>
+          <p:cNvPr id="14" name="Shape 10"/>
+          <p:cNvSpPr/>
+          <p:nvPr/>
+        </p:nvSpPr>
+        <p:spPr>
+          <a:xfrm>
+            <a:off x="548640" y="3566160"/>
+            <a:ext cx="11094415" cy="704088"/>
           </a:xfrm>
           <a:prstGeom prst="roundRect">
             <a:avLst>
-              <a:gd name="adj" fmla="val 8571"/>
+              <a:gd name="adj" fmla="val 11688"/>
             </a:avLst>
           </a:prstGeom>
           <a:solidFill>
@@ -2909,27 +2920,27 @@
       </p:sp>
       <p:sp>
         <p:nvSpPr>
-          <p:cNvPr id="17" name="Shape 13"/>
-          <p:cNvSpPr/>
-          <p:nvPr/>
-        </p:nvSpPr>
-        <p:spPr>
-          <a:xfrm>
-            <a:off x="777240" y="5321808"/>
-            <a:ext cx="548640" cy="548640"/>
+          <p:cNvPr id="15" name="Shape 11"/>
+          <p:cNvSpPr/>
+          <p:nvPr/>
+        </p:nvSpPr>
+        <p:spPr>
+          <a:xfrm>
+            <a:off x="731520" y="3698748"/>
+            <a:ext cx="438912" cy="438912"/>
           </a:xfrm>
           <a:prstGeom prst="ellipse">
             <a:avLst/>
           </a:prstGeom>
           <a:solidFill>
-            <a:srgbClr val="1E2761"/>
+            <a:srgbClr val="2E7D5B"/>
           </a:solidFill>
           <a:ln/>
         </p:spPr>
       </p:sp>
       <p:pic>
         <p:nvPicPr>
-          <p:cNvPr id="18" name="Image 2" descr="preencoded.png">    </p:cNvPr>
+          <p:cNvPr id="16" name="Image 2" descr="preencoded.png">    </p:cNvPr>
           <p:cNvPicPr>
             <a:picLocks noChangeAspect="1"/>
           </p:cNvPicPr>
@@ -2943,8 +2954,8 @@
         </p:blipFill>
         <p:spPr>
           <a:xfrm>
-            <a:off x="919886" y="5464454"/>
-            <a:ext cx="263347" cy="263347"/>
+            <a:off x="845637" y="3812865"/>
+            <a:ext cx="210678" cy="210678"/>
           </a:xfrm>
           <a:prstGeom prst="rect">
             <a:avLst/>
@@ -2953,14 +2964,14 @@
       </p:pic>
       <p:sp>
         <p:nvSpPr>
-          <p:cNvPr id="19" name="Text 14"/>
-          <p:cNvSpPr/>
-          <p:nvPr/>
-        </p:nvSpPr>
-        <p:spPr>
-          <a:xfrm>
-            <a:off x="1508760" y="5230368"/>
-            <a:ext cx="9905695" cy="777240"/>
+          <p:cNvPr id="17" name="Text 12"/>
+          <p:cNvSpPr/>
+          <p:nvPr/>
+        </p:nvSpPr>
+        <p:spPr>
+          <a:xfrm>
+            <a:off x="1371600" y="3566160"/>
+            <a:ext cx="10088575" cy="704088"/>
           </a:xfrm>
           <a:prstGeom prst="rect">
             <a:avLst/>
@@ -2976,15 +2987,239 @@
               <a:buNone/>
             </a:pPr>
             <a:r>
+              <a:rPr lang="en-US" sz="1350" dirty="0">
+                <a:solidFill>
+                  <a:srgbClr val="1B2440"/>
+                </a:solidFill>
+                <a:latin typeface="Calibri" pitchFamily="34" charset="0"/>
+                <a:ea typeface="Calibri" pitchFamily="34" charset="-122"/>
+                <a:cs typeface="Calibri" pitchFamily="34" charset="-120"/>
+              </a:rPr>
+              <a:t>Contract tests pass — the mocks match the OpenAPI spec exactly</a:t>
+            </a:r>
+            <a:endParaRPr lang="en-US" sz="1350" dirty="0"/>
+          </a:p>
+        </p:txBody>
+      </p:sp>
+      <p:sp>
+        <p:nvSpPr>
+          <p:cNvPr id="18" name="Shape 13"/>
+          <p:cNvSpPr/>
+          <p:nvPr/>
+        </p:nvSpPr>
+        <p:spPr>
+          <a:xfrm>
+            <a:off x="548640" y="4434840"/>
+            <a:ext cx="11094415" cy="704088"/>
+          </a:xfrm>
+          <a:prstGeom prst="roundRect">
+            <a:avLst>
+              <a:gd name="adj" fmla="val 11688"/>
+            </a:avLst>
+          </a:prstGeom>
+          <a:solidFill>
+            <a:srgbClr val="EDF3FC"/>
+          </a:solidFill>
+          <a:ln/>
+          <a:effectLst>
+            <a:outerShdw sx="100000" sy="100000" kx="0" ky="0" algn="bl" rotWithShape="0" blurRad="76200" dist="12700" dir="5400000">
+              <a:srgbClr val="9AA7C4">
+                <a:alpha val="22000"/>
+              </a:srgbClr>
+            </a:outerShdw>
+          </a:effectLst>
+        </p:spPr>
+      </p:sp>
+      <p:sp>
+        <p:nvSpPr>
+          <p:cNvPr id="19" name="Shape 14"/>
+          <p:cNvSpPr/>
+          <p:nvPr/>
+        </p:nvSpPr>
+        <p:spPr>
+          <a:xfrm>
+            <a:off x="731520" y="4567428"/>
+            <a:ext cx="438912" cy="438912"/>
+          </a:xfrm>
+          <a:prstGeom prst="ellipse">
+            <a:avLst/>
+          </a:prstGeom>
+          <a:solidFill>
+            <a:srgbClr val="2E7D5B"/>
+          </a:solidFill>
+          <a:ln/>
+        </p:spPr>
+      </p:sp>
+      <p:pic>
+        <p:nvPicPr>
+          <p:cNvPr id="20" name="Image 3" descr="preencoded.png">    </p:cNvPr>
+          <p:cNvPicPr>
+            <a:picLocks noChangeAspect="1"/>
+          </p:cNvPicPr>
+          <p:nvPr/>
+        </p:nvPicPr>
+        <p:blipFill>
+          <a:blip r:embed="rId4"/>
+          <a:stretch>
+            <a:fillRect/>
+          </a:stretch>
+        </p:blipFill>
+        <p:spPr>
+          <a:xfrm>
+            <a:off x="845637" y="4681545"/>
+            <a:ext cx="210678" cy="210678"/>
+          </a:xfrm>
+          <a:prstGeom prst="rect">
+            <a:avLst/>
+          </a:prstGeom>
+        </p:spPr>
+      </p:pic>
+      <p:sp>
+        <p:nvSpPr>
+          <p:cNvPr id="21" name="Text 15"/>
+          <p:cNvSpPr/>
+          <p:nvPr/>
+        </p:nvSpPr>
+        <p:spPr>
+          <a:xfrm>
+            <a:off x="1371600" y="4434840"/>
+            <a:ext cx="10088575" cy="704088"/>
+          </a:xfrm>
+          <a:prstGeom prst="rect">
+            <a:avLst/>
+          </a:prstGeom>
+          <a:noFill/>
+          <a:ln/>
+        </p:spPr>
+        <p:txBody>
+          <a:bodyPr wrap="square" lIns="0" tIns="0" rIns="0" bIns="0" rtlCol="0" anchor="ctr"/>
+          <a:lstStyle/>
+          <a:p>
+            <a:pPr indent="0" marL="0">
+              <a:buNone/>
+            </a:pPr>
+            <a:r>
+              <a:rPr lang="en-US" sz="1350" dirty="0">
+                <a:solidFill>
+                  <a:srgbClr val="1B2440"/>
+                </a:solidFill>
+                <a:latin typeface="Calibri" pitchFamily="34" charset="0"/>
+                <a:ea typeface="Calibri" pitchFamily="34" charset="-122"/>
+                <a:cs typeface="Calibri" pitchFamily="34" charset="-120"/>
+              </a:rPr>
+              <a:t>Playwright suite green — full user flows, not just isolated components</a:t>
+            </a:r>
+            <a:endParaRPr lang="en-US" sz="1350" dirty="0"/>
+          </a:p>
+        </p:txBody>
+      </p:sp>
+      <p:sp>
+        <p:nvSpPr>
+          <p:cNvPr id="22" name="Shape 16"/>
+          <p:cNvSpPr/>
+          <p:nvPr/>
+        </p:nvSpPr>
+        <p:spPr>
+          <a:xfrm>
+            <a:off x="548640" y="5349240"/>
+            <a:ext cx="11094415" cy="822960"/>
+          </a:xfrm>
+          <a:prstGeom prst="roundRect">
+            <a:avLst>
+              <a:gd name="adj" fmla="val 10000"/>
+            </a:avLst>
+          </a:prstGeom>
+          <a:solidFill>
+            <a:srgbClr val="EAF4EF"/>
+          </a:solidFill>
+          <a:ln/>
+          <a:effectLst>
+            <a:outerShdw sx="100000" sy="100000" kx="0" ky="0" algn="bl" rotWithShape="0" blurRad="76200" dist="12700" dir="5400000">
+              <a:srgbClr val="9AA7C4">
+                <a:alpha val="22000"/>
+              </a:srgbClr>
+            </a:outerShdw>
+          </a:effectLst>
+        </p:spPr>
+      </p:sp>
+      <p:sp>
+        <p:nvSpPr>
+          <p:cNvPr id="23" name="Shape 17"/>
+          <p:cNvSpPr/>
+          <p:nvPr/>
+        </p:nvSpPr>
+        <p:spPr>
+          <a:xfrm>
+            <a:off x="749808" y="5513832"/>
+            <a:ext cx="502920" cy="502920"/>
+          </a:xfrm>
+          <a:prstGeom prst="ellipse">
+            <a:avLst/>
+          </a:prstGeom>
+          <a:solidFill>
+            <a:srgbClr val="2E7D5B"/>
+          </a:solidFill>
+          <a:ln/>
+        </p:spPr>
+      </p:sp>
+      <p:pic>
+        <p:nvPicPr>
+          <p:cNvPr id="24" name="Image 4" descr="preencoded.png">    </p:cNvPr>
+          <p:cNvPicPr>
+            <a:picLocks noChangeAspect="1"/>
+          </p:cNvPicPr>
+          <p:nvPr/>
+        </p:nvPicPr>
+        <p:blipFill>
+          <a:blip r:embed="rId5"/>
+          <a:stretch>
+            <a:fillRect/>
+          </a:stretch>
+        </p:blipFill>
+        <p:spPr>
+          <a:xfrm>
+            <a:off x="880567" y="5644591"/>
+            <a:ext cx="241402" cy="241402"/>
+          </a:xfrm>
+          <a:prstGeom prst="rect">
+            <a:avLst/>
+          </a:prstGeom>
+        </p:spPr>
+      </p:pic>
+      <p:sp>
+        <p:nvSpPr>
+          <p:cNvPr id="25" name="Text 18"/>
+          <p:cNvSpPr/>
+          <p:nvPr/>
+        </p:nvSpPr>
+        <p:spPr>
+          <a:xfrm>
+            <a:off x="1389888" y="5440680"/>
+            <a:ext cx="10042855" cy="594360"/>
+          </a:xfrm>
+          <a:prstGeom prst="rect">
+            <a:avLst/>
+          </a:prstGeom>
+          <a:noFill/>
+          <a:ln/>
+        </p:spPr>
+        <p:txBody>
+          <a:bodyPr wrap="square" lIns="0" tIns="0" rIns="0" bIns="0" rtlCol="0" anchor="ctr"/>
+          <a:lstStyle/>
+          <a:p>
+            <a:pPr indent="0" marL="0">
+              <a:buNone/>
+            </a:pPr>
+            <a:r>
               <a:rPr lang="en-US" sz="1300" b="1" dirty="0">
                 <a:solidFill>
-                  <a:srgbClr val="1E2761"/>
-                </a:solidFill>
-                <a:latin typeface="Calibri" pitchFamily="34" charset="0"/>
-                <a:ea typeface="Calibri" pitchFamily="34" charset="-122"/>
-                <a:cs typeface="Calibri" pitchFamily="34" charset="-120"/>
-              </a:rPr>
-              <a:t>The question to ask, per feature: </a:t>
+                  <a:srgbClr val="2E7D5B"/>
+                </a:solidFill>
+                <a:latin typeface="Calibri" pitchFamily="34" charset="0"/>
+                <a:ea typeface="Calibri" pitchFamily="34" charset="-122"/>
+                <a:cs typeface="Calibri" pitchFamily="34" charset="-120"/>
+              </a:rPr>
+              <a:t>If backend code was touched, </a:t>
             </a:r>
             <a:pPr indent="0" marL="0">
               <a:buNone/>
@@ -2998,7 +3233,7 @@
                 <a:ea typeface="Calibri" pitchFamily="34" charset="-122"/>
                 <a:cs typeface="Calibri" pitchFamily="34" charset="-120"/>
               </a:rPr>
-              <a:t>does Confi already have a working backend for this? If yes, mock it. If the backend itself is due for a rewrite anyway, build it outside too.</a:t>
+              <a:t>its tests travel with it — same bar as the frontend, no exceptions.</a:t>
             </a:r>
             <a:endParaRPr lang="en-US" sz="1300" dirty="0"/>
           </a:p>
@@ -3147,7 +3382,7 @@
                 <a:ea typeface="Calibri" pitchFamily="34" charset="-122"/>
                 <a:cs typeface="Calibri" pitchFamily="34" charset="-120"/>
               </a:rPr>
-              <a:t>WHO NEEDS TO LOOK AT WHAT</a:t>
+              <a:t>AN OPEN QUESTION, DECIDED CASE BY CASE</a:t>
             </a:r>
             <a:endParaRPr lang="en-US" sz="1200" dirty="0"/>
           </a:p>
@@ -3186,7 +3421,7 @@
                 <a:ea typeface="Cambria" pitchFamily="34" charset="-122"/>
                 <a:cs typeface="Cambria" pitchFamily="34" charset="-120"/>
               </a:rPr>
-              <a:t>Most things need a quick look. Some need a second pair of eyes.</a:t>
+              <a:t>Do we rebuild backends outside too?</a:t>
             </a:r>
             <a:endParaRPr lang="en-US" sz="2800" dirty="0"/>
           </a:p>
@@ -3201,11 +3436,11 @@
         <p:spPr>
           <a:xfrm>
             <a:off x="548640" y="1737360"/>
-            <a:ext cx="5364328" cy="3291840"/>
+            <a:ext cx="5364328" cy="3200400"/>
           </a:xfrm>
           <a:prstGeom prst="roundRect">
             <a:avLst>
-              <a:gd name="adj" fmla="val 2500"/>
+              <a:gd name="adj" fmla="val 2571"/>
             </a:avLst>
           </a:prstGeom>
           <a:solidFill>
@@ -3298,7 +3533,7 @@
                 <a:ea typeface="Calibri" pitchFamily="34" charset="-122"/>
                 <a:cs typeface="Calibri" pitchFamily="34" charset="-120"/>
               </a:rPr>
-              <a:t>Everyday stuff</a:t>
+              <a:t>Default: MFE only</a:t>
             </a:r>
             <a:endParaRPr lang="en-US" sz="1500" dirty="0"/>
           </a:p>
@@ -3312,8 +3547,8 @@
         </p:nvSpPr>
         <p:spPr>
           <a:xfrm>
-            <a:off x="822960" y="2487168"/>
-            <a:ext cx="4815688" cy="457200"/>
+            <a:off x="822960" y="2514600"/>
+            <a:ext cx="4815688" cy="2011680"/>
           </a:xfrm>
           <a:prstGeom prst="rect">
             <a:avLst/>
@@ -3329,50 +3564,7 @@
               <a:buNone/>
             </a:pPr>
             <a:r>
-              <a:rPr lang="en-US" sz="1200" i="1" dirty="0">
-                <a:solidFill>
-                  <a:srgbClr val="5A6B8C"/>
-                </a:solidFill>
-                <a:latin typeface="Calibri" pitchFamily="34" charset="0"/>
-                <a:ea typeface="Calibri" pitchFamily="34" charset="-122"/>
-                <a:cs typeface="Calibri" pitchFamily="34" charset="-120"/>
-              </a:rPr>
-              <a:t>Structure, contracts, sanitized code, sample fixtures.</a:t>
-            </a:r>
-            <a:endParaRPr lang="en-US" sz="1200" dirty="0"/>
-          </a:p>
-        </p:txBody>
-      </p:sp>
-      <p:sp>
-        <p:nvSpPr>
-          <p:cNvPr id="11" name="Text 8"/>
-          <p:cNvSpPr/>
-          <p:nvPr/>
-        </p:nvSpPr>
-        <p:spPr>
-          <a:xfrm>
-            <a:off x="822960" y="3017520"/>
-            <a:ext cx="4815688" cy="1371600"/>
-          </a:xfrm>
-          <a:prstGeom prst="rect">
-            <a:avLst/>
-          </a:prstGeom>
-          <a:noFill/>
-          <a:ln/>
-        </p:spPr>
-        <p:txBody>
-          <a:bodyPr wrap="square" lIns="0" tIns="0" rIns="0" bIns="0" rtlCol="0" anchor="ctr"/>
-          <a:lstStyle/>
-          <a:p>
-            <a:pPr marL="342900" indent="-342900">
-              <a:spcAft>
-                <a:spcPts val="800"/>
-              </a:spcAft>
-              <a:buSzPct val="100000"/>
-              <a:buChar char="•"/>
-            </a:pPr>
-            <a:r>
-              <a:rPr lang="en-US" sz="1300" dirty="0">
+              <a:rPr lang="en-US" sz="1250" dirty="0">
                 <a:solidFill>
                   <a:srgbClr val="1B2440"/>
                 </a:solidFill>
@@ -3380,47 +3572,26 @@
                 <a:ea typeface="Calibri" pitchFamily="34" charset="-122"/>
                 <a:cs typeface="Calibri" pitchFamily="34" charset="-120"/>
               </a:rPr>
-              <a:t>A teammate reviews it</a:t>
-            </a:r>
-            <a:endParaRPr lang="en-US" sz="1300" dirty="0"/>
-          </a:p>
-          <a:p>
-            <a:pPr marL="342900" indent="-342900">
-              <a:spcAft>
-                <a:spcPts val="800"/>
-              </a:spcAft>
-              <a:buSzPct val="100000"/>
-              <a:buChar char="•"/>
-            </a:pPr>
-            <a:r>
-              <a:rPr lang="en-US" sz="1300" dirty="0">
-                <a:solidFill>
-                  <a:srgbClr val="1B2440"/>
-                </a:solidFill>
-                <a:latin typeface="Calibri" pitchFamily="34" charset="0"/>
-                <a:ea typeface="Calibri" pitchFamily="34" charset="-122"/>
-                <a:cs typeface="Calibri" pitchFamily="34" charset="-120"/>
-              </a:rPr>
-              <a:t>Off it goes — same day, routine</a:t>
-            </a:r>
-            <a:endParaRPr lang="en-US" sz="1300" dirty="0"/>
-          </a:p>
-        </p:txBody>
-      </p:sp>
-      <p:sp>
-        <p:nvSpPr>
-          <p:cNvPr id="12" name="Shape 9"/>
+              <a:t>Most features: build the shell outside against a mocked backend. The real Java/Spring service stays right where it is, built and maintained inside as normal.</a:t>
+            </a:r>
+            <a:endParaRPr lang="en-US" sz="1250" dirty="0"/>
+          </a:p>
+        </p:txBody>
+      </p:sp>
+      <p:sp>
+        <p:nvSpPr>
+          <p:cNvPr id="11" name="Shape 8"/>
           <p:cNvSpPr/>
           <p:nvPr/>
         </p:nvSpPr>
         <p:spPr>
           <a:xfrm>
             <a:off x="6278728" y="1737360"/>
-            <a:ext cx="5364328" cy="3291840"/>
+            <a:ext cx="5364328" cy="3200400"/>
           </a:xfrm>
           <a:prstGeom prst="roundRect">
             <a:avLst>
-              <a:gd name="adj" fmla="val 2500"/>
+              <a:gd name="adj" fmla="val 2571"/>
             </a:avLst>
           </a:prstGeom>
           <a:solidFill>
@@ -3438,7 +3609,7 @@
       </p:sp>
       <p:sp>
         <p:nvSpPr>
-          <p:cNvPr id="13" name="Shape 10"/>
+          <p:cNvPr id="12" name="Shape 9"/>
           <p:cNvSpPr/>
           <p:nvPr/>
         </p:nvSpPr>
@@ -3458,7 +3629,7 @@
       </p:sp>
       <p:pic>
         <p:nvPicPr>
-          <p:cNvPr id="14" name="Image 1" descr="preencoded.png">    </p:cNvPr>
+          <p:cNvPr id="13" name="Image 1" descr="preencoded.png">    </p:cNvPr>
           <p:cNvPicPr>
             <a:picLocks noChangeAspect="1"/>
           </p:cNvPicPr>
@@ -3482,7 +3653,7 @@
       </p:pic>
       <p:sp>
         <p:nvSpPr>
-          <p:cNvPr id="15" name="Text 11"/>
+          <p:cNvPr id="14" name="Text 10"/>
           <p:cNvSpPr/>
           <p:nvPr/>
         </p:nvSpPr>
@@ -3513,7 +3684,7 @@
                 <a:ea typeface="Calibri" pitchFamily="34" charset="-122"/>
                 <a:cs typeface="Calibri" pitchFamily="34" charset="-120"/>
               </a:rPr>
-              <a:t>Anything touching real rules</a:t>
+              <a:t>Case by case: bring the backend along</a:t>
             </a:r>
             <a:endParaRPr lang="en-US" sz="1500" dirty="0"/>
           </a:p>
@@ -3521,14 +3692,14 @@
       </p:sp>
       <p:sp>
         <p:nvSpPr>
-          <p:cNvPr id="16" name="Text 12"/>
-          <p:cNvSpPr/>
-          <p:nvPr/>
-        </p:nvSpPr>
-        <p:spPr>
-          <a:xfrm>
-            <a:off x="6553048" y="2487168"/>
-            <a:ext cx="4815688" cy="457200"/>
+          <p:cNvPr id="15" name="Text 11"/>
+          <p:cNvSpPr/>
+          <p:nvPr/>
+        </p:nvSpPr>
+        <p:spPr>
+          <a:xfrm>
+            <a:off x="6553048" y="2514600"/>
+            <a:ext cx="4815688" cy="2011680"/>
           </a:xfrm>
           <a:prstGeom prst="rect">
             <a:avLst/>
@@ -3544,47 +3715,130 @@
               <a:buNone/>
             </a:pPr>
             <a:r>
-              <a:rPr lang="en-US" sz="1200" i="1" dirty="0">
-                <a:solidFill>
-                  <a:srgbClr val="5A6B8C"/>
-                </a:solidFill>
-                <a:latin typeface="Calibri" pitchFamily="34" charset="0"/>
-                <a:ea typeface="Calibri" pitchFamily="34" charset="-122"/>
-                <a:cs typeface="Calibri" pitchFamily="34" charset="-120"/>
-              </a:rPr>
-              <a:t>Unusual shapes, anything near sensitive logic.</a:t>
-            </a:r>
-            <a:endParaRPr lang="en-US" sz="1200" dirty="0"/>
-          </a:p>
-        </p:txBody>
-      </p:sp>
-      <p:sp>
-        <p:nvSpPr>
-          <p:cNvPr id="17" name="Text 13"/>
-          <p:cNvSpPr/>
-          <p:nvPr/>
-        </p:nvSpPr>
-        <p:spPr>
-          <a:xfrm>
-            <a:off x="6553048" y="3017520"/>
-            <a:ext cx="4815688" cy="1371600"/>
-          </a:xfrm>
-          <a:prstGeom prst="rect">
-            <a:avLst/>
-          </a:prstGeom>
-          <a:noFill/>
-          <a:ln/>
-        </p:spPr>
-        <p:txBody>
-          <a:bodyPr wrap="square" lIns="0" tIns="0" rIns="0" bIns="0" rtlCol="0" anchor="ctr"/>
-          <a:lstStyle/>
-          <a:p>
-            <a:pPr marL="342900" indent="-342900">
-              <a:spcAft>
-                <a:spcPts val="800"/>
-              </a:spcAft>
-              <a:buSzPct val="100000"/>
-              <a:buChar char="•"/>
+              <a:rPr lang="en-US" sz="1250" dirty="0">
+                <a:solidFill>
+                  <a:srgbClr val="1B2440"/>
+                </a:solidFill>
+                <a:latin typeface="Calibri" pitchFamily="34" charset="0"/>
+                <a:ea typeface="Calibri" pitchFamily="34" charset="-122"/>
+                <a:cs typeface="Calibri" pitchFamily="34" charset="-120"/>
+              </a:rPr>
+              <a:t>When a backend genuinely needs a rewrite — not just a re-skin — build a lean version of it outside too, under the same contract-first approach, tested there, then brought in like everything else.</a:t>
+            </a:r>
+            <a:endParaRPr lang="en-US" sz="1250" dirty="0"/>
+          </a:p>
+        </p:txBody>
+      </p:sp>
+      <p:sp>
+        <p:nvSpPr>
+          <p:cNvPr id="16" name="Shape 12"/>
+          <p:cNvSpPr/>
+          <p:nvPr/>
+        </p:nvSpPr>
+        <p:spPr>
+          <a:xfrm>
+            <a:off x="548640" y="5120640"/>
+            <a:ext cx="11094415" cy="960120"/>
+          </a:xfrm>
+          <a:prstGeom prst="roundRect">
+            <a:avLst>
+              <a:gd name="adj" fmla="val 8571"/>
+            </a:avLst>
+          </a:prstGeom>
+          <a:solidFill>
+            <a:srgbClr val="EDF3FC"/>
+          </a:solidFill>
+          <a:ln/>
+          <a:effectLst>
+            <a:outerShdw sx="100000" sy="100000" kx="0" ky="0" algn="bl" rotWithShape="0" blurRad="76200" dist="12700" dir="5400000">
+              <a:srgbClr val="9AA7C4">
+                <a:alpha val="22000"/>
+              </a:srgbClr>
+            </a:outerShdw>
+          </a:effectLst>
+        </p:spPr>
+      </p:sp>
+      <p:sp>
+        <p:nvSpPr>
+          <p:cNvPr id="17" name="Shape 13"/>
+          <p:cNvSpPr/>
+          <p:nvPr/>
+        </p:nvSpPr>
+        <p:spPr>
+          <a:xfrm>
+            <a:off x="777240" y="5321808"/>
+            <a:ext cx="548640" cy="548640"/>
+          </a:xfrm>
+          <a:prstGeom prst="ellipse">
+            <a:avLst/>
+          </a:prstGeom>
+          <a:solidFill>
+            <a:srgbClr val="1E2761"/>
+          </a:solidFill>
+          <a:ln/>
+        </p:spPr>
+      </p:sp>
+      <p:pic>
+        <p:nvPicPr>
+          <p:cNvPr id="18" name="Image 2" descr="preencoded.png">    </p:cNvPr>
+          <p:cNvPicPr>
+            <a:picLocks noChangeAspect="1"/>
+          </p:cNvPicPr>
+          <p:nvPr/>
+        </p:nvPicPr>
+        <p:blipFill>
+          <a:blip r:embed="rId3"/>
+          <a:stretch>
+            <a:fillRect/>
+          </a:stretch>
+        </p:blipFill>
+        <p:spPr>
+          <a:xfrm>
+            <a:off x="919886" y="5464454"/>
+            <a:ext cx="263347" cy="263347"/>
+          </a:xfrm>
+          <a:prstGeom prst="rect">
+            <a:avLst/>
+          </a:prstGeom>
+        </p:spPr>
+      </p:pic>
+      <p:sp>
+        <p:nvSpPr>
+          <p:cNvPr id="19" name="Text 14"/>
+          <p:cNvSpPr/>
+          <p:nvPr/>
+        </p:nvSpPr>
+        <p:spPr>
+          <a:xfrm>
+            <a:off x="1508760" y="5230368"/>
+            <a:ext cx="9905695" cy="777240"/>
+          </a:xfrm>
+          <a:prstGeom prst="rect">
+            <a:avLst/>
+          </a:prstGeom>
+          <a:noFill/>
+          <a:ln/>
+        </p:spPr>
+        <p:txBody>
+          <a:bodyPr wrap="square" lIns="0" tIns="0" rIns="0" bIns="0" rtlCol="0" anchor="ctr"/>
+          <a:lstStyle/>
+          <a:p>
+            <a:pPr indent="0" marL="0">
+              <a:buNone/>
+            </a:pPr>
+            <a:r>
+              <a:rPr lang="en-US" sz="1300" b="1" dirty="0">
+                <a:solidFill>
+                  <a:srgbClr val="1E2761"/>
+                </a:solidFill>
+                <a:latin typeface="Calibri" pitchFamily="34" charset="0"/>
+                <a:ea typeface="Calibri" pitchFamily="34" charset="-122"/>
+                <a:cs typeface="Calibri" pitchFamily="34" charset="-120"/>
+              </a:rPr>
+              <a:t>The question to ask, per feature: </a:t>
+            </a:r>
+            <a:pPr indent="0" marL="0">
+              <a:buNone/>
             </a:pPr>
             <a:r>
               <a:rPr lang="en-US" sz="1300" dirty="0">
@@ -3595,67 +3849,7 @@
                 <a:ea typeface="Calibri" pitchFamily="34" charset="-122"/>
                 <a:cs typeface="Calibri" pitchFamily="34" charset="-120"/>
               </a:rPr>
-              <a:t>Loop in a tech lead or the supervisor first</a:t>
-            </a:r>
-            <a:endParaRPr lang="en-US" sz="1300" dirty="0"/>
-          </a:p>
-          <a:p>
-            <a:pPr marL="342900" indent="-342900">
-              <a:spcAft>
-                <a:spcPts val="800"/>
-              </a:spcAft>
-              <a:buSzPct val="100000"/>
-              <a:buChar char="•"/>
-            </a:pPr>
-            <a:r>
-              <a:rPr lang="en-US" sz="1300" dirty="0">
-                <a:solidFill>
-                  <a:srgbClr val="1B2440"/>
-                </a:solidFill>
-                <a:latin typeface="Calibri" pitchFamily="34" charset="0"/>
-                <a:ea typeface="Calibri" pitchFamily="34" charset="-122"/>
-                <a:cs typeface="Calibri" pitchFamily="34" charset="-120"/>
-              </a:rPr>
-              <a:t>A day or two, not a blocker — just a second look</a:t>
-            </a:r>
-            <a:endParaRPr lang="en-US" sz="1300" dirty="0"/>
-          </a:p>
-        </p:txBody>
-      </p:sp>
-      <p:sp>
-        <p:nvSpPr>
-          <p:cNvPr id="18" name="Text 14"/>
-          <p:cNvSpPr/>
-          <p:nvPr/>
-        </p:nvSpPr>
-        <p:spPr>
-          <a:xfrm>
-            <a:off x="548640" y="5257800"/>
-            <a:ext cx="11094415" cy="457200"/>
-          </a:xfrm>
-          <a:prstGeom prst="rect">
-            <a:avLst/>
-          </a:prstGeom>
-          <a:noFill/>
-          <a:ln/>
-        </p:spPr>
-        <p:txBody>
-          <a:bodyPr wrap="square" lIns="0" tIns="0" rIns="0" bIns="0" rtlCol="0" anchor="ctr"/>
-          <a:lstStyle/>
-          <a:p>
-            <a:pPr algn="ctr" indent="0" marL="0">
-              <a:buNone/>
-            </a:pPr>
-            <a:r>
-              <a:rPr lang="en-US" sz="1300" i="1" dirty="0">
-                <a:solidFill>
-                  <a:srgbClr val="5A6B8C"/>
-                </a:solidFill>
-                <a:latin typeface="Calibri" pitchFamily="34" charset="0"/>
-                <a:ea typeface="Calibri" pitchFamily="34" charset="-122"/>
-                <a:cs typeface="Calibri" pitchFamily="34" charset="-120"/>
-              </a:rPr>
-              <a:t>We'll tighten this up as we go — better to start simple and add structure only where we actually need it.</a:t>
+              <a:t>does Confi already have a working backend for this? If yes, mock it. If the backend itself is due for a rewrite anyway, build it outside too.</a:t>
             </a:r>
             <a:endParaRPr lang="en-US" sz="1300" dirty="0"/>
           </a:p>
@@ -3804,7 +3998,7 @@
                 <a:ea typeface="Calibri" pitchFamily="34" charset="-122"/>
                 <a:cs typeface="Calibri" pitchFamily="34" charset="-120"/>
               </a:rPr>
-              <a:t>PORTING FEATURES, ONE AT A TIME</a:t>
+              <a:t>WHO NEEDS TO LOOK AT WHAT</a:t>
             </a:r>
             <a:endParaRPr lang="en-US" sz="1200" dirty="0"/>
           </a:p>
@@ -3843,7 +4037,7 @@
                 <a:ea typeface="Cambria" pitchFamily="34" charset="-122"/>
                 <a:cs typeface="Cambria" pitchFamily="34" charset="-120"/>
               </a:rPr>
-              <a:t>Inventory → Spec → Build → Verify — repeat</a:t>
+              <a:t>Most things need a quick look. Some need a second pair of eyes.</a:t>
             </a:r>
             <a:endParaRPr lang="en-US" sz="2800" dirty="0"/>
           </a:p>
@@ -3857,12 +4051,12 @@
         </p:nvSpPr>
         <p:spPr>
           <a:xfrm>
-            <a:off x="548640" y="1691640"/>
-            <a:ext cx="2602154" cy="3017520"/>
+            <a:off x="548640" y="1737360"/>
+            <a:ext cx="5364328" cy="3291840"/>
           </a:xfrm>
           <a:prstGeom prst="roundRect">
             <a:avLst>
-              <a:gd name="adj" fmla="val 3163"/>
+              <a:gd name="adj" fmla="val 2500"/>
             </a:avLst>
           </a:prstGeom>
           <a:solidFill>
@@ -3880,14 +4074,58 @@
       </p:sp>
       <p:sp>
         <p:nvSpPr>
-          <p:cNvPr id="7" name="Text 5"/>
-          <p:cNvSpPr/>
-          <p:nvPr/>
-        </p:nvSpPr>
-        <p:spPr>
-          <a:xfrm>
-            <a:off x="731520" y="1828800"/>
-            <a:ext cx="731520" cy="685800"/>
+          <p:cNvPr id="7" name="Shape 5"/>
+          <p:cNvSpPr/>
+          <p:nvPr/>
+        </p:nvSpPr>
+        <p:spPr>
+          <a:xfrm>
+            <a:off x="804672" y="1965960"/>
+            <a:ext cx="548640" cy="548640"/>
+          </a:xfrm>
+          <a:prstGeom prst="ellipse">
+            <a:avLst/>
+          </a:prstGeom>
+          <a:solidFill>
+            <a:srgbClr val="1E2761"/>
+          </a:solidFill>
+          <a:ln/>
+        </p:spPr>
+      </p:sp>
+      <p:pic>
+        <p:nvPicPr>
+          <p:cNvPr id="8" name="Image 0" descr="preencoded.png">    </p:cNvPr>
+          <p:cNvPicPr>
+            <a:picLocks noChangeAspect="1"/>
+          </p:cNvPicPr>
+          <p:nvPr/>
+        </p:nvPicPr>
+        <p:blipFill>
+          <a:blip r:embed="rId1"/>
+          <a:stretch>
+            <a:fillRect/>
+          </a:stretch>
+        </p:blipFill>
+        <p:spPr>
+          <a:xfrm>
+            <a:off x="947318" y="2108606"/>
+            <a:ext cx="263347" cy="263347"/>
+          </a:xfrm>
+          <a:prstGeom prst="rect">
+            <a:avLst/>
+          </a:prstGeom>
+        </p:spPr>
+      </p:pic>
+      <p:sp>
+        <p:nvSpPr>
+          <p:cNvPr id="9" name="Text 6"/>
+          <p:cNvSpPr/>
+          <p:nvPr/>
+        </p:nvSpPr>
+        <p:spPr>
+          <a:xfrm>
+            <a:off x="1481328" y="2029968"/>
+            <a:ext cx="4267048" cy="365760"/>
           </a:xfrm>
           <a:prstGeom prst="rect">
             <a:avLst/>
@@ -3903,30 +4141,30 @@
               <a:buNone/>
             </a:pPr>
             <a:r>
-              <a:rPr lang="en-US" sz="3600" b="1" dirty="0">
-                <a:solidFill>
-                  <a:srgbClr val="CADCFC"/>
-                </a:solidFill>
-                <a:latin typeface="Cambria" pitchFamily="34" charset="0"/>
-                <a:ea typeface="Cambria" pitchFamily="34" charset="-122"/>
-                <a:cs typeface="Cambria" pitchFamily="34" charset="-120"/>
-              </a:rPr>
-              <a:t>1</a:t>
-            </a:r>
-            <a:endParaRPr lang="en-US" sz="3600" dirty="0"/>
-          </a:p>
-        </p:txBody>
-      </p:sp>
-      <p:sp>
-        <p:nvSpPr>
-          <p:cNvPr id="8" name="Text 6"/>
-          <p:cNvSpPr/>
-          <p:nvPr/>
-        </p:nvSpPr>
-        <p:spPr>
-          <a:xfrm>
-            <a:off x="731520" y="2468880"/>
-            <a:ext cx="2236394" cy="320040"/>
+              <a:rPr lang="en-US" sz="1500" b="1" dirty="0">
+                <a:solidFill>
+                  <a:srgbClr val="1E2761"/>
+                </a:solidFill>
+                <a:latin typeface="Calibri" pitchFamily="34" charset="0"/>
+                <a:ea typeface="Calibri" pitchFamily="34" charset="-122"/>
+                <a:cs typeface="Calibri" pitchFamily="34" charset="-120"/>
+              </a:rPr>
+              <a:t>Everyday stuff</a:t>
+            </a:r>
+            <a:endParaRPr lang="en-US" sz="1500" dirty="0"/>
+          </a:p>
+        </p:txBody>
+      </p:sp>
+      <p:sp>
+        <p:nvSpPr>
+          <p:cNvPr id="10" name="Text 7"/>
+          <p:cNvSpPr/>
+          <p:nvPr/>
+        </p:nvSpPr>
+        <p:spPr>
+          <a:xfrm>
+            <a:off x="822960" y="2487168"/>
+            <a:ext cx="4815688" cy="457200"/>
           </a:xfrm>
           <a:prstGeom prst="rect">
             <a:avLst/>
@@ -3942,46 +4180,50 @@
               <a:buNone/>
             </a:pPr>
             <a:r>
-              <a:rPr lang="en-US" sz="1500" b="1" dirty="0">
-                <a:solidFill>
-                  <a:srgbClr val="1E2761"/>
-                </a:solidFill>
-                <a:latin typeface="Calibri" pitchFamily="34" charset="0"/>
-                <a:ea typeface="Calibri" pitchFamily="34" charset="-122"/>
-                <a:cs typeface="Calibri" pitchFamily="34" charset="-120"/>
-              </a:rPr>
-              <a:t>Inventory</a:t>
-            </a:r>
-            <a:endParaRPr lang="en-US" sz="1500" dirty="0"/>
-          </a:p>
-        </p:txBody>
-      </p:sp>
-      <p:sp>
-        <p:nvSpPr>
-          <p:cNvPr id="9" name="Text 7"/>
-          <p:cNvSpPr/>
-          <p:nvPr/>
-        </p:nvSpPr>
-        <p:spPr>
-          <a:xfrm>
-            <a:off x="731520" y="2834640"/>
-            <a:ext cx="2236394" cy="1691640"/>
-          </a:xfrm>
-          <a:prstGeom prst="rect">
-            <a:avLst/>
-          </a:prstGeom>
-          <a:noFill/>
-          <a:ln/>
-        </p:spPr>
-        <p:txBody>
-          <a:bodyPr wrap="square" lIns="0" tIns="0" rIns="0" bIns="0" rtlCol="0" anchor="ctr"/>
-          <a:lstStyle/>
-          <a:p>
-            <a:pPr indent="0" marL="0">
-              <a:buNone/>
-            </a:pPr>
-            <a:r>
-              <a:rPr lang="en-US" sz="1100" dirty="0">
+              <a:rPr lang="en-US" sz="1200" i="1" dirty="0">
+                <a:solidFill>
+                  <a:srgbClr val="5A6B8C"/>
+                </a:solidFill>
+                <a:latin typeface="Calibri" pitchFamily="34" charset="0"/>
+                <a:ea typeface="Calibri" pitchFamily="34" charset="-122"/>
+                <a:cs typeface="Calibri" pitchFamily="34" charset="-120"/>
+              </a:rPr>
+              <a:t>Structure, contracts, sanitized code, sample fixtures.</a:t>
+            </a:r>
+            <a:endParaRPr lang="en-US" sz="1200" dirty="0"/>
+          </a:p>
+        </p:txBody>
+      </p:sp>
+      <p:sp>
+        <p:nvSpPr>
+          <p:cNvPr id="11" name="Text 8"/>
+          <p:cNvSpPr/>
+          <p:nvPr/>
+        </p:nvSpPr>
+        <p:spPr>
+          <a:xfrm>
+            <a:off x="822960" y="3017520"/>
+            <a:ext cx="4815688" cy="1371600"/>
+          </a:xfrm>
+          <a:prstGeom prst="rect">
+            <a:avLst/>
+          </a:prstGeom>
+          <a:noFill/>
+          <a:ln/>
+        </p:spPr>
+        <p:txBody>
+          <a:bodyPr wrap="square" lIns="0" tIns="0" rIns="0" bIns="0" rtlCol="0" anchor="ctr"/>
+          <a:lstStyle/>
+          <a:p>
+            <a:pPr marL="342900" indent="-342900">
+              <a:spcAft>
+                <a:spcPts val="800"/>
+              </a:spcAft>
+              <a:buSzPct val="100000"/>
+              <a:buChar char="•"/>
+            </a:pPr>
+            <a:r>
+              <a:rPr lang="en-US" sz="1300" dirty="0">
                 <a:solidFill>
                   <a:srgbClr val="1B2440"/>
                 </a:solidFill>
@@ -3989,66 +4231,51 @@
                 <a:ea typeface="Calibri" pitchFamily="34" charset="-122"/>
                 <a:cs typeface="Calibri" pitchFamily="34" charset="-120"/>
               </a:rPr>
-              <a:t>List out what each Angular feature actually does: routes, screens, calls, rules. One row per feature.</a:t>
-            </a:r>
-            <a:endParaRPr lang="en-US" sz="1100" dirty="0"/>
-          </a:p>
-        </p:txBody>
-      </p:sp>
-      <p:sp>
-        <p:nvSpPr>
-          <p:cNvPr id="10" name="Text 8"/>
-          <p:cNvSpPr/>
-          <p:nvPr/>
-        </p:nvSpPr>
-        <p:spPr>
-          <a:xfrm>
-            <a:off x="3132506" y="3017520"/>
-            <a:ext cx="274320" cy="365760"/>
-          </a:xfrm>
-          <a:prstGeom prst="rect">
-            <a:avLst/>
-          </a:prstGeom>
-          <a:noFill/>
-          <a:ln/>
-        </p:spPr>
-        <p:txBody>
-          <a:bodyPr wrap="square" lIns="0" tIns="0" rIns="0" bIns="0" rtlCol="0" anchor="ctr"/>
-          <a:lstStyle/>
-          <a:p>
-            <a:pPr algn="ctr" indent="0" marL="0">
-              <a:buNone/>
-            </a:pPr>
-            <a:r>
-              <a:rPr lang="en-US" sz="1800" dirty="0">
-                <a:solidFill>
-                  <a:srgbClr val="5A6B8C"/>
-                </a:solidFill>
-              </a:rPr>
-              <a:t>▸</a:t>
-            </a:r>
-            <a:endParaRPr lang="en-US" sz="1800" dirty="0"/>
-          </a:p>
-        </p:txBody>
-      </p:sp>
-      <p:sp>
-        <p:nvSpPr>
-          <p:cNvPr id="11" name="Shape 9"/>
-          <p:cNvSpPr/>
-          <p:nvPr/>
-        </p:nvSpPr>
-        <p:spPr>
-          <a:xfrm>
-            <a:off x="3379394" y="1691640"/>
-            <a:ext cx="2602154" cy="3017520"/>
+              <a:t>A teammate reviews it</a:t>
+            </a:r>
+            <a:endParaRPr lang="en-US" sz="1300" dirty="0"/>
+          </a:p>
+          <a:p>
+            <a:pPr marL="342900" indent="-342900">
+              <a:spcAft>
+                <a:spcPts val="800"/>
+              </a:spcAft>
+              <a:buSzPct val="100000"/>
+              <a:buChar char="•"/>
+            </a:pPr>
+            <a:r>
+              <a:rPr lang="en-US" sz="1300" dirty="0">
+                <a:solidFill>
+                  <a:srgbClr val="1B2440"/>
+                </a:solidFill>
+                <a:latin typeface="Calibri" pitchFamily="34" charset="0"/>
+                <a:ea typeface="Calibri" pitchFamily="34" charset="-122"/>
+                <a:cs typeface="Calibri" pitchFamily="34" charset="-120"/>
+              </a:rPr>
+              <a:t>Off it goes — same day, routine</a:t>
+            </a:r>
+            <a:endParaRPr lang="en-US" sz="1300" dirty="0"/>
+          </a:p>
+        </p:txBody>
+      </p:sp>
+      <p:sp>
+        <p:nvSpPr>
+          <p:cNvPr id="12" name="Shape 9"/>
+          <p:cNvSpPr/>
+          <p:nvPr/>
+        </p:nvSpPr>
+        <p:spPr>
+          <a:xfrm>
+            <a:off x="6278728" y="1737360"/>
+            <a:ext cx="5364328" cy="3291840"/>
           </a:xfrm>
           <a:prstGeom prst="roundRect">
             <a:avLst>
-              <a:gd name="adj" fmla="val 3163"/>
+              <a:gd name="adj" fmla="val 2500"/>
             </a:avLst>
           </a:prstGeom>
           <a:solidFill>
-            <a:srgbClr val="EDF3FC"/>
+            <a:srgbClr val="EAF4EF"/>
           </a:solidFill>
           <a:ln/>
           <a:effectLst>
@@ -4062,524 +4289,14 @@
       </p:sp>
       <p:sp>
         <p:nvSpPr>
-          <p:cNvPr id="12" name="Text 10"/>
-          <p:cNvSpPr/>
-          <p:nvPr/>
-        </p:nvSpPr>
-        <p:spPr>
-          <a:xfrm>
-            <a:off x="3562274" y="1828800"/>
-            <a:ext cx="731520" cy="685800"/>
-          </a:xfrm>
-          <a:prstGeom prst="rect">
-            <a:avLst/>
-          </a:prstGeom>
-          <a:noFill/>
-          <a:ln/>
-        </p:spPr>
-        <p:txBody>
-          <a:bodyPr wrap="square" lIns="0" tIns="0" rIns="0" bIns="0" rtlCol="0" anchor="ctr"/>
-          <a:lstStyle/>
-          <a:p>
-            <a:pPr indent="0" marL="0">
-              <a:buNone/>
-            </a:pPr>
-            <a:r>
-              <a:rPr lang="en-US" sz="3600" b="1" dirty="0">
-                <a:solidFill>
-                  <a:srgbClr val="CADCFC"/>
-                </a:solidFill>
-                <a:latin typeface="Cambria" pitchFamily="34" charset="0"/>
-                <a:ea typeface="Cambria" pitchFamily="34" charset="-122"/>
-                <a:cs typeface="Cambria" pitchFamily="34" charset="-120"/>
-              </a:rPr>
-              <a:t>2</a:t>
-            </a:r>
-            <a:endParaRPr lang="en-US" sz="3600" dirty="0"/>
-          </a:p>
-        </p:txBody>
-      </p:sp>
-      <p:sp>
-        <p:nvSpPr>
-          <p:cNvPr id="13" name="Text 11"/>
-          <p:cNvSpPr/>
-          <p:nvPr/>
-        </p:nvSpPr>
-        <p:spPr>
-          <a:xfrm>
-            <a:off x="3562274" y="2468880"/>
-            <a:ext cx="2236394" cy="320040"/>
-          </a:xfrm>
-          <a:prstGeom prst="rect">
-            <a:avLst/>
-          </a:prstGeom>
-          <a:noFill/>
-          <a:ln/>
-        </p:spPr>
-        <p:txBody>
-          <a:bodyPr wrap="square" lIns="0" tIns="0" rIns="0" bIns="0" rtlCol="0" anchor="ctr"/>
-          <a:lstStyle/>
-          <a:p>
-            <a:pPr indent="0" marL="0">
-              <a:buNone/>
-            </a:pPr>
-            <a:r>
-              <a:rPr lang="en-US" sz="1500" b="1" dirty="0">
-                <a:solidFill>
-                  <a:srgbClr val="1E2761"/>
-                </a:solidFill>
-                <a:latin typeface="Calibri" pitchFamily="34" charset="0"/>
-                <a:ea typeface="Calibri" pitchFamily="34" charset="-122"/>
-                <a:cs typeface="Calibri" pitchFamily="34" charset="-120"/>
-              </a:rPr>
-              <a:t>Spec</a:t>
-            </a:r>
-            <a:endParaRPr lang="en-US" sz="1500" dirty="0"/>
-          </a:p>
-        </p:txBody>
-      </p:sp>
-      <p:sp>
-        <p:nvSpPr>
-          <p:cNvPr id="14" name="Text 12"/>
-          <p:cNvSpPr/>
-          <p:nvPr/>
-        </p:nvSpPr>
-        <p:spPr>
-          <a:xfrm>
-            <a:off x="3562274" y="2834640"/>
-            <a:ext cx="2236394" cy="1691640"/>
-          </a:xfrm>
-          <a:prstGeom prst="rect">
-            <a:avLst/>
-          </a:prstGeom>
-          <a:noFill/>
-          <a:ln/>
-        </p:spPr>
-        <p:txBody>
-          <a:bodyPr wrap="square" lIns="0" tIns="0" rIns="0" bIns="0" rtlCol="0" anchor="ctr"/>
-          <a:lstStyle/>
-          <a:p>
-            <a:pPr indent="0" marL="0">
-              <a:buNone/>
-            </a:pPr>
-            <a:r>
-              <a:rPr lang="en-US" sz="1100" dirty="0">
-                <a:solidFill>
-                  <a:srgbClr val="1B2440"/>
-                </a:solidFill>
-                <a:latin typeface="Calibri" pitchFamily="34" charset="0"/>
-                <a:ea typeface="Calibri" pitchFamily="34" charset="-122"/>
-                <a:cs typeface="Calibri" pitchFamily="34" charset="-120"/>
-              </a:rPr>
-              <a:t>Write the contract inside: API shape, rule keys, sample data. Keep it tight — a spec shouldn't take a week.</a:t>
-            </a:r>
-            <a:endParaRPr lang="en-US" sz="1100" dirty="0"/>
-          </a:p>
-        </p:txBody>
-      </p:sp>
-      <p:sp>
-        <p:nvSpPr>
-          <p:cNvPr id="15" name="Text 13"/>
-          <p:cNvSpPr/>
-          <p:nvPr/>
-        </p:nvSpPr>
-        <p:spPr>
-          <a:xfrm>
-            <a:off x="5963260" y="3017520"/>
-            <a:ext cx="274320" cy="365760"/>
-          </a:xfrm>
-          <a:prstGeom prst="rect">
-            <a:avLst/>
-          </a:prstGeom>
-          <a:noFill/>
-          <a:ln/>
-        </p:spPr>
-        <p:txBody>
-          <a:bodyPr wrap="square" lIns="0" tIns="0" rIns="0" bIns="0" rtlCol="0" anchor="ctr"/>
-          <a:lstStyle/>
-          <a:p>
-            <a:pPr algn="ctr" indent="0" marL="0">
-              <a:buNone/>
-            </a:pPr>
-            <a:r>
-              <a:rPr lang="en-US" sz="1800" dirty="0">
-                <a:solidFill>
-                  <a:srgbClr val="5A6B8C"/>
-                </a:solidFill>
-              </a:rPr>
-              <a:t>▸</a:t>
-            </a:r>
-            <a:endParaRPr lang="en-US" sz="1800" dirty="0"/>
-          </a:p>
-        </p:txBody>
-      </p:sp>
-      <p:sp>
-        <p:nvSpPr>
-          <p:cNvPr id="16" name="Shape 14"/>
-          <p:cNvSpPr/>
-          <p:nvPr/>
-        </p:nvSpPr>
-        <p:spPr>
-          <a:xfrm>
-            <a:off x="6210148" y="1691640"/>
-            <a:ext cx="2602154" cy="3017520"/>
-          </a:xfrm>
-          <a:prstGeom prst="roundRect">
-            <a:avLst>
-              <a:gd name="adj" fmla="val 3163"/>
-            </a:avLst>
-          </a:prstGeom>
-          <a:solidFill>
-            <a:srgbClr val="EDF3FC"/>
-          </a:solidFill>
-          <a:ln/>
-          <a:effectLst>
-            <a:outerShdw sx="100000" sy="100000" kx="0" ky="0" algn="bl" rotWithShape="0" blurRad="76200" dist="12700" dir="5400000">
-              <a:srgbClr val="9AA7C4">
-                <a:alpha val="22000"/>
-              </a:srgbClr>
-            </a:outerShdw>
-          </a:effectLst>
-        </p:spPr>
-      </p:sp>
-      <p:sp>
-        <p:nvSpPr>
-          <p:cNvPr id="17" name="Text 15"/>
-          <p:cNvSpPr/>
-          <p:nvPr/>
-        </p:nvSpPr>
-        <p:spPr>
-          <a:xfrm>
-            <a:off x="6393028" y="1828800"/>
-            <a:ext cx="731520" cy="685800"/>
-          </a:xfrm>
-          <a:prstGeom prst="rect">
-            <a:avLst/>
-          </a:prstGeom>
-          <a:noFill/>
-          <a:ln/>
-        </p:spPr>
-        <p:txBody>
-          <a:bodyPr wrap="square" lIns="0" tIns="0" rIns="0" bIns="0" rtlCol="0" anchor="ctr"/>
-          <a:lstStyle/>
-          <a:p>
-            <a:pPr indent="0" marL="0">
-              <a:buNone/>
-            </a:pPr>
-            <a:r>
-              <a:rPr lang="en-US" sz="3600" b="1" dirty="0">
-                <a:solidFill>
-                  <a:srgbClr val="CADCFC"/>
-                </a:solidFill>
-                <a:latin typeface="Cambria" pitchFamily="34" charset="0"/>
-                <a:ea typeface="Cambria" pitchFamily="34" charset="-122"/>
-                <a:cs typeface="Cambria" pitchFamily="34" charset="-120"/>
-              </a:rPr>
-              <a:t>3</a:t>
-            </a:r>
-            <a:endParaRPr lang="en-US" sz="3600" dirty="0"/>
-          </a:p>
-        </p:txBody>
-      </p:sp>
-      <p:sp>
-        <p:nvSpPr>
-          <p:cNvPr id="18" name="Text 16"/>
-          <p:cNvSpPr/>
-          <p:nvPr/>
-        </p:nvSpPr>
-        <p:spPr>
-          <a:xfrm>
-            <a:off x="6393028" y="2468880"/>
-            <a:ext cx="2236394" cy="320040"/>
-          </a:xfrm>
-          <a:prstGeom prst="rect">
-            <a:avLst/>
-          </a:prstGeom>
-          <a:noFill/>
-          <a:ln/>
-        </p:spPr>
-        <p:txBody>
-          <a:bodyPr wrap="square" lIns="0" tIns="0" rIns="0" bIns="0" rtlCol="0" anchor="ctr"/>
-          <a:lstStyle/>
-          <a:p>
-            <a:pPr indent="0" marL="0">
-              <a:buNone/>
-            </a:pPr>
-            <a:r>
-              <a:rPr lang="en-US" sz="1500" b="1" dirty="0">
-                <a:solidFill>
-                  <a:srgbClr val="1E2761"/>
-                </a:solidFill>
-                <a:latin typeface="Calibri" pitchFamily="34" charset="0"/>
-                <a:ea typeface="Calibri" pitchFamily="34" charset="-122"/>
-                <a:cs typeface="Calibri" pitchFamily="34" charset="-120"/>
-              </a:rPr>
-              <a:t>Build</a:t>
-            </a:r>
-            <a:endParaRPr lang="en-US" sz="1500" dirty="0"/>
-          </a:p>
-        </p:txBody>
-      </p:sp>
-      <p:sp>
-        <p:nvSpPr>
-          <p:cNvPr id="19" name="Text 17"/>
-          <p:cNvSpPr/>
-          <p:nvPr/>
-        </p:nvSpPr>
-        <p:spPr>
-          <a:xfrm>
-            <a:off x="6393028" y="2834640"/>
-            <a:ext cx="2236394" cy="1691640"/>
-          </a:xfrm>
-          <a:prstGeom prst="rect">
-            <a:avLst/>
-          </a:prstGeom>
-          <a:noFill/>
-          <a:ln/>
-        </p:spPr>
-        <p:txBody>
-          <a:bodyPr wrap="square" lIns="0" tIns="0" rIns="0" bIns="0" rtlCol="0" anchor="ctr"/>
-          <a:lstStyle/>
-          <a:p>
-            <a:pPr indent="0" marL="0">
-              <a:buNone/>
-            </a:pPr>
-            <a:r>
-              <a:rPr lang="en-US" sz="1100" dirty="0">
-                <a:solidFill>
-                  <a:srgbClr val="1B2440"/>
-                </a:solidFill>
-                <a:latin typeface="Calibri" pitchFamily="34" charset="0"/>
-                <a:ea typeface="Calibri" pitchFamily="34" charset="-122"/>
-                <a:cs typeface="Calibri" pitchFamily="34" charset="-120"/>
-              </a:rPr>
-              <a:t>Build it outside end-to-end — UI, tests, docs together — against the mocks. Not all-screens-first.</a:t>
-            </a:r>
-            <a:endParaRPr lang="en-US" sz="1100" dirty="0"/>
-          </a:p>
-        </p:txBody>
-      </p:sp>
-      <p:sp>
-        <p:nvSpPr>
-          <p:cNvPr id="20" name="Text 18"/>
-          <p:cNvSpPr/>
-          <p:nvPr/>
-        </p:nvSpPr>
-        <p:spPr>
-          <a:xfrm>
-            <a:off x="8794013" y="3017520"/>
-            <a:ext cx="274320" cy="365760"/>
-          </a:xfrm>
-          <a:prstGeom prst="rect">
-            <a:avLst/>
-          </a:prstGeom>
-          <a:noFill/>
-          <a:ln/>
-        </p:spPr>
-        <p:txBody>
-          <a:bodyPr wrap="square" lIns="0" tIns="0" rIns="0" bIns="0" rtlCol="0" anchor="ctr"/>
-          <a:lstStyle/>
-          <a:p>
-            <a:pPr algn="ctr" indent="0" marL="0">
-              <a:buNone/>
-            </a:pPr>
-            <a:r>
-              <a:rPr lang="en-US" sz="1800" dirty="0">
-                <a:solidFill>
-                  <a:srgbClr val="5A6B8C"/>
-                </a:solidFill>
-              </a:rPr>
-              <a:t>▸</a:t>
-            </a:r>
-            <a:endParaRPr lang="en-US" sz="1800" dirty="0"/>
-          </a:p>
-        </p:txBody>
-      </p:sp>
-      <p:sp>
-        <p:nvSpPr>
-          <p:cNvPr id="21" name="Shape 19"/>
-          <p:cNvSpPr/>
-          <p:nvPr/>
-        </p:nvSpPr>
-        <p:spPr>
-          <a:xfrm>
-            <a:off x="9040901" y="1691640"/>
-            <a:ext cx="2602154" cy="3017520"/>
-          </a:xfrm>
-          <a:prstGeom prst="roundRect">
-            <a:avLst>
-              <a:gd name="adj" fmla="val 3163"/>
-            </a:avLst>
-          </a:prstGeom>
-          <a:solidFill>
-            <a:srgbClr val="EDF3FC"/>
-          </a:solidFill>
-          <a:ln/>
-          <a:effectLst>
-            <a:outerShdw sx="100000" sy="100000" kx="0" ky="0" algn="bl" rotWithShape="0" blurRad="76200" dist="12700" dir="5400000">
-              <a:srgbClr val="9AA7C4">
-                <a:alpha val="22000"/>
-              </a:srgbClr>
-            </a:outerShdw>
-          </a:effectLst>
-        </p:spPr>
-      </p:sp>
-      <p:sp>
-        <p:nvSpPr>
-          <p:cNvPr id="22" name="Text 20"/>
-          <p:cNvSpPr/>
-          <p:nvPr/>
-        </p:nvSpPr>
-        <p:spPr>
-          <a:xfrm>
-            <a:off x="9223781" y="1828800"/>
-            <a:ext cx="731520" cy="685800"/>
-          </a:xfrm>
-          <a:prstGeom prst="rect">
-            <a:avLst/>
-          </a:prstGeom>
-          <a:noFill/>
-          <a:ln/>
-        </p:spPr>
-        <p:txBody>
-          <a:bodyPr wrap="square" lIns="0" tIns="0" rIns="0" bIns="0" rtlCol="0" anchor="ctr"/>
-          <a:lstStyle/>
-          <a:p>
-            <a:pPr indent="0" marL="0">
-              <a:buNone/>
-            </a:pPr>
-            <a:r>
-              <a:rPr lang="en-US" sz="3600" b="1" dirty="0">
-                <a:solidFill>
-                  <a:srgbClr val="CADCFC"/>
-                </a:solidFill>
-                <a:latin typeface="Cambria" pitchFamily="34" charset="0"/>
-                <a:ea typeface="Cambria" pitchFamily="34" charset="-122"/>
-                <a:cs typeface="Cambria" pitchFamily="34" charset="-120"/>
-              </a:rPr>
-              <a:t>4</a:t>
-            </a:r>
-            <a:endParaRPr lang="en-US" sz="3600" dirty="0"/>
-          </a:p>
-        </p:txBody>
-      </p:sp>
-      <p:sp>
-        <p:nvSpPr>
-          <p:cNvPr id="23" name="Text 21"/>
-          <p:cNvSpPr/>
-          <p:nvPr/>
-        </p:nvSpPr>
-        <p:spPr>
-          <a:xfrm>
-            <a:off x="9223781" y="2468880"/>
-            <a:ext cx="2236394" cy="320040"/>
-          </a:xfrm>
-          <a:prstGeom prst="rect">
-            <a:avLst/>
-          </a:prstGeom>
-          <a:noFill/>
-          <a:ln/>
-        </p:spPr>
-        <p:txBody>
-          <a:bodyPr wrap="square" lIns="0" tIns="0" rIns="0" bIns="0" rtlCol="0" anchor="ctr"/>
-          <a:lstStyle/>
-          <a:p>
-            <a:pPr indent="0" marL="0">
-              <a:buNone/>
-            </a:pPr>
-            <a:r>
-              <a:rPr lang="en-US" sz="1500" b="1" dirty="0">
-                <a:solidFill>
-                  <a:srgbClr val="1E2761"/>
-                </a:solidFill>
-                <a:latin typeface="Calibri" pitchFamily="34" charset="0"/>
-                <a:ea typeface="Calibri" pitchFamily="34" charset="-122"/>
-                <a:cs typeface="Calibri" pitchFamily="34" charset="-120"/>
-              </a:rPr>
-              <a:t>Verify</a:t>
-            </a:r>
-            <a:endParaRPr lang="en-US" sz="1500" dirty="0"/>
-          </a:p>
-        </p:txBody>
-      </p:sp>
-      <p:sp>
-        <p:nvSpPr>
-          <p:cNvPr id="24" name="Text 22"/>
-          <p:cNvSpPr/>
-          <p:nvPr/>
-        </p:nvSpPr>
-        <p:spPr>
-          <a:xfrm>
-            <a:off x="9223781" y="2834640"/>
-            <a:ext cx="2236394" cy="1691640"/>
-          </a:xfrm>
-          <a:prstGeom prst="rect">
-            <a:avLst/>
-          </a:prstGeom>
-          <a:noFill/>
-          <a:ln/>
-        </p:spPr>
-        <p:txBody>
-          <a:bodyPr wrap="square" lIns="0" tIns="0" rIns="0" bIns="0" rtlCol="0" anchor="ctr"/>
-          <a:lstStyle/>
-          <a:p>
-            <a:pPr indent="0" marL="0">
-              <a:buNone/>
-            </a:pPr>
-            <a:r>
-              <a:rPr lang="en-US" sz="1100" dirty="0">
-                <a:solidFill>
-                  <a:srgbClr val="1B2440"/>
-                </a:solidFill>
-                <a:latin typeface="Calibri" pitchFamily="34" charset="0"/>
-                <a:ea typeface="Calibri" pitchFamily="34" charset="-122"/>
-                <a:cs typeface="Calibri" pitchFamily="34" charset="-120"/>
-              </a:rPr>
-              <a:t>Bring it in, plug in the real backend, re-run the same tests. Found a gap? Fix the spec, then the code.</a:t>
-            </a:r>
-            <a:endParaRPr lang="en-US" sz="1100" dirty="0"/>
-          </a:p>
-        </p:txBody>
-      </p:sp>
-      <p:sp>
-        <p:nvSpPr>
-          <p:cNvPr id="25" name="Shape 23"/>
-          <p:cNvSpPr/>
-          <p:nvPr/>
-        </p:nvSpPr>
-        <p:spPr>
-          <a:xfrm>
-            <a:off x="548640" y="4983480"/>
-            <a:ext cx="11094415" cy="1051560"/>
-          </a:xfrm>
-          <a:prstGeom prst="roundRect">
-            <a:avLst>
-              <a:gd name="adj" fmla="val 7826"/>
-            </a:avLst>
-          </a:prstGeom>
-          <a:solidFill>
-            <a:srgbClr val="EAF4EF"/>
-          </a:solidFill>
-          <a:ln/>
-          <a:effectLst>
-            <a:outerShdw sx="100000" sy="100000" kx="0" ky="0" algn="bl" rotWithShape="0" blurRad="76200" dist="12700" dir="5400000">
-              <a:srgbClr val="9AA7C4">
-                <a:alpha val="22000"/>
-              </a:srgbClr>
-            </a:outerShdw>
-          </a:effectLst>
-        </p:spPr>
-      </p:sp>
-      <p:sp>
-        <p:nvSpPr>
-          <p:cNvPr id="26" name="Shape 24"/>
-          <p:cNvSpPr/>
-          <p:nvPr/>
-        </p:nvSpPr>
-        <p:spPr>
-          <a:xfrm>
-            <a:off x="777240" y="5184648"/>
-            <a:ext cx="566928" cy="566928"/>
+          <p:cNvPr id="13" name="Shape 10"/>
+          <p:cNvSpPr/>
+          <p:nvPr/>
+        </p:nvSpPr>
+        <p:spPr>
+          <a:xfrm>
+            <a:off x="6534760" y="1965960"/>
+            <a:ext cx="548640" cy="548640"/>
           </a:xfrm>
           <a:prstGeom prst="ellipse">
             <a:avLst/>
@@ -4592,22 +4309,22 @@
       </p:sp>
       <p:pic>
         <p:nvPicPr>
-          <p:cNvPr id="27" name="Image 0" descr="preencoded.png">    </p:cNvPr>
+          <p:cNvPr id="14" name="Image 1" descr="preencoded.png">    </p:cNvPr>
           <p:cNvPicPr>
             <a:picLocks noChangeAspect="1"/>
           </p:cNvPicPr>
           <p:nvPr/>
         </p:nvPicPr>
         <p:blipFill>
-          <a:blip r:embed="rId1"/>
+          <a:blip r:embed="rId2"/>
           <a:stretch>
             <a:fillRect/>
           </a:stretch>
         </p:blipFill>
         <p:spPr>
           <a:xfrm>
-            <a:off x="924641" y="5332049"/>
-            <a:ext cx="272125" cy="272125"/>
+            <a:off x="6677406" y="2108606"/>
+            <a:ext cx="263347" cy="263347"/>
           </a:xfrm>
           <a:prstGeom prst="rect">
             <a:avLst/>
@@ -4616,14 +4333,14 @@
       </p:pic>
       <p:sp>
         <p:nvSpPr>
-          <p:cNvPr id="28" name="Text 25"/>
-          <p:cNvSpPr/>
-          <p:nvPr/>
-        </p:nvSpPr>
-        <p:spPr>
-          <a:xfrm>
-            <a:off x="1508760" y="5120640"/>
-            <a:ext cx="9905695" cy="822960"/>
+          <p:cNvPr id="15" name="Text 11"/>
+          <p:cNvSpPr/>
+          <p:nvPr/>
+        </p:nvSpPr>
+        <p:spPr>
+          <a:xfrm>
+            <a:off x="7211416" y="2029968"/>
+            <a:ext cx="4267048" cy="365760"/>
           </a:xfrm>
           <a:prstGeom prst="rect">
             <a:avLst/>
@@ -4639,7 +4356,7 @@
               <a:buNone/>
             </a:pPr>
             <a:r>
-              <a:rPr lang="en-US" sz="1300" b="1" dirty="0">
+              <a:rPr lang="en-US" sz="1500" b="1" dirty="0">
                 <a:solidFill>
                   <a:srgbClr val="2E7D5B"/>
                 </a:solidFill>
@@ -4647,12 +4364,80 @@
                 <a:ea typeface="Calibri" pitchFamily="34" charset="-122"/>
                 <a:cs typeface="Calibri" pitchFamily="34" charset="-120"/>
               </a:rPr>
-              <a:t>First pick a medium feature, not the hardest one. </a:t>
-            </a:r>
+              <a:t>Anything touching real rules</a:t>
+            </a:r>
+            <a:endParaRPr lang="en-US" sz="1500" dirty="0"/>
+          </a:p>
+        </p:txBody>
+      </p:sp>
+      <p:sp>
+        <p:nvSpPr>
+          <p:cNvPr id="16" name="Text 12"/>
+          <p:cNvSpPr/>
+          <p:nvPr/>
+        </p:nvSpPr>
+        <p:spPr>
+          <a:xfrm>
+            <a:off x="6553048" y="2487168"/>
+            <a:ext cx="4815688" cy="457200"/>
+          </a:xfrm>
+          <a:prstGeom prst="rect">
+            <a:avLst/>
+          </a:prstGeom>
+          <a:noFill/>
+          <a:ln/>
+        </p:spPr>
+        <p:txBody>
+          <a:bodyPr wrap="square" lIns="0" tIns="0" rIns="0" bIns="0" rtlCol="0" anchor="ctr"/>
+          <a:lstStyle/>
+          <a:p>
             <a:pPr indent="0" marL="0">
               <a:buNone/>
             </a:pPr>
             <a:r>
+              <a:rPr lang="en-US" sz="1200" i="1" dirty="0">
+                <a:solidFill>
+                  <a:srgbClr val="5A6B8C"/>
+                </a:solidFill>
+                <a:latin typeface="Calibri" pitchFamily="34" charset="0"/>
+                <a:ea typeface="Calibri" pitchFamily="34" charset="-122"/>
+                <a:cs typeface="Calibri" pitchFamily="34" charset="-120"/>
+              </a:rPr>
+              <a:t>Unusual shapes, anything near sensitive logic.</a:t>
+            </a:r>
+            <a:endParaRPr lang="en-US" sz="1200" dirty="0"/>
+          </a:p>
+        </p:txBody>
+      </p:sp>
+      <p:sp>
+        <p:nvSpPr>
+          <p:cNvPr id="17" name="Text 13"/>
+          <p:cNvSpPr/>
+          <p:nvPr/>
+        </p:nvSpPr>
+        <p:spPr>
+          <a:xfrm>
+            <a:off x="6553048" y="3017520"/>
+            <a:ext cx="4815688" cy="1371600"/>
+          </a:xfrm>
+          <a:prstGeom prst="rect">
+            <a:avLst/>
+          </a:prstGeom>
+          <a:noFill/>
+          <a:ln/>
+        </p:spPr>
+        <p:txBody>
+          <a:bodyPr wrap="square" lIns="0" tIns="0" rIns="0" bIns="0" rtlCol="0" anchor="ctr"/>
+          <a:lstStyle/>
+          <a:p>
+            <a:pPr marL="342900" indent="-342900">
+              <a:spcAft>
+                <a:spcPts val="800"/>
+              </a:spcAft>
+              <a:buSzPct val="100000"/>
+              <a:buChar char="•"/>
+            </a:pPr>
+            <a:r>
               <a:rPr lang="en-US" sz="1300" dirty="0">
                 <a:solidFill>
                   <a:srgbClr val="1B2440"/>
@@ -4661,7 +4446,67 @@
                 <a:ea typeface="Calibri" pitchFamily="34" charset="-122"/>
                 <a:cs typeface="Calibri" pitchFamily="34" charset="-120"/>
               </a:rPr>
-              <a:t>Its job is to help us learn the loop — how long a spec takes, how the mocks feel, how integration actually goes — before we scale it up.</a:t>
+              <a:t>Loop in a tech lead or the supervisor first</a:t>
+            </a:r>
+            <a:endParaRPr lang="en-US" sz="1300" dirty="0"/>
+          </a:p>
+          <a:p>
+            <a:pPr marL="342900" indent="-342900">
+              <a:spcAft>
+                <a:spcPts val="800"/>
+              </a:spcAft>
+              <a:buSzPct val="100000"/>
+              <a:buChar char="•"/>
+            </a:pPr>
+            <a:r>
+              <a:rPr lang="en-US" sz="1300" dirty="0">
+                <a:solidFill>
+                  <a:srgbClr val="1B2440"/>
+                </a:solidFill>
+                <a:latin typeface="Calibri" pitchFamily="34" charset="0"/>
+                <a:ea typeface="Calibri" pitchFamily="34" charset="-122"/>
+                <a:cs typeface="Calibri" pitchFamily="34" charset="-120"/>
+              </a:rPr>
+              <a:t>A day or two, not a blocker — just a second look</a:t>
+            </a:r>
+            <a:endParaRPr lang="en-US" sz="1300" dirty="0"/>
+          </a:p>
+        </p:txBody>
+      </p:sp>
+      <p:sp>
+        <p:nvSpPr>
+          <p:cNvPr id="18" name="Text 14"/>
+          <p:cNvSpPr/>
+          <p:nvPr/>
+        </p:nvSpPr>
+        <p:spPr>
+          <a:xfrm>
+            <a:off x="548640" y="5257800"/>
+            <a:ext cx="11094415" cy="457200"/>
+          </a:xfrm>
+          <a:prstGeom prst="rect">
+            <a:avLst/>
+          </a:prstGeom>
+          <a:noFill/>
+          <a:ln/>
+        </p:spPr>
+        <p:txBody>
+          <a:bodyPr wrap="square" lIns="0" tIns="0" rIns="0" bIns="0" rtlCol="0" anchor="ctr"/>
+          <a:lstStyle/>
+          <a:p>
+            <a:pPr algn="ctr" indent="0" marL="0">
+              <a:buNone/>
+            </a:pPr>
+            <a:r>
+              <a:rPr lang="en-US" sz="1300" i="1" dirty="0">
+                <a:solidFill>
+                  <a:srgbClr val="5A6B8C"/>
+                </a:solidFill>
+                <a:latin typeface="Calibri" pitchFamily="34" charset="0"/>
+                <a:ea typeface="Calibri" pitchFamily="34" charset="-122"/>
+                <a:cs typeface="Calibri" pitchFamily="34" charset="-120"/>
+              </a:rPr>
+              <a:t>We'll tighten this up as we go — better to start simple and add structure only where we actually need it.</a:t>
             </a:r>
             <a:endParaRPr lang="en-US" sz="1300" dirty="0"/>
           </a:p>
@@ -4810,7 +4655,7 @@
                 <a:ea typeface="Calibri" pitchFamily="34" charset="-122"/>
                 <a:cs typeface="Calibri" pitchFamily="34" charset="-120"/>
               </a:rPr>
-              <a:t>GETTING THERE</a:t>
+              <a:t>PORTING FEATURES, ONE AT A TIME</a:t>
             </a:r>
             <a:endParaRPr lang="en-US" sz="1200" dirty="0"/>
           </a:p>
@@ -4849,7 +4694,7 @@
                 <a:ea typeface="Cambria" pitchFamily="34" charset="-122"/>
                 <a:cs typeface="Cambria" pitchFamily="34" charset="-120"/>
               </a:rPr>
-              <a:t>A few honest stages, not a rigid deadline</a:t>
+              <a:t>Inventory → Spec → Build → Verify — repeat</a:t>
             </a:r>
             <a:endParaRPr lang="en-US" sz="2800" dirty="0"/>
           </a:p>
@@ -4863,12 +4708,12 @@
         </p:nvSpPr>
         <p:spPr>
           <a:xfrm>
-            <a:off x="548640" y="1737360"/>
-            <a:ext cx="3515258" cy="3566160"/>
+            <a:off x="548640" y="1691640"/>
+            <a:ext cx="2602154" cy="3017520"/>
           </a:xfrm>
           <a:prstGeom prst="roundRect">
             <a:avLst>
-              <a:gd name="adj" fmla="val 2341"/>
+              <a:gd name="adj" fmla="val 3163"/>
             </a:avLst>
           </a:prstGeom>
           <a:solidFill>
@@ -4892,8 +4737,8 @@
         </p:nvSpPr>
         <p:spPr>
           <a:xfrm>
-            <a:off x="777240" y="1920240"/>
-            <a:ext cx="3058058" cy="274320"/>
+            <a:off x="731520" y="1828800"/>
+            <a:ext cx="731520" cy="685800"/>
           </a:xfrm>
           <a:prstGeom prst="rect">
             <a:avLst/>
@@ -4909,179 +4754,148 @@
               <a:buNone/>
             </a:pPr>
             <a:r>
-              <a:rPr lang="en-US" sz="1100" b="1" spc="200" kern="0" dirty="0">
+              <a:rPr lang="en-US" sz="3600" b="1" dirty="0">
+                <a:solidFill>
+                  <a:srgbClr val="CADCFC"/>
+                </a:solidFill>
+                <a:latin typeface="Cambria" pitchFamily="34" charset="0"/>
+                <a:ea typeface="Cambria" pitchFamily="34" charset="-122"/>
+                <a:cs typeface="Cambria" pitchFamily="34" charset="-120"/>
+              </a:rPr>
+              <a:t>1</a:t>
+            </a:r>
+            <a:endParaRPr lang="en-US" sz="3600" dirty="0"/>
+          </a:p>
+        </p:txBody>
+      </p:sp>
+      <p:sp>
+        <p:nvSpPr>
+          <p:cNvPr id="8" name="Text 6"/>
+          <p:cNvSpPr/>
+          <p:nvPr/>
+        </p:nvSpPr>
+        <p:spPr>
+          <a:xfrm>
+            <a:off x="731520" y="2468880"/>
+            <a:ext cx="2236394" cy="320040"/>
+          </a:xfrm>
+          <a:prstGeom prst="rect">
+            <a:avLst/>
+          </a:prstGeom>
+          <a:noFill/>
+          <a:ln/>
+        </p:spPr>
+        <p:txBody>
+          <a:bodyPr wrap="square" lIns="0" tIns="0" rIns="0" bIns="0" rtlCol="0" anchor="ctr"/>
+          <a:lstStyle/>
+          <a:p>
+            <a:pPr indent="0" marL="0">
+              <a:buNone/>
+            </a:pPr>
+            <a:r>
+              <a:rPr lang="en-US" sz="1500" b="1" dirty="0">
+                <a:solidFill>
+                  <a:srgbClr val="1E2761"/>
+                </a:solidFill>
+                <a:latin typeface="Calibri" pitchFamily="34" charset="0"/>
+                <a:ea typeface="Calibri" pitchFamily="34" charset="-122"/>
+                <a:cs typeface="Calibri" pitchFamily="34" charset="-120"/>
+              </a:rPr>
+              <a:t>Inventory</a:t>
+            </a:r>
+            <a:endParaRPr lang="en-US" sz="1500" dirty="0"/>
+          </a:p>
+        </p:txBody>
+      </p:sp>
+      <p:sp>
+        <p:nvSpPr>
+          <p:cNvPr id="9" name="Text 7"/>
+          <p:cNvSpPr/>
+          <p:nvPr/>
+        </p:nvSpPr>
+        <p:spPr>
+          <a:xfrm>
+            <a:off x="731520" y="2834640"/>
+            <a:ext cx="2236394" cy="1691640"/>
+          </a:xfrm>
+          <a:prstGeom prst="rect">
+            <a:avLst/>
+          </a:prstGeom>
+          <a:noFill/>
+          <a:ln/>
+        </p:spPr>
+        <p:txBody>
+          <a:bodyPr wrap="square" lIns="0" tIns="0" rIns="0" bIns="0" rtlCol="0" anchor="ctr"/>
+          <a:lstStyle/>
+          <a:p>
+            <a:pPr indent="0" marL="0">
+              <a:buNone/>
+            </a:pPr>
+            <a:r>
+              <a:rPr lang="en-US" sz="1100" dirty="0">
+                <a:solidFill>
+                  <a:srgbClr val="1B2440"/>
+                </a:solidFill>
+                <a:latin typeface="Calibri" pitchFamily="34" charset="0"/>
+                <a:ea typeface="Calibri" pitchFamily="34" charset="-122"/>
+                <a:cs typeface="Calibri" pitchFamily="34" charset="-120"/>
+              </a:rPr>
+              <a:t>List out what each Angular feature actually does: routes, screens, calls, rules. One row per feature.</a:t>
+            </a:r>
+            <a:endParaRPr lang="en-US" sz="1100" dirty="0"/>
+          </a:p>
+        </p:txBody>
+      </p:sp>
+      <p:sp>
+        <p:nvSpPr>
+          <p:cNvPr id="10" name="Text 8"/>
+          <p:cNvSpPr/>
+          <p:nvPr/>
+        </p:nvSpPr>
+        <p:spPr>
+          <a:xfrm>
+            <a:off x="3132506" y="3017520"/>
+            <a:ext cx="274320" cy="365760"/>
+          </a:xfrm>
+          <a:prstGeom prst="rect">
+            <a:avLst/>
+          </a:prstGeom>
+          <a:noFill/>
+          <a:ln/>
+        </p:spPr>
+        <p:txBody>
+          <a:bodyPr wrap="square" lIns="0" tIns="0" rIns="0" bIns="0" rtlCol="0" anchor="ctr"/>
+          <a:lstStyle/>
+          <a:p>
+            <a:pPr algn="ctr" indent="0" marL="0">
+              <a:buNone/>
+            </a:pPr>
+            <a:r>
+              <a:rPr lang="en-US" sz="1800" dirty="0">
                 <a:solidFill>
                   <a:srgbClr val="5A6B8C"/>
                 </a:solidFill>
-                <a:latin typeface="Calibri" pitchFamily="34" charset="0"/>
-                <a:ea typeface="Calibri" pitchFamily="34" charset="-122"/>
-                <a:cs typeface="Calibri" pitchFamily="34" charset="-120"/>
-              </a:rPr>
-              <a:t>STAGE 1</a:t>
-            </a:r>
-            <a:endParaRPr lang="en-US" sz="1100" dirty="0"/>
-          </a:p>
-        </p:txBody>
-      </p:sp>
-      <p:sp>
-        <p:nvSpPr>
-          <p:cNvPr id="8" name="Text 6"/>
-          <p:cNvSpPr/>
-          <p:nvPr/>
-        </p:nvSpPr>
-        <p:spPr>
-          <a:xfrm>
-            <a:off x="777240" y="2212848"/>
-            <a:ext cx="3058058" cy="457200"/>
-          </a:xfrm>
-          <a:prstGeom prst="rect">
-            <a:avLst/>
-          </a:prstGeom>
-          <a:noFill/>
-          <a:ln/>
-        </p:spPr>
-        <p:txBody>
-          <a:bodyPr wrap="square" lIns="0" tIns="0" rIns="0" bIns="0" rtlCol="0" anchor="ctr"/>
-          <a:lstStyle/>
-          <a:p>
-            <a:pPr indent="0" marL="0">
-              <a:buNone/>
-            </a:pPr>
-            <a:r>
-              <a:rPr lang="en-US" sz="1700" b="1" dirty="0">
-                <a:solidFill>
-                  <a:srgbClr val="1E2761"/>
-                </a:solidFill>
-                <a:latin typeface="Calibri" pitchFamily="34" charset="0"/>
-                <a:ea typeface="Calibri" pitchFamily="34" charset="-122"/>
-                <a:cs typeface="Calibri" pitchFamily="34" charset="-120"/>
-              </a:rPr>
-              <a:t>Try it</a:t>
-            </a:r>
-            <a:endParaRPr lang="en-US" sz="1700" dirty="0"/>
-          </a:p>
-        </p:txBody>
-      </p:sp>
-      <p:sp>
-        <p:nvSpPr>
-          <p:cNvPr id="9" name="Text 7"/>
-          <p:cNvSpPr/>
-          <p:nvPr/>
-        </p:nvSpPr>
-        <p:spPr>
-          <a:xfrm>
-            <a:off x="777240" y="2788920"/>
-            <a:ext cx="3058058" cy="2331720"/>
-          </a:xfrm>
-          <a:prstGeom prst="rect">
-            <a:avLst/>
-          </a:prstGeom>
-          <a:noFill/>
-          <a:ln/>
-        </p:spPr>
-        <p:txBody>
-          <a:bodyPr wrap="square" lIns="0" tIns="0" rIns="0" bIns="0" rtlCol="0" anchor="ctr"/>
-          <a:lstStyle/>
-          <a:p>
-            <a:pPr marL="342900" indent="-342900">
-              <a:spcAft>
-                <a:spcPts val="800"/>
-              </a:spcAft>
-              <a:buSzPct val="100000"/>
-              <a:buChar char="•"/>
-            </a:pPr>
-            <a:r>
-              <a:rPr lang="en-US" sz="1150" dirty="0">
-                <a:solidFill>
-                  <a:srgbClr val="1B2440"/>
-                </a:solidFill>
-                <a:latin typeface="Calibri" pitchFamily="34" charset="0"/>
-                <a:ea typeface="Calibri" pitchFamily="34" charset="-122"/>
-                <a:cs typeface="Calibri" pitchFamily="34" charset="-120"/>
-              </a:rPr>
-              <a:t>Pick one real feature</a:t>
-            </a:r>
-            <a:endParaRPr lang="en-US" sz="1150" dirty="0"/>
-          </a:p>
-          <a:p>
-            <a:pPr marL="342900" indent="-342900">
-              <a:spcAft>
-                <a:spcPts val="800"/>
-              </a:spcAft>
-              <a:buSzPct val="100000"/>
-              <a:buChar char="•"/>
-            </a:pPr>
-            <a:r>
-              <a:rPr lang="en-US" sz="1150" dirty="0">
-                <a:solidFill>
-                  <a:srgbClr val="1B2440"/>
-                </a:solidFill>
-                <a:latin typeface="Calibri" pitchFamily="34" charset="0"/>
-                <a:ea typeface="Calibri" pitchFamily="34" charset="-122"/>
-                <a:cs typeface="Calibri" pitchFamily="34" charset="-120"/>
-              </a:rPr>
-              <a:t>Set up matching pipelines &amp; configs outside</a:t>
-            </a:r>
-            <a:endParaRPr lang="en-US" sz="1150" dirty="0"/>
-          </a:p>
-          <a:p>
-            <a:pPr marL="342900" indent="-342900">
-              <a:spcAft>
-                <a:spcPts val="800"/>
-              </a:spcAft>
-              <a:buSzPct val="100000"/>
-              <a:buChar char="•"/>
-            </a:pPr>
-            <a:r>
-              <a:rPr lang="en-US" sz="1150" dirty="0">
-                <a:solidFill>
-                  <a:srgbClr val="1B2440"/>
-                </a:solidFill>
-                <a:latin typeface="Calibri" pitchFamily="34" charset="0"/>
-                <a:ea typeface="Calibri" pitchFamily="34" charset="-122"/>
-                <a:cs typeface="Calibri" pitchFamily="34" charset="-120"/>
-              </a:rPr>
-              <a:t>Run the full loop once, start to finish</a:t>
-            </a:r>
-            <a:endParaRPr lang="en-US" sz="1150" dirty="0"/>
-          </a:p>
-          <a:p>
-            <a:pPr marL="342900" indent="-342900">
-              <a:spcAft>
-                <a:spcPts val="800"/>
-              </a:spcAft>
-              <a:buSzPct val="100000"/>
-              <a:buChar char="•"/>
-            </a:pPr>
-            <a:r>
-              <a:rPr lang="en-US" sz="1150" dirty="0">
-                <a:solidFill>
-                  <a:srgbClr val="1B2440"/>
-                </a:solidFill>
-                <a:latin typeface="Calibri" pitchFamily="34" charset="0"/>
-                <a:ea typeface="Calibri" pitchFamily="34" charset="-122"/>
-                <a:cs typeface="Calibri" pitchFamily="34" charset="-120"/>
-              </a:rPr>
-              <a:t>Talk honestly about what was clunky</a:t>
-            </a:r>
-            <a:endParaRPr lang="en-US" sz="1150" dirty="0"/>
-          </a:p>
-        </p:txBody>
-      </p:sp>
-      <p:sp>
-        <p:nvSpPr>
-          <p:cNvPr id="10" name="Shape 8"/>
-          <p:cNvSpPr/>
-          <p:nvPr/>
-        </p:nvSpPr>
-        <p:spPr>
-          <a:xfrm>
-            <a:off x="4338218" y="1737360"/>
-            <a:ext cx="3515258" cy="3566160"/>
+              </a:rPr>
+              <a:t>▸</a:t>
+            </a:r>
+            <a:endParaRPr lang="en-US" sz="1800" dirty="0"/>
+          </a:p>
+        </p:txBody>
+      </p:sp>
+      <p:sp>
+        <p:nvSpPr>
+          <p:cNvPr id="11" name="Shape 9"/>
+          <p:cNvSpPr/>
+          <p:nvPr/>
+        </p:nvSpPr>
+        <p:spPr>
+          <a:xfrm>
+            <a:off x="3379394" y="1691640"/>
+            <a:ext cx="2602154" cy="3017520"/>
           </a:xfrm>
           <a:prstGeom prst="roundRect">
             <a:avLst>
-              <a:gd name="adj" fmla="val 2341"/>
+              <a:gd name="adj" fmla="val 3163"/>
             </a:avLst>
           </a:prstGeom>
           <a:solidFill>
@@ -5099,14 +4913,14 @@
       </p:sp>
       <p:sp>
         <p:nvSpPr>
-          <p:cNvPr id="11" name="Text 9"/>
-          <p:cNvSpPr/>
-          <p:nvPr/>
-        </p:nvSpPr>
-        <p:spPr>
-          <a:xfrm>
-            <a:off x="4566818" y="1920240"/>
-            <a:ext cx="3058058" cy="274320"/>
+          <p:cNvPr id="12" name="Text 10"/>
+          <p:cNvSpPr/>
+          <p:nvPr/>
+        </p:nvSpPr>
+        <p:spPr>
+          <a:xfrm>
+            <a:off x="3562274" y="1828800"/>
+            <a:ext cx="731520" cy="685800"/>
           </a:xfrm>
           <a:prstGeom prst="rect">
             <a:avLst/>
@@ -5122,179 +4936,148 @@
               <a:buNone/>
             </a:pPr>
             <a:r>
-              <a:rPr lang="en-US" sz="1100" b="1" spc="200" kern="0" dirty="0">
+              <a:rPr lang="en-US" sz="3600" b="1" dirty="0">
+                <a:solidFill>
+                  <a:srgbClr val="CADCFC"/>
+                </a:solidFill>
+                <a:latin typeface="Cambria" pitchFamily="34" charset="0"/>
+                <a:ea typeface="Cambria" pitchFamily="34" charset="-122"/>
+                <a:cs typeface="Cambria" pitchFamily="34" charset="-120"/>
+              </a:rPr>
+              <a:t>2</a:t>
+            </a:r>
+            <a:endParaRPr lang="en-US" sz="3600" dirty="0"/>
+          </a:p>
+        </p:txBody>
+      </p:sp>
+      <p:sp>
+        <p:nvSpPr>
+          <p:cNvPr id="13" name="Text 11"/>
+          <p:cNvSpPr/>
+          <p:nvPr/>
+        </p:nvSpPr>
+        <p:spPr>
+          <a:xfrm>
+            <a:off x="3562274" y="2468880"/>
+            <a:ext cx="2236394" cy="320040"/>
+          </a:xfrm>
+          <a:prstGeom prst="rect">
+            <a:avLst/>
+          </a:prstGeom>
+          <a:noFill/>
+          <a:ln/>
+        </p:spPr>
+        <p:txBody>
+          <a:bodyPr wrap="square" lIns="0" tIns="0" rIns="0" bIns="0" rtlCol="0" anchor="ctr"/>
+          <a:lstStyle/>
+          <a:p>
+            <a:pPr indent="0" marL="0">
+              <a:buNone/>
+            </a:pPr>
+            <a:r>
+              <a:rPr lang="en-US" sz="1500" b="1" dirty="0">
+                <a:solidFill>
+                  <a:srgbClr val="1E2761"/>
+                </a:solidFill>
+                <a:latin typeface="Calibri" pitchFamily="34" charset="0"/>
+                <a:ea typeface="Calibri" pitchFamily="34" charset="-122"/>
+                <a:cs typeface="Calibri" pitchFamily="34" charset="-120"/>
+              </a:rPr>
+              <a:t>Spec</a:t>
+            </a:r>
+            <a:endParaRPr lang="en-US" sz="1500" dirty="0"/>
+          </a:p>
+        </p:txBody>
+      </p:sp>
+      <p:sp>
+        <p:nvSpPr>
+          <p:cNvPr id="14" name="Text 12"/>
+          <p:cNvSpPr/>
+          <p:nvPr/>
+        </p:nvSpPr>
+        <p:spPr>
+          <a:xfrm>
+            <a:off x="3562274" y="2834640"/>
+            <a:ext cx="2236394" cy="1691640"/>
+          </a:xfrm>
+          <a:prstGeom prst="rect">
+            <a:avLst/>
+          </a:prstGeom>
+          <a:noFill/>
+          <a:ln/>
+        </p:spPr>
+        <p:txBody>
+          <a:bodyPr wrap="square" lIns="0" tIns="0" rIns="0" bIns="0" rtlCol="0" anchor="ctr"/>
+          <a:lstStyle/>
+          <a:p>
+            <a:pPr indent="0" marL="0">
+              <a:buNone/>
+            </a:pPr>
+            <a:r>
+              <a:rPr lang="en-US" sz="1100" dirty="0">
+                <a:solidFill>
+                  <a:srgbClr val="1B2440"/>
+                </a:solidFill>
+                <a:latin typeface="Calibri" pitchFamily="34" charset="0"/>
+                <a:ea typeface="Calibri" pitchFamily="34" charset="-122"/>
+                <a:cs typeface="Calibri" pitchFamily="34" charset="-120"/>
+              </a:rPr>
+              <a:t>Write the contract inside: API shape, rule keys, sample data. Keep it tight — a spec shouldn't take a week.</a:t>
+            </a:r>
+            <a:endParaRPr lang="en-US" sz="1100" dirty="0"/>
+          </a:p>
+        </p:txBody>
+      </p:sp>
+      <p:sp>
+        <p:nvSpPr>
+          <p:cNvPr id="15" name="Text 13"/>
+          <p:cNvSpPr/>
+          <p:nvPr/>
+        </p:nvSpPr>
+        <p:spPr>
+          <a:xfrm>
+            <a:off x="5963260" y="3017520"/>
+            <a:ext cx="274320" cy="365760"/>
+          </a:xfrm>
+          <a:prstGeom prst="rect">
+            <a:avLst/>
+          </a:prstGeom>
+          <a:noFill/>
+          <a:ln/>
+        </p:spPr>
+        <p:txBody>
+          <a:bodyPr wrap="square" lIns="0" tIns="0" rIns="0" bIns="0" rtlCol="0" anchor="ctr"/>
+          <a:lstStyle/>
+          <a:p>
+            <a:pPr algn="ctr" indent="0" marL="0">
+              <a:buNone/>
+            </a:pPr>
+            <a:r>
+              <a:rPr lang="en-US" sz="1800" dirty="0">
                 <a:solidFill>
                   <a:srgbClr val="5A6B8C"/>
                 </a:solidFill>
-                <a:latin typeface="Calibri" pitchFamily="34" charset="0"/>
-                <a:ea typeface="Calibri" pitchFamily="34" charset="-122"/>
-                <a:cs typeface="Calibri" pitchFamily="34" charset="-120"/>
-              </a:rPr>
-              <a:t>STAGE 2</a:t>
-            </a:r>
-            <a:endParaRPr lang="en-US" sz="1100" dirty="0"/>
-          </a:p>
-        </p:txBody>
-      </p:sp>
-      <p:sp>
-        <p:nvSpPr>
-          <p:cNvPr id="12" name="Text 10"/>
-          <p:cNvSpPr/>
-          <p:nvPr/>
-        </p:nvSpPr>
-        <p:spPr>
-          <a:xfrm>
-            <a:off x="4566818" y="2212848"/>
-            <a:ext cx="3058058" cy="457200"/>
-          </a:xfrm>
-          <a:prstGeom prst="rect">
-            <a:avLst/>
-          </a:prstGeom>
-          <a:noFill/>
-          <a:ln/>
-        </p:spPr>
-        <p:txBody>
-          <a:bodyPr wrap="square" lIns="0" tIns="0" rIns="0" bIns="0" rtlCol="0" anchor="ctr"/>
-          <a:lstStyle/>
-          <a:p>
-            <a:pPr indent="0" marL="0">
-              <a:buNone/>
-            </a:pPr>
-            <a:r>
-              <a:rPr lang="en-US" sz="1700" b="1" dirty="0">
-                <a:solidFill>
-                  <a:srgbClr val="1E2761"/>
-                </a:solidFill>
-                <a:latin typeface="Calibri" pitchFamily="34" charset="0"/>
-                <a:ea typeface="Calibri" pitchFamily="34" charset="-122"/>
-                <a:cs typeface="Calibri" pitchFamily="34" charset="-120"/>
-              </a:rPr>
-              <a:t>Get comfortable</a:t>
-            </a:r>
-            <a:endParaRPr lang="en-US" sz="1700" dirty="0"/>
-          </a:p>
-        </p:txBody>
-      </p:sp>
-      <p:sp>
-        <p:nvSpPr>
-          <p:cNvPr id="13" name="Text 11"/>
-          <p:cNvSpPr/>
-          <p:nvPr/>
-        </p:nvSpPr>
-        <p:spPr>
-          <a:xfrm>
-            <a:off x="4566818" y="2788920"/>
-            <a:ext cx="3058058" cy="2331720"/>
-          </a:xfrm>
-          <a:prstGeom prst="rect">
-            <a:avLst/>
-          </a:prstGeom>
-          <a:noFill/>
-          <a:ln/>
-        </p:spPr>
-        <p:txBody>
-          <a:bodyPr wrap="square" lIns="0" tIns="0" rIns="0" bIns="0" rtlCol="0" anchor="ctr"/>
-          <a:lstStyle/>
-          <a:p>
-            <a:pPr marL="342900" indent="-342900">
-              <a:spcAft>
-                <a:spcPts val="800"/>
-              </a:spcAft>
-              <a:buSzPct val="100000"/>
-              <a:buChar char="•"/>
-            </a:pPr>
-            <a:r>
-              <a:rPr lang="en-US" sz="1150" dirty="0">
-                <a:solidFill>
-                  <a:srgbClr val="1B2440"/>
-                </a:solidFill>
-                <a:latin typeface="Calibri" pitchFamily="34" charset="0"/>
-                <a:ea typeface="Calibri" pitchFamily="34" charset="-122"/>
-                <a:cs typeface="Calibri" pitchFamily="34" charset="-120"/>
-              </a:rPr>
-              <a:t>A few more features through the loop</a:t>
-            </a:r>
-            <a:endParaRPr lang="en-US" sz="1150" dirty="0"/>
-          </a:p>
-          <a:p>
-            <a:pPr marL="342900" indent="-342900">
-              <a:spcAft>
-                <a:spcPts val="800"/>
-              </a:spcAft>
-              <a:buSzPct val="100000"/>
-              <a:buChar char="•"/>
-            </a:pPr>
-            <a:r>
-              <a:rPr lang="en-US" sz="1150" dirty="0">
-                <a:solidFill>
-                  <a:srgbClr val="1B2440"/>
-                </a:solidFill>
-                <a:latin typeface="Calibri" pitchFamily="34" charset="0"/>
-                <a:ea typeface="Calibri" pitchFamily="34" charset="-122"/>
-                <a:cs typeface="Calibri" pitchFamily="34" charset="-120"/>
-              </a:rPr>
-              <a:t>Fix the friction we found in Stage 1</a:t>
-            </a:r>
-            <a:endParaRPr lang="en-US" sz="1150" dirty="0"/>
-          </a:p>
-          <a:p>
-            <a:pPr marL="342900" indent="-342900">
-              <a:spcAft>
-                <a:spcPts val="800"/>
-              </a:spcAft>
-              <a:buSzPct val="100000"/>
-              <a:buChar char="•"/>
-            </a:pPr>
-            <a:r>
-              <a:rPr lang="en-US" sz="1150" dirty="0">
-                <a:solidFill>
-                  <a:srgbClr val="1B2440"/>
-                </a:solidFill>
-                <a:latin typeface="Calibri" pitchFamily="34" charset="0"/>
-                <a:ea typeface="Calibri" pitchFamily="34" charset="-122"/>
-                <a:cs typeface="Calibri" pitchFamily="34" charset="-120"/>
-              </a:rPr>
-              <a:t>Contractors settle into integration &amp; testing roles</a:t>
-            </a:r>
-            <a:endParaRPr lang="en-US" sz="1150" dirty="0"/>
-          </a:p>
-          <a:p>
-            <a:pPr marL="342900" indent="-342900">
-              <a:spcAft>
-                <a:spcPts val="800"/>
-              </a:spcAft>
-              <a:buSzPct val="100000"/>
-              <a:buChar char="•"/>
-            </a:pPr>
-            <a:r>
-              <a:rPr lang="en-US" sz="1150" dirty="0">
-                <a:solidFill>
-                  <a:srgbClr val="1B2440"/>
-                </a:solidFill>
-                <a:latin typeface="Calibri" pitchFamily="34" charset="0"/>
-                <a:ea typeface="Calibri" pitchFamily="34" charset="-122"/>
-                <a:cs typeface="Calibri" pitchFamily="34" charset="-120"/>
-              </a:rPr>
-              <a:t>The routine starts feeling routine</a:t>
-            </a:r>
-            <a:endParaRPr lang="en-US" sz="1150" dirty="0"/>
-          </a:p>
-        </p:txBody>
-      </p:sp>
-      <p:sp>
-        <p:nvSpPr>
-          <p:cNvPr id="14" name="Shape 12"/>
-          <p:cNvSpPr/>
-          <p:nvPr/>
-        </p:nvSpPr>
-        <p:spPr>
-          <a:xfrm>
-            <a:off x="8127797" y="1737360"/>
-            <a:ext cx="3515258" cy="3566160"/>
+              </a:rPr>
+              <a:t>▸</a:t>
+            </a:r>
+            <a:endParaRPr lang="en-US" sz="1800" dirty="0"/>
+          </a:p>
+        </p:txBody>
+      </p:sp>
+      <p:sp>
+        <p:nvSpPr>
+          <p:cNvPr id="16" name="Shape 14"/>
+          <p:cNvSpPr/>
+          <p:nvPr/>
+        </p:nvSpPr>
+        <p:spPr>
+          <a:xfrm>
+            <a:off x="6210148" y="1691640"/>
+            <a:ext cx="2602154" cy="3017520"/>
           </a:xfrm>
           <a:prstGeom prst="roundRect">
             <a:avLst>
-              <a:gd name="adj" fmla="val 2341"/>
+              <a:gd name="adj" fmla="val 3163"/>
             </a:avLst>
           </a:prstGeom>
           <a:solidFill>
@@ -5312,14 +5095,14 @@
       </p:sp>
       <p:sp>
         <p:nvSpPr>
-          <p:cNvPr id="15" name="Text 13"/>
-          <p:cNvSpPr/>
-          <p:nvPr/>
-        </p:nvSpPr>
-        <p:spPr>
-          <a:xfrm>
-            <a:off x="8356397" y="1920240"/>
-            <a:ext cx="3058058" cy="274320"/>
+          <p:cNvPr id="17" name="Text 15"/>
+          <p:cNvSpPr/>
+          <p:nvPr/>
+        </p:nvSpPr>
+        <p:spPr>
+          <a:xfrm>
+            <a:off x="6393028" y="1828800"/>
+            <a:ext cx="731520" cy="685800"/>
           </a:xfrm>
           <a:prstGeom prst="rect">
             <a:avLst/>
@@ -5335,15 +5118,275 @@
               <a:buNone/>
             </a:pPr>
             <a:r>
-              <a:rPr lang="en-US" sz="1100" b="1" spc="200" kern="0" dirty="0">
+              <a:rPr lang="en-US" sz="3600" b="1" dirty="0">
+                <a:solidFill>
+                  <a:srgbClr val="CADCFC"/>
+                </a:solidFill>
+                <a:latin typeface="Cambria" pitchFamily="34" charset="0"/>
+                <a:ea typeface="Cambria" pitchFamily="34" charset="-122"/>
+                <a:cs typeface="Cambria" pitchFamily="34" charset="-120"/>
+              </a:rPr>
+              <a:t>3</a:t>
+            </a:r>
+            <a:endParaRPr lang="en-US" sz="3600" dirty="0"/>
+          </a:p>
+        </p:txBody>
+      </p:sp>
+      <p:sp>
+        <p:nvSpPr>
+          <p:cNvPr id="18" name="Text 16"/>
+          <p:cNvSpPr/>
+          <p:nvPr/>
+        </p:nvSpPr>
+        <p:spPr>
+          <a:xfrm>
+            <a:off x="6393028" y="2468880"/>
+            <a:ext cx="2236394" cy="320040"/>
+          </a:xfrm>
+          <a:prstGeom prst="rect">
+            <a:avLst/>
+          </a:prstGeom>
+          <a:noFill/>
+          <a:ln/>
+        </p:spPr>
+        <p:txBody>
+          <a:bodyPr wrap="square" lIns="0" tIns="0" rIns="0" bIns="0" rtlCol="0" anchor="ctr"/>
+          <a:lstStyle/>
+          <a:p>
+            <a:pPr indent="0" marL="0">
+              <a:buNone/>
+            </a:pPr>
+            <a:r>
+              <a:rPr lang="en-US" sz="1500" b="1" dirty="0">
+                <a:solidFill>
+                  <a:srgbClr val="1E2761"/>
+                </a:solidFill>
+                <a:latin typeface="Calibri" pitchFamily="34" charset="0"/>
+                <a:ea typeface="Calibri" pitchFamily="34" charset="-122"/>
+                <a:cs typeface="Calibri" pitchFamily="34" charset="-120"/>
+              </a:rPr>
+              <a:t>Build</a:t>
+            </a:r>
+            <a:endParaRPr lang="en-US" sz="1500" dirty="0"/>
+          </a:p>
+        </p:txBody>
+      </p:sp>
+      <p:sp>
+        <p:nvSpPr>
+          <p:cNvPr id="19" name="Text 17"/>
+          <p:cNvSpPr/>
+          <p:nvPr/>
+        </p:nvSpPr>
+        <p:spPr>
+          <a:xfrm>
+            <a:off x="6393028" y="2834640"/>
+            <a:ext cx="2236394" cy="1691640"/>
+          </a:xfrm>
+          <a:prstGeom prst="rect">
+            <a:avLst/>
+          </a:prstGeom>
+          <a:noFill/>
+          <a:ln/>
+        </p:spPr>
+        <p:txBody>
+          <a:bodyPr wrap="square" lIns="0" tIns="0" rIns="0" bIns="0" rtlCol="0" anchor="ctr"/>
+          <a:lstStyle/>
+          <a:p>
+            <a:pPr indent="0" marL="0">
+              <a:buNone/>
+            </a:pPr>
+            <a:r>
+              <a:rPr lang="en-US" sz="1100" dirty="0">
+                <a:solidFill>
+                  <a:srgbClr val="1B2440"/>
+                </a:solidFill>
+                <a:latin typeface="Calibri" pitchFamily="34" charset="0"/>
+                <a:ea typeface="Calibri" pitchFamily="34" charset="-122"/>
+                <a:cs typeface="Calibri" pitchFamily="34" charset="-120"/>
+              </a:rPr>
+              <a:t>Build it outside end-to-end — UI, tests, docs together — against the mocks. Not all-screens-first.</a:t>
+            </a:r>
+            <a:endParaRPr lang="en-US" sz="1100" dirty="0"/>
+          </a:p>
+        </p:txBody>
+      </p:sp>
+      <p:sp>
+        <p:nvSpPr>
+          <p:cNvPr id="20" name="Text 18"/>
+          <p:cNvSpPr/>
+          <p:nvPr/>
+        </p:nvSpPr>
+        <p:spPr>
+          <a:xfrm>
+            <a:off x="8794013" y="3017520"/>
+            <a:ext cx="274320" cy="365760"/>
+          </a:xfrm>
+          <a:prstGeom prst="rect">
+            <a:avLst/>
+          </a:prstGeom>
+          <a:noFill/>
+          <a:ln/>
+        </p:spPr>
+        <p:txBody>
+          <a:bodyPr wrap="square" lIns="0" tIns="0" rIns="0" bIns="0" rtlCol="0" anchor="ctr"/>
+          <a:lstStyle/>
+          <a:p>
+            <a:pPr algn="ctr" indent="0" marL="0">
+              <a:buNone/>
+            </a:pPr>
+            <a:r>
+              <a:rPr lang="en-US" sz="1800" dirty="0">
                 <a:solidFill>
                   <a:srgbClr val="5A6B8C"/>
                 </a:solidFill>
-                <a:latin typeface="Calibri" pitchFamily="34" charset="0"/>
-                <a:ea typeface="Calibri" pitchFamily="34" charset="-122"/>
-                <a:cs typeface="Calibri" pitchFamily="34" charset="-120"/>
-              </a:rPr>
-              <a:t>STAGE 3</a:t>
+              </a:rPr>
+              <a:t>▸</a:t>
+            </a:r>
+            <a:endParaRPr lang="en-US" sz="1800" dirty="0"/>
+          </a:p>
+        </p:txBody>
+      </p:sp>
+      <p:sp>
+        <p:nvSpPr>
+          <p:cNvPr id="21" name="Shape 19"/>
+          <p:cNvSpPr/>
+          <p:nvPr/>
+        </p:nvSpPr>
+        <p:spPr>
+          <a:xfrm>
+            <a:off x="9040901" y="1691640"/>
+            <a:ext cx="2602154" cy="3017520"/>
+          </a:xfrm>
+          <a:prstGeom prst="roundRect">
+            <a:avLst>
+              <a:gd name="adj" fmla="val 3163"/>
+            </a:avLst>
+          </a:prstGeom>
+          <a:solidFill>
+            <a:srgbClr val="EDF3FC"/>
+          </a:solidFill>
+          <a:ln/>
+          <a:effectLst>
+            <a:outerShdw sx="100000" sy="100000" kx="0" ky="0" algn="bl" rotWithShape="0" blurRad="76200" dist="12700" dir="5400000">
+              <a:srgbClr val="9AA7C4">
+                <a:alpha val="22000"/>
+              </a:srgbClr>
+            </a:outerShdw>
+          </a:effectLst>
+        </p:spPr>
+      </p:sp>
+      <p:sp>
+        <p:nvSpPr>
+          <p:cNvPr id="22" name="Text 20"/>
+          <p:cNvSpPr/>
+          <p:nvPr/>
+        </p:nvSpPr>
+        <p:spPr>
+          <a:xfrm>
+            <a:off x="9223781" y="1828800"/>
+            <a:ext cx="731520" cy="685800"/>
+          </a:xfrm>
+          <a:prstGeom prst="rect">
+            <a:avLst/>
+          </a:prstGeom>
+          <a:noFill/>
+          <a:ln/>
+        </p:spPr>
+        <p:txBody>
+          <a:bodyPr wrap="square" lIns="0" tIns="0" rIns="0" bIns="0" rtlCol="0" anchor="ctr"/>
+          <a:lstStyle/>
+          <a:p>
+            <a:pPr indent="0" marL="0">
+              <a:buNone/>
+            </a:pPr>
+            <a:r>
+              <a:rPr lang="en-US" sz="3600" b="1" dirty="0">
+                <a:solidFill>
+                  <a:srgbClr val="CADCFC"/>
+                </a:solidFill>
+                <a:latin typeface="Cambria" pitchFamily="34" charset="0"/>
+                <a:ea typeface="Cambria" pitchFamily="34" charset="-122"/>
+                <a:cs typeface="Cambria" pitchFamily="34" charset="-120"/>
+              </a:rPr>
+              <a:t>4</a:t>
+            </a:r>
+            <a:endParaRPr lang="en-US" sz="3600" dirty="0"/>
+          </a:p>
+        </p:txBody>
+      </p:sp>
+      <p:sp>
+        <p:nvSpPr>
+          <p:cNvPr id="23" name="Text 21"/>
+          <p:cNvSpPr/>
+          <p:nvPr/>
+        </p:nvSpPr>
+        <p:spPr>
+          <a:xfrm>
+            <a:off x="9223781" y="2468880"/>
+            <a:ext cx="2236394" cy="320040"/>
+          </a:xfrm>
+          <a:prstGeom prst="rect">
+            <a:avLst/>
+          </a:prstGeom>
+          <a:noFill/>
+          <a:ln/>
+        </p:spPr>
+        <p:txBody>
+          <a:bodyPr wrap="square" lIns="0" tIns="0" rIns="0" bIns="0" rtlCol="0" anchor="ctr"/>
+          <a:lstStyle/>
+          <a:p>
+            <a:pPr indent="0" marL="0">
+              <a:buNone/>
+            </a:pPr>
+            <a:r>
+              <a:rPr lang="en-US" sz="1500" b="1" dirty="0">
+                <a:solidFill>
+                  <a:srgbClr val="1E2761"/>
+                </a:solidFill>
+                <a:latin typeface="Calibri" pitchFamily="34" charset="0"/>
+                <a:ea typeface="Calibri" pitchFamily="34" charset="-122"/>
+                <a:cs typeface="Calibri" pitchFamily="34" charset="-120"/>
+              </a:rPr>
+              <a:t>Verify</a:t>
+            </a:r>
+            <a:endParaRPr lang="en-US" sz="1500" dirty="0"/>
+          </a:p>
+        </p:txBody>
+      </p:sp>
+      <p:sp>
+        <p:nvSpPr>
+          <p:cNvPr id="24" name="Text 22"/>
+          <p:cNvSpPr/>
+          <p:nvPr/>
+        </p:nvSpPr>
+        <p:spPr>
+          <a:xfrm>
+            <a:off x="9223781" y="2834640"/>
+            <a:ext cx="2236394" cy="1691640"/>
+          </a:xfrm>
+          <a:prstGeom prst="rect">
+            <a:avLst/>
+          </a:prstGeom>
+          <a:noFill/>
+          <a:ln/>
+        </p:spPr>
+        <p:txBody>
+          <a:bodyPr wrap="square" lIns="0" tIns="0" rIns="0" bIns="0" rtlCol="0" anchor="ctr"/>
+          <a:lstStyle/>
+          <a:p>
+            <a:pPr indent="0" marL="0">
+              <a:buNone/>
+            </a:pPr>
+            <a:r>
+              <a:rPr lang="en-US" sz="1100" dirty="0">
+                <a:solidFill>
+                  <a:srgbClr val="1B2440"/>
+                </a:solidFill>
+                <a:latin typeface="Calibri" pitchFamily="34" charset="0"/>
+                <a:ea typeface="Calibri" pitchFamily="34" charset="-122"/>
+                <a:cs typeface="Calibri" pitchFamily="34" charset="-120"/>
+              </a:rPr>
+              <a:t>Bring it in, plug in the real backend, re-run the same tests. Found a gap? Fix the spec, then the code.</a:t>
             </a:r>
             <a:endParaRPr lang="en-US" sz="1100" dirty="0"/>
           </a:p>
@@ -5351,14 +5394,87 @@
       </p:sp>
       <p:sp>
         <p:nvSpPr>
-          <p:cNvPr id="16" name="Text 14"/>
-          <p:cNvSpPr/>
-          <p:nvPr/>
-        </p:nvSpPr>
-        <p:spPr>
-          <a:xfrm>
-            <a:off x="8356397" y="2212848"/>
-            <a:ext cx="3058058" cy="457200"/>
+          <p:cNvPr id="25" name="Shape 23"/>
+          <p:cNvSpPr/>
+          <p:nvPr/>
+        </p:nvSpPr>
+        <p:spPr>
+          <a:xfrm>
+            <a:off x="548640" y="4983480"/>
+            <a:ext cx="11094415" cy="1051560"/>
+          </a:xfrm>
+          <a:prstGeom prst="roundRect">
+            <a:avLst>
+              <a:gd name="adj" fmla="val 7826"/>
+            </a:avLst>
+          </a:prstGeom>
+          <a:solidFill>
+            <a:srgbClr val="EAF4EF"/>
+          </a:solidFill>
+          <a:ln/>
+          <a:effectLst>
+            <a:outerShdw sx="100000" sy="100000" kx="0" ky="0" algn="bl" rotWithShape="0" blurRad="76200" dist="12700" dir="5400000">
+              <a:srgbClr val="9AA7C4">
+                <a:alpha val="22000"/>
+              </a:srgbClr>
+            </a:outerShdw>
+          </a:effectLst>
+        </p:spPr>
+      </p:sp>
+      <p:sp>
+        <p:nvSpPr>
+          <p:cNvPr id="26" name="Shape 24"/>
+          <p:cNvSpPr/>
+          <p:nvPr/>
+        </p:nvSpPr>
+        <p:spPr>
+          <a:xfrm>
+            <a:off x="777240" y="5184648"/>
+            <a:ext cx="566928" cy="566928"/>
+          </a:xfrm>
+          <a:prstGeom prst="ellipse">
+            <a:avLst/>
+          </a:prstGeom>
+          <a:solidFill>
+            <a:srgbClr val="2E7D5B"/>
+          </a:solidFill>
+          <a:ln/>
+        </p:spPr>
+      </p:sp>
+      <p:pic>
+        <p:nvPicPr>
+          <p:cNvPr id="27" name="Image 0" descr="preencoded.png">    </p:cNvPr>
+          <p:cNvPicPr>
+            <a:picLocks noChangeAspect="1"/>
+          </p:cNvPicPr>
+          <p:nvPr/>
+        </p:nvPicPr>
+        <p:blipFill>
+          <a:blip r:embed="rId1"/>
+          <a:stretch>
+            <a:fillRect/>
+          </a:stretch>
+        </p:blipFill>
+        <p:spPr>
+          <a:xfrm>
+            <a:off x="924641" y="5332049"/>
+            <a:ext cx="272125" cy="272125"/>
+          </a:xfrm>
+          <a:prstGeom prst="rect">
+            <a:avLst/>
+          </a:prstGeom>
+        </p:spPr>
+      </p:pic>
+      <p:sp>
+        <p:nvSpPr>
+          <p:cNvPr id="28" name="Text 25"/>
+          <p:cNvSpPr/>
+          <p:nvPr/>
+        </p:nvSpPr>
+        <p:spPr>
+          <a:xfrm>
+            <a:off x="1508760" y="5120640"/>
+            <a:ext cx="9905695" cy="822960"/>
           </a:xfrm>
           <a:prstGeom prst="rect">
             <a:avLst/>
@@ -5374,50 +5490,21 @@
               <a:buNone/>
             </a:pPr>
             <a:r>
-              <a:rPr lang="en-US" sz="1700" b="1" dirty="0">
-                <a:solidFill>
-                  <a:srgbClr val="1E2761"/>
-                </a:solidFill>
-                <a:latin typeface="Calibri" pitchFamily="34" charset="0"/>
-                <a:ea typeface="Calibri" pitchFamily="34" charset="-122"/>
-                <a:cs typeface="Calibri" pitchFamily="34" charset="-120"/>
-              </a:rPr>
-              <a:t>Make it the norm</a:t>
-            </a:r>
-            <a:endParaRPr lang="en-US" sz="1700" dirty="0"/>
-          </a:p>
-        </p:txBody>
-      </p:sp>
-      <p:sp>
-        <p:nvSpPr>
-          <p:cNvPr id="17" name="Text 15"/>
-          <p:cNvSpPr/>
-          <p:nvPr/>
-        </p:nvSpPr>
-        <p:spPr>
-          <a:xfrm>
-            <a:off x="8356397" y="2788920"/>
-            <a:ext cx="3058058" cy="2331720"/>
-          </a:xfrm>
-          <a:prstGeom prst="rect">
-            <a:avLst/>
-          </a:prstGeom>
-          <a:noFill/>
-          <a:ln/>
-        </p:spPr>
-        <p:txBody>
-          <a:bodyPr wrap="square" lIns="0" tIns="0" rIns="0" bIns="0" rtlCol="0" anchor="ctr"/>
-          <a:lstStyle/>
-          <a:p>
-            <a:pPr marL="342900" indent="-342900">
-              <a:spcAft>
-                <a:spcPts val="800"/>
-              </a:spcAft>
-              <a:buSzPct val="100000"/>
-              <a:buChar char="•"/>
-            </a:pPr>
-            <a:r>
-              <a:rPr lang="en-US" sz="1150" dirty="0">
+              <a:rPr lang="en-US" sz="1300" b="1" dirty="0">
+                <a:solidFill>
+                  <a:srgbClr val="2E7D5B"/>
+                </a:solidFill>
+                <a:latin typeface="Calibri" pitchFamily="34" charset="0"/>
+                <a:ea typeface="Calibri" pitchFamily="34" charset="-122"/>
+                <a:cs typeface="Calibri" pitchFamily="34" charset="-120"/>
+              </a:rPr>
+              <a:t>First pick a medium feature, not the hardest one. </a:t>
+            </a:r>
+            <a:pPr indent="0" marL="0">
+              <a:buNone/>
+            </a:pPr>
+            <a:r>
+              <a:rPr lang="en-US" sz="1300" dirty="0">
                 <a:solidFill>
                   <a:srgbClr val="1B2440"/>
                 </a:solidFill>
@@ -5425,109 +5512,7 @@
                 <a:ea typeface="Calibri" pitchFamily="34" charset="-122"/>
                 <a:cs typeface="Calibri" pitchFamily="34" charset="-120"/>
               </a:rPr>
-              <a:t>Most new work starts outside by default</a:t>
-            </a:r>
-            <a:endParaRPr lang="en-US" sz="1150" dirty="0"/>
-          </a:p>
-          <a:p>
-            <a:pPr marL="342900" indent="-342900">
-              <a:spcAft>
-                <a:spcPts val="800"/>
-              </a:spcAft>
-              <a:buSzPct val="100000"/>
-              <a:buChar char="•"/>
-            </a:pPr>
-            <a:r>
-              <a:rPr lang="en-US" sz="1150" dirty="0">
-                <a:solidFill>
-                  <a:srgbClr val="1B2440"/>
-                </a:solidFill>
-                <a:latin typeface="Calibri" pitchFamily="34" charset="0"/>
-                <a:ea typeface="Calibri" pitchFamily="34" charset="-122"/>
-                <a:cs typeface="Calibri" pitchFamily="34" charset="-120"/>
-              </a:rPr>
-              <a:t>Angular inventory &amp; porting well underway</a:t>
-            </a:r>
-            <a:endParaRPr lang="en-US" sz="1150" dirty="0"/>
-          </a:p>
-          <a:p>
-            <a:pPr marL="342900" indent="-342900">
-              <a:spcAft>
-                <a:spcPts val="800"/>
-              </a:spcAft>
-              <a:buSzPct val="100000"/>
-              <a:buChar char="•"/>
-            </a:pPr>
-            <a:r>
-              <a:rPr lang="en-US" sz="1150" dirty="0">
-                <a:solidFill>
-                  <a:srgbClr val="1B2440"/>
-                </a:solidFill>
-                <a:latin typeface="Calibri" pitchFamily="34" charset="0"/>
-                <a:ea typeface="Calibri" pitchFamily="34" charset="-122"/>
-                <a:cs typeface="Calibri" pitchFamily="34" charset="-120"/>
-              </a:rPr>
-              <a:t>Sign-off is quick because the habits are solid</a:t>
-            </a:r>
-            <a:endParaRPr lang="en-US" sz="1150" dirty="0"/>
-          </a:p>
-          <a:p>
-            <a:pPr marL="342900" indent="-342900">
-              <a:spcAft>
-                <a:spcPts val="800"/>
-              </a:spcAft>
-              <a:buSzPct val="100000"/>
-              <a:buChar char="•"/>
-            </a:pPr>
-            <a:r>
-              <a:rPr lang="en-US" sz="1150" dirty="0">
-                <a:solidFill>
-                  <a:srgbClr val="1B2440"/>
-                </a:solidFill>
-                <a:latin typeface="Calibri" pitchFamily="34" charset="0"/>
-                <a:ea typeface="Calibri" pitchFamily="34" charset="-122"/>
-                <a:cs typeface="Calibri" pitchFamily="34" charset="-120"/>
-              </a:rPr>
-              <a:t>We're no longer thinking about this as "new"</a:t>
-            </a:r>
-            <a:endParaRPr lang="en-US" sz="1150" dirty="0"/>
-          </a:p>
-        </p:txBody>
-      </p:sp>
-      <p:sp>
-        <p:nvSpPr>
-          <p:cNvPr id="18" name="Text 16"/>
-          <p:cNvSpPr/>
-          <p:nvPr/>
-        </p:nvSpPr>
-        <p:spPr>
-          <a:xfrm>
-            <a:off x="548640" y="5486400"/>
-            <a:ext cx="11094415" cy="411480"/>
-          </a:xfrm>
-          <a:prstGeom prst="rect">
-            <a:avLst/>
-          </a:prstGeom>
-          <a:noFill/>
-          <a:ln/>
-        </p:spPr>
-        <p:txBody>
-          <a:bodyPr wrap="square" lIns="0" tIns="0" rIns="0" bIns="0" rtlCol="0" anchor="ctr"/>
-          <a:lstStyle/>
-          <a:p>
-            <a:pPr algn="ctr" indent="0" marL="0">
-              <a:buNone/>
-            </a:pPr>
-            <a:r>
-              <a:rPr lang="en-US" sz="1300" i="1" dirty="0">
-                <a:solidFill>
-                  <a:srgbClr val="5A6B8C"/>
-                </a:solidFill>
-                <a:latin typeface="Calibri" pitchFamily="34" charset="0"/>
-                <a:ea typeface="Calibri" pitchFamily="34" charset="-122"/>
-                <a:cs typeface="Calibri" pitchFamily="34" charset="-120"/>
-              </a:rPr>
-              <a:t>No fixed dates on purpose — each stage ends when the criteria above are actually true, not when a calendar says so.</a:t>
+              <a:t>Its job is to help us learn the loop — how long a spec takes, how the mocks feel, how integration actually goes — before we scale it up.</a:t>
             </a:r>
             <a:endParaRPr lang="en-US" sz="1300" dirty="0"/>
           </a:p>
@@ -5676,7 +5661,7 @@
                 <a:ea typeface="Calibri" pitchFamily="34" charset="-122"/>
                 <a:cs typeface="Calibri" pitchFamily="34" charset="-120"/>
               </a:rPr>
-              <a:t>BEING STRAIGHT ABOUT THE PEOPLE SIDE</a:t>
+              <a:t>THE THREE PHASES, NAMED HONESTLY</a:t>
             </a:r>
             <a:endParaRPr lang="en-US" sz="1200" dirty="0"/>
           </a:p>
@@ -5715,7 +5700,7 @@
                 <a:ea typeface="Cambria" pitchFamily="34" charset="-122"/>
                 <a:cs typeface="Cambria" pitchFamily="34" charset="-120"/>
               </a:rPr>
-              <a:t>This changes roles — let's talk about it early and honestly</a:t>
+              <a:t>Where this goes, and why</a:t>
             </a:r>
             <a:endParaRPr lang="en-US" sz="2800" dirty="0"/>
           </a:p>
@@ -5729,12 +5714,12 @@
         </p:nvSpPr>
         <p:spPr>
           <a:xfrm>
-            <a:off x="548640" y="1691640"/>
-            <a:ext cx="3520440" cy="3657600"/>
+            <a:off x="548640" y="1737360"/>
+            <a:ext cx="3515258" cy="3566160"/>
           </a:xfrm>
           <a:prstGeom prst="roundRect">
             <a:avLst>
-              <a:gd name="adj" fmla="val 2338"/>
+              <a:gd name="adj" fmla="val 2341"/>
             </a:avLst>
           </a:prstGeom>
           <a:solidFill>
@@ -5752,14 +5737,653 @@
       </p:sp>
       <p:sp>
         <p:nvSpPr>
-          <p:cNvPr id="7" name="Shape 5"/>
+          <p:cNvPr id="7" name="Text 5"/>
           <p:cNvSpPr/>
           <p:nvPr/>
         </p:nvSpPr>
         <p:spPr>
           <a:xfrm>
             <a:off x="777240" y="1920240"/>
-            <a:ext cx="548640" cy="548640"/>
+            <a:ext cx="3058058" cy="274320"/>
+          </a:xfrm>
+          <a:prstGeom prst="rect">
+            <a:avLst/>
+          </a:prstGeom>
+          <a:noFill/>
+          <a:ln/>
+        </p:spPr>
+        <p:txBody>
+          <a:bodyPr wrap="square" lIns="0" tIns="0" rIns="0" bIns="0" rtlCol="0" anchor="ctr"/>
+          <a:lstStyle/>
+          <a:p>
+            <a:pPr indent="0" marL="0">
+              <a:buNone/>
+            </a:pPr>
+            <a:r>
+              <a:rPr lang="en-US" sz="1100" b="1" spc="200" kern="0" dirty="0">
+                <a:solidFill>
+                  <a:srgbClr val="5A6B8C"/>
+                </a:solidFill>
+                <a:latin typeface="Calibri" pitchFamily="34" charset="0"/>
+                <a:ea typeface="Calibri" pitchFamily="34" charset="-122"/>
+                <a:cs typeface="Calibri" pitchFamily="34" charset="-120"/>
+              </a:rPr>
+              <a:t>PHASE 1</a:t>
+            </a:r>
+            <a:endParaRPr lang="en-US" sz="1100" dirty="0"/>
+          </a:p>
+        </p:txBody>
+      </p:sp>
+      <p:sp>
+        <p:nvSpPr>
+          <p:cNvPr id="8" name="Text 6"/>
+          <p:cNvSpPr/>
+          <p:nvPr/>
+        </p:nvSpPr>
+        <p:spPr>
+          <a:xfrm>
+            <a:off x="777240" y="2212848"/>
+            <a:ext cx="3058058" cy="548640"/>
+          </a:xfrm>
+          <a:prstGeom prst="rect">
+            <a:avLst/>
+          </a:prstGeom>
+          <a:noFill/>
+          <a:ln/>
+        </p:spPr>
+        <p:txBody>
+          <a:bodyPr wrap="square" lIns="0" tIns="0" rIns="0" bIns="0" rtlCol="0" anchor="ctr"/>
+          <a:lstStyle/>
+          <a:p>
+            <a:pPr indent="0" marL="0">
+              <a:buNone/>
+            </a:pPr>
+            <a:r>
+              <a:rPr lang="en-US" sz="1700" b="1" dirty="0">
+                <a:solidFill>
+                  <a:srgbClr val="1E2761"/>
+                </a:solidFill>
+                <a:latin typeface="Calibri" pitchFamily="34" charset="0"/>
+                <a:ea typeface="Calibri" pitchFamily="34" charset="-122"/>
+                <a:cs typeface="Calibri" pitchFamily="34" charset="-120"/>
+              </a:rPr>
+              <a:t>Core team goes outside</a:t>
+            </a:r>
+            <a:endParaRPr lang="en-US" sz="1700" dirty="0"/>
+          </a:p>
+        </p:txBody>
+      </p:sp>
+      <p:sp>
+        <p:nvSpPr>
+          <p:cNvPr id="9" name="Text 7"/>
+          <p:cNvSpPr/>
+          <p:nvPr/>
+        </p:nvSpPr>
+        <p:spPr>
+          <a:xfrm>
+            <a:off x="777240" y="2880360"/>
+            <a:ext cx="3058058" cy="2240280"/>
+          </a:xfrm>
+          <a:prstGeom prst="rect">
+            <a:avLst/>
+          </a:prstGeom>
+          <a:noFill/>
+          <a:ln/>
+        </p:spPr>
+        <p:txBody>
+          <a:bodyPr wrap="square" lIns="0" tIns="0" rIns="0" bIns="0" rtlCol="0" anchor="ctr"/>
+          <a:lstStyle/>
+          <a:p>
+            <a:pPr marL="342900" indent="-342900">
+              <a:spcAft>
+                <a:spcPts val="700"/>
+              </a:spcAft>
+              <a:buSzPct val="100000"/>
+              <a:buChar char="•"/>
+            </a:pPr>
+            <a:r>
+              <a:rPr lang="en-US" sz="1100" dirty="0">
+                <a:solidFill>
+                  <a:srgbClr val="1B2440"/>
+                </a:solidFill>
+                <a:latin typeface="Calibri" pitchFamily="34" charset="0"/>
+                <a:ea typeface="Calibri" pitchFamily="34" charset="-122"/>
+                <a:cs typeface="Calibri" pitchFamily="34" charset="-120"/>
+              </a:rPr>
+              <a:t>Pick a pilot feature, run the full loop end to end</a:t>
+            </a:r>
+            <a:endParaRPr lang="en-US" sz="1100" dirty="0"/>
+          </a:p>
+          <a:p>
+            <a:pPr marL="342900" indent="-342900">
+              <a:spcAft>
+                <a:spcPts val="700"/>
+              </a:spcAft>
+              <a:buSzPct val="100000"/>
+              <a:buChar char="•"/>
+            </a:pPr>
+            <a:r>
+              <a:rPr lang="en-US" sz="1100" dirty="0">
+                <a:solidFill>
+                  <a:srgbClr val="1B2440"/>
+                </a:solidFill>
+                <a:latin typeface="Calibri" pitchFamily="34" charset="0"/>
+                <a:ea typeface="Calibri" pitchFamily="34" charset="-122"/>
+                <a:cs typeface="Calibri" pitchFamily="34" charset="-120"/>
+              </a:rPr>
+              <a:t>Set up matching pipelines &amp; configs outside</a:t>
+            </a:r>
+            <a:endParaRPr lang="en-US" sz="1100" dirty="0"/>
+          </a:p>
+          <a:p>
+            <a:pPr marL="342900" indent="-342900">
+              <a:spcAft>
+                <a:spcPts val="700"/>
+              </a:spcAft>
+              <a:buSzPct val="100000"/>
+              <a:buChar char="•"/>
+            </a:pPr>
+            <a:r>
+              <a:rPr lang="en-US" sz="1100" dirty="0">
+                <a:solidFill>
+                  <a:srgbClr val="1B2440"/>
+                </a:solidFill>
+                <a:latin typeface="Calibri" pitchFamily="34" charset="0"/>
+                <a:ea typeface="Calibri" pitchFamily="34" charset="-122"/>
+                <a:cs typeface="Calibri" pitchFamily="34" charset="-120"/>
+              </a:rPr>
+              <a:t>Contractors take on environment testing, config management, and bringing internet work into Confi — the ingress side</a:t>
+            </a:r>
+            <a:endParaRPr lang="en-US" sz="1100" dirty="0"/>
+          </a:p>
+          <a:p>
+            <a:pPr marL="342900" indent="-342900">
+              <a:spcAft>
+                <a:spcPts val="700"/>
+              </a:spcAft>
+              <a:buSzPct val="100000"/>
+              <a:buChar char="•"/>
+            </a:pPr>
+            <a:r>
+              <a:rPr lang="en-US" sz="1100" dirty="0">
+                <a:solidFill>
+                  <a:srgbClr val="1B2440"/>
+                </a:solidFill>
+                <a:latin typeface="Calibri" pitchFamily="34" charset="0"/>
+                <a:ea typeface="Calibri" pitchFamily="34" charset="-122"/>
+                <a:cs typeface="Calibri" pitchFamily="34" charset="-120"/>
+              </a:rPr>
+              <a:t>Fix the friction we find, together</a:t>
+            </a:r>
+            <a:endParaRPr lang="en-US" sz="1100" dirty="0"/>
+          </a:p>
+        </p:txBody>
+      </p:sp>
+      <p:sp>
+        <p:nvSpPr>
+          <p:cNvPr id="10" name="Shape 8"/>
+          <p:cNvSpPr/>
+          <p:nvPr/>
+        </p:nvSpPr>
+        <p:spPr>
+          <a:xfrm>
+            <a:off x="4338218" y="1737360"/>
+            <a:ext cx="3515258" cy="3566160"/>
+          </a:xfrm>
+          <a:prstGeom prst="roundRect">
+            <a:avLst>
+              <a:gd name="adj" fmla="val 2341"/>
+            </a:avLst>
+          </a:prstGeom>
+          <a:solidFill>
+            <a:srgbClr val="EDF3FC"/>
+          </a:solidFill>
+          <a:ln/>
+          <a:effectLst>
+            <a:outerShdw sx="100000" sy="100000" kx="0" ky="0" algn="bl" rotWithShape="0" blurRad="76200" dist="12700" dir="5400000">
+              <a:srgbClr val="9AA7C4">
+                <a:alpha val="22000"/>
+              </a:srgbClr>
+            </a:outerShdw>
+          </a:effectLst>
+        </p:spPr>
+      </p:sp>
+      <p:sp>
+        <p:nvSpPr>
+          <p:cNvPr id="11" name="Text 9"/>
+          <p:cNvSpPr/>
+          <p:nvPr/>
+        </p:nvSpPr>
+        <p:spPr>
+          <a:xfrm>
+            <a:off x="4566818" y="1920240"/>
+            <a:ext cx="3058058" cy="274320"/>
+          </a:xfrm>
+          <a:prstGeom prst="rect">
+            <a:avLst/>
+          </a:prstGeom>
+          <a:noFill/>
+          <a:ln/>
+        </p:spPr>
+        <p:txBody>
+          <a:bodyPr wrap="square" lIns="0" tIns="0" rIns="0" bIns="0" rtlCol="0" anchor="ctr"/>
+          <a:lstStyle/>
+          <a:p>
+            <a:pPr indent="0" marL="0">
+              <a:buNone/>
+            </a:pPr>
+            <a:r>
+              <a:rPr lang="en-US" sz="1100" b="1" spc="200" kern="0" dirty="0">
+                <a:solidFill>
+                  <a:srgbClr val="5A6B8C"/>
+                </a:solidFill>
+                <a:latin typeface="Calibri" pitchFamily="34" charset="0"/>
+                <a:ea typeface="Calibri" pitchFamily="34" charset="-122"/>
+                <a:cs typeface="Calibri" pitchFamily="34" charset="-120"/>
+              </a:rPr>
+              <a:t>PHASE 2</a:t>
+            </a:r>
+            <a:endParaRPr lang="en-US" sz="1100" dirty="0"/>
+          </a:p>
+        </p:txBody>
+      </p:sp>
+      <p:sp>
+        <p:nvSpPr>
+          <p:cNvPr id="12" name="Text 10"/>
+          <p:cNvSpPr/>
+          <p:nvPr/>
+        </p:nvSpPr>
+        <p:spPr>
+          <a:xfrm>
+            <a:off x="4566818" y="2212848"/>
+            <a:ext cx="3058058" cy="548640"/>
+          </a:xfrm>
+          <a:prstGeom prst="rect">
+            <a:avLst/>
+          </a:prstGeom>
+          <a:noFill/>
+          <a:ln/>
+        </p:spPr>
+        <p:txBody>
+          <a:bodyPr wrap="square" lIns="0" tIns="0" rIns="0" bIns="0" rtlCol="0" anchor="ctr"/>
+          <a:lstStyle/>
+          <a:p>
+            <a:pPr indent="0" marL="0">
+              <a:buNone/>
+            </a:pPr>
+            <a:r>
+              <a:rPr lang="en-US" sz="1700" b="1" dirty="0">
+                <a:solidFill>
+                  <a:srgbClr val="1E2761"/>
+                </a:solidFill>
+                <a:latin typeface="Calibri" pitchFamily="34" charset="0"/>
+                <a:ea typeface="Calibri" pitchFamily="34" charset="-122"/>
+                <a:cs typeface="Calibri" pitchFamily="34" charset="-120"/>
+              </a:rPr>
+              <a:t>Both directions get routine</a:t>
+            </a:r>
+            <a:endParaRPr lang="en-US" sz="1700" dirty="0"/>
+          </a:p>
+        </p:txBody>
+      </p:sp>
+      <p:sp>
+        <p:nvSpPr>
+          <p:cNvPr id="13" name="Text 11"/>
+          <p:cNvSpPr/>
+          <p:nvPr/>
+        </p:nvSpPr>
+        <p:spPr>
+          <a:xfrm>
+            <a:off x="4566818" y="2880360"/>
+            <a:ext cx="3058058" cy="2240280"/>
+          </a:xfrm>
+          <a:prstGeom prst="rect">
+            <a:avLst/>
+          </a:prstGeom>
+          <a:noFill/>
+          <a:ln/>
+        </p:spPr>
+        <p:txBody>
+          <a:bodyPr wrap="square" lIns="0" tIns="0" rIns="0" bIns="0" rtlCol="0" anchor="ctr"/>
+          <a:lstStyle/>
+          <a:p>
+            <a:pPr marL="342900" indent="-342900">
+              <a:spcAft>
+                <a:spcPts val="700"/>
+              </a:spcAft>
+              <a:buSzPct val="100000"/>
+              <a:buChar char="•"/>
+            </a:pPr>
+            <a:r>
+              <a:rPr lang="en-US" sz="1100" dirty="0">
+                <a:solidFill>
+                  <a:srgbClr val="1B2440"/>
+                </a:solidFill>
+                <a:latin typeface="Calibri" pitchFamily="34" charset="0"/>
+                <a:ea typeface="Calibri" pitchFamily="34" charset="-122"/>
+                <a:cs typeface="Calibri" pitchFamily="34" charset="-120"/>
+              </a:rPr>
+              <a:t>More features through the loop; Angular inventory &amp; porting underway</a:t>
+            </a:r>
+            <a:endParaRPr lang="en-US" sz="1100" dirty="0"/>
+          </a:p>
+          <a:p>
+            <a:pPr marL="342900" indent="-342900">
+              <a:spcAft>
+                <a:spcPts val="700"/>
+              </a:spcAft>
+              <a:buSzPct val="100000"/>
+              <a:buChar char="•"/>
+            </a:pPr>
+            <a:r>
+              <a:rPr lang="en-US" sz="1100" dirty="0">
+                <a:solidFill>
+                  <a:srgbClr val="1B2440"/>
+                </a:solidFill>
+                <a:latin typeface="Calibri" pitchFamily="34" charset="0"/>
+                <a:ea typeface="Calibri" pitchFamily="34" charset="-122"/>
+                <a:cs typeface="Calibri" pitchFamily="34" charset="-120"/>
+              </a:rPr>
+              <a:t>The occasional egress flow (Confi → internet) becomes the clear, repeatable process from a couple slides ago</a:t>
+            </a:r>
+            <a:endParaRPr lang="en-US" sz="1100" dirty="0"/>
+          </a:p>
+          <a:p>
+            <a:pPr marL="342900" indent="-342900">
+              <a:spcAft>
+                <a:spcPts val="700"/>
+              </a:spcAft>
+              <a:buSzPct val="100000"/>
+              <a:buChar char="•"/>
+            </a:pPr>
+            <a:r>
+              <a:rPr lang="en-US" sz="1100" dirty="0">
+                <a:solidFill>
+                  <a:srgbClr val="1B2440"/>
+                </a:solidFill>
+                <a:latin typeface="Calibri" pitchFamily="34" charset="0"/>
+                <a:ea typeface="Calibri" pitchFamily="34" charset="-122"/>
+                <a:cs typeface="Calibri" pitchFamily="34" charset="-120"/>
+              </a:rPr>
+              <a:t>Sign-off is quick because the habits are solid</a:t>
+            </a:r>
+            <a:endParaRPr lang="en-US" sz="1100" dirty="0"/>
+          </a:p>
+          <a:p>
+            <a:pPr marL="342900" indent="-342900">
+              <a:spcAft>
+                <a:spcPts val="700"/>
+              </a:spcAft>
+              <a:buSzPct val="100000"/>
+              <a:buChar char="•"/>
+            </a:pPr>
+            <a:r>
+              <a:rPr lang="en-US" sz="1100" dirty="0">
+                <a:solidFill>
+                  <a:srgbClr val="1B2440"/>
+                </a:solidFill>
+                <a:latin typeface="Calibri" pitchFamily="34" charset="0"/>
+                <a:ea typeface="Calibri" pitchFamily="34" charset="-122"/>
+                <a:cs typeface="Calibri" pitchFamily="34" charset="-120"/>
+              </a:rPr>
+              <a:t>We're no longer thinking about this as "new"</a:t>
+            </a:r>
+            <a:endParaRPr lang="en-US" sz="1100" dirty="0"/>
+          </a:p>
+        </p:txBody>
+      </p:sp>
+      <p:sp>
+        <p:nvSpPr>
+          <p:cNvPr id="14" name="Shape 12"/>
+          <p:cNvSpPr/>
+          <p:nvPr/>
+        </p:nvSpPr>
+        <p:spPr>
+          <a:xfrm>
+            <a:off x="8127797" y="1737360"/>
+            <a:ext cx="3515258" cy="3566160"/>
+          </a:xfrm>
+          <a:prstGeom prst="roundRect">
+            <a:avLst>
+              <a:gd name="adj" fmla="val 2341"/>
+            </a:avLst>
+          </a:prstGeom>
+          <a:solidFill>
+            <a:srgbClr val="EAF4EF"/>
+          </a:solidFill>
+          <a:ln/>
+          <a:effectLst>
+            <a:outerShdw sx="100000" sy="100000" kx="0" ky="0" algn="bl" rotWithShape="0" blurRad="76200" dist="12700" dir="5400000">
+              <a:srgbClr val="9AA7C4">
+                <a:alpha val="22000"/>
+              </a:srgbClr>
+            </a:outerShdw>
+          </a:effectLst>
+        </p:spPr>
+      </p:sp>
+      <p:sp>
+        <p:nvSpPr>
+          <p:cNvPr id="15" name="Text 13"/>
+          <p:cNvSpPr/>
+          <p:nvPr/>
+        </p:nvSpPr>
+        <p:spPr>
+          <a:xfrm>
+            <a:off x="8356397" y="1920240"/>
+            <a:ext cx="3058058" cy="274320"/>
+          </a:xfrm>
+          <a:prstGeom prst="rect">
+            <a:avLst/>
+          </a:prstGeom>
+          <a:noFill/>
+          <a:ln/>
+        </p:spPr>
+        <p:txBody>
+          <a:bodyPr wrap="square" lIns="0" tIns="0" rIns="0" bIns="0" rtlCol="0" anchor="ctr"/>
+          <a:lstStyle/>
+          <a:p>
+            <a:pPr indent="0" marL="0">
+              <a:buNone/>
+            </a:pPr>
+            <a:r>
+              <a:rPr lang="en-US" sz="1100" b="1" spc="200" kern="0" dirty="0">
+                <a:solidFill>
+                  <a:srgbClr val="2E7D5B"/>
+                </a:solidFill>
+                <a:latin typeface="Calibri" pitchFamily="34" charset="0"/>
+                <a:ea typeface="Calibri" pitchFamily="34" charset="-122"/>
+                <a:cs typeface="Calibri" pitchFamily="34" charset="-120"/>
+              </a:rPr>
+              <a:t>PHASE 3</a:t>
+            </a:r>
+            <a:endParaRPr lang="en-US" sz="1100" dirty="0"/>
+          </a:p>
+        </p:txBody>
+      </p:sp>
+      <p:sp>
+        <p:nvSpPr>
+          <p:cNvPr id="16" name="Text 14"/>
+          <p:cNvSpPr/>
+          <p:nvPr/>
+        </p:nvSpPr>
+        <p:spPr>
+          <a:xfrm>
+            <a:off x="8356397" y="2212848"/>
+            <a:ext cx="3058058" cy="548640"/>
+          </a:xfrm>
+          <a:prstGeom prst="rect">
+            <a:avLst/>
+          </a:prstGeom>
+          <a:noFill/>
+          <a:ln/>
+        </p:spPr>
+        <p:txBody>
+          <a:bodyPr wrap="square" lIns="0" tIns="0" rIns="0" bIns="0" rtlCol="0" anchor="ctr"/>
+          <a:lstStyle/>
+          <a:p>
+            <a:pPr indent="0" marL="0">
+              <a:buNone/>
+            </a:pPr>
+            <a:r>
+              <a:rPr lang="en-US" sz="1700" b="1" dirty="0">
+                <a:solidFill>
+                  <a:srgbClr val="2E7D5B"/>
+                </a:solidFill>
+                <a:latin typeface="Calibri" pitchFamily="34" charset="0"/>
+                <a:ea typeface="Calibri" pitchFamily="34" charset="-122"/>
+                <a:cs typeface="Calibri" pitchFamily="34" charset="-120"/>
+              </a:rPr>
+              <a:t>Contractor headcount comes down</a:t>
+            </a:r>
+            <a:endParaRPr lang="en-US" sz="1700" dirty="0"/>
+          </a:p>
+        </p:txBody>
+      </p:sp>
+      <p:sp>
+        <p:nvSpPr>
+          <p:cNvPr id="17" name="Text 15"/>
+          <p:cNvSpPr/>
+          <p:nvPr/>
+        </p:nvSpPr>
+        <p:spPr>
+          <a:xfrm>
+            <a:off x="8356397" y="2880360"/>
+            <a:ext cx="3058058" cy="2240280"/>
+          </a:xfrm>
+          <a:prstGeom prst="rect">
+            <a:avLst/>
+          </a:prstGeom>
+          <a:noFill/>
+          <a:ln/>
+        </p:spPr>
+        <p:txBody>
+          <a:bodyPr wrap="square" lIns="0" tIns="0" rIns="0" bIns="0" rtlCol="0" anchor="ctr"/>
+          <a:lstStyle/>
+          <a:p>
+            <a:pPr marL="342900" indent="-342900">
+              <a:spcAft>
+                <a:spcPts val="700"/>
+              </a:spcAft>
+              <a:buSzPct val="100000"/>
+              <a:buChar char="•"/>
+            </a:pPr>
+            <a:r>
+              <a:rPr lang="en-US" sz="1100" dirty="0">
+                <a:solidFill>
+                  <a:srgbClr val="1B2440"/>
+                </a:solidFill>
+                <a:latin typeface="Calibri" pitchFamily="34" charset="0"/>
+                <a:ea typeface="Calibri" pitchFamily="34" charset="-122"/>
+                <a:cs typeface="Calibri" pitchFamily="34" charset="-120"/>
+              </a:rPr>
+              <a:t>Core team absorbs the full loop, both directions, on its own</a:t>
+            </a:r>
+            <a:endParaRPr lang="en-US" sz="1100" dirty="0"/>
+          </a:p>
+          <a:p>
+            <a:pPr marL="342900" indent="-342900">
+              <a:spcAft>
+                <a:spcPts val="700"/>
+              </a:spcAft>
+              <a:buSzPct val="100000"/>
+              <a:buChar char="•"/>
+            </a:pPr>
+            <a:r>
+              <a:rPr lang="en-US" sz="1100" dirty="0">
+                <a:solidFill>
+                  <a:srgbClr val="1B2440"/>
+                </a:solidFill>
+                <a:latin typeface="Calibri" pitchFamily="34" charset="0"/>
+                <a:ea typeface="Calibri" pitchFamily="34" charset="-122"/>
+                <a:cs typeface="Calibri" pitchFamily="34" charset="-120"/>
+              </a:rPr>
+              <a:t>Trigger-based, not date-based — we genuinely don't know when</a:t>
+            </a:r>
+            <a:endParaRPr lang="en-US" sz="1100" dirty="0"/>
+          </a:p>
+          <a:p>
+            <a:pPr marL="342900" indent="-342900">
+              <a:spcAft>
+                <a:spcPts val="700"/>
+              </a:spcAft>
+              <a:buSzPct val="100000"/>
+              <a:buChar char="•"/>
+            </a:pPr>
+            <a:r>
+              <a:rPr lang="en-US" sz="1100" dirty="0">
+                <a:solidFill>
+                  <a:srgbClr val="1B2440"/>
+                </a:solidFill>
+                <a:latin typeface="Calibri" pitchFamily="34" charset="0"/>
+                <a:ea typeface="Calibri" pitchFamily="34" charset="-122"/>
+                <a:cs typeface="Calibri" pitchFamily="34" charset="-120"/>
+              </a:rPr>
+              <a:t>Phases 1 &amp; 2 exist partly to make this transition possible without surprises</a:t>
+            </a:r>
+            <a:endParaRPr lang="en-US" sz="1100" dirty="0"/>
+          </a:p>
+          <a:p>
+            <a:pPr marL="342900" indent="-342900">
+              <a:spcAft>
+                <a:spcPts val="700"/>
+              </a:spcAft>
+              <a:buSzPct val="100000"/>
+              <a:buChar char="•"/>
+            </a:pPr>
+            <a:r>
+              <a:rPr lang="en-US" sz="1100" dirty="0">
+                <a:solidFill>
+                  <a:srgbClr val="1B2440"/>
+                </a:solidFill>
+                <a:latin typeface="Calibri" pitchFamily="34" charset="0"/>
+                <a:ea typeface="Calibri" pitchFamily="34" charset="-122"/>
+                <a:cs typeface="Calibri" pitchFamily="34" charset="-120"/>
+              </a:rPr>
+              <a:t>We're naming it now, not waiting until it's decided to say anything</a:t>
+            </a:r>
+            <a:endParaRPr lang="en-US" sz="1100" dirty="0"/>
+          </a:p>
+        </p:txBody>
+      </p:sp>
+      <p:sp>
+        <p:nvSpPr>
+          <p:cNvPr id="18" name="Shape 16"/>
+          <p:cNvSpPr/>
+          <p:nvPr/>
+        </p:nvSpPr>
+        <p:spPr>
+          <a:xfrm>
+            <a:off x="548640" y="5440680"/>
+            <a:ext cx="11094415" cy="777240"/>
+          </a:xfrm>
+          <a:prstGeom prst="roundRect">
+            <a:avLst>
+              <a:gd name="adj" fmla="val 10588"/>
+            </a:avLst>
+          </a:prstGeom>
+          <a:solidFill>
+            <a:srgbClr val="EDF3FC"/>
+          </a:solidFill>
+          <a:ln/>
+          <a:effectLst>
+            <a:outerShdw sx="100000" sy="100000" kx="0" ky="0" algn="bl" rotWithShape="0" blurRad="76200" dist="12700" dir="5400000">
+              <a:srgbClr val="9AA7C4">
+                <a:alpha val="22000"/>
+              </a:srgbClr>
+            </a:outerShdw>
+          </a:effectLst>
+        </p:spPr>
+      </p:sp>
+      <p:sp>
+        <p:nvSpPr>
+          <p:cNvPr id="19" name="Shape 17"/>
+          <p:cNvSpPr/>
+          <p:nvPr/>
+        </p:nvSpPr>
+        <p:spPr>
+          <a:xfrm>
+            <a:off x="749808" y="5605272"/>
+            <a:ext cx="457200" cy="457200"/>
           </a:xfrm>
           <a:prstGeom prst="ellipse">
             <a:avLst/>
@@ -5772,7 +6396,7 @@
       </p:sp>
       <p:pic>
         <p:nvPicPr>
-          <p:cNvPr id="8" name="Image 0" descr="preencoded.png">    </p:cNvPr>
+          <p:cNvPr id="20" name="Image 0" descr="preencoded.png">    </p:cNvPr>
           <p:cNvPicPr>
             <a:picLocks noChangeAspect="1"/>
           </p:cNvPicPr>
@@ -5786,8 +6410,8 @@
         </p:blipFill>
         <p:spPr>
           <a:xfrm>
-            <a:off x="919886" y="2062886"/>
-            <a:ext cx="263347" cy="263347"/>
+            <a:off x="868680" y="5724144"/>
+            <a:ext cx="219456" cy="219456"/>
           </a:xfrm>
           <a:prstGeom prst="rect">
             <a:avLst/>
@@ -5796,14 +6420,14 @@
       </p:pic>
       <p:sp>
         <p:nvSpPr>
-          <p:cNvPr id="9" name="Text 6"/>
-          <p:cNvSpPr/>
-          <p:nvPr/>
-        </p:nvSpPr>
-        <p:spPr>
-          <a:xfrm>
-            <a:off x="777240" y="2606040"/>
-            <a:ext cx="3063240" cy="457200"/>
+          <p:cNvPr id="21" name="Text 18"/>
+          <p:cNvSpPr/>
+          <p:nvPr/>
+        </p:nvSpPr>
+        <p:spPr>
+          <a:xfrm>
+            <a:off x="1353312" y="5513832"/>
+            <a:ext cx="10088575" cy="594360"/>
           </a:xfrm>
           <a:prstGeom prst="rect">
             <a:avLst/>
@@ -5819,7 +6443,7 @@
               <a:buNone/>
             </a:pPr>
             <a:r>
-              <a:rPr lang="en-US" sz="1500" b="1" dirty="0">
+              <a:rPr lang="en-US" sz="1350" b="1" dirty="0">
                 <a:solidFill>
                   <a:srgbClr val="1E2761"/>
                 </a:solidFill>
@@ -5827,38 +6451,13 @@
                 <a:ea typeface="Calibri" pitchFamily="34" charset="-122"/>
                 <a:cs typeface="Calibri" pitchFamily="34" charset="-120"/>
               </a:rPr>
-              <a:t>For developers</a:t>
-            </a:r>
-            <a:endParaRPr lang="en-US" sz="1500" dirty="0"/>
-          </a:p>
-        </p:txBody>
-      </p:sp>
-      <p:sp>
-        <p:nvSpPr>
-          <p:cNvPr id="10" name="Text 7"/>
-          <p:cNvSpPr/>
-          <p:nvPr/>
-        </p:nvSpPr>
-        <p:spPr>
-          <a:xfrm>
-            <a:off x="777240" y="3108960"/>
-            <a:ext cx="3063240" cy="2103120"/>
-          </a:xfrm>
-          <a:prstGeom prst="rect">
-            <a:avLst/>
-          </a:prstGeom>
-          <a:noFill/>
-          <a:ln/>
-        </p:spPr>
-        <p:txBody>
-          <a:bodyPr wrap="square" lIns="0" tIns="0" rIns="0" bIns="0" rtlCol="0" anchor="ctr"/>
-          <a:lstStyle/>
-          <a:p>
+              <a:t>We'd rather be straightforward about where this is headed </a:t>
+            </a:r>
             <a:pPr indent="0" marL="0">
               <a:buNone/>
             </a:pPr>
             <a:r>
-              <a:rPr lang="en-US" sz="1200" dirty="0">
+              <a:rPr lang="en-US" sz="1350" dirty="0">
                 <a:solidFill>
                   <a:srgbClr val="1B2440"/>
                 </a:solidFill>
@@ -5866,311 +6465,9 @@
                 <a:ea typeface="Calibri" pitchFamily="34" charset="-122"/>
                 <a:cs typeface="Calibri" pitchFamily="34" charset="-120"/>
               </a:rPr>
-              <a:t>More time on the interesting problems, less on environment friction and waiting on access or pipelines. The tools handle more of the repetitive part so we can focus on what actually needs a person.</a:t>
-            </a:r>
-            <a:endParaRPr lang="en-US" sz="1200" dirty="0"/>
-          </a:p>
-        </p:txBody>
-      </p:sp>
-      <p:sp>
-        <p:nvSpPr>
-          <p:cNvPr id="11" name="Shape 8"/>
-          <p:cNvSpPr/>
-          <p:nvPr/>
-        </p:nvSpPr>
-        <p:spPr>
-          <a:xfrm>
-            <a:off x="4334256" y="1691640"/>
-            <a:ext cx="3520440" cy="3657600"/>
-          </a:xfrm>
-          <a:prstGeom prst="roundRect">
-            <a:avLst>
-              <a:gd name="adj" fmla="val 2338"/>
-            </a:avLst>
-          </a:prstGeom>
-          <a:solidFill>
-            <a:srgbClr val="EDF3FC"/>
-          </a:solidFill>
-          <a:ln/>
-          <a:effectLst>
-            <a:outerShdw sx="100000" sy="100000" kx="0" ky="0" algn="bl" rotWithShape="0" blurRad="76200" dist="12700" dir="5400000">
-              <a:srgbClr val="9AA7C4">
-                <a:alpha val="22000"/>
-              </a:srgbClr>
-            </a:outerShdw>
-          </a:effectLst>
-        </p:spPr>
-      </p:sp>
-      <p:sp>
-        <p:nvSpPr>
-          <p:cNvPr id="12" name="Shape 9"/>
-          <p:cNvSpPr/>
-          <p:nvPr/>
-        </p:nvSpPr>
-        <p:spPr>
-          <a:xfrm>
-            <a:off x="4562856" y="1920240"/>
-            <a:ext cx="548640" cy="548640"/>
-          </a:xfrm>
-          <a:prstGeom prst="ellipse">
-            <a:avLst/>
-          </a:prstGeom>
-          <a:solidFill>
-            <a:srgbClr val="1E2761"/>
-          </a:solidFill>
-          <a:ln/>
-        </p:spPr>
-      </p:sp>
-      <p:pic>
-        <p:nvPicPr>
-          <p:cNvPr id="13" name="Image 1" descr="preencoded.png">    </p:cNvPr>
-          <p:cNvPicPr>
-            <a:picLocks noChangeAspect="1"/>
-          </p:cNvPicPr>
-          <p:nvPr/>
-        </p:nvPicPr>
-        <p:blipFill>
-          <a:blip r:embed="rId2"/>
-          <a:stretch>
-            <a:fillRect/>
-          </a:stretch>
-        </p:blipFill>
-        <p:spPr>
-          <a:xfrm>
-            <a:off x="4705502" y="2062886"/>
-            <a:ext cx="263347" cy="263347"/>
-          </a:xfrm>
-          <a:prstGeom prst="rect">
-            <a:avLst/>
-          </a:prstGeom>
-        </p:spPr>
-      </p:pic>
-      <p:sp>
-        <p:nvSpPr>
-          <p:cNvPr id="14" name="Text 10"/>
-          <p:cNvSpPr/>
-          <p:nvPr/>
-        </p:nvSpPr>
-        <p:spPr>
-          <a:xfrm>
-            <a:off x="4562856" y="2606040"/>
-            <a:ext cx="3063240" cy="457200"/>
-          </a:xfrm>
-          <a:prstGeom prst="rect">
-            <a:avLst/>
-          </a:prstGeom>
-          <a:noFill/>
-          <a:ln/>
-        </p:spPr>
-        <p:txBody>
-          <a:bodyPr wrap="square" lIns="0" tIns="0" rIns="0" bIns="0" rtlCol="0" anchor="ctr"/>
-          <a:lstStyle/>
-          <a:p>
-            <a:pPr indent="0" marL="0">
-              <a:buNone/>
-            </a:pPr>
-            <a:r>
-              <a:rPr lang="en-US" sz="1500" b="1" dirty="0">
-                <a:solidFill>
-                  <a:srgbClr val="1E2761"/>
-                </a:solidFill>
-                <a:latin typeface="Calibri" pitchFamily="34" charset="0"/>
-                <a:ea typeface="Calibri" pitchFamily="34" charset="-122"/>
-                <a:cs typeface="Calibri" pitchFamily="34" charset="-120"/>
-              </a:rPr>
-              <a:t>For contractors</a:t>
-            </a:r>
-            <a:endParaRPr lang="en-US" sz="1500" dirty="0"/>
-          </a:p>
-        </p:txBody>
-      </p:sp>
-      <p:sp>
-        <p:nvSpPr>
-          <p:cNvPr id="15" name="Text 11"/>
-          <p:cNvSpPr/>
-          <p:nvPr/>
-        </p:nvSpPr>
-        <p:spPr>
-          <a:xfrm>
-            <a:off x="4562856" y="3108960"/>
-            <a:ext cx="3063240" cy="2103120"/>
-          </a:xfrm>
-          <a:prstGeom prst="rect">
-            <a:avLst/>
-          </a:prstGeom>
-          <a:noFill/>
-          <a:ln/>
-        </p:spPr>
-        <p:txBody>
-          <a:bodyPr wrap="square" lIns="0" tIns="0" rIns="0" bIns="0" rtlCol="0" anchor="ctr"/>
-          <a:lstStyle/>
-          <a:p>
-            <a:pPr indent="0" marL="0">
-              <a:buNone/>
-            </a:pPr>
-            <a:r>
-              <a:rPr lang="en-US" sz="1200" dirty="0">
-                <a:solidFill>
-                  <a:srgbClr val="1B2440"/>
-                </a:solidFill>
-                <a:latin typeface="Calibri" pitchFamily="34" charset="0"/>
-                <a:ea typeface="Calibri" pitchFamily="34" charset="-122"/>
-                <a:cs typeface="Calibri" pitchFamily="34" charset="-120"/>
-              </a:rPr>
-              <a:t>Some roles shift toward integration, environment testing, and configuration management — genuinely valuable, hands-on work, not busywork. Where useful, some may also move toward more BA-style spec work.</a:t>
-            </a:r>
-            <a:endParaRPr lang="en-US" sz="1200" dirty="0"/>
-          </a:p>
-        </p:txBody>
-      </p:sp>
-      <p:sp>
-        <p:nvSpPr>
-          <p:cNvPr id="16" name="Shape 12"/>
-          <p:cNvSpPr/>
-          <p:nvPr/>
-        </p:nvSpPr>
-        <p:spPr>
-          <a:xfrm>
-            <a:off x="8119872" y="1691640"/>
-            <a:ext cx="3520440" cy="3657600"/>
-          </a:xfrm>
-          <a:prstGeom prst="roundRect">
-            <a:avLst>
-              <a:gd name="adj" fmla="val 2338"/>
-            </a:avLst>
-          </a:prstGeom>
-          <a:solidFill>
-            <a:srgbClr val="EAF4EF"/>
-          </a:solidFill>
-          <a:ln/>
-          <a:effectLst>
-            <a:outerShdw sx="100000" sy="100000" kx="0" ky="0" algn="bl" rotWithShape="0" blurRad="76200" dist="12700" dir="5400000">
-              <a:srgbClr val="9AA7C4">
-                <a:alpha val="22000"/>
-              </a:srgbClr>
-            </a:outerShdw>
-          </a:effectLst>
-        </p:spPr>
-      </p:sp>
-      <p:sp>
-        <p:nvSpPr>
-          <p:cNvPr id="17" name="Shape 13"/>
-          <p:cNvSpPr/>
-          <p:nvPr/>
-        </p:nvSpPr>
-        <p:spPr>
-          <a:xfrm>
-            <a:off x="8348472" y="1920240"/>
-            <a:ext cx="548640" cy="548640"/>
-          </a:xfrm>
-          <a:prstGeom prst="ellipse">
-            <a:avLst/>
-          </a:prstGeom>
-          <a:solidFill>
-            <a:srgbClr val="2E7D5B"/>
-          </a:solidFill>
-          <a:ln/>
-        </p:spPr>
-      </p:sp>
-      <p:pic>
-        <p:nvPicPr>
-          <p:cNvPr id="18" name="Image 2" descr="preencoded.png">    </p:cNvPr>
-          <p:cNvPicPr>
-            <a:picLocks noChangeAspect="1"/>
-          </p:cNvPicPr>
-          <p:nvPr/>
-        </p:nvPicPr>
-        <p:blipFill>
-          <a:blip r:embed="rId3"/>
-          <a:stretch>
-            <a:fillRect/>
-          </a:stretch>
-        </p:blipFill>
-        <p:spPr>
-          <a:xfrm>
-            <a:off x="8491118" y="2062886"/>
-            <a:ext cx="263347" cy="263347"/>
-          </a:xfrm>
-          <a:prstGeom prst="rect">
-            <a:avLst/>
-          </a:prstGeom>
-        </p:spPr>
-      </p:pic>
-      <p:sp>
-        <p:nvSpPr>
-          <p:cNvPr id="19" name="Text 14"/>
-          <p:cNvSpPr/>
-          <p:nvPr/>
-        </p:nvSpPr>
-        <p:spPr>
-          <a:xfrm>
-            <a:off x="8348472" y="2606040"/>
-            <a:ext cx="3063240" cy="457200"/>
-          </a:xfrm>
-          <a:prstGeom prst="rect">
-            <a:avLst/>
-          </a:prstGeom>
-          <a:noFill/>
-          <a:ln/>
-        </p:spPr>
-        <p:txBody>
-          <a:bodyPr wrap="square" lIns="0" tIns="0" rIns="0" bIns="0" rtlCol="0" anchor="ctr"/>
-          <a:lstStyle/>
-          <a:p>
-            <a:pPr indent="0" marL="0">
-              <a:buNone/>
-            </a:pPr>
-            <a:r>
-              <a:rPr lang="en-US" sz="1500" b="1" dirty="0">
-                <a:solidFill>
-                  <a:srgbClr val="2E7D5B"/>
-                </a:solidFill>
-                <a:latin typeface="Calibri" pitchFamily="34" charset="0"/>
-                <a:ea typeface="Calibri" pitchFamily="34" charset="-122"/>
-                <a:cs typeface="Calibri" pitchFamily="34" charset="-120"/>
-              </a:rPr>
-              <a:t>For everyone</a:t>
-            </a:r>
-            <a:endParaRPr lang="en-US" sz="1500" dirty="0"/>
-          </a:p>
-        </p:txBody>
-      </p:sp>
-      <p:sp>
-        <p:nvSpPr>
-          <p:cNvPr id="20" name="Text 15"/>
-          <p:cNvSpPr/>
-          <p:nvPr/>
-        </p:nvSpPr>
-        <p:spPr>
-          <a:xfrm>
-            <a:off x="8348472" y="3108960"/>
-            <a:ext cx="3063240" cy="2103120"/>
-          </a:xfrm>
-          <a:prstGeom prst="rect">
-            <a:avLst/>
-          </a:prstGeom>
-          <a:noFill/>
-          <a:ln/>
-        </p:spPr>
-        <p:txBody>
-          <a:bodyPr wrap="square" lIns="0" tIns="0" rIns="0" bIns="0" rtlCol="0" anchor="ctr"/>
-          <a:lstStyle/>
-          <a:p>
-            <a:pPr indent="0" marL="0">
-              <a:buNone/>
-            </a:pPr>
-            <a:r>
-              <a:rPr lang="en-US" sz="1200" dirty="0">
-                <a:solidFill>
-                  <a:srgbClr val="1B2440"/>
-                </a:solidFill>
-                <a:latin typeface="Calibri" pitchFamily="34" charset="0"/>
-                <a:ea typeface="Calibri" pitchFamily="34" charset="-122"/>
-                <a:cs typeface="Calibri" pitchFamily="34" charset="-120"/>
-              </a:rPr>
-              <a:t>Nothing about headcount is decided or urgent right now. As things become clearer, we'll say so — plainly and early, not as a surprise later.</a:t>
-            </a:r>
-            <a:endParaRPr lang="en-US" sz="1200" dirty="0"/>
+              <a:t>than let people guess.</a:t>
+            </a:r>
+            <a:endParaRPr lang="en-US" sz="1350" dirty="0"/>
           </a:p>
         </p:txBody>
       </p:sp>
@@ -6185,6 +6482,647 @@
 <file path=ppt/slides/slide15.xml><?xml version="1.0" encoding="utf-8"?>
 <p:sld xmlns:a="http://schemas.openxmlformats.org/drawingml/2006/main" xmlns:r="http://schemas.openxmlformats.org/officeDocument/2006/relationships" xmlns:p="http://schemas.openxmlformats.org/presentationml/2006/main">
   <p:cSld name="Slide 15">
+    <p:bg>
+      <p:bgPr>
+        <a:solidFill>
+          <a:srgbClr val="FFFFFF"/>
+        </a:solidFill>
+      </p:bgPr>
+    </p:bg>
+    <p:spTree>
+      <p:nvGrpSpPr>
+        <p:cNvPr id="1" name=""/>
+        <p:cNvGrpSpPr/>
+        <p:nvPr/>
+      </p:nvGrpSpPr>
+      <p:grpSpPr>
+        <a:xfrm>
+          <a:off x="0" y="0"/>
+          <a:ext cx="0" cy="0"/>
+          <a:chOff x="0" y="0"/>
+          <a:chExt cx="0" cy="0"/>
+        </a:xfrm>
+      </p:grpSpPr>
+      <p:sp>
+        <p:nvSpPr>
+          <p:cNvPr id="2" name="Text 0"/>
+          <p:cNvSpPr/>
+          <p:nvPr/>
+        </p:nvSpPr>
+        <p:spPr>
+          <a:xfrm>
+            <a:off x="548640" y="6473952"/>
+            <a:ext cx="5029200" cy="274320"/>
+          </a:xfrm>
+          <a:prstGeom prst="rect">
+            <a:avLst/>
+          </a:prstGeom>
+          <a:noFill/>
+          <a:ln/>
+        </p:spPr>
+        <p:txBody>
+          <a:bodyPr wrap="square" lIns="0" tIns="0" rIns="0" bIns="0" rtlCol="0" anchor="ctr"/>
+          <a:lstStyle/>
+          <a:p>
+            <a:pPr algn="l" indent="0" marL="0">
+              <a:buNone/>
+            </a:pPr>
+            <a:r>
+              <a:rPr lang="en-US" sz="900" dirty="0">
+                <a:solidFill>
+                  <a:srgbClr val="5A6B8C"/>
+                </a:solidFill>
+                <a:latin typeface="Calibri" pitchFamily="34" charset="0"/>
+                <a:ea typeface="Calibri" pitchFamily="34" charset="-122"/>
+                <a:cs typeface="Calibri" pitchFamily="34" charset="-120"/>
+              </a:rPr>
+              <a:t>Internet-First, Airgap-Final — Team Edition</a:t>
+            </a:r>
+            <a:endParaRPr lang="en-US" sz="900" dirty="0"/>
+          </a:p>
+        </p:txBody>
+      </p:sp>
+      <p:sp>
+        <p:nvSpPr>
+          <p:cNvPr id="3" name="Text 1"/>
+          <p:cNvSpPr/>
+          <p:nvPr/>
+        </p:nvSpPr>
+        <p:spPr>
+          <a:xfrm>
+            <a:off x="11094415" y="6473952"/>
+            <a:ext cx="548640" cy="274320"/>
+          </a:xfrm>
+          <a:prstGeom prst="rect">
+            <a:avLst/>
+          </a:prstGeom>
+          <a:noFill/>
+          <a:ln/>
+        </p:spPr>
+        <p:txBody>
+          <a:bodyPr wrap="square" lIns="0" tIns="0" rIns="0" bIns="0" rtlCol="0" anchor="ctr"/>
+          <a:lstStyle/>
+          <a:p>
+            <a:pPr algn="r" indent="0" marL="0">
+              <a:buNone/>
+            </a:pPr>
+            <a:r>
+              <a:rPr lang="en-US" sz="900" dirty="0">
+                <a:solidFill>
+                  <a:srgbClr val="5A6B8C"/>
+                </a:solidFill>
+                <a:latin typeface="Calibri" pitchFamily="34" charset="0"/>
+                <a:ea typeface="Calibri" pitchFamily="34" charset="-122"/>
+                <a:cs typeface="Calibri" pitchFamily="34" charset="-120"/>
+              </a:rPr>
+              <a:t>15</a:t>
+            </a:r>
+            <a:endParaRPr lang="en-US" sz="900" dirty="0"/>
+          </a:p>
+        </p:txBody>
+      </p:sp>
+      <p:sp>
+        <p:nvSpPr>
+          <p:cNvPr id="4" name="Text 2"/>
+          <p:cNvSpPr/>
+          <p:nvPr/>
+        </p:nvSpPr>
+        <p:spPr>
+          <a:xfrm>
+            <a:off x="548640" y="384048"/>
+            <a:ext cx="11094415" cy="274320"/>
+          </a:xfrm>
+          <a:prstGeom prst="rect">
+            <a:avLst/>
+          </a:prstGeom>
+          <a:noFill/>
+          <a:ln/>
+        </p:spPr>
+        <p:txBody>
+          <a:bodyPr wrap="square" lIns="0" tIns="0" rIns="0" bIns="0" rtlCol="0" anchor="ctr"/>
+          <a:lstStyle/>
+          <a:p>
+            <a:pPr indent="0" marL="0">
+              <a:buNone/>
+            </a:pPr>
+            <a:r>
+              <a:rPr lang="en-US" sz="1200" b="1" spc="300" kern="0" dirty="0">
+                <a:solidFill>
+                  <a:srgbClr val="5A6B8C"/>
+                </a:solidFill>
+                <a:latin typeface="Calibri" pitchFamily="34" charset="0"/>
+                <a:ea typeface="Calibri" pitchFamily="34" charset="-122"/>
+                <a:cs typeface="Calibri" pitchFamily="34" charset="-120"/>
+              </a:rPr>
+              <a:t>BEING STRAIGHT ABOUT THE PEOPLE SIDE</a:t>
+            </a:r>
+            <a:endParaRPr lang="en-US" sz="1200" dirty="0"/>
+          </a:p>
+        </p:txBody>
+      </p:sp>
+      <p:sp>
+        <p:nvSpPr>
+          <p:cNvPr id="5" name="Text 3"/>
+          <p:cNvSpPr/>
+          <p:nvPr/>
+        </p:nvSpPr>
+        <p:spPr>
+          <a:xfrm>
+            <a:off x="548640" y="658368"/>
+            <a:ext cx="11094415" cy="621792"/>
+          </a:xfrm>
+          <a:prstGeom prst="rect">
+            <a:avLst/>
+          </a:prstGeom>
+          <a:noFill/>
+          <a:ln/>
+        </p:spPr>
+        <p:txBody>
+          <a:bodyPr wrap="square" lIns="0" tIns="0" rIns="0" bIns="0" rtlCol="0" anchor="t"/>
+          <a:lstStyle/>
+          <a:p>
+            <a:pPr indent="0" marL="0">
+              <a:buNone/>
+            </a:pPr>
+            <a:r>
+              <a:rPr lang="en-US" sz="2800" b="1" dirty="0">
+                <a:solidFill>
+                  <a:srgbClr val="1E2761"/>
+                </a:solidFill>
+                <a:latin typeface="Cambria" pitchFamily="34" charset="0"/>
+                <a:ea typeface="Cambria" pitchFamily="34" charset="-122"/>
+                <a:cs typeface="Cambria" pitchFamily="34" charset="-120"/>
+              </a:rPr>
+              <a:t>This changes roles — let's talk about it early and honestly</a:t>
+            </a:r>
+            <a:endParaRPr lang="en-US" sz="2800" dirty="0"/>
+          </a:p>
+        </p:txBody>
+      </p:sp>
+      <p:sp>
+        <p:nvSpPr>
+          <p:cNvPr id="6" name="Shape 4"/>
+          <p:cNvSpPr/>
+          <p:nvPr/>
+        </p:nvSpPr>
+        <p:spPr>
+          <a:xfrm>
+            <a:off x="548640" y="1691640"/>
+            <a:ext cx="3520440" cy="3657600"/>
+          </a:xfrm>
+          <a:prstGeom prst="roundRect">
+            <a:avLst>
+              <a:gd name="adj" fmla="val 2338"/>
+            </a:avLst>
+          </a:prstGeom>
+          <a:solidFill>
+            <a:srgbClr val="EDF3FC"/>
+          </a:solidFill>
+          <a:ln/>
+          <a:effectLst>
+            <a:outerShdw sx="100000" sy="100000" kx="0" ky="0" algn="bl" rotWithShape="0" blurRad="76200" dist="12700" dir="5400000">
+              <a:srgbClr val="9AA7C4">
+                <a:alpha val="22000"/>
+              </a:srgbClr>
+            </a:outerShdw>
+          </a:effectLst>
+        </p:spPr>
+      </p:sp>
+      <p:sp>
+        <p:nvSpPr>
+          <p:cNvPr id="7" name="Shape 5"/>
+          <p:cNvSpPr/>
+          <p:nvPr/>
+        </p:nvSpPr>
+        <p:spPr>
+          <a:xfrm>
+            <a:off x="777240" y="1920240"/>
+            <a:ext cx="548640" cy="548640"/>
+          </a:xfrm>
+          <a:prstGeom prst="ellipse">
+            <a:avLst/>
+          </a:prstGeom>
+          <a:solidFill>
+            <a:srgbClr val="1E2761"/>
+          </a:solidFill>
+          <a:ln/>
+        </p:spPr>
+      </p:sp>
+      <p:pic>
+        <p:nvPicPr>
+          <p:cNvPr id="8" name="Image 0" descr="preencoded.png">    </p:cNvPr>
+          <p:cNvPicPr>
+            <a:picLocks noChangeAspect="1"/>
+          </p:cNvPicPr>
+          <p:nvPr/>
+        </p:nvPicPr>
+        <p:blipFill>
+          <a:blip r:embed="rId1"/>
+          <a:stretch>
+            <a:fillRect/>
+          </a:stretch>
+        </p:blipFill>
+        <p:spPr>
+          <a:xfrm>
+            <a:off x="919886" y="2062886"/>
+            <a:ext cx="263347" cy="263347"/>
+          </a:xfrm>
+          <a:prstGeom prst="rect">
+            <a:avLst/>
+          </a:prstGeom>
+        </p:spPr>
+      </p:pic>
+      <p:sp>
+        <p:nvSpPr>
+          <p:cNvPr id="9" name="Text 6"/>
+          <p:cNvSpPr/>
+          <p:nvPr/>
+        </p:nvSpPr>
+        <p:spPr>
+          <a:xfrm>
+            <a:off x="777240" y="2606040"/>
+            <a:ext cx="3063240" cy="457200"/>
+          </a:xfrm>
+          <a:prstGeom prst="rect">
+            <a:avLst/>
+          </a:prstGeom>
+          <a:noFill/>
+          <a:ln/>
+        </p:spPr>
+        <p:txBody>
+          <a:bodyPr wrap="square" lIns="0" tIns="0" rIns="0" bIns="0" rtlCol="0" anchor="ctr"/>
+          <a:lstStyle/>
+          <a:p>
+            <a:pPr indent="0" marL="0">
+              <a:buNone/>
+            </a:pPr>
+            <a:r>
+              <a:rPr lang="en-US" sz="1500" b="1" dirty="0">
+                <a:solidFill>
+                  <a:srgbClr val="1E2761"/>
+                </a:solidFill>
+                <a:latin typeface="Calibri" pitchFamily="34" charset="0"/>
+                <a:ea typeface="Calibri" pitchFamily="34" charset="-122"/>
+                <a:cs typeface="Calibri" pitchFamily="34" charset="-120"/>
+              </a:rPr>
+              <a:t>For developers</a:t>
+            </a:r>
+            <a:endParaRPr lang="en-US" sz="1500" dirty="0"/>
+          </a:p>
+        </p:txBody>
+      </p:sp>
+      <p:sp>
+        <p:nvSpPr>
+          <p:cNvPr id="10" name="Text 7"/>
+          <p:cNvSpPr/>
+          <p:nvPr/>
+        </p:nvSpPr>
+        <p:spPr>
+          <a:xfrm>
+            <a:off x="777240" y="3108960"/>
+            <a:ext cx="3063240" cy="2103120"/>
+          </a:xfrm>
+          <a:prstGeom prst="rect">
+            <a:avLst/>
+          </a:prstGeom>
+          <a:noFill/>
+          <a:ln/>
+        </p:spPr>
+        <p:txBody>
+          <a:bodyPr wrap="square" lIns="0" tIns="0" rIns="0" bIns="0" rtlCol="0" anchor="ctr"/>
+          <a:lstStyle/>
+          <a:p>
+            <a:pPr indent="0" marL="0">
+              <a:buNone/>
+            </a:pPr>
+            <a:r>
+              <a:rPr lang="en-US" sz="1200" dirty="0">
+                <a:solidFill>
+                  <a:srgbClr val="1B2440"/>
+                </a:solidFill>
+                <a:latin typeface="Calibri" pitchFamily="34" charset="0"/>
+                <a:ea typeface="Calibri" pitchFamily="34" charset="-122"/>
+                <a:cs typeface="Calibri" pitchFamily="34" charset="-120"/>
+              </a:rPr>
+              <a:t>More time on the interesting problems, less on environment friction and waiting on access or pipelines. The tools handle more of the repetitive part so we can focus on what actually needs a person.</a:t>
+            </a:r>
+            <a:endParaRPr lang="en-US" sz="1200" dirty="0"/>
+          </a:p>
+        </p:txBody>
+      </p:sp>
+      <p:sp>
+        <p:nvSpPr>
+          <p:cNvPr id="11" name="Shape 8"/>
+          <p:cNvSpPr/>
+          <p:nvPr/>
+        </p:nvSpPr>
+        <p:spPr>
+          <a:xfrm>
+            <a:off x="4334256" y="1691640"/>
+            <a:ext cx="3520440" cy="3657600"/>
+          </a:xfrm>
+          <a:prstGeom prst="roundRect">
+            <a:avLst>
+              <a:gd name="adj" fmla="val 2338"/>
+            </a:avLst>
+          </a:prstGeom>
+          <a:solidFill>
+            <a:srgbClr val="EDF3FC"/>
+          </a:solidFill>
+          <a:ln/>
+          <a:effectLst>
+            <a:outerShdw sx="100000" sy="100000" kx="0" ky="0" algn="bl" rotWithShape="0" blurRad="76200" dist="12700" dir="5400000">
+              <a:srgbClr val="9AA7C4">
+                <a:alpha val="22000"/>
+              </a:srgbClr>
+            </a:outerShdw>
+          </a:effectLst>
+        </p:spPr>
+      </p:sp>
+      <p:sp>
+        <p:nvSpPr>
+          <p:cNvPr id="12" name="Shape 9"/>
+          <p:cNvSpPr/>
+          <p:nvPr/>
+        </p:nvSpPr>
+        <p:spPr>
+          <a:xfrm>
+            <a:off x="4562856" y="1920240"/>
+            <a:ext cx="548640" cy="548640"/>
+          </a:xfrm>
+          <a:prstGeom prst="ellipse">
+            <a:avLst/>
+          </a:prstGeom>
+          <a:solidFill>
+            <a:srgbClr val="1E2761"/>
+          </a:solidFill>
+          <a:ln/>
+        </p:spPr>
+      </p:sp>
+      <p:pic>
+        <p:nvPicPr>
+          <p:cNvPr id="13" name="Image 1" descr="preencoded.png">    </p:cNvPr>
+          <p:cNvPicPr>
+            <a:picLocks noChangeAspect="1"/>
+          </p:cNvPicPr>
+          <p:nvPr/>
+        </p:nvPicPr>
+        <p:blipFill>
+          <a:blip r:embed="rId2"/>
+          <a:stretch>
+            <a:fillRect/>
+          </a:stretch>
+        </p:blipFill>
+        <p:spPr>
+          <a:xfrm>
+            <a:off x="4705502" y="2062886"/>
+            <a:ext cx="263347" cy="263347"/>
+          </a:xfrm>
+          <a:prstGeom prst="rect">
+            <a:avLst/>
+          </a:prstGeom>
+        </p:spPr>
+      </p:pic>
+      <p:sp>
+        <p:nvSpPr>
+          <p:cNvPr id="14" name="Text 10"/>
+          <p:cNvSpPr/>
+          <p:nvPr/>
+        </p:nvSpPr>
+        <p:spPr>
+          <a:xfrm>
+            <a:off x="4562856" y="2606040"/>
+            <a:ext cx="3063240" cy="457200"/>
+          </a:xfrm>
+          <a:prstGeom prst="rect">
+            <a:avLst/>
+          </a:prstGeom>
+          <a:noFill/>
+          <a:ln/>
+        </p:spPr>
+        <p:txBody>
+          <a:bodyPr wrap="square" lIns="0" tIns="0" rIns="0" bIns="0" rtlCol="0" anchor="ctr"/>
+          <a:lstStyle/>
+          <a:p>
+            <a:pPr indent="0" marL="0">
+              <a:buNone/>
+            </a:pPr>
+            <a:r>
+              <a:rPr lang="en-US" sz="1500" b="1" dirty="0">
+                <a:solidFill>
+                  <a:srgbClr val="1E2761"/>
+                </a:solidFill>
+                <a:latin typeface="Calibri" pitchFamily="34" charset="0"/>
+                <a:ea typeface="Calibri" pitchFamily="34" charset="-122"/>
+                <a:cs typeface="Calibri" pitchFamily="34" charset="-120"/>
+              </a:rPr>
+              <a:t>For contractors</a:t>
+            </a:r>
+            <a:endParaRPr lang="en-US" sz="1500" dirty="0"/>
+          </a:p>
+        </p:txBody>
+      </p:sp>
+      <p:sp>
+        <p:nvSpPr>
+          <p:cNvPr id="15" name="Text 11"/>
+          <p:cNvSpPr/>
+          <p:nvPr/>
+        </p:nvSpPr>
+        <p:spPr>
+          <a:xfrm>
+            <a:off x="4562856" y="3108960"/>
+            <a:ext cx="3063240" cy="2103120"/>
+          </a:xfrm>
+          <a:prstGeom prst="rect">
+            <a:avLst/>
+          </a:prstGeom>
+          <a:noFill/>
+          <a:ln/>
+        </p:spPr>
+        <p:txBody>
+          <a:bodyPr wrap="square" lIns="0" tIns="0" rIns="0" bIns="0" rtlCol="0" anchor="ctr"/>
+          <a:lstStyle/>
+          <a:p>
+            <a:pPr indent="0" marL="0">
+              <a:buNone/>
+            </a:pPr>
+            <a:r>
+              <a:rPr lang="en-US" sz="1200" dirty="0">
+                <a:solidFill>
+                  <a:srgbClr val="1B2440"/>
+                </a:solidFill>
+                <a:latin typeface="Calibri" pitchFamily="34" charset="0"/>
+                <a:ea typeface="Calibri" pitchFamily="34" charset="-122"/>
+                <a:cs typeface="Calibri" pitchFamily="34" charset="-120"/>
+              </a:rPr>
+              <a:t>Some roles shift toward integration, environment testing, and configuration management — the ingress side of the loop, and genuinely valuable, hands-on work, not busywork. Where useful, some may also move toward more BA-style spec work.</a:t>
+            </a:r>
+            <a:endParaRPr lang="en-US" sz="1200" dirty="0"/>
+          </a:p>
+        </p:txBody>
+      </p:sp>
+      <p:sp>
+        <p:nvSpPr>
+          <p:cNvPr id="16" name="Shape 12"/>
+          <p:cNvSpPr/>
+          <p:nvPr/>
+        </p:nvSpPr>
+        <p:spPr>
+          <a:xfrm>
+            <a:off x="8119872" y="1691640"/>
+            <a:ext cx="3520440" cy="3657600"/>
+          </a:xfrm>
+          <a:prstGeom prst="roundRect">
+            <a:avLst>
+              <a:gd name="adj" fmla="val 2338"/>
+            </a:avLst>
+          </a:prstGeom>
+          <a:solidFill>
+            <a:srgbClr val="EAF4EF"/>
+          </a:solidFill>
+          <a:ln/>
+          <a:effectLst>
+            <a:outerShdw sx="100000" sy="100000" kx="0" ky="0" algn="bl" rotWithShape="0" blurRad="76200" dist="12700" dir="5400000">
+              <a:srgbClr val="9AA7C4">
+                <a:alpha val="22000"/>
+              </a:srgbClr>
+            </a:outerShdw>
+          </a:effectLst>
+        </p:spPr>
+      </p:sp>
+      <p:sp>
+        <p:nvSpPr>
+          <p:cNvPr id="17" name="Shape 13"/>
+          <p:cNvSpPr/>
+          <p:nvPr/>
+        </p:nvSpPr>
+        <p:spPr>
+          <a:xfrm>
+            <a:off x="8348472" y="1920240"/>
+            <a:ext cx="548640" cy="548640"/>
+          </a:xfrm>
+          <a:prstGeom prst="ellipse">
+            <a:avLst/>
+          </a:prstGeom>
+          <a:solidFill>
+            <a:srgbClr val="2E7D5B"/>
+          </a:solidFill>
+          <a:ln/>
+        </p:spPr>
+      </p:sp>
+      <p:pic>
+        <p:nvPicPr>
+          <p:cNvPr id="18" name="Image 2" descr="preencoded.png">    </p:cNvPr>
+          <p:cNvPicPr>
+            <a:picLocks noChangeAspect="1"/>
+          </p:cNvPicPr>
+          <p:nvPr/>
+        </p:nvPicPr>
+        <p:blipFill>
+          <a:blip r:embed="rId3"/>
+          <a:stretch>
+            <a:fillRect/>
+          </a:stretch>
+        </p:blipFill>
+        <p:spPr>
+          <a:xfrm>
+            <a:off x="8491118" y="2062886"/>
+            <a:ext cx="263347" cy="263347"/>
+          </a:xfrm>
+          <a:prstGeom prst="rect">
+            <a:avLst/>
+          </a:prstGeom>
+        </p:spPr>
+      </p:pic>
+      <p:sp>
+        <p:nvSpPr>
+          <p:cNvPr id="19" name="Text 14"/>
+          <p:cNvSpPr/>
+          <p:nvPr/>
+        </p:nvSpPr>
+        <p:spPr>
+          <a:xfrm>
+            <a:off x="8348472" y="2606040"/>
+            <a:ext cx="3063240" cy="457200"/>
+          </a:xfrm>
+          <a:prstGeom prst="rect">
+            <a:avLst/>
+          </a:prstGeom>
+          <a:noFill/>
+          <a:ln/>
+        </p:spPr>
+        <p:txBody>
+          <a:bodyPr wrap="square" lIns="0" tIns="0" rIns="0" bIns="0" rtlCol="0" anchor="ctr"/>
+          <a:lstStyle/>
+          <a:p>
+            <a:pPr indent="0" marL="0">
+              <a:buNone/>
+            </a:pPr>
+            <a:r>
+              <a:rPr lang="en-US" sz="1500" b="1" dirty="0">
+                <a:solidFill>
+                  <a:srgbClr val="2E7D5B"/>
+                </a:solidFill>
+                <a:latin typeface="Calibri" pitchFamily="34" charset="0"/>
+                <a:ea typeface="Calibri" pitchFamily="34" charset="-122"/>
+                <a:cs typeface="Calibri" pitchFamily="34" charset="-120"/>
+              </a:rPr>
+              <a:t>For everyone</a:t>
+            </a:r>
+            <a:endParaRPr lang="en-US" sz="1500" dirty="0"/>
+          </a:p>
+        </p:txBody>
+      </p:sp>
+      <p:sp>
+        <p:nvSpPr>
+          <p:cNvPr id="20" name="Text 15"/>
+          <p:cNvSpPr/>
+          <p:nvPr/>
+        </p:nvSpPr>
+        <p:spPr>
+          <a:xfrm>
+            <a:off x="8348472" y="3108960"/>
+            <a:ext cx="3063240" cy="2103120"/>
+          </a:xfrm>
+          <a:prstGeom prst="rect">
+            <a:avLst/>
+          </a:prstGeom>
+          <a:noFill/>
+          <a:ln/>
+        </p:spPr>
+        <p:txBody>
+          <a:bodyPr wrap="square" lIns="0" tIns="0" rIns="0" bIns="0" rtlCol="0" anchor="ctr"/>
+          <a:lstStyle/>
+          <a:p>
+            <a:pPr indent="0" marL="0">
+              <a:buNone/>
+            </a:pPr>
+            <a:r>
+              <a:rPr lang="en-US" sz="1200" dirty="0">
+                <a:solidFill>
+                  <a:srgbClr val="1B2440"/>
+                </a:solidFill>
+                <a:latin typeface="Calibri" pitchFamily="34" charset="0"/>
+                <a:ea typeface="Calibri" pitchFamily="34" charset="-122"/>
+                <a:cs typeface="Calibri" pitchFamily="34" charset="-120"/>
+              </a:rPr>
+              <a:t>Phase 3 means a real reduction in contractor headcount, eventually — we don't know when, but we're naming it now rather than waiting. Phases 1 and 2 exist partly to make that transition possible without anyone being blindsided.</a:t>
+            </a:r>
+            <a:endParaRPr lang="en-US" sz="1200" dirty="0"/>
+          </a:p>
+        </p:txBody>
+      </p:sp>
+    </p:spTree>
+  </p:cSld>
+  <p:clrMapOvr>
+    <a:masterClrMapping/>
+  </p:clrMapOvr>
+</p:sld>
+</file>
+
+<file path=ppt/slides/slide16.xml><?xml version="1.0" encoding="utf-8"?>
+<p:sld xmlns:a="http://schemas.openxmlformats.org/drawingml/2006/main" xmlns:r="http://schemas.openxmlformats.org/officeDocument/2006/relationships" xmlns:p="http://schemas.openxmlformats.org/presentationml/2006/main">
+  <p:cSld name="Slide 16">
     <p:bg>
       <p:bgPr>
         <a:solidFill>
@@ -6278,7 +7216,7 @@
                 <a:ea typeface="Calibri" pitchFamily="34" charset="-122"/>
                 <a:cs typeface="Calibri" pitchFamily="34" charset="-120"/>
               </a:rPr>
-              <a:t>15</a:t>
+              <a:t>16</a:t>
             </a:r>
             <a:endParaRPr lang="en-US" sz="900" dirty="0"/>
           </a:p>
@@ -10902,7 +11840,7 @@
                 <a:ea typeface="Calibri" pitchFamily="34" charset="-122"/>
                 <a:cs typeface="Calibri" pitchFamily="34" charset="-120"/>
               </a:rPr>
-              <a:t>ELEVATING “LOOKING AT TREES” TO REAL C3</a:t>
+              <a:t>THE RARE OCCASION WE BRING CODE OUT</a:t>
             </a:r>
             <a:endParaRPr lang="en-US" sz="1200" dirty="0"/>
           </a:p>
@@ -10941,7 +11879,7 @@
                 <a:ea typeface="Cambria" pitchFamily="34" charset="-122"/>
                 <a:cs typeface="Cambria" pitchFamily="34" charset="-120"/>
               </a:rPr>
-              <a:t>The code doesn't care which company it's for — the data does</a:t>
+              <a:t>How code occasionally leaves Confi</a:t>
             </a:r>
             <a:endParaRPr lang="en-US" sz="2800" dirty="0"/>
           </a:p>
@@ -10949,219 +11887,22 @@
       </p:sp>
       <p:sp>
         <p:nvSpPr>
-          <p:cNvPr id="6" name="Text 4"/>
-          <p:cNvSpPr/>
-          <p:nvPr/>
-        </p:nvSpPr>
-        <p:spPr>
-          <a:xfrm>
-            <a:off x="548640" y="1737360"/>
-            <a:ext cx="5120640" cy="4114800"/>
-          </a:xfrm>
-          <a:prstGeom prst="rect">
-            <a:avLst/>
-          </a:prstGeom>
-          <a:noFill/>
-          <a:ln/>
-        </p:spPr>
-        <p:txBody>
-          <a:bodyPr wrap="square" lIns="0" tIns="0" rIns="0" bIns="0" rtlCol="0" anchor="ctr"/>
-          <a:lstStyle/>
-          <a:p>
-            <a:pPr indent="0" marL="0">
-              <a:spcAft>
-                <a:spcPts val="500"/>
-              </a:spcAft>
-              <a:buNone/>
-            </a:pPr>
-            <a:r>
-              <a:rPr lang="en-US" sz="1350" dirty="0">
-                <a:solidFill>
-                  <a:srgbClr val="1B2440"/>
-                </a:solidFill>
-                <a:latin typeface="Calibri" pitchFamily="34" charset="0"/>
-                <a:ea typeface="Calibri" pitchFamily="34" charset="-122"/>
-                <a:cs typeface="Calibri" pitchFamily="34" charset="-120"/>
-              </a:rPr>
-              <a:t>Whether it's Looking at Trees or the real thing, the components, forms, validation logic, and flows are exactly the same code either way.</a:t>
-            </a:r>
-            <a:endParaRPr lang="en-US" sz="1350" dirty="0"/>
-          </a:p>
-          <a:p>
-            <a:pPr indent="0" marL="0">
-              <a:spcAft>
-                <a:spcPts val="500"/>
-              </a:spcAft>
-              <a:buNone/>
-            </a:pPr>
-            <a:endParaRPr lang="en-US" sz="1350" dirty="0"/>
-          </a:p>
-          <a:p>
-            <a:pPr indent="0" marL="0">
-              <a:spcAft>
-                <a:spcPts val="500"/>
-              </a:spcAft>
-              <a:buNone/>
-            </a:pPr>
-            <a:r>
-              <a:rPr lang="en-US" sz="1350" dirty="0">
-                <a:solidFill>
-                  <a:srgbClr val="1B2440"/>
-                </a:solidFill>
-                <a:latin typeface="Calibri" pitchFamily="34" charset="0"/>
-                <a:ea typeface="Calibri" pitchFamily="34" charset="-122"/>
-                <a:cs typeface="Calibri" pitchFamily="34" charset="-120"/>
-              </a:rPr>
-              <a:t>What's actually sensitive is almost always the </a:t>
-            </a:r>
-            <a:pPr indent="0" marL="0">
-              <a:spcAft>
-                <a:spcPts val="500"/>
-              </a:spcAft>
-              <a:buNone/>
-            </a:pPr>
-            <a:r>
-              <a:rPr lang="en-US" sz="1350" b="1" dirty="0">
-                <a:solidFill>
-                  <a:srgbClr val="1E2761"/>
-                </a:solidFill>
-                <a:latin typeface="Calibri" pitchFamily="34" charset="0"/>
-                <a:ea typeface="Calibri" pitchFamily="34" charset="-122"/>
-                <a:cs typeface="Calibri" pitchFamily="34" charset="-120"/>
-              </a:rPr>
-              <a:t>data</a:t>
-            </a:r>
-            <a:pPr indent="0" marL="0">
-              <a:spcAft>
-                <a:spcPts val="500"/>
-              </a:spcAft>
-              <a:buNone/>
-            </a:pPr>
-            <a:r>
-              <a:rPr lang="en-US" sz="1350" dirty="0">
-                <a:solidFill>
-                  <a:srgbClr val="1B2440"/>
-                </a:solidFill>
-                <a:latin typeface="Calibri" pitchFamily="34" charset="0"/>
-                <a:ea typeface="Calibri" pitchFamily="34" charset="-122"/>
-                <a:cs typeface="Calibri" pitchFamily="34" charset="-120"/>
-              </a:rPr>
-              <a:t> underneath — real customer records, real figures, real identifiers — plus, occasionally, one or two genuinely sensitive rule values.</a:t>
-            </a:r>
-            <a:endParaRPr lang="en-US" sz="1350" dirty="0"/>
-          </a:p>
-          <a:p>
-            <a:pPr indent="0" marL="0">
-              <a:spcAft>
-                <a:spcPts val="500"/>
-              </a:spcAft>
-              <a:buNone/>
-            </a:pPr>
-            <a:endParaRPr lang="en-US" sz="1350" dirty="0"/>
-          </a:p>
-          <a:p>
-            <a:pPr indent="0" marL="0">
-              <a:spcAft>
-                <a:spcPts val="500"/>
-              </a:spcAft>
-              <a:buNone/>
-            </a:pPr>
-            <a:r>
-              <a:rPr lang="en-US" sz="1350" dirty="0">
-                <a:solidFill>
-                  <a:srgbClr val="1B2440"/>
-                </a:solidFill>
-                <a:latin typeface="Calibri" pitchFamily="34" charset="0"/>
-                <a:ea typeface="Calibri" pitchFamily="34" charset="-122"/>
-                <a:cs typeface="Calibri" pitchFamily="34" charset="-120"/>
-              </a:rPr>
-              <a:t>So outside, the app runs on placeholder data (and placeholder values for the rare sensitive rule). Inside, we point it at the real data instead — closer to swapping an </a:t>
-            </a:r>
-            <a:pPr indent="0" marL="0">
-              <a:spcAft>
-                <a:spcPts val="500"/>
-              </a:spcAft>
-              <a:buNone/>
-            </a:pPr>
-            <a:r>
-              <a:rPr lang="en-US" sz="1350" dirty="0">
-                <a:solidFill>
-                  <a:srgbClr val="1E2761"/>
-                </a:solidFill>
-                <a:latin typeface="Courier New" pitchFamily="34" charset="0"/>
-                <a:ea typeface="Courier New" pitchFamily="34" charset="-122"/>
-                <a:cs typeface="Courier New" pitchFamily="34" charset="-120"/>
-              </a:rPr>
-              <a:t>.env</a:t>
-            </a:r>
-            <a:pPr indent="0" marL="0">
-              <a:spcAft>
-                <a:spcPts val="500"/>
-              </a:spcAft>
-              <a:buNone/>
-            </a:pPr>
-            <a:r>
-              <a:rPr lang="en-US" sz="1350" dirty="0">
-                <a:solidFill>
-                  <a:srgbClr val="1B2440"/>
-                </a:solidFill>
-                <a:latin typeface="Calibri" pitchFamily="34" charset="0"/>
-                <a:ea typeface="Calibri" pitchFamily="34" charset="-122"/>
-                <a:cs typeface="Calibri" pitchFamily="34" charset="-120"/>
-              </a:rPr>
-              <a:t> file than rewriting the app.</a:t>
-            </a:r>
-            <a:endParaRPr lang="en-US" sz="1350" dirty="0"/>
-          </a:p>
-          <a:p>
-            <a:pPr indent="0" marL="0">
-              <a:spcAft>
-                <a:spcPts val="500"/>
-              </a:spcAft>
-              <a:buNone/>
-            </a:pPr>
-            <a:endParaRPr lang="en-US" sz="1350" dirty="0"/>
-          </a:p>
-          <a:p>
-            <a:pPr indent="0" marL="0">
-              <a:spcAft>
-                <a:spcPts val="500"/>
-              </a:spcAft>
-              <a:buNone/>
-            </a:pPr>
-            <a:r>
-              <a:rPr lang="en-US" sz="1350" b="1" dirty="0">
-                <a:solidFill>
-                  <a:srgbClr val="2E7D5B"/>
-                </a:solidFill>
-                <a:latin typeface="Calibri" pitchFamily="34" charset="0"/>
-                <a:ea typeface="Calibri" pitchFamily="34" charset="-122"/>
-                <a:cs typeface="Calibri" pitchFamily="34" charset="-120"/>
-              </a:rPr>
-              <a:t>Some rules will be sensitive or complex enough that we just build them directly inside — that's completely fine. We'll flag those upfront, per feature, so nobody's surprised later.</a:t>
-            </a:r>
-            <a:endParaRPr lang="en-US" sz="1350" dirty="0"/>
-          </a:p>
-        </p:txBody>
-      </p:sp>
-      <p:sp>
-        <p:nvSpPr>
-          <p:cNvPr id="7" name="Shape 5"/>
-          <p:cNvSpPr/>
-          <p:nvPr/>
-        </p:nvSpPr>
-        <p:spPr>
-          <a:xfrm>
-            <a:off x="6126480" y="1737360"/>
-            <a:ext cx="5486400" cy="1874520"/>
+          <p:cNvPr id="6" name="Shape 4"/>
+          <p:cNvSpPr/>
+          <p:nvPr/>
+        </p:nvSpPr>
+        <p:spPr>
+          <a:xfrm>
+            <a:off x="682600" y="1828800"/>
+            <a:ext cx="2514600" cy="2651760"/>
           </a:xfrm>
           <a:prstGeom prst="roundRect">
             <a:avLst>
-              <a:gd name="adj" fmla="val 4390"/>
+              <a:gd name="adj" fmla="val 3273"/>
             </a:avLst>
           </a:prstGeom>
           <a:solidFill>
-            <a:srgbClr val="EAF4EF"/>
+            <a:srgbClr val="EDF3FC"/>
           </a:solidFill>
           <a:ln/>
           <a:effectLst>
@@ -11175,27 +11916,27 @@
       </p:sp>
       <p:sp>
         <p:nvSpPr>
-          <p:cNvPr id="8" name="Shape 6"/>
-          <p:cNvSpPr/>
-          <p:nvPr/>
-        </p:nvSpPr>
-        <p:spPr>
-          <a:xfrm>
-            <a:off x="6355080" y="1938528"/>
-            <a:ext cx="502920" cy="502920"/>
+          <p:cNvPr id="7" name="Shape 5"/>
+          <p:cNvSpPr/>
+          <p:nvPr/>
+        </p:nvSpPr>
+        <p:spPr>
+          <a:xfrm>
+            <a:off x="1619860" y="2084832"/>
+            <a:ext cx="640080" cy="640080"/>
           </a:xfrm>
           <a:prstGeom prst="ellipse">
             <a:avLst/>
           </a:prstGeom>
           <a:solidFill>
-            <a:srgbClr val="2E7D5B"/>
+            <a:srgbClr val="1E2761"/>
           </a:solidFill>
           <a:ln/>
         </p:spPr>
       </p:sp>
       <p:pic>
         <p:nvPicPr>
-          <p:cNvPr id="9" name="Image 0" descr="preencoded.png">    </p:cNvPr>
+          <p:cNvPr id="8" name="Image 0" descr="preencoded.png">    </p:cNvPr>
           <p:cNvPicPr>
             <a:picLocks noChangeAspect="1"/>
           </p:cNvPicPr>
@@ -11209,8 +11950,8 @@
         </p:blipFill>
         <p:spPr>
           <a:xfrm>
-            <a:off x="6485839" y="2069287"/>
-            <a:ext cx="241402" cy="241402"/>
+            <a:off x="1786280" y="2251253"/>
+            <a:ext cx="307238" cy="307238"/>
           </a:xfrm>
           <a:prstGeom prst="rect">
             <a:avLst/>
@@ -11219,40 +11960,147 @@
       </p:pic>
       <p:sp>
         <p:nvSpPr>
+          <p:cNvPr id="9" name="Text 6"/>
+          <p:cNvSpPr/>
+          <p:nvPr/>
+        </p:nvSpPr>
+        <p:spPr>
+          <a:xfrm>
+            <a:off x="774040" y="2880360"/>
+            <a:ext cx="2331720" cy="640080"/>
+          </a:xfrm>
+          <a:prstGeom prst="rect">
+            <a:avLst/>
+          </a:prstGeom>
+          <a:noFill/>
+          <a:ln/>
+        </p:spPr>
+        <p:txBody>
+          <a:bodyPr wrap="square" lIns="0" tIns="0" rIns="0" bIns="0" rtlCol="0" anchor="ctr"/>
+          <a:lstStyle/>
+          <a:p>
+            <a:pPr algn="ctr" indent="0" marL="0">
+              <a:buNone/>
+            </a:pPr>
+            <a:r>
+              <a:rPr lang="en-US" sz="1400" b="1" dirty="0">
+                <a:solidFill>
+                  <a:srgbClr val="1E2761"/>
+                </a:solidFill>
+                <a:latin typeface="Calibri" pitchFamily="34" charset="0"/>
+                <a:ea typeface="Calibri" pitchFamily="34" charset="-122"/>
+                <a:cs typeface="Calibri" pitchFamily="34" charset="-120"/>
+              </a:rPr>
+              <a:t>Decide what's</a:t>
+            </a:r>
+            <a:endParaRPr lang="en-US" sz="1400" dirty="0"/>
+          </a:p>
+          <a:p>
+            <a:pPr algn="ctr" indent="0" marL="0">
+              <a:buNone/>
+            </a:pPr>
+            <a:r>
+              <a:rPr lang="en-US" sz="1400" b="1" dirty="0">
+                <a:solidFill>
+                  <a:srgbClr val="1E2761"/>
+                </a:solidFill>
+                <a:latin typeface="Calibri" pitchFamily="34" charset="0"/>
+                <a:ea typeface="Calibri" pitchFamily="34" charset="-122"/>
+                <a:cs typeface="Calibri" pitchFamily="34" charset="-120"/>
+              </a:rPr>
+              <a:t>needed</a:t>
+            </a:r>
+            <a:endParaRPr lang="en-US" sz="1400" dirty="0"/>
+          </a:p>
+        </p:txBody>
+      </p:sp>
+      <p:sp>
+        <p:nvSpPr>
           <p:cNvPr id="10" name="Text 7"/>
           <p:cNvSpPr/>
           <p:nvPr/>
         </p:nvSpPr>
         <p:spPr>
           <a:xfrm>
-            <a:off x="6967728" y="1984248"/>
-            <a:ext cx="4480560" cy="365760"/>
-          </a:xfrm>
-          <a:prstGeom prst="rect">
-            <a:avLst/>
-          </a:prstGeom>
-          <a:noFill/>
-          <a:ln/>
-        </p:spPr>
-        <p:txBody>
-          <a:bodyPr wrap="square" lIns="0" tIns="0" rIns="0" bIns="0" rtlCol="0" anchor="ctr"/>
-          <a:lstStyle/>
-          <a:p>
-            <a:pPr indent="0" marL="0">
-              <a:buNone/>
-            </a:pPr>
-            <a:r>
-              <a:rPr lang="en-US" sz="1300" b="1" dirty="0">
-                <a:solidFill>
-                  <a:srgbClr val="2E7D5B"/>
-                </a:solidFill>
-                <a:latin typeface="Calibri" pitchFamily="34" charset="0"/>
-                <a:ea typeface="Calibri" pitchFamily="34" charset="-122"/>
-                <a:cs typeface="Calibri" pitchFamily="34" charset="-120"/>
-              </a:rPr>
-              <a:t>OUTSIDE — “Looking at Trees” data</a:t>
-            </a:r>
-            <a:endParaRPr lang="en-US" sz="1300" dirty="0"/>
+            <a:off x="792328" y="3566160"/>
+            <a:ext cx="2295144" cy="822960"/>
+          </a:xfrm>
+          <a:prstGeom prst="rect">
+            <a:avLst/>
+          </a:prstGeom>
+          <a:noFill/>
+          <a:ln/>
+        </p:spPr>
+        <p:txBody>
+          <a:bodyPr wrap="square" lIns="0" tIns="0" rIns="0" bIns="0" rtlCol="0" anchor="ctr"/>
+          <a:lstStyle/>
+          <a:p>
+            <a:pPr algn="ctr" indent="0" marL="0">
+              <a:buNone/>
+            </a:pPr>
+            <a:r>
+              <a:rPr lang="en-US" sz="1050" dirty="0">
+                <a:solidFill>
+                  <a:srgbClr val="1B2440"/>
+                </a:solidFill>
+                <a:latin typeface="Calibri" pitchFamily="34" charset="0"/>
+                <a:ea typeface="Calibri" pitchFamily="34" charset="-122"/>
+                <a:cs typeface="Calibri" pitchFamily="34" charset="-120"/>
+              </a:rPr>
+              <a:t>Almost always a lean</a:t>
+            </a:r>
+            <a:endParaRPr lang="en-US" sz="1050" dirty="0"/>
+          </a:p>
+          <a:p>
+            <a:pPr algn="ctr" indent="0" marL="0">
+              <a:buNone/>
+            </a:pPr>
+            <a:r>
+              <a:rPr lang="en-US" sz="1050" dirty="0">
+                <a:solidFill>
+                  <a:srgbClr val="1B2440"/>
+                </a:solidFill>
+                <a:latin typeface="Calibri" pitchFamily="34" charset="0"/>
+                <a:ea typeface="Calibri" pitchFamily="34" charset="-122"/>
+                <a:cs typeface="Calibri" pitchFamily="34" charset="-120"/>
+              </a:rPr>
+              <a:t>spec: routes, contracts,</a:t>
+            </a:r>
+            <a:endParaRPr lang="en-US" sz="1050" dirty="0"/>
+          </a:p>
+          <a:p>
+            <a:pPr algn="ctr" indent="0" marL="0">
+              <a:buNone/>
+            </a:pPr>
+            <a:r>
+              <a:rPr lang="en-US" sz="1050" dirty="0">
+                <a:solidFill>
+                  <a:srgbClr val="1B2440"/>
+                </a:solidFill>
+                <a:latin typeface="Calibri" pitchFamily="34" charset="0"/>
+                <a:ea typeface="Calibri" pitchFamily="34" charset="-122"/>
+                <a:cs typeface="Calibri" pitchFamily="34" charset="-120"/>
+              </a:rPr>
+              <a:t>structure — never a</a:t>
+            </a:r>
+            <a:endParaRPr lang="en-US" sz="1050" dirty="0"/>
+          </a:p>
+          <a:p>
+            <a:pPr algn="ctr" indent="0" marL="0">
+              <a:buNone/>
+            </a:pPr>
+            <a:r>
+              <a:rPr lang="en-US" sz="1050" dirty="0">
+                <a:solidFill>
+                  <a:srgbClr val="1B2440"/>
+                </a:solidFill>
+                <a:latin typeface="Calibri" pitchFamily="34" charset="0"/>
+                <a:ea typeface="Calibri" pitchFamily="34" charset="-122"/>
+                <a:cs typeface="Calibri" pitchFamily="34" charset="-120"/>
+              </a:rPr>
+              <a:t>full active repository</a:t>
+            </a:r>
+            <a:endParaRPr lang="en-US" sz="1050" dirty="0"/>
           </a:p>
         </p:txBody>
       </p:sp>
@@ -11264,47 +12112,8 @@
         </p:nvSpPr>
         <p:spPr>
           <a:xfrm>
-            <a:off x="6382512" y="2404872"/>
-            <a:ext cx="4974336" cy="1005840"/>
-          </a:xfrm>
-          <a:prstGeom prst="rect">
-            <a:avLst/>
-          </a:prstGeom>
-          <a:noFill/>
-          <a:ln/>
-        </p:spPr>
-        <p:txBody>
-          <a:bodyPr wrap="square" lIns="0" tIns="0" rIns="0" bIns="0" rtlCol="0" anchor="ctr"/>
-          <a:lstStyle/>
-          <a:p>
-            <a:pPr indent="0" marL="0">
-              <a:buNone/>
-            </a:pPr>
-            <a:r>
-              <a:rPr lang="en-US" sz="1150" dirty="0">
-                <a:solidFill>
-                  <a:srgbClr val="1B2440"/>
-                </a:solidFill>
-                <a:latin typeface="Calibri" pitchFamily="34" charset="0"/>
-                <a:ea typeface="Calibri" pitchFamily="34" charset="-122"/>
-                <a:cs typeface="Calibri" pitchFamily="34" charset="-120"/>
-              </a:rPr>
-              <a:t>Fake but realistic records and figures. Same app, same behavior — nothing real underneath.</a:t>
-            </a:r>
-            <a:endParaRPr lang="en-US" sz="1150" dirty="0"/>
-          </a:p>
-        </p:txBody>
-      </p:sp>
-      <p:sp>
-        <p:nvSpPr>
-          <p:cNvPr id="12" name="Text 9"/>
-          <p:cNvSpPr/>
-          <p:nvPr/>
-        </p:nvSpPr>
-        <p:spPr>
-          <a:xfrm>
-            <a:off x="6126480" y="3749040"/>
-            <a:ext cx="5486400" cy="320040"/>
+            <a:off x="3178912" y="2971800"/>
+            <a:ext cx="274320" cy="365760"/>
           </a:xfrm>
           <a:prstGeom prst="rect">
             <a:avLst/>
@@ -11320,34 +12129,31 @@
               <a:buNone/>
             </a:pPr>
             <a:r>
-              <a:rPr lang="en-US" sz="1200" b="1" dirty="0">
+              <a:rPr lang="en-US" sz="1800" dirty="0">
                 <a:solidFill>
                   <a:srgbClr val="5A6B8C"/>
                 </a:solidFill>
-                <a:latin typeface="Calibri" pitchFamily="34" charset="0"/>
-                <a:ea typeface="Calibri" pitchFamily="34" charset="-122"/>
-                <a:cs typeface="Calibri" pitchFamily="34" charset="-120"/>
-              </a:rPr>
-              <a:t>▼  same app, different data  ▼</a:t>
-            </a:r>
-            <a:endParaRPr lang="en-US" sz="1200" dirty="0"/>
-          </a:p>
-        </p:txBody>
-      </p:sp>
-      <p:sp>
-        <p:nvSpPr>
-          <p:cNvPr id="13" name="Shape 10"/>
-          <p:cNvSpPr/>
-          <p:nvPr/>
-        </p:nvSpPr>
-        <p:spPr>
-          <a:xfrm>
-            <a:off x="6126480" y="4114800"/>
-            <a:ext cx="5486400" cy="1874520"/>
+              </a:rPr>
+              <a:t>▸</a:t>
+            </a:r>
+            <a:endParaRPr lang="en-US" sz="1800" dirty="0"/>
+          </a:p>
+        </p:txBody>
+      </p:sp>
+      <p:sp>
+        <p:nvSpPr>
+          <p:cNvPr id="12" name="Shape 9"/>
+          <p:cNvSpPr/>
+          <p:nvPr/>
+        </p:nvSpPr>
+        <p:spPr>
+          <a:xfrm>
+            <a:off x="3453232" y="1828800"/>
+            <a:ext cx="2514600" cy="2651760"/>
           </a:xfrm>
           <a:prstGeom prst="roundRect">
             <a:avLst>
-              <a:gd name="adj" fmla="val 4390"/>
+              <a:gd name="adj" fmla="val 3273"/>
             </a:avLst>
           </a:prstGeom>
           <a:solidFill>
@@ -11365,14 +12171,14 @@
       </p:sp>
       <p:sp>
         <p:nvSpPr>
-          <p:cNvPr id="14" name="Shape 11"/>
-          <p:cNvSpPr/>
-          <p:nvPr/>
-        </p:nvSpPr>
-        <p:spPr>
-          <a:xfrm>
-            <a:off x="6355080" y="4315968"/>
-            <a:ext cx="502920" cy="502920"/>
+          <p:cNvPr id="13" name="Shape 10"/>
+          <p:cNvSpPr/>
+          <p:nvPr/>
+        </p:nvSpPr>
+        <p:spPr>
+          <a:xfrm>
+            <a:off x="4390492" y="2084832"/>
+            <a:ext cx="640080" cy="640080"/>
           </a:xfrm>
           <a:prstGeom prst="ellipse">
             <a:avLst/>
@@ -11385,7 +12191,7 @@
       </p:sp>
       <p:pic>
         <p:nvPicPr>
-          <p:cNvPr id="15" name="Image 1" descr="preencoded.png">    </p:cNvPr>
+          <p:cNvPr id="14" name="Image 1" descr="preencoded.png">    </p:cNvPr>
           <p:cNvPicPr>
             <a:picLocks noChangeAspect="1"/>
           </p:cNvPicPr>
@@ -11399,8 +12205,8 @@
         </p:blipFill>
         <p:spPr>
           <a:xfrm>
-            <a:off x="6485839" y="4446727"/>
-            <a:ext cx="241402" cy="241402"/>
+            <a:off x="4556912" y="2251253"/>
+            <a:ext cx="307238" cy="307238"/>
           </a:xfrm>
           <a:prstGeom prst="rect">
             <a:avLst/>
@@ -11409,14 +12215,743 @@
       </p:pic>
       <p:sp>
         <p:nvSpPr>
+          <p:cNvPr id="15" name="Text 11"/>
+          <p:cNvSpPr/>
+          <p:nvPr/>
+        </p:nvSpPr>
+        <p:spPr>
+          <a:xfrm>
+            <a:off x="3544672" y="2880360"/>
+            <a:ext cx="2331720" cy="640080"/>
+          </a:xfrm>
+          <a:prstGeom prst="rect">
+            <a:avLst/>
+          </a:prstGeom>
+          <a:noFill/>
+          <a:ln/>
+        </p:spPr>
+        <p:txBody>
+          <a:bodyPr wrap="square" lIns="0" tIns="0" rIns="0" bIns="0" rtlCol="0" anchor="ctr"/>
+          <a:lstStyle/>
+          <a:p>
+            <a:pPr algn="ctr" indent="0" marL="0">
+              <a:buNone/>
+            </a:pPr>
+            <a:r>
+              <a:rPr lang="en-US" sz="1400" b="1" dirty="0">
+                <a:solidFill>
+                  <a:srgbClr val="1E2761"/>
+                </a:solidFill>
+                <a:latin typeface="Calibri" pitchFamily="34" charset="0"/>
+                <a:ea typeface="Calibri" pitchFamily="34" charset="-122"/>
+                <a:cs typeface="Calibri" pitchFamily="34" charset="-120"/>
+              </a:rPr>
+              <a:t>Run the</a:t>
+            </a:r>
+            <a:endParaRPr lang="en-US" sz="1400" dirty="0"/>
+          </a:p>
+          <a:p>
+            <a:pPr algn="ctr" indent="0" marL="0">
+              <a:buNone/>
+            </a:pPr>
+            <a:r>
+              <a:rPr lang="en-US" sz="1400" b="1" dirty="0">
+                <a:solidFill>
+                  <a:srgbClr val="1E2761"/>
+                </a:solidFill>
+                <a:latin typeface="Calibri" pitchFamily="34" charset="0"/>
+                <a:ea typeface="Calibri" pitchFamily="34" charset="-122"/>
+                <a:cs typeface="Calibri" pitchFamily="34" charset="-120"/>
+              </a:rPr>
+              <a:t>desensitizer</a:t>
+            </a:r>
+            <a:endParaRPr lang="en-US" sz="1400" dirty="0"/>
+          </a:p>
+        </p:txBody>
+      </p:sp>
+      <p:sp>
+        <p:nvSpPr>
           <p:cNvPr id="16" name="Text 12"/>
           <p:cNvSpPr/>
           <p:nvPr/>
         </p:nvSpPr>
         <p:spPr>
           <a:xfrm>
-            <a:off x="6967728" y="4361688"/>
-            <a:ext cx="4480560" cy="365760"/>
+            <a:off x="3562960" y="3566160"/>
+            <a:ext cx="2295144" cy="822960"/>
+          </a:xfrm>
+          <a:prstGeom prst="rect">
+            <a:avLst/>
+          </a:prstGeom>
+          <a:noFill/>
+          <a:ln/>
+        </p:spPr>
+        <p:txBody>
+          <a:bodyPr wrap="square" lIns="0" tIns="0" rIns="0" bIns="0" rtlCol="0" anchor="ctr"/>
+          <a:lstStyle/>
+          <a:p>
+            <a:pPr algn="ctr" indent="0" marL="0">
+              <a:buNone/>
+            </a:pPr>
+            <a:r>
+              <a:rPr lang="en-US" sz="1050" dirty="0">
+                <a:solidFill>
+                  <a:srgbClr val="1B2440"/>
+                </a:solidFill>
+                <a:latin typeface="Calibri" pitchFamily="34" charset="0"/>
+                <a:ea typeface="Calibri" pitchFamily="34" charset="-122"/>
+                <a:cs typeface="Calibri" pitchFamily="34" charset="-120"/>
+              </a:rPr>
+              <a:t>code_extractor.py strips</a:t>
+            </a:r>
+            <a:endParaRPr lang="en-US" sz="1050" dirty="0"/>
+          </a:p>
+          <a:p>
+            <a:pPr algn="ctr" indent="0" marL="0">
+              <a:buNone/>
+            </a:pPr>
+            <a:r>
+              <a:rPr lang="en-US" sz="1050" dirty="0">
+                <a:solidFill>
+                  <a:srgbClr val="1B2440"/>
+                </a:solidFill>
+                <a:latin typeface="Calibri" pitchFamily="34" charset="0"/>
+                <a:ea typeface="Calibri" pitchFamily="34" charset="-122"/>
+                <a:cs typeface="Calibri" pitchFamily="34" charset="-120"/>
+              </a:rPr>
+              <a:t>real names, masks data</a:t>
+            </a:r>
+            <a:endParaRPr lang="en-US" sz="1050" dirty="0"/>
+          </a:p>
+          <a:p>
+            <a:pPr algn="ctr" indent="0" marL="0">
+              <a:buNone/>
+            </a:pPr>
+            <a:r>
+              <a:rPr lang="en-US" sz="1050" dirty="0">
+                <a:solidFill>
+                  <a:srgbClr val="1B2440"/>
+                </a:solidFill>
+                <a:latin typeface="Calibri" pitchFamily="34" charset="0"/>
+                <a:ea typeface="Calibri" pitchFamily="34" charset="-122"/>
+                <a:cs typeface="Calibri" pitchFamily="34" charset="-120"/>
+              </a:rPr>
+              <a:t>&amp; strings, swaps in</a:t>
+            </a:r>
+            <a:endParaRPr lang="en-US" sz="1050" dirty="0"/>
+          </a:p>
+          <a:p>
+            <a:pPr algn="ctr" indent="0" marL="0">
+              <a:buNone/>
+            </a:pPr>
+            <a:r>
+              <a:rPr lang="en-US" sz="1050" dirty="0">
+                <a:solidFill>
+                  <a:srgbClr val="1B2440"/>
+                </a:solidFill>
+                <a:latin typeface="Calibri" pitchFamily="34" charset="0"/>
+                <a:ea typeface="Calibri" pitchFamily="34" charset="-122"/>
+                <a:cs typeface="Calibri" pitchFamily="34" charset="-120"/>
+              </a:rPr>
+              <a:t>Looking at Trees terms</a:t>
+            </a:r>
+            <a:endParaRPr lang="en-US" sz="1050" dirty="0"/>
+          </a:p>
+        </p:txBody>
+      </p:sp>
+      <p:sp>
+        <p:nvSpPr>
+          <p:cNvPr id="17" name="Text 13"/>
+          <p:cNvSpPr/>
+          <p:nvPr/>
+        </p:nvSpPr>
+        <p:spPr>
+          <a:xfrm>
+            <a:off x="5949544" y="2971800"/>
+            <a:ext cx="274320" cy="365760"/>
+          </a:xfrm>
+          <a:prstGeom prst="rect">
+            <a:avLst/>
+          </a:prstGeom>
+          <a:noFill/>
+          <a:ln/>
+        </p:spPr>
+        <p:txBody>
+          <a:bodyPr wrap="square" lIns="0" tIns="0" rIns="0" bIns="0" rtlCol="0" anchor="ctr"/>
+          <a:lstStyle/>
+          <a:p>
+            <a:pPr algn="ctr" indent="0" marL="0">
+              <a:buNone/>
+            </a:pPr>
+            <a:r>
+              <a:rPr lang="en-US" sz="1800" dirty="0">
+                <a:solidFill>
+                  <a:srgbClr val="5A6B8C"/>
+                </a:solidFill>
+              </a:rPr>
+              <a:t>▸</a:t>
+            </a:r>
+            <a:endParaRPr lang="en-US" sz="1800" dirty="0"/>
+          </a:p>
+        </p:txBody>
+      </p:sp>
+      <p:sp>
+        <p:nvSpPr>
+          <p:cNvPr id="18" name="Shape 14"/>
+          <p:cNvSpPr/>
+          <p:nvPr/>
+        </p:nvSpPr>
+        <p:spPr>
+          <a:xfrm>
+            <a:off x="6223864" y="1828800"/>
+            <a:ext cx="2514600" cy="2651760"/>
+          </a:xfrm>
+          <a:prstGeom prst="roundRect">
+            <a:avLst>
+              <a:gd name="adj" fmla="val 3273"/>
+            </a:avLst>
+          </a:prstGeom>
+          <a:solidFill>
+            <a:srgbClr val="EAF4EF"/>
+          </a:solidFill>
+          <a:ln/>
+          <a:effectLst>
+            <a:outerShdw sx="100000" sy="100000" kx="0" ky="0" algn="bl" rotWithShape="0" blurRad="76200" dist="12700" dir="5400000">
+              <a:srgbClr val="9AA7C4">
+                <a:alpha val="22000"/>
+              </a:srgbClr>
+            </a:outerShdw>
+          </a:effectLst>
+        </p:spPr>
+      </p:sp>
+      <p:sp>
+        <p:nvSpPr>
+          <p:cNvPr id="19" name="Shape 15"/>
+          <p:cNvSpPr/>
+          <p:nvPr/>
+        </p:nvSpPr>
+        <p:spPr>
+          <a:xfrm>
+            <a:off x="7161124" y="2084832"/>
+            <a:ext cx="640080" cy="640080"/>
+          </a:xfrm>
+          <a:prstGeom prst="ellipse">
+            <a:avLst/>
+          </a:prstGeom>
+          <a:solidFill>
+            <a:srgbClr val="1E2761"/>
+          </a:solidFill>
+          <a:ln/>
+        </p:spPr>
+      </p:sp>
+      <p:pic>
+        <p:nvPicPr>
+          <p:cNvPr id="20" name="Image 2" descr="preencoded.png">    </p:cNvPr>
+          <p:cNvPicPr>
+            <a:picLocks noChangeAspect="1"/>
+          </p:cNvPicPr>
+          <p:nvPr/>
+        </p:nvPicPr>
+        <p:blipFill>
+          <a:blip r:embed="rId3"/>
+          <a:stretch>
+            <a:fillRect/>
+          </a:stretch>
+        </p:blipFill>
+        <p:spPr>
+          <a:xfrm>
+            <a:off x="7327544" y="2251253"/>
+            <a:ext cx="307238" cy="307238"/>
+          </a:xfrm>
+          <a:prstGeom prst="rect">
+            <a:avLst/>
+          </a:prstGeom>
+        </p:spPr>
+      </p:pic>
+      <p:sp>
+        <p:nvSpPr>
+          <p:cNvPr id="21" name="Text 16"/>
+          <p:cNvSpPr/>
+          <p:nvPr/>
+        </p:nvSpPr>
+        <p:spPr>
+          <a:xfrm>
+            <a:off x="6315304" y="2880360"/>
+            <a:ext cx="2331720" cy="640080"/>
+          </a:xfrm>
+          <a:prstGeom prst="rect">
+            <a:avLst/>
+          </a:prstGeom>
+          <a:noFill/>
+          <a:ln/>
+        </p:spPr>
+        <p:txBody>
+          <a:bodyPr wrap="square" lIns="0" tIns="0" rIns="0" bIns="0" rtlCol="0" anchor="ctr"/>
+          <a:lstStyle/>
+          <a:p>
+            <a:pPr algn="ctr" indent="0" marL="0">
+              <a:buNone/>
+            </a:pPr>
+            <a:r>
+              <a:rPr lang="en-US" sz="1400" b="1" dirty="0">
+                <a:solidFill>
+                  <a:srgbClr val="1E2761"/>
+                </a:solidFill>
+                <a:latin typeface="Calibri" pitchFamily="34" charset="0"/>
+                <a:ea typeface="Calibri" pitchFamily="34" charset="-122"/>
+                <a:cs typeface="Calibri" pitchFamily="34" charset="-120"/>
+              </a:rPr>
+              <a:t>A teammate</a:t>
+            </a:r>
+            <a:endParaRPr lang="en-US" sz="1400" dirty="0"/>
+          </a:p>
+          <a:p>
+            <a:pPr algn="ctr" indent="0" marL="0">
+              <a:buNone/>
+            </a:pPr>
+            <a:r>
+              <a:rPr lang="en-US" sz="1400" b="1" dirty="0">
+                <a:solidFill>
+                  <a:srgbClr val="1E2761"/>
+                </a:solidFill>
+                <a:latin typeface="Calibri" pitchFamily="34" charset="0"/>
+                <a:ea typeface="Calibri" pitchFamily="34" charset="-122"/>
+                <a:cs typeface="Calibri" pitchFamily="34" charset="-120"/>
+              </a:rPr>
+              <a:t>checks it</a:t>
+            </a:r>
+            <a:endParaRPr lang="en-US" sz="1400" dirty="0"/>
+          </a:p>
+        </p:txBody>
+      </p:sp>
+      <p:sp>
+        <p:nvSpPr>
+          <p:cNvPr id="22" name="Text 17"/>
+          <p:cNvSpPr/>
+          <p:nvPr/>
+        </p:nvSpPr>
+        <p:spPr>
+          <a:xfrm>
+            <a:off x="6333592" y="3566160"/>
+            <a:ext cx="2295144" cy="822960"/>
+          </a:xfrm>
+          <a:prstGeom prst="rect">
+            <a:avLst/>
+          </a:prstGeom>
+          <a:noFill/>
+          <a:ln/>
+        </p:spPr>
+        <p:txBody>
+          <a:bodyPr wrap="square" lIns="0" tIns="0" rIns="0" bIns="0" rtlCol="0" anchor="ctr"/>
+          <a:lstStyle/>
+          <a:p>
+            <a:pPr algn="ctr" indent="0" marL="0">
+              <a:buNone/>
+            </a:pPr>
+            <a:r>
+              <a:rPr lang="en-US" sz="1050" dirty="0">
+                <a:solidFill>
+                  <a:srgbClr val="1B2440"/>
+                </a:solidFill>
+                <a:latin typeface="Calibri" pitchFamily="34" charset="0"/>
+                <a:ea typeface="Calibri" pitchFamily="34" charset="-122"/>
+                <a:cs typeface="Calibri" pitchFamily="34" charset="-120"/>
+              </a:rPr>
+              <a:t>A second pair of eyes</a:t>
+            </a:r>
+            <a:endParaRPr lang="en-US" sz="1050" dirty="0"/>
+          </a:p>
+          <a:p>
+            <a:pPr algn="ctr" indent="0" marL="0">
+              <a:buNone/>
+            </a:pPr>
+            <a:r>
+              <a:rPr lang="en-US" sz="1050" dirty="0">
+                <a:solidFill>
+                  <a:srgbClr val="1B2440"/>
+                </a:solidFill>
+                <a:latin typeface="Calibri" pitchFamily="34" charset="0"/>
+                <a:ea typeface="Calibri" pitchFamily="34" charset="-122"/>
+                <a:cs typeface="Calibri" pitchFamily="34" charset="-120"/>
+              </a:rPr>
+              <a:t>reads the sanitized</a:t>
+            </a:r>
+            <a:endParaRPr lang="en-US" sz="1050" dirty="0"/>
+          </a:p>
+          <a:p>
+            <a:pPr algn="ctr" indent="0" marL="0">
+              <a:buNone/>
+            </a:pPr>
+            <a:r>
+              <a:rPr lang="en-US" sz="1050" dirty="0">
+                <a:solidFill>
+                  <a:srgbClr val="1B2440"/>
+                </a:solidFill>
+                <a:latin typeface="Calibri" pitchFamily="34" charset="0"/>
+                <a:ea typeface="Calibri" pitchFamily="34" charset="-122"/>
+                <a:cs typeface="Calibri" pitchFamily="34" charset="-120"/>
+              </a:rPr>
+              <a:t>output before anything</a:t>
+            </a:r>
+            <a:endParaRPr lang="en-US" sz="1050" dirty="0"/>
+          </a:p>
+          <a:p>
+            <a:pPr algn="ctr" indent="0" marL="0">
+              <a:buNone/>
+            </a:pPr>
+            <a:r>
+              <a:rPr lang="en-US" sz="1050" dirty="0">
+                <a:solidFill>
+                  <a:srgbClr val="1B2440"/>
+                </a:solidFill>
+                <a:latin typeface="Calibri" pitchFamily="34" charset="0"/>
+                <a:ea typeface="Calibri" pitchFamily="34" charset="-122"/>
+                <a:cs typeface="Calibri" pitchFamily="34" charset="-120"/>
+              </a:rPr>
+              <a:t>leaves</a:t>
+            </a:r>
+            <a:endParaRPr lang="en-US" sz="1050" dirty="0"/>
+          </a:p>
+        </p:txBody>
+      </p:sp>
+      <p:sp>
+        <p:nvSpPr>
+          <p:cNvPr id="23" name="Text 18"/>
+          <p:cNvSpPr/>
+          <p:nvPr/>
+        </p:nvSpPr>
+        <p:spPr>
+          <a:xfrm>
+            <a:off x="8720176" y="2971800"/>
+            <a:ext cx="274320" cy="365760"/>
+          </a:xfrm>
+          <a:prstGeom prst="rect">
+            <a:avLst/>
+          </a:prstGeom>
+          <a:noFill/>
+          <a:ln/>
+        </p:spPr>
+        <p:txBody>
+          <a:bodyPr wrap="square" lIns="0" tIns="0" rIns="0" bIns="0" rtlCol="0" anchor="ctr"/>
+          <a:lstStyle/>
+          <a:p>
+            <a:pPr algn="ctr" indent="0" marL="0">
+              <a:buNone/>
+            </a:pPr>
+            <a:r>
+              <a:rPr lang="en-US" sz="1800" dirty="0">
+                <a:solidFill>
+                  <a:srgbClr val="5A6B8C"/>
+                </a:solidFill>
+              </a:rPr>
+              <a:t>▸</a:t>
+            </a:r>
+            <a:endParaRPr lang="en-US" sz="1800" dirty="0"/>
+          </a:p>
+        </p:txBody>
+      </p:sp>
+      <p:sp>
+        <p:nvSpPr>
+          <p:cNvPr id="24" name="Shape 19"/>
+          <p:cNvSpPr/>
+          <p:nvPr/>
+        </p:nvSpPr>
+        <p:spPr>
+          <a:xfrm>
+            <a:off x="8994496" y="1828800"/>
+            <a:ext cx="2514600" cy="2651760"/>
+          </a:xfrm>
+          <a:prstGeom prst="roundRect">
+            <a:avLst>
+              <a:gd name="adj" fmla="val 3273"/>
+            </a:avLst>
+          </a:prstGeom>
+          <a:solidFill>
+            <a:srgbClr val="EDF3FC"/>
+          </a:solidFill>
+          <a:ln/>
+          <a:effectLst>
+            <a:outerShdw sx="100000" sy="100000" kx="0" ky="0" algn="bl" rotWithShape="0" blurRad="76200" dist="12700" dir="5400000">
+              <a:srgbClr val="9AA7C4">
+                <a:alpha val="22000"/>
+              </a:srgbClr>
+            </a:outerShdw>
+          </a:effectLst>
+        </p:spPr>
+      </p:sp>
+      <p:sp>
+        <p:nvSpPr>
+          <p:cNvPr id="25" name="Shape 20"/>
+          <p:cNvSpPr/>
+          <p:nvPr/>
+        </p:nvSpPr>
+        <p:spPr>
+          <a:xfrm>
+            <a:off x="9931756" y="2084832"/>
+            <a:ext cx="640080" cy="640080"/>
+          </a:xfrm>
+          <a:prstGeom prst="ellipse">
+            <a:avLst/>
+          </a:prstGeom>
+          <a:solidFill>
+            <a:srgbClr val="1E2761"/>
+          </a:solidFill>
+          <a:ln/>
+        </p:spPr>
+      </p:sp>
+      <p:pic>
+        <p:nvPicPr>
+          <p:cNvPr id="26" name="Image 3" descr="preencoded.png">    </p:cNvPr>
+          <p:cNvPicPr>
+            <a:picLocks noChangeAspect="1"/>
+          </p:cNvPicPr>
+          <p:nvPr/>
+        </p:nvPicPr>
+        <p:blipFill>
+          <a:blip r:embed="rId4"/>
+          <a:stretch>
+            <a:fillRect/>
+          </a:stretch>
+        </p:blipFill>
+        <p:spPr>
+          <a:xfrm>
+            <a:off x="10098176" y="2251253"/>
+            <a:ext cx="307238" cy="307238"/>
+          </a:xfrm>
+          <a:prstGeom prst="rect">
+            <a:avLst/>
+          </a:prstGeom>
+        </p:spPr>
+      </p:pic>
+      <p:sp>
+        <p:nvSpPr>
+          <p:cNvPr id="27" name="Text 21"/>
+          <p:cNvSpPr/>
+          <p:nvPr/>
+        </p:nvSpPr>
+        <p:spPr>
+          <a:xfrm>
+            <a:off x="9085936" y="2880360"/>
+            <a:ext cx="2331720" cy="640080"/>
+          </a:xfrm>
+          <a:prstGeom prst="rect">
+            <a:avLst/>
+          </a:prstGeom>
+          <a:noFill/>
+          <a:ln/>
+        </p:spPr>
+        <p:txBody>
+          <a:bodyPr wrap="square" lIns="0" tIns="0" rIns="0" bIns="0" rtlCol="0" anchor="ctr"/>
+          <a:lstStyle/>
+          <a:p>
+            <a:pPr algn="ctr" indent="0" marL="0">
+              <a:buNone/>
+            </a:pPr>
+            <a:r>
+              <a:rPr lang="en-US" sz="1400" b="1" dirty="0">
+                <a:solidFill>
+                  <a:srgbClr val="1E2761"/>
+                </a:solidFill>
+                <a:latin typeface="Calibri" pitchFamily="34" charset="0"/>
+                <a:ea typeface="Calibri" pitchFamily="34" charset="-122"/>
+                <a:cs typeface="Calibri" pitchFamily="34" charset="-120"/>
+              </a:rPr>
+              <a:t>Send it,</a:t>
+            </a:r>
+            <a:endParaRPr lang="en-US" sz="1400" dirty="0"/>
+          </a:p>
+          <a:p>
+            <a:pPr algn="ctr" indent="0" marL="0">
+              <a:buNone/>
+            </a:pPr>
+            <a:r>
+              <a:rPr lang="en-US" sz="1400" b="1" dirty="0">
+                <a:solidFill>
+                  <a:srgbClr val="1E2761"/>
+                </a:solidFill>
+                <a:latin typeface="Calibri" pitchFamily="34" charset="0"/>
+                <a:ea typeface="Calibri" pitchFamily="34" charset="-122"/>
+                <a:cs typeface="Calibri" pitchFamily="34" charset="-120"/>
+              </a:rPr>
+              <a:t>log it</a:t>
+            </a:r>
+            <a:endParaRPr lang="en-US" sz="1400" dirty="0"/>
+          </a:p>
+        </p:txBody>
+      </p:sp>
+      <p:sp>
+        <p:nvSpPr>
+          <p:cNvPr id="28" name="Text 22"/>
+          <p:cNvSpPr/>
+          <p:nvPr/>
+        </p:nvSpPr>
+        <p:spPr>
+          <a:xfrm>
+            <a:off x="9104224" y="3566160"/>
+            <a:ext cx="2295144" cy="822960"/>
+          </a:xfrm>
+          <a:prstGeom prst="rect">
+            <a:avLst/>
+          </a:prstGeom>
+          <a:noFill/>
+          <a:ln/>
+        </p:spPr>
+        <p:txBody>
+          <a:bodyPr wrap="square" lIns="0" tIns="0" rIns="0" bIns="0" rtlCol="0" anchor="ctr"/>
+          <a:lstStyle/>
+          <a:p>
+            <a:pPr algn="ctr" indent="0" marL="0">
+              <a:buNone/>
+            </a:pPr>
+            <a:r>
+              <a:rPr lang="en-US" sz="1050" dirty="0">
+                <a:solidFill>
+                  <a:srgbClr val="1B2440"/>
+                </a:solidFill>
+                <a:latin typeface="Calibri" pitchFamily="34" charset="0"/>
+                <a:ea typeface="Calibri" pitchFamily="34" charset="-122"/>
+                <a:cs typeface="Calibri" pitchFamily="34" charset="-120"/>
+              </a:rPr>
+              <a:t>Out through our</a:t>
+            </a:r>
+            <a:endParaRPr lang="en-US" sz="1050" dirty="0"/>
+          </a:p>
+          <a:p>
+            <a:pPr algn="ctr" indent="0" marL="0">
+              <a:buNone/>
+            </a:pPr>
+            <a:r>
+              <a:rPr lang="en-US" sz="1050" dirty="0">
+                <a:solidFill>
+                  <a:srgbClr val="1B2440"/>
+                </a:solidFill>
+                <a:latin typeface="Calibri" pitchFamily="34" charset="0"/>
+                <a:ea typeface="Calibri" pitchFamily="34" charset="-122"/>
+                <a:cs typeface="Calibri" pitchFamily="34" charset="-120"/>
+              </a:rPr>
+              <a:t>approved channel; what</a:t>
+            </a:r>
+            <a:endParaRPr lang="en-US" sz="1050" dirty="0"/>
+          </a:p>
+          <a:p>
+            <a:pPr algn="ctr" indent="0" marL="0">
+              <a:buNone/>
+            </a:pPr>
+            <a:r>
+              <a:rPr lang="en-US" sz="1050" dirty="0">
+                <a:solidFill>
+                  <a:srgbClr val="1B2440"/>
+                </a:solidFill>
+                <a:latin typeface="Calibri" pitchFamily="34" charset="0"/>
+                <a:ea typeface="Calibri" pitchFamily="34" charset="-122"/>
+                <a:cs typeface="Calibri" pitchFamily="34" charset="-120"/>
+              </a:rPr>
+              <a:t>left and when gets</a:t>
+            </a:r>
+            <a:endParaRPr lang="en-US" sz="1050" dirty="0"/>
+          </a:p>
+          <a:p>
+            <a:pPr algn="ctr" indent="0" marL="0">
+              <a:buNone/>
+            </a:pPr>
+            <a:r>
+              <a:rPr lang="en-US" sz="1050" dirty="0">
+                <a:solidFill>
+                  <a:srgbClr val="1B2440"/>
+                </a:solidFill>
+                <a:latin typeface="Calibri" pitchFamily="34" charset="0"/>
+                <a:ea typeface="Calibri" pitchFamily="34" charset="-122"/>
+                <a:cs typeface="Calibri" pitchFamily="34" charset="-120"/>
+              </a:rPr>
+              <a:t>noted, simply</a:t>
+            </a:r>
+            <a:endParaRPr lang="en-US" sz="1050" dirty="0"/>
+          </a:p>
+        </p:txBody>
+      </p:sp>
+      <p:sp>
+        <p:nvSpPr>
+          <p:cNvPr id="29" name="Shape 23"/>
+          <p:cNvSpPr/>
+          <p:nvPr/>
+        </p:nvSpPr>
+        <p:spPr>
+          <a:xfrm>
+            <a:off x="548640" y="4846320"/>
+            <a:ext cx="11094415" cy="1051560"/>
+          </a:xfrm>
+          <a:prstGeom prst="roundRect">
+            <a:avLst>
+              <a:gd name="adj" fmla="val 7826"/>
+            </a:avLst>
+          </a:prstGeom>
+          <a:solidFill>
+            <a:srgbClr val="EDF3FC"/>
+          </a:solidFill>
+          <a:ln/>
+          <a:effectLst>
+            <a:outerShdw sx="100000" sy="100000" kx="0" ky="0" algn="bl" rotWithShape="0" blurRad="76200" dist="12700" dir="5400000">
+              <a:srgbClr val="9AA7C4">
+                <a:alpha val="22000"/>
+              </a:srgbClr>
+            </a:outerShdw>
+          </a:effectLst>
+        </p:spPr>
+      </p:sp>
+      <p:sp>
+        <p:nvSpPr>
+          <p:cNvPr id="30" name="Shape 24"/>
+          <p:cNvSpPr/>
+          <p:nvPr/>
+        </p:nvSpPr>
+        <p:spPr>
+          <a:xfrm>
+            <a:off x="777240" y="5056632"/>
+            <a:ext cx="566928" cy="566928"/>
+          </a:xfrm>
+          <a:prstGeom prst="ellipse">
+            <a:avLst/>
+          </a:prstGeom>
+          <a:solidFill>
+            <a:srgbClr val="1E2761"/>
+          </a:solidFill>
+          <a:ln/>
+        </p:spPr>
+      </p:sp>
+      <p:pic>
+        <p:nvPicPr>
+          <p:cNvPr id="31" name="Image 4" descr="preencoded.png">    </p:cNvPr>
+          <p:cNvPicPr>
+            <a:picLocks noChangeAspect="1"/>
+          </p:cNvPicPr>
+          <p:nvPr/>
+        </p:nvPicPr>
+        <p:blipFill>
+          <a:blip r:embed="rId5"/>
+          <a:stretch>
+            <a:fillRect/>
+          </a:stretch>
+        </p:blipFill>
+        <p:spPr>
+          <a:xfrm>
+            <a:off x="924641" y="5204033"/>
+            <a:ext cx="272125" cy="272125"/>
+          </a:xfrm>
+          <a:prstGeom prst="rect">
+            <a:avLst/>
+          </a:prstGeom>
+        </p:spPr>
+      </p:pic>
+      <p:sp>
+        <p:nvSpPr>
+          <p:cNvPr id="32" name="Text 25"/>
+          <p:cNvSpPr/>
+          <p:nvPr/>
+        </p:nvSpPr>
+        <p:spPr>
+          <a:xfrm>
+            <a:off x="1554480" y="4965192"/>
+            <a:ext cx="9859975" cy="822960"/>
           </a:xfrm>
           <a:prstGeom prst="rect">
             <a:avLst/>
@@ -11432,7 +12967,7 @@
               <a:buNone/>
             </a:pPr>
             <a:r>
-              <a:rPr lang="en-US" sz="1300" b="1" dirty="0">
+              <a:rPr lang="en-US" sz="1350" b="1" dirty="0">
                 <a:solidFill>
                   <a:srgbClr val="1E2761"/>
                 </a:solidFill>
@@ -11440,38 +12975,13 @@
                 <a:ea typeface="Calibri" pitchFamily="34" charset="-122"/>
                 <a:cs typeface="Calibri" pitchFamily="34" charset="-120"/>
               </a:rPr>
-              <a:t>INSIDE — the real data</a:t>
-            </a:r>
-            <a:endParaRPr lang="en-US" sz="1300" dirty="0"/>
-          </a:p>
-        </p:txBody>
-      </p:sp>
-      <p:sp>
-        <p:nvSpPr>
-          <p:cNvPr id="17" name="Text 13"/>
-          <p:cNvSpPr/>
-          <p:nvPr/>
-        </p:nvSpPr>
-        <p:spPr>
-          <a:xfrm>
-            <a:off x="6382512" y="4782312"/>
-            <a:ext cx="4974336" cy="1005840"/>
-          </a:xfrm>
-          <a:prstGeom prst="rect">
-            <a:avLst/>
-          </a:prstGeom>
-          <a:noFill/>
-          <a:ln/>
-        </p:spPr>
-        <p:txBody>
-          <a:bodyPr wrap="square" lIns="0" tIns="0" rIns="0" bIns="0" rtlCol="0" anchor="ctr"/>
-          <a:lstStyle/>
-          <a:p>
+              <a:t>mapping.json is the one file that turns “Looking at Trees” back into the real thing — </a:t>
+            </a:r>
             <a:pPr indent="0" marL="0">
               <a:buNone/>
             </a:pPr>
             <a:r>
-              <a:rPr lang="en-US" sz="1150" dirty="0">
+              <a:rPr lang="en-US" sz="1350" dirty="0">
                 <a:solidFill>
                   <a:srgbClr val="1B2440"/>
                 </a:solidFill>
@@ -11479,9 +12989,9 @@
                 <a:ea typeface="Calibri" pitchFamily="34" charset="-122"/>
                 <a:cs typeface="Calibri" pitchFamily="34" charset="-120"/>
               </a:rPr>
-              <a:t>Same components, same tests. Only the values underneath change — reviewed and versioned like everything else we ship.</a:t>
-            </a:r>
-            <a:endParaRPr lang="en-US" sz="1150" dirty="0"/>
+              <a:t>it stays inside, always. Everything else is designed to be boring to send.</a:t>
+            </a:r>
+            <a:endParaRPr lang="en-US" sz="1350" dirty="0"/>
           </a:p>
         </p:txBody>
       </p:sp>
@@ -11628,7 +13138,7 @@
                 <a:ea typeface="Calibri" pitchFamily="34" charset="-122"/>
                 <a:cs typeface="Calibri" pitchFamily="34" charset="-120"/>
               </a:rPr>
-              <a:t>BUILDING WITHOUT WAITING ON ANYONE</a:t>
+              <a:t>ELEVATING “LOOKING AT TREES” TO REAL C3</a:t>
             </a:r>
             <a:endParaRPr lang="en-US" sz="1200" dirty="0"/>
           </a:p>
@@ -11667,7 +13177,7 @@
                 <a:ea typeface="Cambria" pitchFamily="34" charset="-122"/>
                 <a:cs typeface="Cambria" pitchFamily="34" charset="-120"/>
               </a:rPr>
-              <a:t>Test the whole thing before it ever touches Confi</a:t>
+              <a:t>The code doesn't care which company it's for — the data does</a:t>
             </a:r>
             <a:endParaRPr lang="en-US" sz="2800" dirty="0"/>
           </a:p>
@@ -11675,22 +13185,219 @@
       </p:sp>
       <p:sp>
         <p:nvSpPr>
-          <p:cNvPr id="6" name="Shape 4"/>
-          <p:cNvSpPr/>
-          <p:nvPr/>
-        </p:nvSpPr>
-        <p:spPr>
-          <a:xfrm>
-            <a:off x="548640" y="1691640"/>
-            <a:ext cx="11094415" cy="859536"/>
+          <p:cNvPr id="6" name="Text 4"/>
+          <p:cNvSpPr/>
+          <p:nvPr/>
+        </p:nvSpPr>
+        <p:spPr>
+          <a:xfrm>
+            <a:off x="548640" y="1737360"/>
+            <a:ext cx="5120640" cy="4114800"/>
+          </a:xfrm>
+          <a:prstGeom prst="rect">
+            <a:avLst/>
+          </a:prstGeom>
+          <a:noFill/>
+          <a:ln/>
+        </p:spPr>
+        <p:txBody>
+          <a:bodyPr wrap="square" lIns="0" tIns="0" rIns="0" bIns="0" rtlCol="0" anchor="ctr"/>
+          <a:lstStyle/>
+          <a:p>
+            <a:pPr indent="0" marL="0">
+              <a:spcAft>
+                <a:spcPts val="500"/>
+              </a:spcAft>
+              <a:buNone/>
+            </a:pPr>
+            <a:r>
+              <a:rPr lang="en-US" sz="1350" dirty="0">
+                <a:solidFill>
+                  <a:srgbClr val="1B2440"/>
+                </a:solidFill>
+                <a:latin typeface="Calibri" pitchFamily="34" charset="0"/>
+                <a:ea typeface="Calibri" pitchFamily="34" charset="-122"/>
+                <a:cs typeface="Calibri" pitchFamily="34" charset="-120"/>
+              </a:rPr>
+              <a:t>Whether it's Looking at Trees or the real thing, the components, forms, validation logic, and flows are exactly the same code either way.</a:t>
+            </a:r>
+            <a:endParaRPr lang="en-US" sz="1350" dirty="0"/>
+          </a:p>
+          <a:p>
+            <a:pPr indent="0" marL="0">
+              <a:spcAft>
+                <a:spcPts val="500"/>
+              </a:spcAft>
+              <a:buNone/>
+            </a:pPr>
+            <a:endParaRPr lang="en-US" sz="1350" dirty="0"/>
+          </a:p>
+          <a:p>
+            <a:pPr indent="0" marL="0">
+              <a:spcAft>
+                <a:spcPts val="500"/>
+              </a:spcAft>
+              <a:buNone/>
+            </a:pPr>
+            <a:r>
+              <a:rPr lang="en-US" sz="1350" dirty="0">
+                <a:solidFill>
+                  <a:srgbClr val="1B2440"/>
+                </a:solidFill>
+                <a:latin typeface="Calibri" pitchFamily="34" charset="0"/>
+                <a:ea typeface="Calibri" pitchFamily="34" charset="-122"/>
+                <a:cs typeface="Calibri" pitchFamily="34" charset="-120"/>
+              </a:rPr>
+              <a:t>What's actually sensitive is almost always the </a:t>
+            </a:r>
+            <a:pPr indent="0" marL="0">
+              <a:spcAft>
+                <a:spcPts val="500"/>
+              </a:spcAft>
+              <a:buNone/>
+            </a:pPr>
+            <a:r>
+              <a:rPr lang="en-US" sz="1350" b="1" dirty="0">
+                <a:solidFill>
+                  <a:srgbClr val="1E2761"/>
+                </a:solidFill>
+                <a:latin typeface="Calibri" pitchFamily="34" charset="0"/>
+                <a:ea typeface="Calibri" pitchFamily="34" charset="-122"/>
+                <a:cs typeface="Calibri" pitchFamily="34" charset="-120"/>
+              </a:rPr>
+              <a:t>data</a:t>
+            </a:r>
+            <a:pPr indent="0" marL="0">
+              <a:spcAft>
+                <a:spcPts val="500"/>
+              </a:spcAft>
+              <a:buNone/>
+            </a:pPr>
+            <a:r>
+              <a:rPr lang="en-US" sz="1350" dirty="0">
+                <a:solidFill>
+                  <a:srgbClr val="1B2440"/>
+                </a:solidFill>
+                <a:latin typeface="Calibri" pitchFamily="34" charset="0"/>
+                <a:ea typeface="Calibri" pitchFamily="34" charset="-122"/>
+                <a:cs typeface="Calibri" pitchFamily="34" charset="-120"/>
+              </a:rPr>
+              <a:t> underneath — real customer records, real figures, real identifiers — plus, occasionally, one or two genuinely sensitive rule values.</a:t>
+            </a:r>
+            <a:endParaRPr lang="en-US" sz="1350" dirty="0"/>
+          </a:p>
+          <a:p>
+            <a:pPr indent="0" marL="0">
+              <a:spcAft>
+                <a:spcPts val="500"/>
+              </a:spcAft>
+              <a:buNone/>
+            </a:pPr>
+            <a:endParaRPr lang="en-US" sz="1350" dirty="0"/>
+          </a:p>
+          <a:p>
+            <a:pPr indent="0" marL="0">
+              <a:spcAft>
+                <a:spcPts val="500"/>
+              </a:spcAft>
+              <a:buNone/>
+            </a:pPr>
+            <a:r>
+              <a:rPr lang="en-US" sz="1350" dirty="0">
+                <a:solidFill>
+                  <a:srgbClr val="1B2440"/>
+                </a:solidFill>
+                <a:latin typeface="Calibri" pitchFamily="34" charset="0"/>
+                <a:ea typeface="Calibri" pitchFamily="34" charset="-122"/>
+                <a:cs typeface="Calibri" pitchFamily="34" charset="-120"/>
+              </a:rPr>
+              <a:t>So outside, the app runs on placeholder data (and placeholder values for the rare sensitive rule). Inside, we point it at the real data instead — closer to swapping an </a:t>
+            </a:r>
+            <a:pPr indent="0" marL="0">
+              <a:spcAft>
+                <a:spcPts val="500"/>
+              </a:spcAft>
+              <a:buNone/>
+            </a:pPr>
+            <a:r>
+              <a:rPr lang="en-US" sz="1350" dirty="0">
+                <a:solidFill>
+                  <a:srgbClr val="1E2761"/>
+                </a:solidFill>
+                <a:latin typeface="Courier New" pitchFamily="34" charset="0"/>
+                <a:ea typeface="Courier New" pitchFamily="34" charset="-122"/>
+                <a:cs typeface="Courier New" pitchFamily="34" charset="-120"/>
+              </a:rPr>
+              <a:t>.env</a:t>
+            </a:r>
+            <a:pPr indent="0" marL="0">
+              <a:spcAft>
+                <a:spcPts val="500"/>
+              </a:spcAft>
+              <a:buNone/>
+            </a:pPr>
+            <a:r>
+              <a:rPr lang="en-US" sz="1350" dirty="0">
+                <a:solidFill>
+                  <a:srgbClr val="1B2440"/>
+                </a:solidFill>
+                <a:latin typeface="Calibri" pitchFamily="34" charset="0"/>
+                <a:ea typeface="Calibri" pitchFamily="34" charset="-122"/>
+                <a:cs typeface="Calibri" pitchFamily="34" charset="-120"/>
+              </a:rPr>
+              <a:t> file than rewriting the app.</a:t>
+            </a:r>
+            <a:endParaRPr lang="en-US" sz="1350" dirty="0"/>
+          </a:p>
+          <a:p>
+            <a:pPr indent="0" marL="0">
+              <a:spcAft>
+                <a:spcPts val="500"/>
+              </a:spcAft>
+              <a:buNone/>
+            </a:pPr>
+            <a:endParaRPr lang="en-US" sz="1350" dirty="0"/>
+          </a:p>
+          <a:p>
+            <a:pPr indent="0" marL="0">
+              <a:spcAft>
+                <a:spcPts val="500"/>
+              </a:spcAft>
+              <a:buNone/>
+            </a:pPr>
+            <a:r>
+              <a:rPr lang="en-US" sz="1350" b="1" dirty="0">
+                <a:solidFill>
+                  <a:srgbClr val="2E7D5B"/>
+                </a:solidFill>
+                <a:latin typeface="Calibri" pitchFamily="34" charset="0"/>
+                <a:ea typeface="Calibri" pitchFamily="34" charset="-122"/>
+                <a:cs typeface="Calibri" pitchFamily="34" charset="-120"/>
+              </a:rPr>
+              <a:t>Some rules will be sensitive or complex enough that we just build them directly inside — that's completely fine. We'll flag those upfront, per feature, so nobody's surprised later.</a:t>
+            </a:r>
+            <a:endParaRPr lang="en-US" sz="1350" dirty="0"/>
+          </a:p>
+        </p:txBody>
+      </p:sp>
+      <p:sp>
+        <p:nvSpPr>
+          <p:cNvPr id="7" name="Shape 5"/>
+          <p:cNvSpPr/>
+          <p:nvPr/>
+        </p:nvSpPr>
+        <p:spPr>
+          <a:xfrm>
+            <a:off x="6126480" y="1737360"/>
+            <a:ext cx="5486400" cy="1874520"/>
           </a:xfrm>
           <a:prstGeom prst="roundRect">
             <a:avLst>
-              <a:gd name="adj" fmla="val 9574"/>
+              <a:gd name="adj" fmla="val 4390"/>
             </a:avLst>
           </a:prstGeom>
           <a:solidFill>
-            <a:srgbClr val="EDF3FC"/>
+            <a:srgbClr val="EAF4EF"/>
           </a:solidFill>
           <a:ln/>
           <a:effectLst>
@@ -11704,27 +13411,27 @@
       </p:sp>
       <p:sp>
         <p:nvSpPr>
-          <p:cNvPr id="7" name="Shape 5"/>
-          <p:cNvSpPr/>
-          <p:nvPr/>
-        </p:nvSpPr>
-        <p:spPr>
-          <a:xfrm>
-            <a:off x="749808" y="1865376"/>
-            <a:ext cx="548640" cy="548640"/>
+          <p:cNvPr id="8" name="Shape 6"/>
+          <p:cNvSpPr/>
+          <p:nvPr/>
+        </p:nvSpPr>
+        <p:spPr>
+          <a:xfrm>
+            <a:off x="6355080" y="1938528"/>
+            <a:ext cx="502920" cy="502920"/>
           </a:xfrm>
           <a:prstGeom prst="ellipse">
             <a:avLst/>
           </a:prstGeom>
           <a:solidFill>
-            <a:srgbClr val="1E2761"/>
+            <a:srgbClr val="2E7D5B"/>
           </a:solidFill>
           <a:ln/>
         </p:spPr>
       </p:sp>
       <p:pic>
         <p:nvPicPr>
-          <p:cNvPr id="8" name="Image 0" descr="preencoded.png">    </p:cNvPr>
+          <p:cNvPr id="9" name="Image 0" descr="preencoded.png">    </p:cNvPr>
           <p:cNvPicPr>
             <a:picLocks noChangeAspect="1"/>
           </p:cNvPicPr>
@@ -11738,8 +13445,8 @@
         </p:blipFill>
         <p:spPr>
           <a:xfrm>
-            <a:off x="892454" y="2008022"/>
-            <a:ext cx="263347" cy="263347"/>
+            <a:off x="6485839" y="2069287"/>
+            <a:ext cx="241402" cy="241402"/>
           </a:xfrm>
           <a:prstGeom prst="rect">
             <a:avLst/>
@@ -11748,14 +13455,14 @@
       </p:pic>
       <p:sp>
         <p:nvSpPr>
-          <p:cNvPr id="9" name="Text 6"/>
-          <p:cNvSpPr/>
-          <p:nvPr/>
-        </p:nvSpPr>
-        <p:spPr>
-          <a:xfrm>
-            <a:off x="1463040" y="1801368"/>
-            <a:ext cx="2926080" cy="694944"/>
+          <p:cNvPr id="10" name="Text 7"/>
+          <p:cNvSpPr/>
+          <p:nvPr/>
+        </p:nvSpPr>
+        <p:spPr>
+          <a:xfrm>
+            <a:off x="6967728" y="1984248"/>
+            <a:ext cx="4480560" cy="365760"/>
           </a:xfrm>
           <a:prstGeom prst="rect">
             <a:avLst/>
@@ -11771,30 +13478,30 @@
               <a:buNone/>
             </a:pPr>
             <a:r>
-              <a:rPr lang="en-US" sz="1400" b="1" dirty="0">
-                <a:solidFill>
-                  <a:srgbClr val="1E2761"/>
-                </a:solidFill>
-                <a:latin typeface="Calibri" pitchFamily="34" charset="0"/>
-                <a:ea typeface="Calibri" pitchFamily="34" charset="-122"/>
-                <a:cs typeface="Calibri" pitchFamily="34" charset="-120"/>
-              </a:rPr>
-              <a:t>OpenAPI spec</a:t>
-            </a:r>
-            <a:endParaRPr lang="en-US" sz="1400" dirty="0"/>
-          </a:p>
-        </p:txBody>
-      </p:sp>
-      <p:sp>
-        <p:nvSpPr>
-          <p:cNvPr id="10" name="Text 7"/>
-          <p:cNvSpPr/>
-          <p:nvPr/>
-        </p:nvSpPr>
-        <p:spPr>
-          <a:xfrm>
-            <a:off x="4572000" y="1783080"/>
-            <a:ext cx="6888175" cy="731520"/>
+              <a:rPr lang="en-US" sz="1300" b="1" dirty="0">
+                <a:solidFill>
+                  <a:srgbClr val="2E7D5B"/>
+                </a:solidFill>
+                <a:latin typeface="Calibri" pitchFamily="34" charset="0"/>
+                <a:ea typeface="Calibri" pitchFamily="34" charset="-122"/>
+                <a:cs typeface="Calibri" pitchFamily="34" charset="-120"/>
+              </a:rPr>
+              <a:t>OUTSIDE — “Looking at Trees” data</a:t>
+            </a:r>
+            <a:endParaRPr lang="en-US" sz="1300" dirty="0"/>
+          </a:p>
+        </p:txBody>
+      </p:sp>
+      <p:sp>
+        <p:nvSpPr>
+          <p:cNvPr id="11" name="Text 8"/>
+          <p:cNvSpPr/>
+          <p:nvPr/>
+        </p:nvSpPr>
+        <p:spPr>
+          <a:xfrm>
+            <a:off x="6382512" y="2404872"/>
+            <a:ext cx="4974336" cy="1005840"/>
           </a:xfrm>
           <a:prstGeom prst="rect">
             <a:avLst/>
@@ -11810,7 +13517,7 @@
               <a:buNone/>
             </a:pPr>
             <a:r>
-              <a:rPr lang="en-US" sz="1200" dirty="0">
+              <a:rPr lang="en-US" sz="1150" dirty="0">
                 <a:solidFill>
                   <a:srgbClr val="1B2440"/>
                 </a:solidFill>
@@ -11818,7 +13525,46 @@
                 <a:ea typeface="Calibri" pitchFamily="34" charset="-122"/>
                 <a:cs typeface="Calibri" pitchFamily="34" charset="-120"/>
               </a:rPr>
-              <a:t>The contract everyone builds against — types, endpoints, sample data</a:t>
+              <a:t>Fake but realistic records and figures. Same app, same behavior — nothing real underneath.</a:t>
+            </a:r>
+            <a:endParaRPr lang="en-US" sz="1150" dirty="0"/>
+          </a:p>
+        </p:txBody>
+      </p:sp>
+      <p:sp>
+        <p:nvSpPr>
+          <p:cNvPr id="12" name="Text 9"/>
+          <p:cNvSpPr/>
+          <p:nvPr/>
+        </p:nvSpPr>
+        <p:spPr>
+          <a:xfrm>
+            <a:off x="6126480" y="3749040"/>
+            <a:ext cx="5486400" cy="320040"/>
+          </a:xfrm>
+          <a:prstGeom prst="rect">
+            <a:avLst/>
+          </a:prstGeom>
+          <a:noFill/>
+          <a:ln/>
+        </p:spPr>
+        <p:txBody>
+          <a:bodyPr wrap="square" lIns="0" tIns="0" rIns="0" bIns="0" rtlCol="0" anchor="ctr"/>
+          <a:lstStyle/>
+          <a:p>
+            <a:pPr algn="ctr" indent="0" marL="0">
+              <a:buNone/>
+            </a:pPr>
+            <a:r>
+              <a:rPr lang="en-US" sz="1200" b="1" dirty="0">
+                <a:solidFill>
+                  <a:srgbClr val="5A6B8C"/>
+                </a:solidFill>
+                <a:latin typeface="Calibri" pitchFamily="34" charset="0"/>
+                <a:ea typeface="Calibri" pitchFamily="34" charset="-122"/>
+                <a:cs typeface="Calibri" pitchFamily="34" charset="-120"/>
+              </a:rPr>
+              <a:t>▼  same app, different data  ▼</a:t>
             </a:r>
             <a:endParaRPr lang="en-US" sz="1200" dirty="0"/>
           </a:p>
@@ -11826,18 +13572,18 @@
       </p:sp>
       <p:sp>
         <p:nvSpPr>
-          <p:cNvPr id="11" name="Shape 8"/>
-          <p:cNvSpPr/>
-          <p:nvPr/>
-        </p:nvSpPr>
-        <p:spPr>
-          <a:xfrm>
-            <a:off x="548640" y="2679192"/>
-            <a:ext cx="11094415" cy="859536"/>
+          <p:cNvPr id="13" name="Shape 10"/>
+          <p:cNvSpPr/>
+          <p:nvPr/>
+        </p:nvSpPr>
+        <p:spPr>
+          <a:xfrm>
+            <a:off x="6126480" y="4114800"/>
+            <a:ext cx="5486400" cy="1874520"/>
           </a:xfrm>
           <a:prstGeom prst="roundRect">
             <a:avLst>
-              <a:gd name="adj" fmla="val 9574"/>
+              <a:gd name="adj" fmla="val 4390"/>
             </a:avLst>
           </a:prstGeom>
           <a:solidFill>
@@ -11855,14 +13601,14 @@
       </p:sp>
       <p:sp>
         <p:nvSpPr>
-          <p:cNvPr id="12" name="Shape 9"/>
-          <p:cNvSpPr/>
-          <p:nvPr/>
-        </p:nvSpPr>
-        <p:spPr>
-          <a:xfrm>
-            <a:off x="749808" y="2852928"/>
-            <a:ext cx="548640" cy="548640"/>
+          <p:cNvPr id="14" name="Shape 11"/>
+          <p:cNvSpPr/>
+          <p:nvPr/>
+        </p:nvSpPr>
+        <p:spPr>
+          <a:xfrm>
+            <a:off x="6355080" y="4315968"/>
+            <a:ext cx="502920" cy="502920"/>
           </a:xfrm>
           <a:prstGeom prst="ellipse">
             <a:avLst/>
@@ -11875,7 +13621,7 @@
       </p:sp>
       <p:pic>
         <p:nvPicPr>
-          <p:cNvPr id="13" name="Image 1" descr="preencoded.png">    </p:cNvPr>
+          <p:cNvPr id="15" name="Image 1" descr="preencoded.png">    </p:cNvPr>
           <p:cNvPicPr>
             <a:picLocks noChangeAspect="1"/>
           </p:cNvPicPr>
@@ -11889,8 +13635,8 @@
         </p:blipFill>
         <p:spPr>
           <a:xfrm>
-            <a:off x="892454" y="2995574"/>
-            <a:ext cx="263347" cy="263347"/>
+            <a:off x="6485839" y="4446727"/>
+            <a:ext cx="241402" cy="241402"/>
           </a:xfrm>
           <a:prstGeom prst="rect">
             <a:avLst/>
@@ -11899,14 +13645,14 @@
       </p:pic>
       <p:sp>
         <p:nvSpPr>
-          <p:cNvPr id="14" name="Text 10"/>
-          <p:cNvSpPr/>
-          <p:nvPr/>
-        </p:nvSpPr>
-        <p:spPr>
-          <a:xfrm>
-            <a:off x="1463040" y="2788920"/>
-            <a:ext cx="2926080" cy="694944"/>
+          <p:cNvPr id="16" name="Text 12"/>
+          <p:cNvSpPr/>
+          <p:nvPr/>
+        </p:nvSpPr>
+        <p:spPr>
+          <a:xfrm>
+            <a:off x="6967728" y="4361688"/>
+            <a:ext cx="4480560" cy="365760"/>
           </a:xfrm>
           <a:prstGeom prst="rect">
             <a:avLst/>
@@ -11922,7 +13668,7 @@
               <a:buNone/>
             </a:pPr>
             <a:r>
-              <a:rPr lang="en-US" sz="1400" b="1" dirty="0">
+              <a:rPr lang="en-US" sz="1300" b="1" dirty="0">
                 <a:solidFill>
                   <a:srgbClr val="1E2761"/>
                 </a:solidFill>
@@ -11930,22 +13676,22 @@
                 <a:ea typeface="Calibri" pitchFamily="34" charset="-122"/>
                 <a:cs typeface="Calibri" pitchFamily="34" charset="-120"/>
               </a:rPr>
-              <a:t>Generated types + client</a:t>
-            </a:r>
-            <a:endParaRPr lang="en-US" sz="1400" dirty="0"/>
-          </a:p>
-        </p:txBody>
-      </p:sp>
-      <p:sp>
-        <p:nvSpPr>
-          <p:cNvPr id="15" name="Text 11"/>
-          <p:cNvSpPr/>
-          <p:nvPr/>
-        </p:nvSpPr>
-        <p:spPr>
-          <a:xfrm>
-            <a:off x="4572000" y="2770632"/>
-            <a:ext cx="6888175" cy="731520"/>
+              <a:t>INSIDE — the real data</a:t>
+            </a:r>
+            <a:endParaRPr lang="en-US" sz="1300" dirty="0"/>
+          </a:p>
+        </p:txBody>
+      </p:sp>
+      <p:sp>
+        <p:nvSpPr>
+          <p:cNvPr id="17" name="Text 13"/>
+          <p:cNvSpPr/>
+          <p:nvPr/>
+        </p:nvSpPr>
+        <p:spPr>
+          <a:xfrm>
+            <a:off x="6382512" y="4782312"/>
+            <a:ext cx="4974336" cy="1005840"/>
           </a:xfrm>
           <a:prstGeom prst="rect">
             <a:avLst/>
@@ -11961,7 +13707,7 @@
               <a:buNone/>
             </a:pPr>
             <a:r>
-              <a:rPr lang="en-US" sz="1200" dirty="0">
+              <a:rPr lang="en-US" sz="1150" dirty="0">
                 <a:solidFill>
                   <a:srgbClr val="1B2440"/>
                 </a:solidFill>
@@ -11969,437 +13715,9 @@
                 <a:ea typeface="Calibri" pitchFamily="34" charset="-122"/>
                 <a:cs typeface="Calibri" pitchFamily="34" charset="-120"/>
               </a:rPr>
-              <a:t>No one hand-writes fetch calls — they're generated from the spec</a:t>
-            </a:r>
-            <a:endParaRPr lang="en-US" sz="1200" dirty="0"/>
-          </a:p>
-        </p:txBody>
-      </p:sp>
-      <p:sp>
-        <p:nvSpPr>
-          <p:cNvPr id="16" name="Shape 12"/>
-          <p:cNvSpPr/>
-          <p:nvPr/>
-        </p:nvSpPr>
-        <p:spPr>
-          <a:xfrm>
-            <a:off x="548640" y="3666744"/>
-            <a:ext cx="11094415" cy="859536"/>
-          </a:xfrm>
-          <a:prstGeom prst="roundRect">
-            <a:avLst>
-              <a:gd name="adj" fmla="val 9574"/>
-            </a:avLst>
-          </a:prstGeom>
-          <a:solidFill>
-            <a:srgbClr val="EDF3FC"/>
-          </a:solidFill>
-          <a:ln/>
-          <a:effectLst>
-            <a:outerShdw sx="100000" sy="100000" kx="0" ky="0" algn="bl" rotWithShape="0" blurRad="76200" dist="12700" dir="5400000">
-              <a:srgbClr val="9AA7C4">
-                <a:alpha val="22000"/>
-              </a:srgbClr>
-            </a:outerShdw>
-          </a:effectLst>
-        </p:spPr>
-      </p:sp>
-      <p:sp>
-        <p:nvSpPr>
-          <p:cNvPr id="17" name="Shape 13"/>
-          <p:cNvSpPr/>
-          <p:nvPr/>
-        </p:nvSpPr>
-        <p:spPr>
-          <a:xfrm>
-            <a:off x="749808" y="3840480"/>
-            <a:ext cx="548640" cy="548640"/>
-          </a:xfrm>
-          <a:prstGeom prst="ellipse">
-            <a:avLst/>
-          </a:prstGeom>
-          <a:solidFill>
-            <a:srgbClr val="1E2761"/>
-          </a:solidFill>
-          <a:ln/>
-        </p:spPr>
-      </p:sp>
-      <p:pic>
-        <p:nvPicPr>
-          <p:cNvPr id="18" name="Image 2" descr="preencoded.png">    </p:cNvPr>
-          <p:cNvPicPr>
-            <a:picLocks noChangeAspect="1"/>
-          </p:cNvPicPr>
-          <p:nvPr/>
-        </p:nvPicPr>
-        <p:blipFill>
-          <a:blip r:embed="rId3"/>
-          <a:stretch>
-            <a:fillRect/>
-          </a:stretch>
-        </p:blipFill>
-        <p:spPr>
-          <a:xfrm>
-            <a:off x="892454" y="3983126"/>
-            <a:ext cx="263347" cy="263347"/>
-          </a:xfrm>
-          <a:prstGeom prst="rect">
-            <a:avLst/>
-          </a:prstGeom>
-        </p:spPr>
-      </p:pic>
-      <p:sp>
-        <p:nvSpPr>
-          <p:cNvPr id="19" name="Text 14"/>
-          <p:cNvSpPr/>
-          <p:nvPr/>
-        </p:nvSpPr>
-        <p:spPr>
-          <a:xfrm>
-            <a:off x="1463040" y="3776472"/>
-            <a:ext cx="2926080" cy="694944"/>
-          </a:xfrm>
-          <a:prstGeom prst="rect">
-            <a:avLst/>
-          </a:prstGeom>
-          <a:noFill/>
-          <a:ln/>
-        </p:spPr>
-        <p:txBody>
-          <a:bodyPr wrap="square" lIns="0" tIns="0" rIns="0" bIns="0" rtlCol="0" anchor="ctr"/>
-          <a:lstStyle/>
-          <a:p>
-            <a:pPr indent="0" marL="0">
-              <a:buNone/>
-            </a:pPr>
-            <a:r>
-              <a:rPr lang="en-US" sz="1400" b="1" dirty="0">
-                <a:solidFill>
-                  <a:srgbClr val="1E2761"/>
-                </a:solidFill>
-                <a:latin typeface="Calibri" pitchFamily="34" charset="0"/>
-                <a:ea typeface="Calibri" pitchFamily="34" charset="-122"/>
-                <a:cs typeface="Calibri" pitchFamily="34" charset="-120"/>
-              </a:rPr>
-              <a:t>Mock backend (MSW)</a:t>
-            </a:r>
-            <a:endParaRPr lang="en-US" sz="1400" dirty="0"/>
-          </a:p>
-        </p:txBody>
-      </p:sp>
-      <p:sp>
-        <p:nvSpPr>
-          <p:cNvPr id="20" name="Text 15"/>
-          <p:cNvSpPr/>
-          <p:nvPr/>
-        </p:nvSpPr>
-        <p:spPr>
-          <a:xfrm>
-            <a:off x="4572000" y="3758184"/>
-            <a:ext cx="6888175" cy="731520"/>
-          </a:xfrm>
-          <a:prstGeom prst="rect">
-            <a:avLst/>
-          </a:prstGeom>
-          <a:noFill/>
-          <a:ln/>
-        </p:spPr>
-        <p:txBody>
-          <a:bodyPr wrap="square" lIns="0" tIns="0" rIns="0" bIns="0" rtlCol="0" anchor="ctr"/>
-          <a:lstStyle/>
-          <a:p>
-            <a:pPr indent="0" marL="0">
-              <a:buNone/>
-            </a:pPr>
-            <a:r>
-              <a:rPr lang="en-US" sz="1200" dirty="0">
-                <a:solidFill>
-                  <a:srgbClr val="1B2440"/>
-                </a:solidFill>
-                <a:latin typeface="Calibri" pitchFamily="34" charset="0"/>
-                <a:ea typeface="Calibri" pitchFamily="34" charset="-122"/>
-                <a:cs typeface="Calibri" pitchFamily="34" charset="-120"/>
-              </a:rPr>
-              <a:t>The app runs for real, with realistic fake data, zero live backend</a:t>
-            </a:r>
-            <a:endParaRPr lang="en-US" sz="1200" dirty="0"/>
-          </a:p>
-        </p:txBody>
-      </p:sp>
-      <p:sp>
-        <p:nvSpPr>
-          <p:cNvPr id="21" name="Shape 16"/>
-          <p:cNvSpPr/>
-          <p:nvPr/>
-        </p:nvSpPr>
-        <p:spPr>
-          <a:xfrm>
-            <a:off x="548640" y="4654296"/>
-            <a:ext cx="11094415" cy="859536"/>
-          </a:xfrm>
-          <a:prstGeom prst="roundRect">
-            <a:avLst>
-              <a:gd name="adj" fmla="val 9574"/>
-            </a:avLst>
-          </a:prstGeom>
-          <a:solidFill>
-            <a:srgbClr val="EDF3FC"/>
-          </a:solidFill>
-          <a:ln/>
-          <a:effectLst>
-            <a:outerShdw sx="100000" sy="100000" kx="0" ky="0" algn="bl" rotWithShape="0" blurRad="76200" dist="12700" dir="5400000">
-              <a:srgbClr val="9AA7C4">
-                <a:alpha val="22000"/>
-              </a:srgbClr>
-            </a:outerShdw>
-          </a:effectLst>
-        </p:spPr>
-      </p:sp>
-      <p:sp>
-        <p:nvSpPr>
-          <p:cNvPr id="22" name="Shape 17"/>
-          <p:cNvSpPr/>
-          <p:nvPr/>
-        </p:nvSpPr>
-        <p:spPr>
-          <a:xfrm>
-            <a:off x="749808" y="4828032"/>
-            <a:ext cx="548640" cy="548640"/>
-          </a:xfrm>
-          <a:prstGeom prst="ellipse">
-            <a:avLst/>
-          </a:prstGeom>
-          <a:solidFill>
-            <a:srgbClr val="1E2761"/>
-          </a:solidFill>
-          <a:ln/>
-        </p:spPr>
-      </p:sp>
-      <p:pic>
-        <p:nvPicPr>
-          <p:cNvPr id="23" name="Image 3" descr="preencoded.png">    </p:cNvPr>
-          <p:cNvPicPr>
-            <a:picLocks noChangeAspect="1"/>
-          </p:cNvPicPr>
-          <p:nvPr/>
-        </p:nvPicPr>
-        <p:blipFill>
-          <a:blip r:embed="rId4"/>
-          <a:stretch>
-            <a:fillRect/>
-          </a:stretch>
-        </p:blipFill>
-        <p:spPr>
-          <a:xfrm>
-            <a:off x="892454" y="4970678"/>
-            <a:ext cx="263347" cy="263347"/>
-          </a:xfrm>
-          <a:prstGeom prst="rect">
-            <a:avLst/>
-          </a:prstGeom>
-        </p:spPr>
-      </p:pic>
-      <p:sp>
-        <p:nvSpPr>
-          <p:cNvPr id="24" name="Text 18"/>
-          <p:cNvSpPr/>
-          <p:nvPr/>
-        </p:nvSpPr>
-        <p:spPr>
-          <a:xfrm>
-            <a:off x="1463040" y="4764024"/>
-            <a:ext cx="2926080" cy="694944"/>
-          </a:xfrm>
-          <a:prstGeom prst="rect">
-            <a:avLst/>
-          </a:prstGeom>
-          <a:noFill/>
-          <a:ln/>
-        </p:spPr>
-        <p:txBody>
-          <a:bodyPr wrap="square" lIns="0" tIns="0" rIns="0" bIns="0" rtlCol="0" anchor="ctr"/>
-          <a:lstStyle/>
-          <a:p>
-            <a:pPr indent="0" marL="0">
-              <a:buNone/>
-            </a:pPr>
-            <a:r>
-              <a:rPr lang="en-US" sz="1400" b="1" dirty="0">
-                <a:solidFill>
-                  <a:srgbClr val="1E2761"/>
-                </a:solidFill>
-                <a:latin typeface="Calibri" pitchFamily="34" charset="0"/>
-                <a:ea typeface="Calibri" pitchFamily="34" charset="-122"/>
-                <a:cs typeface="Calibri" pitchFamily="34" charset="-120"/>
-              </a:rPr>
-              <a:t>Playwright tests</a:t>
-            </a:r>
-            <a:endParaRPr lang="en-US" sz="1400" dirty="0"/>
-          </a:p>
-        </p:txBody>
-      </p:sp>
-      <p:sp>
-        <p:nvSpPr>
-          <p:cNvPr id="25" name="Text 19"/>
-          <p:cNvSpPr/>
-          <p:nvPr/>
-        </p:nvSpPr>
-        <p:spPr>
-          <a:xfrm>
-            <a:off x="4572000" y="4745736"/>
-            <a:ext cx="6888175" cy="731520"/>
-          </a:xfrm>
-          <a:prstGeom prst="rect">
-            <a:avLst/>
-          </a:prstGeom>
-          <a:noFill/>
-          <a:ln/>
-        </p:spPr>
-        <p:txBody>
-          <a:bodyPr wrap="square" lIns="0" tIns="0" rIns="0" bIns="0" rtlCol="0" anchor="ctr"/>
-          <a:lstStyle/>
-          <a:p>
-            <a:pPr indent="0" marL="0">
-              <a:buNone/>
-            </a:pPr>
-            <a:r>
-              <a:rPr lang="en-US" sz="1200" dirty="0">
-                <a:solidFill>
-                  <a:srgbClr val="1B2440"/>
-                </a:solidFill>
-                <a:latin typeface="Calibri" pitchFamily="34" charset="0"/>
-                <a:ea typeface="Calibri" pitchFamily="34" charset="-122"/>
-                <a:cs typeface="Calibri" pitchFamily="34" charset="-120"/>
-              </a:rPr>
-              <a:t>Real user flows, including error cases — fast and repeatable</a:t>
-            </a:r>
-            <a:endParaRPr lang="en-US" sz="1200" dirty="0"/>
-          </a:p>
-        </p:txBody>
-      </p:sp>
-      <p:sp>
-        <p:nvSpPr>
-          <p:cNvPr id="26" name="Shape 20"/>
-          <p:cNvSpPr/>
-          <p:nvPr/>
-        </p:nvSpPr>
-        <p:spPr>
-          <a:xfrm>
-            <a:off x="548640" y="5733288"/>
-            <a:ext cx="11094415" cy="960120"/>
-          </a:xfrm>
-          <a:prstGeom prst="roundRect">
-            <a:avLst>
-              <a:gd name="adj" fmla="val 8571"/>
-            </a:avLst>
-          </a:prstGeom>
-          <a:solidFill>
-            <a:srgbClr val="EAF4EF"/>
-          </a:solidFill>
-          <a:ln/>
-          <a:effectLst>
-            <a:outerShdw sx="100000" sy="100000" kx="0" ky="0" algn="bl" rotWithShape="0" blurRad="76200" dist="12700" dir="5400000">
-              <a:srgbClr val="9AA7C4">
-                <a:alpha val="22000"/>
-              </a:srgbClr>
-            </a:outerShdw>
-          </a:effectLst>
-        </p:spPr>
-      </p:sp>
-      <p:sp>
-        <p:nvSpPr>
-          <p:cNvPr id="27" name="Shape 21"/>
-          <p:cNvSpPr/>
-          <p:nvPr/>
-        </p:nvSpPr>
-        <p:spPr>
-          <a:xfrm>
-            <a:off x="777240" y="5943600"/>
-            <a:ext cx="548640" cy="548640"/>
-          </a:xfrm>
-          <a:prstGeom prst="ellipse">
-            <a:avLst/>
-          </a:prstGeom>
-          <a:solidFill>
-            <a:srgbClr val="2E7D5B"/>
-          </a:solidFill>
-          <a:ln/>
-        </p:spPr>
-      </p:sp>
-      <p:pic>
-        <p:nvPicPr>
-          <p:cNvPr id="28" name="Image 4" descr="preencoded.png">    </p:cNvPr>
-          <p:cNvPicPr>
-            <a:picLocks noChangeAspect="1"/>
-          </p:cNvPicPr>
-          <p:nvPr/>
-        </p:nvPicPr>
-        <p:blipFill>
-          <a:blip r:embed="rId5"/>
-          <a:stretch>
-            <a:fillRect/>
-          </a:stretch>
-        </p:blipFill>
-        <p:spPr>
-          <a:xfrm>
-            <a:off x="919886" y="6086246"/>
-            <a:ext cx="263347" cy="263347"/>
-          </a:xfrm>
-          <a:prstGeom prst="rect">
-            <a:avLst/>
-          </a:prstGeom>
-        </p:spPr>
-      </p:pic>
-      <p:sp>
-        <p:nvSpPr>
-          <p:cNvPr id="29" name="Text 22"/>
-          <p:cNvSpPr/>
-          <p:nvPr/>
-        </p:nvSpPr>
-        <p:spPr>
-          <a:xfrm>
-            <a:off x="1508760" y="5852160"/>
-            <a:ext cx="9905695" cy="731520"/>
-          </a:xfrm>
-          <a:prstGeom prst="rect">
-            <a:avLst/>
-          </a:prstGeom>
-          <a:noFill/>
-          <a:ln/>
-        </p:spPr>
-        <p:txBody>
-          <a:bodyPr wrap="square" lIns="0" tIns="0" rIns="0" bIns="0" rtlCol="0" anchor="ctr"/>
-          <a:lstStyle/>
-          <a:p>
-            <a:pPr indent="0" marL="0">
-              <a:buNone/>
-            </a:pPr>
-            <a:r>
-              <a:rPr lang="en-US" sz="1350" b="1" dirty="0">
-                <a:solidFill>
-                  <a:srgbClr val="2E7D5B"/>
-                </a:solidFill>
-                <a:latin typeface="Calibri" pitchFamily="34" charset="0"/>
-                <a:ea typeface="Calibri" pitchFamily="34" charset="-122"/>
-                <a:cs typeface="Calibri" pitchFamily="34" charset="-120"/>
-              </a:rPr>
-              <a:t>This is the part that actually saves us months: </a:t>
-            </a:r>
-            <a:pPr indent="0" marL="0">
-              <a:buNone/>
-            </a:pPr>
-            <a:r>
-              <a:rPr lang="en-US" sz="1350" dirty="0">
-                <a:solidFill>
-                  <a:srgbClr val="1B2440"/>
-                </a:solidFill>
-                <a:latin typeface="Calibri" pitchFamily="34" charset="0"/>
-                <a:ea typeface="Calibri" pitchFamily="34" charset="-122"/>
-                <a:cs typeface="Calibri" pitchFamily="34" charset="-120"/>
-              </a:rPr>
-              <a:t>most bugs get caught outside, where fixing them is a two-minute edit instead of a trip through the internal pipeline.</a:t>
-            </a:r>
-            <a:endParaRPr lang="en-US" sz="1350" dirty="0"/>
+              <a:t>Same components, same tests. Only the values underneath change — reviewed and versioned like everything else we ship.</a:t>
+            </a:r>
+            <a:endParaRPr lang="en-US" sz="1150" dirty="0"/>
           </a:p>
         </p:txBody>
       </p:sp>
@@ -12546,7 +13864,7 @@
                 <a:ea typeface="Calibri" pitchFamily="34" charset="-122"/>
                 <a:cs typeface="Calibri" pitchFamily="34" charset="-120"/>
               </a:rPr>
-              <a:t>BEFORE ANY CODE CROSSES</a:t>
+              <a:t>BUILDING WITHOUT WAITING ON ANYONE</a:t>
             </a:r>
             <a:endParaRPr lang="en-US" sz="1200" dirty="0"/>
           </a:p>
@@ -12585,7 +13903,7 @@
                 <a:ea typeface="Cambria" pitchFamily="34" charset="-122"/>
                 <a:cs typeface="Cambria" pitchFamily="34" charset="-120"/>
               </a:rPr>
-              <a:t>A short checklist, every time</a:t>
+              <a:t>Test the whole thing before it ever touches Confi</a:t>
             </a:r>
             <a:endParaRPr lang="en-US" sz="2800" dirty="0"/>
           </a:p>
@@ -12599,12 +13917,12 @@
         </p:nvSpPr>
         <p:spPr>
           <a:xfrm>
-            <a:off x="548640" y="1828800"/>
-            <a:ext cx="11094415" cy="704088"/>
+            <a:off x="548640" y="1691640"/>
+            <a:ext cx="11094415" cy="859536"/>
           </a:xfrm>
           <a:prstGeom prst="roundRect">
             <a:avLst>
-              <a:gd name="adj" fmla="val 11688"/>
+              <a:gd name="adj" fmla="val 9574"/>
             </a:avLst>
           </a:prstGeom>
           <a:solidFill>
@@ -12628,14 +13946,14 @@
         </p:nvSpPr>
         <p:spPr>
           <a:xfrm>
-            <a:off x="731520" y="1961388"/>
-            <a:ext cx="438912" cy="438912"/>
+            <a:off x="749808" y="1865376"/>
+            <a:ext cx="548640" cy="548640"/>
           </a:xfrm>
           <a:prstGeom prst="ellipse">
             <a:avLst/>
           </a:prstGeom>
           <a:solidFill>
-            <a:srgbClr val="2E7D5B"/>
+            <a:srgbClr val="1E2761"/>
           </a:solidFill>
           <a:ln/>
         </p:spPr>
@@ -12656,8 +13974,8 @@
         </p:blipFill>
         <p:spPr>
           <a:xfrm>
-            <a:off x="845637" y="2075505"/>
-            <a:ext cx="210678" cy="210678"/>
+            <a:off x="892454" y="2008022"/>
+            <a:ext cx="263347" cy="263347"/>
           </a:xfrm>
           <a:prstGeom prst="rect">
             <a:avLst/>
@@ -12672,8 +13990,8 @@
         </p:nvSpPr>
         <p:spPr>
           <a:xfrm>
-            <a:off x="1371600" y="1828800"/>
-            <a:ext cx="10088575" cy="704088"/>
+            <a:off x="1463040" y="1801368"/>
+            <a:ext cx="2926080" cy="694944"/>
           </a:xfrm>
           <a:prstGeom prst="rect">
             <a:avLst/>
@@ -12689,7 +14007,46 @@
               <a:buNone/>
             </a:pPr>
             <a:r>
-              <a:rPr lang="en-US" sz="1350" dirty="0">
+              <a:rPr lang="en-US" sz="1400" b="1" dirty="0">
+                <a:solidFill>
+                  <a:srgbClr val="1E2761"/>
+                </a:solidFill>
+                <a:latin typeface="Calibri" pitchFamily="34" charset="0"/>
+                <a:ea typeface="Calibri" pitchFamily="34" charset="-122"/>
+                <a:cs typeface="Calibri" pitchFamily="34" charset="-120"/>
+              </a:rPr>
+              <a:t>OpenAPI spec</a:t>
+            </a:r>
+            <a:endParaRPr lang="en-US" sz="1400" dirty="0"/>
+          </a:p>
+        </p:txBody>
+      </p:sp>
+      <p:sp>
+        <p:nvSpPr>
+          <p:cNvPr id="10" name="Text 7"/>
+          <p:cNvSpPr/>
+          <p:nvPr/>
+        </p:nvSpPr>
+        <p:spPr>
+          <a:xfrm>
+            <a:off x="4572000" y="1783080"/>
+            <a:ext cx="6888175" cy="731520"/>
+          </a:xfrm>
+          <a:prstGeom prst="rect">
+            <a:avLst/>
+          </a:prstGeom>
+          <a:noFill/>
+          <a:ln/>
+        </p:spPr>
+        <p:txBody>
+          <a:bodyPr wrap="square" lIns="0" tIns="0" rIns="0" bIns="0" rtlCol="0" anchor="ctr"/>
+          <a:lstStyle/>
+          <a:p>
+            <a:pPr indent="0" marL="0">
+              <a:buNone/>
+            </a:pPr>
+            <a:r>
+              <a:rPr lang="en-US" sz="1200" dirty="0">
                 <a:solidFill>
                   <a:srgbClr val="1B2440"/>
                 </a:solidFill>
@@ -12697,26 +14054,26 @@
                 <a:ea typeface="Calibri" pitchFamily="34" charset="-122"/>
                 <a:cs typeface="Calibri" pitchFamily="34" charset="-120"/>
               </a:rPr>
-              <a:t>Unit tests green — Jest for React/TypeScript, JUnit for any Java/Spring code involved</a:t>
-            </a:r>
-            <a:endParaRPr lang="en-US" sz="1350" dirty="0"/>
-          </a:p>
-        </p:txBody>
-      </p:sp>
-      <p:sp>
-        <p:nvSpPr>
-          <p:cNvPr id="10" name="Shape 7"/>
-          <p:cNvSpPr/>
-          <p:nvPr/>
-        </p:nvSpPr>
-        <p:spPr>
-          <a:xfrm>
-            <a:off x="548640" y="2697480"/>
-            <a:ext cx="11094415" cy="704088"/>
+              <a:t>The contract everyone builds against — types, endpoints, sample data</a:t>
+            </a:r>
+            <a:endParaRPr lang="en-US" sz="1200" dirty="0"/>
+          </a:p>
+        </p:txBody>
+      </p:sp>
+      <p:sp>
+        <p:nvSpPr>
+          <p:cNvPr id="11" name="Shape 8"/>
+          <p:cNvSpPr/>
+          <p:nvPr/>
+        </p:nvSpPr>
+        <p:spPr>
+          <a:xfrm>
+            <a:off x="548640" y="2679192"/>
+            <a:ext cx="11094415" cy="859536"/>
           </a:xfrm>
           <a:prstGeom prst="roundRect">
             <a:avLst>
-              <a:gd name="adj" fmla="val 11688"/>
+              <a:gd name="adj" fmla="val 9574"/>
             </a:avLst>
           </a:prstGeom>
           <a:solidFill>
@@ -12734,27 +14091,27 @@
       </p:sp>
       <p:sp>
         <p:nvSpPr>
-          <p:cNvPr id="11" name="Shape 8"/>
-          <p:cNvSpPr/>
-          <p:nvPr/>
-        </p:nvSpPr>
-        <p:spPr>
-          <a:xfrm>
-            <a:off x="731520" y="2830068"/>
-            <a:ext cx="438912" cy="438912"/>
+          <p:cNvPr id="12" name="Shape 9"/>
+          <p:cNvSpPr/>
+          <p:nvPr/>
+        </p:nvSpPr>
+        <p:spPr>
+          <a:xfrm>
+            <a:off x="749808" y="2852928"/>
+            <a:ext cx="548640" cy="548640"/>
           </a:xfrm>
           <a:prstGeom prst="ellipse">
             <a:avLst/>
           </a:prstGeom>
           <a:solidFill>
-            <a:srgbClr val="2E7D5B"/>
+            <a:srgbClr val="1E2761"/>
           </a:solidFill>
           <a:ln/>
         </p:spPr>
       </p:sp>
       <p:pic>
         <p:nvPicPr>
-          <p:cNvPr id="12" name="Image 1" descr="preencoded.png">    </p:cNvPr>
+          <p:cNvPr id="13" name="Image 1" descr="preencoded.png">    </p:cNvPr>
           <p:cNvPicPr>
             <a:picLocks noChangeAspect="1"/>
           </p:cNvPicPr>
@@ -12768,8 +14125,8 @@
         </p:blipFill>
         <p:spPr>
           <a:xfrm>
-            <a:off x="845637" y="2944185"/>
-            <a:ext cx="210678" cy="210678"/>
+            <a:off x="892454" y="2995574"/>
+            <a:ext cx="263347" cy="263347"/>
           </a:xfrm>
           <a:prstGeom prst="rect">
             <a:avLst/>
@@ -12778,14 +14135,14 @@
       </p:pic>
       <p:sp>
         <p:nvSpPr>
-          <p:cNvPr id="13" name="Text 9"/>
-          <p:cNvSpPr/>
-          <p:nvPr/>
-        </p:nvSpPr>
-        <p:spPr>
-          <a:xfrm>
-            <a:off x="1371600" y="2697480"/>
-            <a:ext cx="10088575" cy="704088"/>
+          <p:cNvPr id="14" name="Text 10"/>
+          <p:cNvSpPr/>
+          <p:nvPr/>
+        </p:nvSpPr>
+        <p:spPr>
+          <a:xfrm>
+            <a:off x="1463040" y="2788920"/>
+            <a:ext cx="2926080" cy="694944"/>
           </a:xfrm>
           <a:prstGeom prst="rect">
             <a:avLst/>
@@ -12801,7 +14158,46 @@
               <a:buNone/>
             </a:pPr>
             <a:r>
-              <a:rPr lang="en-US" sz="1350" dirty="0">
+              <a:rPr lang="en-US" sz="1400" b="1" dirty="0">
+                <a:solidFill>
+                  <a:srgbClr val="1E2761"/>
+                </a:solidFill>
+                <a:latin typeface="Calibri" pitchFamily="34" charset="0"/>
+                <a:ea typeface="Calibri" pitchFamily="34" charset="-122"/>
+                <a:cs typeface="Calibri" pitchFamily="34" charset="-120"/>
+              </a:rPr>
+              <a:t>Generated types + client</a:t>
+            </a:r>
+            <a:endParaRPr lang="en-US" sz="1400" dirty="0"/>
+          </a:p>
+        </p:txBody>
+      </p:sp>
+      <p:sp>
+        <p:nvSpPr>
+          <p:cNvPr id="15" name="Text 11"/>
+          <p:cNvSpPr/>
+          <p:nvPr/>
+        </p:nvSpPr>
+        <p:spPr>
+          <a:xfrm>
+            <a:off x="4572000" y="2770632"/>
+            <a:ext cx="6888175" cy="731520"/>
+          </a:xfrm>
+          <a:prstGeom prst="rect">
+            <a:avLst/>
+          </a:prstGeom>
+          <a:noFill/>
+          <a:ln/>
+        </p:spPr>
+        <p:txBody>
+          <a:bodyPr wrap="square" lIns="0" tIns="0" rIns="0" bIns="0" rtlCol="0" anchor="ctr"/>
+          <a:lstStyle/>
+          <a:p>
+            <a:pPr indent="0" marL="0">
+              <a:buNone/>
+            </a:pPr>
+            <a:r>
+              <a:rPr lang="en-US" sz="1200" dirty="0">
                 <a:solidFill>
                   <a:srgbClr val="1B2440"/>
                 </a:solidFill>
@@ -12809,26 +14205,26 @@
                 <a:ea typeface="Calibri" pitchFamily="34" charset="-122"/>
                 <a:cs typeface="Calibri" pitchFamily="34" charset="-120"/>
               </a:rPr>
-              <a:t>Static analysis &amp; lint clean — the same rules Confi uses, not a lighter internet-only version</a:t>
-            </a:r>
-            <a:endParaRPr lang="en-US" sz="1350" dirty="0"/>
-          </a:p>
-        </p:txBody>
-      </p:sp>
-      <p:sp>
-        <p:nvSpPr>
-          <p:cNvPr id="14" name="Shape 10"/>
-          <p:cNvSpPr/>
-          <p:nvPr/>
-        </p:nvSpPr>
-        <p:spPr>
-          <a:xfrm>
-            <a:off x="548640" y="3566160"/>
-            <a:ext cx="11094415" cy="704088"/>
+              <a:t>No one hand-writes fetch calls — they're generated from the spec</a:t>
+            </a:r>
+            <a:endParaRPr lang="en-US" sz="1200" dirty="0"/>
+          </a:p>
+        </p:txBody>
+      </p:sp>
+      <p:sp>
+        <p:nvSpPr>
+          <p:cNvPr id="16" name="Shape 12"/>
+          <p:cNvSpPr/>
+          <p:nvPr/>
+        </p:nvSpPr>
+        <p:spPr>
+          <a:xfrm>
+            <a:off x="548640" y="3666744"/>
+            <a:ext cx="11094415" cy="859536"/>
           </a:xfrm>
           <a:prstGeom prst="roundRect">
             <a:avLst>
-              <a:gd name="adj" fmla="val 11688"/>
+              <a:gd name="adj" fmla="val 9574"/>
             </a:avLst>
           </a:prstGeom>
           <a:solidFill>
@@ -12846,27 +14242,27 @@
       </p:sp>
       <p:sp>
         <p:nvSpPr>
-          <p:cNvPr id="15" name="Shape 11"/>
-          <p:cNvSpPr/>
-          <p:nvPr/>
-        </p:nvSpPr>
-        <p:spPr>
-          <a:xfrm>
-            <a:off x="731520" y="3698748"/>
-            <a:ext cx="438912" cy="438912"/>
+          <p:cNvPr id="17" name="Shape 13"/>
+          <p:cNvSpPr/>
+          <p:nvPr/>
+        </p:nvSpPr>
+        <p:spPr>
+          <a:xfrm>
+            <a:off x="749808" y="3840480"/>
+            <a:ext cx="548640" cy="548640"/>
           </a:xfrm>
           <a:prstGeom prst="ellipse">
             <a:avLst/>
           </a:prstGeom>
           <a:solidFill>
-            <a:srgbClr val="2E7D5B"/>
+            <a:srgbClr val="1E2761"/>
           </a:solidFill>
           <a:ln/>
         </p:spPr>
       </p:sp>
       <p:pic>
         <p:nvPicPr>
-          <p:cNvPr id="16" name="Image 2" descr="preencoded.png">    </p:cNvPr>
+          <p:cNvPr id="18" name="Image 2" descr="preencoded.png">    </p:cNvPr>
           <p:cNvPicPr>
             <a:picLocks noChangeAspect="1"/>
           </p:cNvPicPr>
@@ -12880,8 +14276,8 @@
         </p:blipFill>
         <p:spPr>
           <a:xfrm>
-            <a:off x="845637" y="3812865"/>
-            <a:ext cx="210678" cy="210678"/>
+            <a:off x="892454" y="3983126"/>
+            <a:ext cx="263347" cy="263347"/>
           </a:xfrm>
           <a:prstGeom prst="rect">
             <a:avLst/>
@@ -12890,14 +14286,14 @@
       </p:pic>
       <p:sp>
         <p:nvSpPr>
-          <p:cNvPr id="17" name="Text 12"/>
-          <p:cNvSpPr/>
-          <p:nvPr/>
-        </p:nvSpPr>
-        <p:spPr>
-          <a:xfrm>
-            <a:off x="1371600" y="3566160"/>
-            <a:ext cx="10088575" cy="704088"/>
+          <p:cNvPr id="19" name="Text 14"/>
+          <p:cNvSpPr/>
+          <p:nvPr/>
+        </p:nvSpPr>
+        <p:spPr>
+          <a:xfrm>
+            <a:off x="1463040" y="3776472"/>
+            <a:ext cx="2926080" cy="694944"/>
           </a:xfrm>
           <a:prstGeom prst="rect">
             <a:avLst/>
@@ -12913,7 +14309,46 @@
               <a:buNone/>
             </a:pPr>
             <a:r>
-              <a:rPr lang="en-US" sz="1350" dirty="0">
+              <a:rPr lang="en-US" sz="1400" b="1" dirty="0">
+                <a:solidFill>
+                  <a:srgbClr val="1E2761"/>
+                </a:solidFill>
+                <a:latin typeface="Calibri" pitchFamily="34" charset="0"/>
+                <a:ea typeface="Calibri" pitchFamily="34" charset="-122"/>
+                <a:cs typeface="Calibri" pitchFamily="34" charset="-120"/>
+              </a:rPr>
+              <a:t>Mock backend (MSW)</a:t>
+            </a:r>
+            <a:endParaRPr lang="en-US" sz="1400" dirty="0"/>
+          </a:p>
+        </p:txBody>
+      </p:sp>
+      <p:sp>
+        <p:nvSpPr>
+          <p:cNvPr id="20" name="Text 15"/>
+          <p:cNvSpPr/>
+          <p:nvPr/>
+        </p:nvSpPr>
+        <p:spPr>
+          <a:xfrm>
+            <a:off x="4572000" y="3758184"/>
+            <a:ext cx="6888175" cy="731520"/>
+          </a:xfrm>
+          <a:prstGeom prst="rect">
+            <a:avLst/>
+          </a:prstGeom>
+          <a:noFill/>
+          <a:ln/>
+        </p:spPr>
+        <p:txBody>
+          <a:bodyPr wrap="square" lIns="0" tIns="0" rIns="0" bIns="0" rtlCol="0" anchor="ctr"/>
+          <a:lstStyle/>
+          <a:p>
+            <a:pPr indent="0" marL="0">
+              <a:buNone/>
+            </a:pPr>
+            <a:r>
+              <a:rPr lang="en-US" sz="1200" dirty="0">
                 <a:solidFill>
                   <a:srgbClr val="1B2440"/>
                 </a:solidFill>
@@ -12921,26 +14356,26 @@
                 <a:ea typeface="Calibri" pitchFamily="34" charset="-122"/>
                 <a:cs typeface="Calibri" pitchFamily="34" charset="-120"/>
               </a:rPr>
-              <a:t>Contract tests pass — the mocks match the OpenAPI spec exactly</a:t>
-            </a:r>
-            <a:endParaRPr lang="en-US" sz="1350" dirty="0"/>
-          </a:p>
-        </p:txBody>
-      </p:sp>
-      <p:sp>
-        <p:nvSpPr>
-          <p:cNvPr id="18" name="Shape 13"/>
-          <p:cNvSpPr/>
-          <p:nvPr/>
-        </p:nvSpPr>
-        <p:spPr>
-          <a:xfrm>
-            <a:off x="548640" y="4434840"/>
-            <a:ext cx="11094415" cy="704088"/>
+              <a:t>The app runs for real, with realistic fake data, zero live backend</a:t>
+            </a:r>
+            <a:endParaRPr lang="en-US" sz="1200" dirty="0"/>
+          </a:p>
+        </p:txBody>
+      </p:sp>
+      <p:sp>
+        <p:nvSpPr>
+          <p:cNvPr id="21" name="Shape 16"/>
+          <p:cNvSpPr/>
+          <p:nvPr/>
+        </p:nvSpPr>
+        <p:spPr>
+          <a:xfrm>
+            <a:off x="548640" y="4654296"/>
+            <a:ext cx="11094415" cy="859536"/>
           </a:xfrm>
           <a:prstGeom prst="roundRect">
             <a:avLst>
-              <a:gd name="adj" fmla="val 11688"/>
+              <a:gd name="adj" fmla="val 9574"/>
             </a:avLst>
           </a:prstGeom>
           <a:solidFill>
@@ -12958,27 +14393,27 @@
       </p:sp>
       <p:sp>
         <p:nvSpPr>
-          <p:cNvPr id="19" name="Shape 14"/>
-          <p:cNvSpPr/>
-          <p:nvPr/>
-        </p:nvSpPr>
-        <p:spPr>
-          <a:xfrm>
-            <a:off x="731520" y="4567428"/>
-            <a:ext cx="438912" cy="438912"/>
+          <p:cNvPr id="22" name="Shape 17"/>
+          <p:cNvSpPr/>
+          <p:nvPr/>
+        </p:nvSpPr>
+        <p:spPr>
+          <a:xfrm>
+            <a:off x="749808" y="4828032"/>
+            <a:ext cx="548640" cy="548640"/>
           </a:xfrm>
           <a:prstGeom prst="ellipse">
             <a:avLst/>
           </a:prstGeom>
           <a:solidFill>
-            <a:srgbClr val="2E7D5B"/>
+            <a:srgbClr val="1E2761"/>
           </a:solidFill>
           <a:ln/>
         </p:spPr>
       </p:sp>
       <p:pic>
         <p:nvPicPr>
-          <p:cNvPr id="20" name="Image 3" descr="preencoded.png">    </p:cNvPr>
+          <p:cNvPr id="23" name="Image 3" descr="preencoded.png">    </p:cNvPr>
           <p:cNvPicPr>
             <a:picLocks noChangeAspect="1"/>
           </p:cNvPicPr>
@@ -12992,8 +14427,8 @@
         </p:blipFill>
         <p:spPr>
           <a:xfrm>
-            <a:off x="845637" y="4681545"/>
-            <a:ext cx="210678" cy="210678"/>
+            <a:off x="892454" y="4970678"/>
+            <a:ext cx="263347" cy="263347"/>
           </a:xfrm>
           <a:prstGeom prst="rect">
             <a:avLst/>
@@ -13002,14 +14437,14 @@
       </p:pic>
       <p:sp>
         <p:nvSpPr>
-          <p:cNvPr id="21" name="Text 15"/>
-          <p:cNvSpPr/>
-          <p:nvPr/>
-        </p:nvSpPr>
-        <p:spPr>
-          <a:xfrm>
-            <a:off x="1371600" y="4434840"/>
-            <a:ext cx="10088575" cy="704088"/>
+          <p:cNvPr id="24" name="Text 18"/>
+          <p:cNvSpPr/>
+          <p:nvPr/>
+        </p:nvSpPr>
+        <p:spPr>
+          <a:xfrm>
+            <a:off x="1463040" y="4764024"/>
+            <a:ext cx="2926080" cy="694944"/>
           </a:xfrm>
           <a:prstGeom prst="rect">
             <a:avLst/>
@@ -13025,7 +14460,46 @@
               <a:buNone/>
             </a:pPr>
             <a:r>
-              <a:rPr lang="en-US" sz="1350" dirty="0">
+              <a:rPr lang="en-US" sz="1400" b="1" dirty="0">
+                <a:solidFill>
+                  <a:srgbClr val="1E2761"/>
+                </a:solidFill>
+                <a:latin typeface="Calibri" pitchFamily="34" charset="0"/>
+                <a:ea typeface="Calibri" pitchFamily="34" charset="-122"/>
+                <a:cs typeface="Calibri" pitchFamily="34" charset="-120"/>
+              </a:rPr>
+              <a:t>Playwright tests</a:t>
+            </a:r>
+            <a:endParaRPr lang="en-US" sz="1400" dirty="0"/>
+          </a:p>
+        </p:txBody>
+      </p:sp>
+      <p:sp>
+        <p:nvSpPr>
+          <p:cNvPr id="25" name="Text 19"/>
+          <p:cNvSpPr/>
+          <p:nvPr/>
+        </p:nvSpPr>
+        <p:spPr>
+          <a:xfrm>
+            <a:off x="4572000" y="4745736"/>
+            <a:ext cx="6888175" cy="731520"/>
+          </a:xfrm>
+          <a:prstGeom prst="rect">
+            <a:avLst/>
+          </a:prstGeom>
+          <a:noFill/>
+          <a:ln/>
+        </p:spPr>
+        <p:txBody>
+          <a:bodyPr wrap="square" lIns="0" tIns="0" rIns="0" bIns="0" rtlCol="0" anchor="ctr"/>
+          <a:lstStyle/>
+          <a:p>
+            <a:pPr indent="0" marL="0">
+              <a:buNone/>
+            </a:pPr>
+            <a:r>
+              <a:rPr lang="en-US" sz="1200" dirty="0">
                 <a:solidFill>
                   <a:srgbClr val="1B2440"/>
                 </a:solidFill>
@@ -13033,26 +14507,26 @@
                 <a:ea typeface="Calibri" pitchFamily="34" charset="-122"/>
                 <a:cs typeface="Calibri" pitchFamily="34" charset="-120"/>
               </a:rPr>
-              <a:t>Playwright suite green — full user flows, not just isolated components</a:t>
-            </a:r>
-            <a:endParaRPr lang="en-US" sz="1350" dirty="0"/>
-          </a:p>
-        </p:txBody>
-      </p:sp>
-      <p:sp>
-        <p:nvSpPr>
-          <p:cNvPr id="22" name="Shape 16"/>
-          <p:cNvSpPr/>
-          <p:nvPr/>
-        </p:nvSpPr>
-        <p:spPr>
-          <a:xfrm>
-            <a:off x="548640" y="5349240"/>
-            <a:ext cx="11094415" cy="822960"/>
+              <a:t>Real user flows, including error cases — fast and repeatable</a:t>
+            </a:r>
+            <a:endParaRPr lang="en-US" sz="1200" dirty="0"/>
+          </a:p>
+        </p:txBody>
+      </p:sp>
+      <p:sp>
+        <p:nvSpPr>
+          <p:cNvPr id="26" name="Shape 20"/>
+          <p:cNvSpPr/>
+          <p:nvPr/>
+        </p:nvSpPr>
+        <p:spPr>
+          <a:xfrm>
+            <a:off x="548640" y="5733288"/>
+            <a:ext cx="11094415" cy="960120"/>
           </a:xfrm>
           <a:prstGeom prst="roundRect">
             <a:avLst>
-              <a:gd name="adj" fmla="val 10000"/>
+              <a:gd name="adj" fmla="val 8571"/>
             </a:avLst>
           </a:prstGeom>
           <a:solidFill>
@@ -13070,14 +14544,14 @@
       </p:sp>
       <p:sp>
         <p:nvSpPr>
-          <p:cNvPr id="23" name="Shape 17"/>
-          <p:cNvSpPr/>
-          <p:nvPr/>
-        </p:nvSpPr>
-        <p:spPr>
-          <a:xfrm>
-            <a:off x="749808" y="5513832"/>
-            <a:ext cx="502920" cy="502920"/>
+          <p:cNvPr id="27" name="Shape 21"/>
+          <p:cNvSpPr/>
+          <p:nvPr/>
+        </p:nvSpPr>
+        <p:spPr>
+          <a:xfrm>
+            <a:off x="777240" y="5943600"/>
+            <a:ext cx="548640" cy="548640"/>
           </a:xfrm>
           <a:prstGeom prst="ellipse">
             <a:avLst/>
@@ -13090,7 +14564,7 @@
       </p:sp>
       <p:pic>
         <p:nvPicPr>
-          <p:cNvPr id="24" name="Image 4" descr="preencoded.png">    </p:cNvPr>
+          <p:cNvPr id="28" name="Image 4" descr="preencoded.png">    </p:cNvPr>
           <p:cNvPicPr>
             <a:picLocks noChangeAspect="1"/>
           </p:cNvPicPr>
@@ -13104,8 +14578,8 @@
         </p:blipFill>
         <p:spPr>
           <a:xfrm>
-            <a:off x="880567" y="5644591"/>
-            <a:ext cx="241402" cy="241402"/>
+            <a:off x="919886" y="6086246"/>
+            <a:ext cx="263347" cy="263347"/>
           </a:xfrm>
           <a:prstGeom prst="rect">
             <a:avLst/>
@@ -13114,14 +14588,14 @@
       </p:pic>
       <p:sp>
         <p:nvSpPr>
-          <p:cNvPr id="25" name="Text 18"/>
-          <p:cNvSpPr/>
-          <p:nvPr/>
-        </p:nvSpPr>
-        <p:spPr>
-          <a:xfrm>
-            <a:off x="1389888" y="5440680"/>
-            <a:ext cx="10042855" cy="594360"/>
+          <p:cNvPr id="29" name="Text 22"/>
+          <p:cNvSpPr/>
+          <p:nvPr/>
+        </p:nvSpPr>
+        <p:spPr>
+          <a:xfrm>
+            <a:off x="1508760" y="5852160"/>
+            <a:ext cx="9905695" cy="731520"/>
           </a:xfrm>
           <a:prstGeom prst="rect">
             <a:avLst/>
@@ -13137,7 +14611,7 @@
               <a:buNone/>
             </a:pPr>
             <a:r>
-              <a:rPr lang="en-US" sz="1300" b="1" dirty="0">
+              <a:rPr lang="en-US" sz="1350" b="1" dirty="0">
                 <a:solidFill>
                   <a:srgbClr val="2E7D5B"/>
                 </a:solidFill>
@@ -13145,13 +14619,13 @@
                 <a:ea typeface="Calibri" pitchFamily="34" charset="-122"/>
                 <a:cs typeface="Calibri" pitchFamily="34" charset="-120"/>
               </a:rPr>
-              <a:t>If backend code was touched, </a:t>
+              <a:t>This is the part that actually saves us months: </a:t>
             </a:r>
             <a:pPr indent="0" marL="0">
               <a:buNone/>
             </a:pPr>
             <a:r>
-              <a:rPr lang="en-US" sz="1300" dirty="0">
+              <a:rPr lang="en-US" sz="1350" dirty="0">
                 <a:solidFill>
                   <a:srgbClr val="1B2440"/>
                 </a:solidFill>
@@ -13159,9 +14633,9 @@
                 <a:ea typeface="Calibri" pitchFamily="34" charset="-122"/>
                 <a:cs typeface="Calibri" pitchFamily="34" charset="-120"/>
               </a:rPr>
-              <a:t>its tests travel with it — same bar as the frontend, no exceptions.</a:t>
-            </a:r>
-            <a:endParaRPr lang="en-US" sz="1300" dirty="0"/>
+              <a:t>most bugs get caught outside, where fixing them is a two-minute edit instead of a trip through the internal pipeline.</a:t>
+            </a:r>
+            <a:endParaRPr lang="en-US" sz="1350" dirty="0"/>
           </a:p>
         </p:txBody>
       </p:sp>
